--- a/Progetto Interfacce Uomo-Macchina.pptx
+++ b/Progetto Interfacce Uomo-Macchina.pptx
@@ -17054,7 +17054,7 @@
               <a:buNone/>
             </a:pPr>
             <a:r>
-              <a:rPr lang="en-US" sz="3000">
+              <a:rPr lang="en-US" sz="3000" dirty="0">
                 <a:solidFill>
                   <a:srgbClr val="F8FAFC"/>
                 </a:solidFill>
@@ -17063,9 +17063,57 @@
                 <a:cs typeface="Poppins SemiBold"/>
                 <a:sym typeface="Poppins SemiBold"/>
               </a:rPr>
-              <a:t>Altri esperimenti (scartati)</a:t>
-            </a:r>
-            <a:endParaRPr/>
+              <a:t>Altro - </a:t>
+            </a:r>
+            <a:r>
+              <a:rPr lang="en-US" sz="3000" dirty="0" err="1">
+                <a:solidFill>
+                  <a:srgbClr val="F8FAFC"/>
+                </a:solidFill>
+                <a:latin typeface="Poppins SemiBold"/>
+                <a:ea typeface="Poppins SemiBold"/>
+                <a:cs typeface="Poppins SemiBold"/>
+                <a:sym typeface="Poppins SemiBold"/>
+              </a:rPr>
+              <a:t>Esperimenti</a:t>
+            </a:r>
+            <a:r>
+              <a:rPr lang="en-US" sz="3000" dirty="0">
+                <a:solidFill>
+                  <a:srgbClr val="F8FAFC"/>
+                </a:solidFill>
+                <a:latin typeface="Poppins SemiBold"/>
+                <a:ea typeface="Poppins SemiBold"/>
+                <a:cs typeface="Poppins SemiBold"/>
+                <a:sym typeface="Poppins SemiBold"/>
+              </a:rPr>
+              <a:t> (</a:t>
+            </a:r>
+            <a:r>
+              <a:rPr lang="en-US" sz="3000" dirty="0" err="1">
+                <a:solidFill>
+                  <a:srgbClr val="F8FAFC"/>
+                </a:solidFill>
+                <a:latin typeface="Poppins SemiBold"/>
+                <a:ea typeface="Poppins SemiBold"/>
+                <a:cs typeface="Poppins SemiBold"/>
+                <a:sym typeface="Poppins SemiBold"/>
+              </a:rPr>
+              <a:t>scartati</a:t>
+            </a:r>
+            <a:r>
+              <a:rPr lang="en-US" sz="3000" dirty="0">
+                <a:solidFill>
+                  <a:srgbClr val="F8FAFC"/>
+                </a:solidFill>
+                <a:latin typeface="Poppins SemiBold"/>
+                <a:ea typeface="Poppins SemiBold"/>
+                <a:cs typeface="Poppins SemiBold"/>
+                <a:sym typeface="Poppins SemiBold"/>
+              </a:rPr>
+              <a:t>) e screenshots</a:t>
+            </a:r>
+            <a:endParaRPr dirty="0"/>
           </a:p>
         </p:txBody>
       </p:sp>
@@ -17078,7 +17126,7 @@
         <p:spPr>
           <a:xfrm>
             <a:off x="571500" y="1350200"/>
-            <a:ext cx="6130200" cy="2326791"/>
+            <a:ext cx="4287883" cy="2758069"/>
           </a:xfrm>
           <a:prstGeom prst="rect">
             <a:avLst/>
@@ -17811,6 +17859,104 @@
               <a:cs typeface="Inter"/>
               <a:sym typeface="Inter"/>
             </a:endParaRPr>
+          </a:p>
+        </p:txBody>
+      </p:sp>
+      <p:pic>
+        <p:nvPicPr>
+          <p:cNvPr id="3" name="Immagine 2">
+            <a:extLst>
+              <a:ext uri="{FF2B5EF4-FFF2-40B4-BE49-F238E27FC236}">
+                <a16:creationId xmlns:a16="http://schemas.microsoft.com/office/drawing/2014/main" id="{D7C588C3-6093-5D04-637C-77B80EAB4566}"/>
+              </a:ext>
+            </a:extLst>
+          </p:cNvPr>
+          <p:cNvPicPr>
+            <a:picLocks noChangeAspect="1"/>
+          </p:cNvPicPr>
+          <p:nvPr/>
+        </p:nvPicPr>
+        <p:blipFill>
+          <a:blip r:embed="rId4"/>
+          <a:stretch>
+            <a:fillRect/>
+          </a:stretch>
+        </p:blipFill>
+        <p:spPr>
+          <a:xfrm>
+            <a:off x="5111167" y="1601349"/>
+            <a:ext cx="6331896" cy="3762782"/>
+          </a:xfrm>
+          <a:prstGeom prst="roundRect">
+            <a:avLst>
+              <a:gd name="adj" fmla="val 16667"/>
+            </a:avLst>
+          </a:prstGeom>
+          <a:ln>
+            <a:noFill/>
+          </a:ln>
+          <a:effectLst>
+            <a:outerShdw blurRad="76200" dist="38100" dir="7800000" algn="tl" rotWithShape="0">
+              <a:srgbClr val="000000">
+                <a:alpha val="40000"/>
+              </a:srgbClr>
+            </a:outerShdw>
+          </a:effectLst>
+          <a:scene3d>
+            <a:camera prst="orthographicFront"/>
+            <a:lightRig rig="contrasting" dir="t">
+              <a:rot lat="0" lon="0" rev="4200000"/>
+            </a:lightRig>
+          </a:scene3d>
+          <a:sp3d prstMaterial="plastic">
+            <a:bevelT w="381000" h="114300" prst="relaxedInset"/>
+            <a:contourClr>
+              <a:srgbClr val="969696"/>
+            </a:contourClr>
+          </a:sp3d>
+        </p:spPr>
+      </p:pic>
+      <p:sp>
+        <p:nvSpPr>
+          <p:cNvPr id="7" name="CasellaDiTesto 6">
+            <a:extLst>
+              <a:ext uri="{FF2B5EF4-FFF2-40B4-BE49-F238E27FC236}">
+                <a16:creationId xmlns:a16="http://schemas.microsoft.com/office/drawing/2014/main" id="{28D02567-1529-5595-B43E-822C849CE8D1}"/>
+              </a:ext>
+            </a:extLst>
+          </p:cNvPr>
+          <p:cNvSpPr txBox="1"/>
+          <p:nvPr/>
+        </p:nvSpPr>
+        <p:spPr>
+          <a:xfrm>
+            <a:off x="6421873" y="5499977"/>
+            <a:ext cx="3947118" cy="307777"/>
+          </a:xfrm>
+          <a:prstGeom prst="rect">
+            <a:avLst/>
+          </a:prstGeom>
+          <a:noFill/>
+        </p:spPr>
+        <p:txBody>
+          <a:bodyPr wrap="square">
+            <a:spAutoFit/>
+          </a:bodyPr>
+          <a:lstStyle/>
+          <a:p>
+            <a:r>
+              <a:rPr lang="en-US" sz="1400" dirty="0">
+                <a:solidFill>
+                  <a:srgbClr val="CBD5E1"/>
+                </a:solidFill>
+                <a:latin typeface="Inter"/>
+                <a:ea typeface="Inter"/>
+                <a:cs typeface="Inter"/>
+                <a:sym typeface="Inter"/>
+              </a:rPr>
+              <a:t>Matrice di confusion finale (senza HR e IBI)</a:t>
+            </a:r>
+            <a:endParaRPr lang="it-IT" dirty="0"/>
           </a:p>
         </p:txBody>
       </p:sp>

--- a/Progetto Interfacce Uomo-Macchina.pptx
+++ b/Progetto Interfacce Uomo-Macchina.pptx
@@ -12531,7 +12531,7 @@
         <p:spPr>
           <a:xfrm>
             <a:off x="571500" y="2623244"/>
-            <a:ext cx="5286375" cy="2564010"/>
+            <a:ext cx="5286375" cy="2654150"/>
           </a:xfrm>
           <a:prstGeom prst="rect">
             <a:avLst/>
@@ -12577,8 +12577,8 @@
         </p:nvSpPr>
         <p:spPr>
           <a:xfrm>
-            <a:off x="962025" y="3013769"/>
-            <a:ext cx="4730591" cy="323165"/>
+            <a:off x="806768" y="3013768"/>
+            <a:ext cx="4955857" cy="323165"/>
           </a:xfrm>
           <a:prstGeom prst="rect">
             <a:avLst/>
@@ -12625,7 +12625,19 @@
                 <a:cs typeface="Poppins Medium"/>
                 <a:sym typeface="Poppins Medium"/>
               </a:rPr>
-              <a:t> (Ensemble)</a:t>
+              <a:t> (Ensemble) e </a:t>
+            </a:r>
+            <a:r>
+              <a:rPr lang="en-US" sz="2100" b="0" i="0" u="none" strike="noStrike" cap="none" dirty="0" err="1">
+                <a:solidFill>
+                  <a:srgbClr val="38BDF8"/>
+                </a:solidFill>
+                <a:latin typeface="Poppins Medium"/>
+                <a:ea typeface="Poppins Medium"/>
+                <a:cs typeface="Poppins Medium"/>
+                <a:sym typeface="Poppins Medium"/>
+              </a:rPr>
+              <a:t>GentleBoost</a:t>
             </a:r>
             <a:endParaRPr dirty="0"/>
           </a:p>
@@ -12639,8 +12651,8 @@
         </p:nvSpPr>
         <p:spPr>
           <a:xfrm>
-            <a:off x="962025" y="3556700"/>
-            <a:ext cx="4505400" cy="1329595"/>
+            <a:off x="806767" y="3524671"/>
+            <a:ext cx="4875576" cy="1661993"/>
           </a:xfrm>
           <a:prstGeom prst="rect">
             <a:avLst/>
@@ -12750,7 +12762,35 @@
                 <a:cs typeface="Inter"/>
                 <a:sym typeface="Inter"/>
               </a:rPr>
-              <a:t>tra le etichette di riposo e stress.</a:t>
+              <a:t>tra le etichette di riposo e stress (e anche LOSO con </a:t>
+            </a:r>
+            <a:r>
+              <a:rPr lang="it-IT" sz="1350" b="0" i="0" u="none" strike="noStrike" cap="none" dirty="0" err="1">
+                <a:solidFill>
+                  <a:schemeClr val="bg1">
+                    <a:lumMod val="85000"/>
+                  </a:schemeClr>
+                </a:solidFill>
+                <a:latin typeface="Inter"/>
+                <a:ea typeface="Inter"/>
+                <a:cs typeface="Inter"/>
+                <a:sym typeface="Inter"/>
+              </a:rPr>
+              <a:t>GentleBoost</a:t>
+            </a:r>
+            <a:r>
+              <a:rPr lang="it-IT" sz="1350" b="0" i="0" u="none" strike="noStrike" cap="none" dirty="0">
+                <a:solidFill>
+                  <a:schemeClr val="bg1">
+                    <a:lumMod val="85000"/>
+                  </a:schemeClr>
+                </a:solidFill>
+                <a:latin typeface="Inter"/>
+                <a:ea typeface="Inter"/>
+                <a:cs typeface="Inter"/>
+                <a:sym typeface="Inter"/>
+              </a:rPr>
+              <a:t>).</a:t>
             </a:r>
             <a:endParaRPr lang="it-IT" dirty="0">
               <a:solidFill>
@@ -12903,7 +12943,35 @@
                 <a:cs typeface="Inter"/>
                 <a:sym typeface="Inter"/>
               </a:rPr>
-              <a:t> pari a 10. Un </a:t>
+              <a:t> pari a 10. SVM è </a:t>
+            </a:r>
+            <a:r>
+              <a:rPr lang="en-US" sz="1350" dirty="0">
+                <a:solidFill>
+                  <a:schemeClr val="bg1">
+                    <a:lumMod val="85000"/>
+                  </a:schemeClr>
+                </a:solidFill>
+                <a:latin typeface="Inter"/>
+                <a:ea typeface="Inter"/>
+                <a:cs typeface="Inter"/>
+                <a:sym typeface="Inter"/>
+              </a:rPr>
+              <a:t>u</a:t>
+            </a:r>
+            <a:r>
+              <a:rPr lang="en-US" sz="1350" b="0" i="0" u="none" strike="noStrike" cap="none" dirty="0">
+                <a:solidFill>
+                  <a:schemeClr val="bg1">
+                    <a:lumMod val="85000"/>
+                  </a:schemeClr>
+                </a:solidFill>
+                <a:latin typeface="Inter"/>
+                <a:ea typeface="Inter"/>
+                <a:cs typeface="Inter"/>
+                <a:sym typeface="Inter"/>
+              </a:rPr>
+              <a:t>n </a:t>
             </a:r>
             <a:r>
               <a:rPr lang="en-US" sz="1350" b="0" i="0" u="none" strike="noStrike" cap="none" dirty="0" err="1">
@@ -13201,7 +13269,7 @@
         </p:nvSpPr>
         <p:spPr>
           <a:xfrm>
-            <a:off x="571500" y="2459384"/>
+            <a:off x="523875" y="1309882"/>
             <a:ext cx="5286375" cy="1333500"/>
           </a:xfrm>
           <a:prstGeom prst="rect">
@@ -13231,7 +13299,7 @@
               <a:buNone/>
             </a:pPr>
             <a:r>
-              <a:rPr lang="en-US" sz="10500" b="1" i="0" u="none" strike="noStrike" cap="none">
+              <a:rPr lang="en-US" sz="10500" b="1" i="0" u="none" strike="noStrike" cap="none" dirty="0">
                 <a:solidFill>
                   <a:srgbClr val="38BDF8"/>
                 </a:solidFill>
@@ -13242,7 +13310,7 @@
               </a:rPr>
               <a:t>78.8%</a:t>
             </a:r>
-            <a:endParaRPr/>
+            <a:endParaRPr dirty="0"/>
           </a:p>
         </p:txBody>
       </p:sp>
@@ -13254,7 +13322,7 @@
         </p:nvSpPr>
         <p:spPr>
           <a:xfrm>
-            <a:off x="571500" y="3888134"/>
+            <a:off x="571500" y="2697276"/>
             <a:ext cx="5286375" cy="443198"/>
           </a:xfrm>
           <a:prstGeom prst="rect">
@@ -13311,8 +13379,8 @@
         </p:nvSpPr>
         <p:spPr>
           <a:xfrm>
-            <a:off x="6334125" y="2459384"/>
-            <a:ext cx="5550693" cy="400050"/>
+            <a:off x="6201890" y="1222400"/>
+            <a:ext cx="5550693" cy="323165"/>
           </a:xfrm>
           <a:prstGeom prst="rect">
             <a:avLst/>
@@ -13338,7 +13406,7 @@
               <a:buNone/>
             </a:pPr>
             <a:r>
-              <a:rPr lang="en-US" sz="2100" b="0" i="0" u="none" strike="noStrike" cap="none">
+              <a:rPr lang="en-US" sz="2100" b="0" i="0" u="none" strike="noStrike" cap="none" dirty="0">
                 <a:solidFill>
                   <a:srgbClr val="38BDF8"/>
                 </a:solidFill>
@@ -13347,9 +13415,45 @@
                 <a:cs typeface="Poppins Medium"/>
                 <a:sym typeface="Poppins Medium"/>
               </a:rPr>
-              <a:t>Performance dell'Ensemble</a:t>
-            </a:r>
-            <a:endParaRPr/>
+              <a:t>Performance </a:t>
+            </a:r>
+            <a:r>
+              <a:rPr lang="en-US" sz="2100" b="0" i="0" u="none" strike="noStrike" cap="none" dirty="0" err="1">
+                <a:solidFill>
+                  <a:srgbClr val="38BDF8"/>
+                </a:solidFill>
+                <a:latin typeface="Poppins Medium"/>
+                <a:ea typeface="Poppins Medium"/>
+                <a:cs typeface="Poppins Medium"/>
+                <a:sym typeface="Poppins Medium"/>
+              </a:rPr>
+              <a:t>dell'Ensemble</a:t>
+            </a:r>
+            <a:r>
+              <a:rPr lang="en-US" sz="2100" b="0" i="0" u="none" strike="noStrike" cap="none" dirty="0">
+                <a:solidFill>
+                  <a:srgbClr val="38BDF8"/>
+                </a:solidFill>
+                <a:latin typeface="Poppins Medium"/>
+                <a:ea typeface="Poppins Medium"/>
+                <a:cs typeface="Poppins Medium"/>
+                <a:sym typeface="Poppins Medium"/>
+              </a:rPr>
+              <a:t> </a:t>
+            </a:r>
+            <a:r>
+              <a:rPr lang="en-US" sz="2100" b="0" i="0" u="none" strike="noStrike" cap="none" dirty="0" err="1">
+                <a:solidFill>
+                  <a:srgbClr val="38BDF8"/>
+                </a:solidFill>
+                <a:latin typeface="Poppins Medium"/>
+                <a:ea typeface="Poppins Medium"/>
+                <a:cs typeface="Poppins Medium"/>
+                <a:sym typeface="Poppins Medium"/>
+              </a:rPr>
+              <a:t>RUSBoost</a:t>
+            </a:r>
+            <a:endParaRPr dirty="0"/>
           </a:p>
         </p:txBody>
       </p:sp>
@@ -13361,7 +13465,7 @@
         </p:nvSpPr>
         <p:spPr>
           <a:xfrm>
-            <a:off x="6334125" y="3002309"/>
+            <a:off x="6201965" y="1604665"/>
             <a:ext cx="5286300" cy="664797"/>
           </a:xfrm>
           <a:prstGeom prst="rect">
@@ -13542,34 +13646,6 @@
                 <a:cs typeface="Inter"/>
                 <a:sym typeface="Inter"/>
               </a:rPr>
-              <a:t>già</a:t>
-            </a:r>
-            <a:r>
-              <a:rPr lang="en-US" sz="1350" dirty="0">
-                <a:solidFill>
-                  <a:schemeClr val="bg1">
-                    <a:lumMod val="85000"/>
-                  </a:schemeClr>
-                </a:solidFill>
-                <a:latin typeface="Inter"/>
-                <a:ea typeface="Inter"/>
-                <a:cs typeface="Inter"/>
-                <a:sym typeface="Inter"/>
-              </a:rPr>
-              <a:t> </a:t>
-            </a:r>
-            <a:r>
-              <a:rPr lang="en-US" sz="1350" dirty="0" err="1">
-                <a:solidFill>
-                  <a:schemeClr val="bg1">
-                    <a:lumMod val="85000"/>
-                  </a:schemeClr>
-                </a:solidFill>
-                <a:latin typeface="Inter"/>
-                <a:ea typeface="Inter"/>
-                <a:cs typeface="Inter"/>
-                <a:sym typeface="Inter"/>
-              </a:rPr>
               <a:t>raggiunto</a:t>
             </a:r>
             <a:r>
@@ -13674,7 +13750,7 @@
         </p:nvSpPr>
         <p:spPr>
           <a:xfrm>
-            <a:off x="6334050" y="3792884"/>
+            <a:off x="6201890" y="2323327"/>
             <a:ext cx="5286375" cy="747897"/>
           </a:xfrm>
           <a:prstGeom prst="rect">
@@ -13920,7 +13996,7 @@
         </p:nvSpPr>
         <p:spPr>
           <a:xfrm>
-            <a:off x="6334125" y="4659510"/>
+            <a:off x="6201965" y="3125089"/>
             <a:ext cx="5286300" cy="664797"/>
           </a:xfrm>
           <a:prstGeom prst="rect">
@@ -13950,35 +14026,49 @@
               <a:buNone/>
             </a:pPr>
             <a:r>
-              <a:rPr lang="en-US" sz="1350" i="1" dirty="0">
-                <a:solidFill>
-                  <a:schemeClr val="bg1">
-                    <a:lumMod val="85000"/>
-                  </a:schemeClr>
-                </a:solidFill>
-                <a:latin typeface="Inter"/>
-                <a:ea typeface="Inter"/>
-                <a:cs typeface="Inter"/>
-                <a:sym typeface="Inter"/>
-              </a:rPr>
-              <a:t>Dalla </a:t>
-            </a:r>
-            <a:r>
-              <a:rPr lang="en-US" sz="1350" i="1" dirty="0" err="1">
-                <a:solidFill>
-                  <a:schemeClr val="bg1">
-                    <a:lumMod val="85000"/>
-                  </a:schemeClr>
-                </a:solidFill>
-                <a:latin typeface="Inter"/>
-                <a:ea typeface="Inter"/>
-                <a:cs typeface="Inter"/>
-                <a:sym typeface="Inter"/>
-              </a:rPr>
-              <a:t>matrice</a:t>
-            </a:r>
-            <a:r>
-              <a:rPr lang="en-US" sz="1350" i="1" dirty="0">
+              <a:rPr lang="en-US" sz="1350" b="0" i="1" u="none" strike="noStrike" cap="none" dirty="0" err="1">
+                <a:solidFill>
+                  <a:schemeClr val="bg1">
+                    <a:lumMod val="85000"/>
+                  </a:schemeClr>
+                </a:solidFill>
+                <a:latin typeface="Inter"/>
+                <a:ea typeface="Inter"/>
+                <a:cs typeface="Inter"/>
+                <a:sym typeface="Inter"/>
+              </a:rPr>
+              <a:t>Tuttavia</a:t>
+            </a:r>
+            <a:r>
+              <a:rPr lang="en-US" sz="1350" b="0" i="1" u="none" strike="noStrike" cap="none" dirty="0">
+                <a:solidFill>
+                  <a:schemeClr val="bg1">
+                    <a:lumMod val="85000"/>
+                  </a:schemeClr>
+                </a:solidFill>
+                <a:latin typeface="Inter"/>
+                <a:ea typeface="Inter"/>
+                <a:cs typeface="Inter"/>
+                <a:sym typeface="Inter"/>
+              </a:rPr>
+              <a:t>, </a:t>
+            </a:r>
+            <a:r>
+              <a:rPr lang="en-US" sz="1350" b="0" i="1" u="none" strike="noStrike" cap="none" dirty="0" err="1">
+                <a:solidFill>
+                  <a:schemeClr val="bg1">
+                    <a:lumMod val="85000"/>
+                  </a:schemeClr>
+                </a:solidFill>
+                <a:latin typeface="Inter"/>
+                <a:ea typeface="Inter"/>
+                <a:cs typeface="Inter"/>
+                <a:sym typeface="Inter"/>
+              </a:rPr>
+              <a:t>soffre</a:t>
+            </a:r>
+            <a:r>
+              <a:rPr lang="en-US" sz="1350" b="0" i="1" u="none" strike="noStrike" cap="none" dirty="0">
                 <a:solidFill>
                   <a:schemeClr val="bg1">
                     <a:lumMod val="85000"/>
@@ -13992,77 +14082,50 @@
               <a:t> di </a:t>
             </a:r>
             <a:r>
-              <a:rPr lang="en-US" sz="1350" i="1" dirty="0" err="1">
-                <a:solidFill>
-                  <a:schemeClr val="bg1">
-                    <a:lumMod val="85000"/>
-                  </a:schemeClr>
-                </a:solidFill>
-                <a:latin typeface="Inter"/>
-                <a:ea typeface="Inter"/>
-                <a:cs typeface="Inter"/>
-                <a:sym typeface="Inter"/>
-              </a:rPr>
-              <a:t>confusione</a:t>
-            </a:r>
-            <a:r>
-              <a:rPr lang="en-US" sz="1350" i="1" dirty="0">
-                <a:solidFill>
-                  <a:schemeClr val="bg1">
-                    <a:lumMod val="85000"/>
-                  </a:schemeClr>
-                </a:solidFill>
-                <a:latin typeface="Inter"/>
-                <a:ea typeface="Inter"/>
-                <a:cs typeface="Inter"/>
-                <a:sym typeface="Inter"/>
-              </a:rPr>
-              <a:t>, </a:t>
-            </a:r>
-            <a:r>
-              <a:rPr lang="en-US" sz="1350" i="1" dirty="0" err="1">
-                <a:solidFill>
-                  <a:schemeClr val="bg1">
-                    <a:lumMod val="85000"/>
-                  </a:schemeClr>
-                </a:solidFill>
-                <a:latin typeface="Inter"/>
-                <a:ea typeface="Inter"/>
-                <a:cs typeface="Inter"/>
-                <a:sym typeface="Inter"/>
-              </a:rPr>
-              <a:t>si</a:t>
-            </a:r>
-            <a:r>
-              <a:rPr lang="en-US" sz="1350" i="1" dirty="0">
-                <a:solidFill>
-                  <a:schemeClr val="bg1">
-                    <a:lumMod val="85000"/>
-                  </a:schemeClr>
-                </a:solidFill>
-                <a:latin typeface="Inter"/>
-                <a:ea typeface="Inter"/>
-                <a:cs typeface="Inter"/>
-                <a:sym typeface="Inter"/>
-              </a:rPr>
-              <a:t> nota </a:t>
-            </a:r>
-            <a:r>
-              <a:rPr lang="en-US" sz="1350" i="1" dirty="0" err="1">
-                <a:solidFill>
-                  <a:schemeClr val="bg1">
-                    <a:lumMod val="85000"/>
-                  </a:schemeClr>
-                </a:solidFill>
-                <a:latin typeface="Inter"/>
-                <a:ea typeface="Inter"/>
-                <a:cs typeface="Inter"/>
-                <a:sym typeface="Inter"/>
-              </a:rPr>
-              <a:t>un’ottima</a:t>
-            </a:r>
-            <a:r>
-              <a:rPr lang="en-US" sz="1350" i="1" dirty="0">
+              <a:rPr lang="en-US" sz="1350" b="0" i="1" u="none" strike="noStrike" cap="none" dirty="0">
+                <a:solidFill>
+                  <a:schemeClr val="accent2">
+                    <a:lumMod val="60000"/>
+                    <a:lumOff val="40000"/>
+                  </a:schemeClr>
+                </a:solidFill>
+                <a:latin typeface="Inter"/>
+                <a:ea typeface="Inter"/>
+                <a:cs typeface="Inter"/>
+                <a:sym typeface="Inter"/>
+              </a:rPr>
+              <a:t>DATA LEAKAGE</a:t>
+            </a:r>
+            <a:r>
+              <a:rPr lang="en-US" sz="1350" b="0" i="1" u="none" strike="noStrike" cap="none" dirty="0">
+                <a:solidFill>
+                  <a:schemeClr val="bg1">
+                    <a:lumMod val="85000"/>
+                  </a:schemeClr>
+                </a:solidFill>
+                <a:latin typeface="Inter"/>
+                <a:ea typeface="Inter"/>
+                <a:cs typeface="Inter"/>
+                <a:sym typeface="Inter"/>
+              </a:rPr>
+              <a:t>! La </a:t>
+            </a:r>
+            <a:r>
+              <a:rPr lang="en-US" sz="1350" b="0" i="1" u="none" strike="noStrike" cap="none" dirty="0" err="1">
+                <a:solidFill>
+                  <a:schemeClr val="bg1">
+                    <a:lumMod val="85000"/>
+                  </a:schemeClr>
+                </a:solidFill>
+                <a:latin typeface="Inter"/>
+                <a:ea typeface="Inter"/>
+                <a:cs typeface="Inter"/>
+                <a:sym typeface="Inter"/>
+              </a:rPr>
+              <a:t>variante</a:t>
+            </a:r>
+            <a:r>
+              <a:rPr lang="en-US" sz="1350" b="0" i="1" u="none" strike="noStrike" cap="none" dirty="0">
                 <a:solidFill>
                   <a:schemeClr val="bg1">
                     <a:lumMod val="85000"/>
@@ -14087,7 +14150,7 @@
                 <a:cs typeface="Inter"/>
                 <a:sym typeface="Inter"/>
               </a:rPr>
-              <a:t>reattività</a:t>
+              <a:t>sicura</a:t>
             </a:r>
             <a:r>
               <a:rPr lang="en-US" sz="1350" b="0" i="1" u="none" strike="noStrike" cap="none" dirty="0">
@@ -14101,7 +14164,7 @@
                 <a:cs typeface="Inter"/>
                 <a:sym typeface="Inter"/>
               </a:rPr>
-              <a:t> </a:t>
+              <a:t> senza leakage ha </a:t>
             </a:r>
             <a:r>
               <a:rPr lang="en-US" sz="1350" b="0" i="1" u="none" strike="noStrike" cap="none" dirty="0" err="1">
@@ -14115,7 +14178,7 @@
                 <a:cs typeface="Inter"/>
                 <a:sym typeface="Inter"/>
               </a:rPr>
-              <a:t>sulla</a:t>
+              <a:t>accuratezza</a:t>
             </a:r>
             <a:r>
               <a:rPr lang="en-US" sz="1350" b="0" i="1" u="none" strike="noStrike" cap="none" dirty="0">
@@ -14129,91 +14192,7 @@
                 <a:cs typeface="Inter"/>
                 <a:sym typeface="Inter"/>
               </a:rPr>
-              <a:t> </a:t>
-            </a:r>
-            <a:r>
-              <a:rPr lang="en-US" sz="1350" b="0" i="1" u="none" strike="noStrike" cap="none" dirty="0" err="1">
-                <a:solidFill>
-                  <a:schemeClr val="bg1">
-                    <a:lumMod val="85000"/>
-                  </a:schemeClr>
-                </a:solidFill>
-                <a:latin typeface="Inter"/>
-                <a:ea typeface="Inter"/>
-                <a:cs typeface="Inter"/>
-                <a:sym typeface="Inter"/>
-              </a:rPr>
-              <a:t>classe</a:t>
-            </a:r>
-            <a:r>
-              <a:rPr lang="en-US" sz="1350" b="0" i="1" u="none" strike="noStrike" cap="none" dirty="0">
-                <a:solidFill>
-                  <a:schemeClr val="bg1">
-                    <a:lumMod val="85000"/>
-                  </a:schemeClr>
-                </a:solidFill>
-                <a:latin typeface="Inter"/>
-                <a:ea typeface="Inter"/>
-                <a:cs typeface="Inter"/>
-                <a:sym typeface="Inter"/>
-              </a:rPr>
-              <a:t> </a:t>
-            </a:r>
-            <a:r>
-              <a:rPr lang="en-US" sz="1350" b="0" i="1" u="none" strike="noStrike" cap="none" dirty="0" err="1">
-                <a:solidFill>
-                  <a:schemeClr val="bg1">
-                    <a:lumMod val="85000"/>
-                  </a:schemeClr>
-                </a:solidFill>
-                <a:latin typeface="Inter"/>
-                <a:ea typeface="Inter"/>
-                <a:cs typeface="Inter"/>
-                <a:sym typeface="Inter"/>
-              </a:rPr>
-              <a:t>positiva</a:t>
-            </a:r>
-            <a:r>
-              <a:rPr lang="en-US" sz="1350" b="0" i="1" u="none" strike="noStrike" cap="none" dirty="0">
-                <a:solidFill>
-                  <a:schemeClr val="bg1">
-                    <a:lumMod val="85000"/>
-                  </a:schemeClr>
-                </a:solidFill>
-                <a:latin typeface="Inter"/>
-                <a:ea typeface="Inter"/>
-                <a:cs typeface="Inter"/>
-                <a:sym typeface="Inter"/>
-              </a:rPr>
-              <a:t> (1127 Veri </a:t>
-            </a:r>
-            <a:r>
-              <a:rPr lang="en-US" sz="1350" b="0" i="1" u="none" strike="noStrike" cap="none" dirty="0" err="1">
-                <a:solidFill>
-                  <a:schemeClr val="bg1">
-                    <a:lumMod val="85000"/>
-                  </a:schemeClr>
-                </a:solidFill>
-                <a:latin typeface="Inter"/>
-                <a:ea typeface="Inter"/>
-                <a:cs typeface="Inter"/>
-                <a:sym typeface="Inter"/>
-              </a:rPr>
-              <a:t>Positivi</a:t>
-            </a:r>
-            <a:r>
-              <a:rPr lang="en-US" sz="1350" b="0" i="1" u="none" strike="noStrike" cap="none" dirty="0">
-                <a:solidFill>
-                  <a:schemeClr val="bg1">
-                    <a:lumMod val="85000"/>
-                  </a:schemeClr>
-                </a:solidFill>
-                <a:latin typeface="Inter"/>
-                <a:ea typeface="Inter"/>
-                <a:cs typeface="Inter"/>
-                <a:sym typeface="Inter"/>
-              </a:rPr>
-              <a:t>).</a:t>
+              <a:t> del 70%.</a:t>
             </a:r>
             <a:endParaRPr dirty="0">
               <a:solidFill>
@@ -14293,7 +14272,7 @@
                 <a:cs typeface="Poppins SemiBold"/>
                 <a:sym typeface="Poppins SemiBold"/>
               </a:rPr>
-              <a:t> </a:t>
+              <a:t> RF </a:t>
             </a:r>
             <a:r>
               <a:rPr lang="en-US" sz="3000" dirty="0" err="1">
@@ -14307,9 +14286,722 @@
               </a:rPr>
               <a:t>RUSBoost</a:t>
             </a:r>
+            <a:r>
+              <a:rPr lang="en-US" sz="3000" dirty="0">
+                <a:solidFill>
+                  <a:schemeClr val="bg1"/>
+                </a:solidFill>
+                <a:latin typeface="Poppins SemiBold"/>
+                <a:ea typeface="Poppins SemiBold"/>
+                <a:cs typeface="Poppins SemiBold"/>
+                <a:sym typeface="Poppins SemiBold"/>
+              </a:rPr>
+              <a:t> e RF </a:t>
+            </a:r>
+            <a:r>
+              <a:rPr lang="en-US" sz="3000" dirty="0" err="1">
+                <a:solidFill>
+                  <a:schemeClr val="bg1"/>
+                </a:solidFill>
+                <a:latin typeface="Poppins SemiBold"/>
+                <a:ea typeface="Poppins SemiBold"/>
+                <a:cs typeface="Poppins SemiBold"/>
+                <a:sym typeface="Poppins SemiBold"/>
+              </a:rPr>
+              <a:t>GentleBoost</a:t>
+            </a:r>
             <a:endParaRPr dirty="0">
               <a:solidFill>
                 <a:schemeClr val="bg1"/>
+              </a:solidFill>
+            </a:endParaRPr>
+          </a:p>
+        </p:txBody>
+      </p:sp>
+      <p:sp>
+        <p:nvSpPr>
+          <p:cNvPr id="2" name="Google Shape;240;p23">
+            <a:extLst>
+              <a:ext uri="{FF2B5EF4-FFF2-40B4-BE49-F238E27FC236}">
+                <a16:creationId xmlns:a16="http://schemas.microsoft.com/office/drawing/2014/main" id="{90807F2A-9490-291D-40DE-FEBF1C7779FD}"/>
+              </a:ext>
+            </a:extLst>
+          </p:cNvPr>
+          <p:cNvSpPr txBox="1"/>
+          <p:nvPr/>
+        </p:nvSpPr>
+        <p:spPr>
+          <a:xfrm>
+            <a:off x="523875" y="4290805"/>
+            <a:ext cx="5286375" cy="1615827"/>
+          </a:xfrm>
+          <a:prstGeom prst="rect">
+            <a:avLst/>
+          </a:prstGeom>
+          <a:noFill/>
+          <a:ln>
+            <a:noFill/>
+          </a:ln>
+        </p:spPr>
+        <p:txBody>
+          <a:bodyPr spcFirstLastPara="1" wrap="square" lIns="0" tIns="0" rIns="0" bIns="0" anchor="t" anchorCtr="0">
+            <a:spAutoFit/>
+          </a:bodyPr>
+          <a:lstStyle/>
+          <a:p>
+            <a:pPr marL="0" marR="0" lvl="0" indent="0" algn="ctr" rtl="0">
+              <a:lnSpc>
+                <a:spcPct val="100000"/>
+              </a:lnSpc>
+              <a:spcBef>
+                <a:spcPts val="0"/>
+              </a:spcBef>
+              <a:spcAft>
+                <a:spcPts val="0"/>
+              </a:spcAft>
+              <a:buNone/>
+            </a:pPr>
+            <a:r>
+              <a:rPr lang="en-US" sz="10500" b="1" i="0" u="none" strike="noStrike" cap="none" dirty="0">
+                <a:solidFill>
+                  <a:srgbClr val="38BDF8"/>
+                </a:solidFill>
+                <a:latin typeface="Poppins"/>
+                <a:ea typeface="Poppins"/>
+                <a:cs typeface="Poppins"/>
+                <a:sym typeface="Poppins"/>
+              </a:rPr>
+              <a:t>70.8%</a:t>
+            </a:r>
+            <a:endParaRPr dirty="0"/>
+          </a:p>
+        </p:txBody>
+      </p:sp>
+      <p:sp>
+        <p:nvSpPr>
+          <p:cNvPr id="3" name="Google Shape;241;p23">
+            <a:extLst>
+              <a:ext uri="{FF2B5EF4-FFF2-40B4-BE49-F238E27FC236}">
+                <a16:creationId xmlns:a16="http://schemas.microsoft.com/office/drawing/2014/main" id="{AEA90460-57D8-D9C5-6C3C-6D0C6B9BF7F8}"/>
+              </a:ext>
+            </a:extLst>
+          </p:cNvPr>
+          <p:cNvSpPr txBox="1"/>
+          <p:nvPr/>
+        </p:nvSpPr>
+        <p:spPr>
+          <a:xfrm>
+            <a:off x="571500" y="5678199"/>
+            <a:ext cx="5286375" cy="443198"/>
+          </a:xfrm>
+          <a:prstGeom prst="rect">
+            <a:avLst/>
+          </a:prstGeom>
+          <a:noFill/>
+          <a:ln>
+            <a:noFill/>
+          </a:ln>
+        </p:spPr>
+        <p:txBody>
+          <a:bodyPr spcFirstLastPara="1" wrap="square" lIns="0" tIns="0" rIns="0" bIns="0" anchor="t" anchorCtr="0">
+            <a:spAutoFit/>
+          </a:bodyPr>
+          <a:lstStyle/>
+          <a:p>
+            <a:pPr marL="0" marR="0" lvl="0" indent="0" algn="ctr" rtl="0">
+              <a:lnSpc>
+                <a:spcPct val="159944"/>
+              </a:lnSpc>
+              <a:spcBef>
+                <a:spcPts val="0"/>
+              </a:spcBef>
+              <a:spcAft>
+                <a:spcPts val="0"/>
+              </a:spcAft>
+              <a:buNone/>
+            </a:pPr>
+            <a:r>
+              <a:rPr lang="en-US" sz="1800" b="0" i="0" u="none" strike="noStrike" cap="none" dirty="0">
+                <a:solidFill>
+                  <a:schemeClr val="bg1"/>
+                </a:solidFill>
+                <a:latin typeface="Inter SemiBold"/>
+                <a:ea typeface="Inter SemiBold"/>
+                <a:cs typeface="Inter SemiBold"/>
+                <a:sym typeface="Inter SemiBold"/>
+              </a:rPr>
+              <a:t>ACCURATEZZA GLOBALE</a:t>
+            </a:r>
+            <a:endParaRPr dirty="0">
+              <a:solidFill>
+                <a:schemeClr val="bg1"/>
+              </a:solidFill>
+            </a:endParaRPr>
+          </a:p>
+        </p:txBody>
+      </p:sp>
+      <p:sp>
+        <p:nvSpPr>
+          <p:cNvPr id="4" name="Google Shape;242;p23">
+            <a:extLst>
+              <a:ext uri="{FF2B5EF4-FFF2-40B4-BE49-F238E27FC236}">
+                <a16:creationId xmlns:a16="http://schemas.microsoft.com/office/drawing/2014/main" id="{3F3C09EF-72D2-BAD9-9474-604CA3CB186C}"/>
+              </a:ext>
+            </a:extLst>
+          </p:cNvPr>
+          <p:cNvSpPr txBox="1"/>
+          <p:nvPr/>
+        </p:nvSpPr>
+        <p:spPr>
+          <a:xfrm>
+            <a:off x="6201890" y="4203323"/>
+            <a:ext cx="5550693" cy="323165"/>
+          </a:xfrm>
+          <a:prstGeom prst="rect">
+            <a:avLst/>
+          </a:prstGeom>
+          <a:noFill/>
+          <a:ln>
+            <a:noFill/>
+          </a:ln>
+        </p:spPr>
+        <p:txBody>
+          <a:bodyPr spcFirstLastPara="1" wrap="square" lIns="0" tIns="0" rIns="0" bIns="0" anchor="t" anchorCtr="0">
+            <a:spAutoFit/>
+          </a:bodyPr>
+          <a:lstStyle/>
+          <a:p>
+            <a:pPr marL="0" marR="0" lvl="0" indent="0" algn="l" rtl="0">
+              <a:spcBef>
+                <a:spcPts val="0"/>
+              </a:spcBef>
+              <a:spcAft>
+                <a:spcPts val="0"/>
+              </a:spcAft>
+              <a:buNone/>
+            </a:pPr>
+            <a:r>
+              <a:rPr lang="en-US" sz="2100" b="0" i="0" u="none" strike="noStrike" cap="none" dirty="0">
+                <a:solidFill>
+                  <a:srgbClr val="38BDF8"/>
+                </a:solidFill>
+                <a:latin typeface="Poppins Medium"/>
+                <a:ea typeface="Poppins Medium"/>
+                <a:cs typeface="Poppins Medium"/>
+                <a:sym typeface="Poppins Medium"/>
+              </a:rPr>
+              <a:t>Performance </a:t>
+            </a:r>
+            <a:r>
+              <a:rPr lang="en-US" sz="2100" b="0" i="0" u="none" strike="noStrike" cap="none" dirty="0" err="1">
+                <a:solidFill>
+                  <a:srgbClr val="38BDF8"/>
+                </a:solidFill>
+                <a:latin typeface="Poppins Medium"/>
+                <a:ea typeface="Poppins Medium"/>
+                <a:cs typeface="Poppins Medium"/>
+                <a:sym typeface="Poppins Medium"/>
+              </a:rPr>
+              <a:t>GentleBoost</a:t>
+            </a:r>
+            <a:r>
+              <a:rPr lang="en-US" sz="2100" b="0" i="0" u="none" strike="noStrike" cap="none" dirty="0">
+                <a:solidFill>
+                  <a:srgbClr val="38BDF8"/>
+                </a:solidFill>
+                <a:latin typeface="Poppins Medium"/>
+                <a:ea typeface="Poppins Medium"/>
+                <a:cs typeface="Poppins Medium"/>
+                <a:sym typeface="Poppins Medium"/>
+              </a:rPr>
+              <a:t> con LOSO</a:t>
+            </a:r>
+            <a:endParaRPr dirty="0"/>
+          </a:p>
+        </p:txBody>
+      </p:sp>
+      <p:sp>
+        <p:nvSpPr>
+          <p:cNvPr id="5" name="Google Shape;243;p23">
+            <a:extLst>
+              <a:ext uri="{FF2B5EF4-FFF2-40B4-BE49-F238E27FC236}">
+                <a16:creationId xmlns:a16="http://schemas.microsoft.com/office/drawing/2014/main" id="{4D28F712-FAEF-E2C4-06C6-7A37486AE986}"/>
+              </a:ext>
+            </a:extLst>
+          </p:cNvPr>
+          <p:cNvSpPr txBox="1"/>
+          <p:nvPr/>
+        </p:nvSpPr>
+        <p:spPr>
+          <a:xfrm>
+            <a:off x="6201965" y="4585588"/>
+            <a:ext cx="5286300" cy="332399"/>
+          </a:xfrm>
+          <a:prstGeom prst="rect">
+            <a:avLst/>
+          </a:prstGeom>
+          <a:noFill/>
+          <a:ln>
+            <a:noFill/>
+          </a:ln>
+        </p:spPr>
+        <p:txBody>
+          <a:bodyPr spcFirstLastPara="1" wrap="square" lIns="0" tIns="0" rIns="0" bIns="0" anchor="t" anchorCtr="0">
+            <a:spAutoFit/>
+          </a:bodyPr>
+          <a:lstStyle/>
+          <a:p>
+            <a:pPr marL="0" marR="0" lvl="0" indent="0" algn="l" rtl="0">
+              <a:lnSpc>
+                <a:spcPct val="160000"/>
+              </a:lnSpc>
+              <a:spcBef>
+                <a:spcPts val="0"/>
+              </a:spcBef>
+              <a:spcAft>
+                <a:spcPts val="0"/>
+              </a:spcAft>
+              <a:buNone/>
+            </a:pPr>
+            <a:r>
+              <a:rPr lang="en-US" sz="1350" dirty="0" err="1">
+                <a:solidFill>
+                  <a:schemeClr val="bg1">
+                    <a:lumMod val="85000"/>
+                  </a:schemeClr>
+                </a:solidFill>
+                <a:latin typeface="Inter"/>
+                <a:ea typeface="Inter"/>
+                <a:cs typeface="Inter"/>
+                <a:sym typeface="Inter"/>
+              </a:rPr>
+              <a:t>Tramite</a:t>
+            </a:r>
+            <a:r>
+              <a:rPr lang="en-US" sz="1350" dirty="0">
+                <a:solidFill>
+                  <a:schemeClr val="bg1">
+                    <a:lumMod val="85000"/>
+                  </a:schemeClr>
+                </a:solidFill>
+                <a:latin typeface="Inter"/>
+                <a:ea typeface="Inter"/>
+                <a:cs typeface="Inter"/>
+                <a:sym typeface="Inter"/>
+              </a:rPr>
+              <a:t> </a:t>
+            </a:r>
+            <a:r>
+              <a:rPr lang="en-US" sz="1350" b="0" i="0" u="none" strike="noStrike" cap="none" dirty="0" err="1">
+                <a:solidFill>
+                  <a:schemeClr val="bg1">
+                    <a:lumMod val="85000"/>
+                  </a:schemeClr>
+                </a:solidFill>
+                <a:latin typeface="Inter"/>
+                <a:ea typeface="Inter"/>
+                <a:cs typeface="Inter"/>
+                <a:sym typeface="Inter"/>
+              </a:rPr>
+              <a:t>GentleBoost</a:t>
+            </a:r>
+            <a:r>
+              <a:rPr lang="en-US" sz="1350" dirty="0">
+                <a:solidFill>
+                  <a:schemeClr val="bg1">
+                    <a:lumMod val="85000"/>
+                  </a:schemeClr>
+                </a:solidFill>
+                <a:latin typeface="Inter"/>
+                <a:ea typeface="Inter"/>
+                <a:cs typeface="Inter"/>
+                <a:sym typeface="Inter"/>
+              </a:rPr>
+              <a:t>, il </a:t>
+            </a:r>
+            <a:r>
+              <a:rPr lang="en-US" sz="1350" dirty="0" err="1">
+                <a:solidFill>
+                  <a:schemeClr val="bg1">
+                    <a:lumMod val="85000"/>
+                  </a:schemeClr>
+                </a:solidFill>
+                <a:latin typeface="Inter"/>
+                <a:ea typeface="Inter"/>
+                <a:cs typeface="Inter"/>
+                <a:sym typeface="Inter"/>
+              </a:rPr>
+              <a:t>risultato</a:t>
+            </a:r>
+            <a:r>
+              <a:rPr lang="en-US" sz="1350" dirty="0">
+                <a:solidFill>
+                  <a:schemeClr val="bg1">
+                    <a:lumMod val="85000"/>
+                  </a:schemeClr>
+                </a:solidFill>
+                <a:latin typeface="Inter"/>
+                <a:ea typeface="Inter"/>
+                <a:cs typeface="Inter"/>
+                <a:sym typeface="Inter"/>
+              </a:rPr>
+              <a:t> </a:t>
+            </a:r>
+            <a:r>
+              <a:rPr lang="en-US" sz="1350" dirty="0" err="1">
+                <a:solidFill>
+                  <a:schemeClr val="bg1">
+                    <a:lumMod val="85000"/>
+                  </a:schemeClr>
+                </a:solidFill>
+                <a:latin typeface="Inter"/>
+                <a:ea typeface="Inter"/>
+                <a:cs typeface="Inter"/>
+                <a:sym typeface="Inter"/>
+              </a:rPr>
+              <a:t>si</a:t>
+            </a:r>
+            <a:r>
+              <a:rPr lang="en-US" sz="1350" dirty="0">
+                <a:solidFill>
+                  <a:schemeClr val="bg1">
+                    <a:lumMod val="85000"/>
+                  </a:schemeClr>
+                </a:solidFill>
+                <a:latin typeface="Inter"/>
+                <a:ea typeface="Inter"/>
+                <a:cs typeface="Inter"/>
+                <a:sym typeface="Inter"/>
+              </a:rPr>
+              <a:t> </a:t>
+            </a:r>
+            <a:r>
+              <a:rPr lang="en-US" sz="1350" dirty="0" err="1">
+                <a:solidFill>
+                  <a:schemeClr val="bg1">
+                    <a:lumMod val="85000"/>
+                  </a:schemeClr>
+                </a:solidFill>
+                <a:latin typeface="Inter"/>
+                <a:ea typeface="Inter"/>
+                <a:cs typeface="Inter"/>
+                <a:sym typeface="Inter"/>
+              </a:rPr>
+              <a:t>avvicina</a:t>
+            </a:r>
+            <a:r>
+              <a:rPr lang="en-US" sz="1350" dirty="0">
+                <a:solidFill>
+                  <a:schemeClr val="bg1">
+                    <a:lumMod val="85000"/>
+                  </a:schemeClr>
+                </a:solidFill>
+                <a:latin typeface="Inter"/>
+                <a:ea typeface="Inter"/>
+                <a:cs typeface="Inter"/>
+                <a:sym typeface="Inter"/>
+              </a:rPr>
+              <a:t> al paper (baseline)</a:t>
+            </a:r>
+            <a:r>
+              <a:rPr lang="en-US" sz="1350" b="0" i="0" u="none" strike="noStrike" cap="none" dirty="0">
+                <a:solidFill>
+                  <a:schemeClr val="bg1">
+                    <a:lumMod val="85000"/>
+                  </a:schemeClr>
+                </a:solidFill>
+                <a:latin typeface="Inter"/>
+                <a:ea typeface="Inter"/>
+                <a:cs typeface="Inter"/>
+                <a:sym typeface="Inter"/>
+              </a:rPr>
+              <a:t>.</a:t>
+            </a:r>
+            <a:endParaRPr dirty="0">
+              <a:solidFill>
+                <a:schemeClr val="bg1">
+                  <a:lumMod val="85000"/>
+                </a:schemeClr>
+              </a:solidFill>
+            </a:endParaRPr>
+          </a:p>
+        </p:txBody>
+      </p:sp>
+      <p:sp>
+        <p:nvSpPr>
+          <p:cNvPr id="6" name="Google Shape;244;p23">
+            <a:extLst>
+              <a:ext uri="{FF2B5EF4-FFF2-40B4-BE49-F238E27FC236}">
+                <a16:creationId xmlns:a16="http://schemas.microsoft.com/office/drawing/2014/main" id="{B2383452-624F-8D4B-7A84-7FE5859342AA}"/>
+              </a:ext>
+            </a:extLst>
+          </p:cNvPr>
+          <p:cNvSpPr txBox="1"/>
+          <p:nvPr/>
+        </p:nvSpPr>
+        <p:spPr>
+          <a:xfrm>
+            <a:off x="6201890" y="4982672"/>
+            <a:ext cx="5286375" cy="747897"/>
+          </a:xfrm>
+          <a:prstGeom prst="rect">
+            <a:avLst/>
+          </a:prstGeom>
+          <a:noFill/>
+          <a:ln>
+            <a:noFill/>
+          </a:ln>
+        </p:spPr>
+        <p:txBody>
+          <a:bodyPr spcFirstLastPara="1" wrap="square" lIns="0" tIns="0" rIns="0" bIns="0" anchor="t" anchorCtr="0">
+            <a:spAutoFit/>
+          </a:bodyPr>
+          <a:lstStyle/>
+          <a:p>
+            <a:pPr marL="0" marR="0" lvl="0" indent="0" algn="l" rtl="0">
+              <a:lnSpc>
+                <a:spcPct val="120000"/>
+              </a:lnSpc>
+              <a:spcBef>
+                <a:spcPts val="0"/>
+              </a:spcBef>
+              <a:spcAft>
+                <a:spcPts val="0"/>
+              </a:spcAft>
+              <a:buNone/>
+            </a:pPr>
+            <a:r>
+              <a:rPr lang="en-US" sz="1350" b="1" i="0" u="none" strike="noStrike" cap="none" dirty="0" err="1">
+                <a:solidFill>
+                  <a:schemeClr val="bg2">
+                    <a:lumMod val="20000"/>
+                    <a:lumOff val="80000"/>
+                  </a:schemeClr>
+                </a:solidFill>
+                <a:latin typeface="Inter"/>
+                <a:ea typeface="Inter"/>
+                <a:cs typeface="Inter"/>
+                <a:sym typeface="Inter"/>
+              </a:rPr>
+              <a:t>Precisione</a:t>
+            </a:r>
+            <a:r>
+              <a:rPr lang="en-US" sz="1350" b="1" i="0" u="none" strike="noStrike" cap="none" dirty="0">
+                <a:solidFill>
+                  <a:schemeClr val="bg2">
+                    <a:lumMod val="20000"/>
+                    <a:lumOff val="80000"/>
+                  </a:schemeClr>
+                </a:solidFill>
+                <a:latin typeface="Inter"/>
+                <a:ea typeface="Inter"/>
+                <a:cs typeface="Inter"/>
+                <a:sym typeface="Inter"/>
+              </a:rPr>
+              <a:t> (Stress):</a:t>
+            </a:r>
+            <a:r>
+              <a:rPr lang="en-US" sz="1350" b="0" i="0" u="none" strike="noStrike" cap="none" dirty="0">
+                <a:solidFill>
+                  <a:schemeClr val="bg2">
+                    <a:lumMod val="20000"/>
+                    <a:lumOff val="80000"/>
+                  </a:schemeClr>
+                </a:solidFill>
+                <a:latin typeface="Inter"/>
+                <a:ea typeface="Inter"/>
+                <a:cs typeface="Inter"/>
+                <a:sym typeface="Inter"/>
+              </a:rPr>
+              <a:t> </a:t>
+            </a:r>
+            <a:r>
+              <a:rPr lang="en-US" sz="1350" dirty="0">
+                <a:solidFill>
+                  <a:schemeClr val="bg1">
+                    <a:lumMod val="85000"/>
+                  </a:schemeClr>
+                </a:solidFill>
+                <a:latin typeface="Inter"/>
+                <a:ea typeface="Inter"/>
+                <a:cs typeface="Inter"/>
+                <a:sym typeface="Inter"/>
+              </a:rPr>
+              <a:t>79</a:t>
+            </a:r>
+            <a:r>
+              <a:rPr lang="en-US" sz="1350" b="0" i="0" u="none" strike="noStrike" cap="none" dirty="0">
+                <a:solidFill>
+                  <a:schemeClr val="bg1">
+                    <a:lumMod val="85000"/>
+                  </a:schemeClr>
+                </a:solidFill>
+                <a:latin typeface="Inter"/>
+                <a:ea typeface="Inter"/>
+                <a:cs typeface="Inter"/>
+                <a:sym typeface="Inter"/>
+              </a:rPr>
+              <a:t>%</a:t>
+            </a:r>
+            <a:br>
+              <a:rPr lang="en-US" sz="1800" b="0" i="0" u="none" strike="noStrike" cap="none" dirty="0">
+                <a:solidFill>
+                  <a:schemeClr val="dk1"/>
+                </a:solidFill>
+                <a:latin typeface="Calibri"/>
+                <a:ea typeface="Calibri"/>
+                <a:cs typeface="Calibri"/>
+                <a:sym typeface="Calibri"/>
+              </a:rPr>
+            </a:br>
+            <a:r>
+              <a:rPr lang="en-US" sz="1350" b="1" i="0" u="none" strike="noStrike" cap="none" dirty="0">
+                <a:solidFill>
+                  <a:schemeClr val="bg2">
+                    <a:lumMod val="20000"/>
+                    <a:lumOff val="80000"/>
+                  </a:schemeClr>
+                </a:solidFill>
+                <a:latin typeface="Inter"/>
+                <a:ea typeface="Inter"/>
+                <a:cs typeface="Inter"/>
+                <a:sym typeface="Inter"/>
+              </a:rPr>
+              <a:t>Recall (</a:t>
+            </a:r>
+            <a:r>
+              <a:rPr lang="en-US" sz="1350" b="1" i="0" u="none" strike="noStrike" cap="none" dirty="0" err="1">
+                <a:solidFill>
+                  <a:schemeClr val="bg2">
+                    <a:lumMod val="20000"/>
+                    <a:lumOff val="80000"/>
+                  </a:schemeClr>
+                </a:solidFill>
+                <a:latin typeface="Inter"/>
+                <a:ea typeface="Inter"/>
+                <a:cs typeface="Inter"/>
+                <a:sym typeface="Inter"/>
+              </a:rPr>
+              <a:t>Sensibilità</a:t>
+            </a:r>
+            <a:r>
+              <a:rPr lang="en-US" sz="1350" b="1" i="0" u="none" strike="noStrike" cap="none" dirty="0">
+                <a:solidFill>
+                  <a:schemeClr val="bg2">
+                    <a:lumMod val="20000"/>
+                    <a:lumOff val="80000"/>
+                  </a:schemeClr>
+                </a:solidFill>
+                <a:latin typeface="Inter"/>
+                <a:ea typeface="Inter"/>
+                <a:cs typeface="Inter"/>
+                <a:sym typeface="Inter"/>
+              </a:rPr>
+              <a:t>):</a:t>
+            </a:r>
+            <a:r>
+              <a:rPr lang="en-US" sz="1350" b="0" i="0" u="none" strike="noStrike" cap="none" dirty="0">
+                <a:solidFill>
+                  <a:schemeClr val="bg2">
+                    <a:lumMod val="20000"/>
+                    <a:lumOff val="80000"/>
+                  </a:schemeClr>
+                </a:solidFill>
+                <a:latin typeface="Inter"/>
+                <a:ea typeface="Inter"/>
+                <a:cs typeface="Inter"/>
+                <a:sym typeface="Inter"/>
+              </a:rPr>
+              <a:t> </a:t>
+            </a:r>
+            <a:r>
+              <a:rPr lang="en-US" sz="1350" dirty="0">
+                <a:solidFill>
+                  <a:schemeClr val="bg1">
+                    <a:lumMod val="85000"/>
+                  </a:schemeClr>
+                </a:solidFill>
+                <a:latin typeface="Inter"/>
+                <a:ea typeface="Inter"/>
+                <a:cs typeface="Inter"/>
+                <a:sym typeface="Inter"/>
+              </a:rPr>
+              <a:t>81</a:t>
+            </a:r>
+            <a:r>
+              <a:rPr lang="en-US" sz="1350" b="0" i="0" u="none" strike="noStrike" cap="none" dirty="0">
+                <a:solidFill>
+                  <a:schemeClr val="bg1">
+                    <a:lumMod val="85000"/>
+                  </a:schemeClr>
+                </a:solidFill>
+                <a:latin typeface="Inter"/>
+                <a:ea typeface="Inter"/>
+                <a:cs typeface="Inter"/>
+                <a:sym typeface="Inter"/>
+              </a:rPr>
+              <a:t>%</a:t>
+            </a:r>
+            <a:br>
+              <a:rPr lang="en-US" sz="1800" b="0" i="0" u="none" strike="noStrike" cap="none" dirty="0">
+                <a:solidFill>
+                  <a:schemeClr val="dk1"/>
+                </a:solidFill>
+                <a:latin typeface="Calibri"/>
+                <a:ea typeface="Calibri"/>
+                <a:cs typeface="Calibri"/>
+                <a:sym typeface="Calibri"/>
+              </a:rPr>
+            </a:br>
+            <a:r>
+              <a:rPr lang="en-US" sz="1350" b="1" i="0" u="none" strike="noStrike" cap="none" dirty="0">
+                <a:solidFill>
+                  <a:schemeClr val="bg2">
+                    <a:lumMod val="20000"/>
+                    <a:lumOff val="80000"/>
+                  </a:schemeClr>
+                </a:solidFill>
+                <a:latin typeface="Inter"/>
+                <a:ea typeface="Inter"/>
+                <a:cs typeface="Inter"/>
+                <a:sym typeface="Inter"/>
+              </a:rPr>
+              <a:t>F1-Score:</a:t>
+            </a:r>
+            <a:r>
+              <a:rPr lang="en-US" sz="1350" b="0" i="0" u="none" strike="noStrike" cap="none" dirty="0">
+                <a:solidFill>
+                  <a:schemeClr val="bg2">
+                    <a:lumMod val="20000"/>
+                    <a:lumOff val="80000"/>
+                  </a:schemeClr>
+                </a:solidFill>
+                <a:latin typeface="Inter"/>
+                <a:ea typeface="Inter"/>
+                <a:cs typeface="Inter"/>
+                <a:sym typeface="Inter"/>
+              </a:rPr>
+              <a:t> </a:t>
+            </a:r>
+            <a:r>
+              <a:rPr lang="en-US" sz="1350" b="0" i="0" u="none" strike="noStrike" cap="none" dirty="0">
+                <a:solidFill>
+                  <a:schemeClr val="bg1">
+                    <a:lumMod val="85000"/>
+                  </a:schemeClr>
+                </a:solidFill>
+                <a:latin typeface="Inter"/>
+                <a:ea typeface="Inter"/>
+                <a:cs typeface="Inter"/>
+                <a:sym typeface="Inter"/>
+              </a:rPr>
+              <a:t>80%</a:t>
+            </a:r>
+            <a:endParaRPr dirty="0">
+              <a:solidFill>
+                <a:schemeClr val="bg1">
+                  <a:lumMod val="85000"/>
+                </a:schemeClr>
               </a:solidFill>
             </a:endParaRPr>
           </a:p>
@@ -14348,33 +15040,6 @@
           <a:chExt cx="0" cy="0"/>
         </a:xfrm>
       </p:grpSpPr>
-      <p:pic>
-        <p:nvPicPr>
-          <p:cNvPr id="251" name="Google Shape;251;p24" descr="image.png"/>
-          <p:cNvPicPr preferRelativeResize="0"/>
-          <p:nvPr/>
-        </p:nvPicPr>
-        <p:blipFill rotWithShape="1">
-          <a:blip r:embed="rId3">
-            <a:alphaModFix/>
-          </a:blip>
-          <a:srcRect/>
-          <a:stretch/>
-        </p:blipFill>
-        <p:spPr>
-          <a:xfrm>
-            <a:off x="0" y="0"/>
-            <a:ext cx="12192000" cy="6858000"/>
-          </a:xfrm>
-          <a:prstGeom prst="rect">
-            <a:avLst/>
-          </a:prstGeom>
-          <a:noFill/>
-          <a:ln>
-            <a:noFill/>
-          </a:ln>
-        </p:spPr>
-      </p:pic>
       <p:sp>
         <p:nvSpPr>
           <p:cNvPr id="252" name="Google Shape;252;p24"/>
@@ -14383,7 +15048,7 @@
         </p:nvSpPr>
         <p:spPr>
           <a:xfrm>
-            <a:off x="571500" y="2668041"/>
+            <a:off x="571500" y="2246503"/>
             <a:ext cx="5286375" cy="1333500"/>
           </a:xfrm>
           <a:prstGeom prst="rect">
@@ -14436,7 +15101,7 @@
         </p:nvSpPr>
         <p:spPr>
           <a:xfrm>
-            <a:off x="571500" y="4096791"/>
+            <a:off x="571500" y="3675253"/>
             <a:ext cx="5286375" cy="443198"/>
           </a:xfrm>
           <a:prstGeom prst="rect">
@@ -14493,7 +15158,7 @@
         </p:nvSpPr>
         <p:spPr>
           <a:xfrm>
-            <a:off x="6334125" y="2668041"/>
+            <a:off x="6334125" y="2246503"/>
             <a:ext cx="5550693" cy="323165"/>
           </a:xfrm>
           <a:prstGeom prst="rect">
@@ -14627,7 +15292,7 @@
         </p:nvSpPr>
         <p:spPr>
           <a:xfrm>
-            <a:off x="6334125" y="3210966"/>
+            <a:off x="6334113" y="2682513"/>
             <a:ext cx="5286300" cy="1661993"/>
           </a:xfrm>
           <a:prstGeom prst="rect">
@@ -14920,7 +15585,7 @@
                 <a:cs typeface="Inter"/>
                 <a:sym typeface="Inter"/>
               </a:rPr>
-              <a:t> (ha un Recall dell’86,6% rispetto a 81.9%), </a:t>
+              <a:t> (ha un Recall dell’86,6% rispetto all’81.9%), </a:t>
             </a:r>
             <a:r>
               <a:rPr lang="en-US" sz="1350" dirty="0" err="1">
@@ -15290,7 +15955,7 @@
         </p:nvSpPr>
         <p:spPr>
           <a:xfrm>
-            <a:off x="6334113" y="4950637"/>
+            <a:off x="6334113" y="4457352"/>
             <a:ext cx="5286300" cy="747897"/>
           </a:xfrm>
           <a:prstGeom prst="rect">
@@ -15589,6 +16254,130 @@
             <a:endParaRPr dirty="0">
               <a:solidFill>
                 <a:schemeClr val="bg1"/>
+              </a:solidFill>
+            </a:endParaRPr>
+          </a:p>
+        </p:txBody>
+      </p:sp>
+      <p:sp>
+        <p:nvSpPr>
+          <p:cNvPr id="15" name="Google Shape;245;p23">
+            <a:extLst>
+              <a:ext uri="{FF2B5EF4-FFF2-40B4-BE49-F238E27FC236}">
+                <a16:creationId xmlns:a16="http://schemas.microsoft.com/office/drawing/2014/main" id="{EC89CE9A-880C-EF8B-D470-2EC353755939}"/>
+              </a:ext>
+            </a:extLst>
+          </p:cNvPr>
+          <p:cNvSpPr txBox="1"/>
+          <p:nvPr/>
+        </p:nvSpPr>
+        <p:spPr>
+          <a:xfrm>
+            <a:off x="571575" y="4196700"/>
+            <a:ext cx="5286300" cy="997196"/>
+          </a:xfrm>
+          <a:prstGeom prst="rect">
+            <a:avLst/>
+          </a:prstGeom>
+          <a:noFill/>
+          <a:ln>
+            <a:noFill/>
+          </a:ln>
+        </p:spPr>
+        <p:txBody>
+          <a:bodyPr spcFirstLastPara="1" wrap="square" lIns="0" tIns="0" rIns="0" bIns="0" anchor="t" anchorCtr="0">
+            <a:spAutoFit/>
+          </a:bodyPr>
+          <a:lstStyle/>
+          <a:p>
+            <a:pPr marL="0" marR="0" lvl="0" indent="0" algn="l" rtl="0">
+              <a:lnSpc>
+                <a:spcPct val="160000"/>
+              </a:lnSpc>
+              <a:spcBef>
+                <a:spcPts val="0"/>
+              </a:spcBef>
+              <a:spcAft>
+                <a:spcPts val="0"/>
+              </a:spcAft>
+              <a:buNone/>
+            </a:pPr>
+            <a:r>
+              <a:rPr lang="it-IT" sz="1350" b="0" i="1" u="none" strike="noStrike" cap="none" dirty="0">
+                <a:solidFill>
+                  <a:schemeClr val="bg1">
+                    <a:lumMod val="85000"/>
+                  </a:schemeClr>
+                </a:solidFill>
+                <a:latin typeface="Inter"/>
+                <a:ea typeface="Inter"/>
+                <a:cs typeface="Inter"/>
+                <a:sym typeface="Inter"/>
+              </a:rPr>
+              <a:t>Tuttavia, soffre di </a:t>
+            </a:r>
+            <a:r>
+              <a:rPr lang="it-IT" sz="1350" b="0" i="1" u="none" strike="noStrike" cap="none" dirty="0">
+                <a:solidFill>
+                  <a:schemeClr val="accent2">
+                    <a:lumMod val="60000"/>
+                    <a:lumOff val="40000"/>
+                  </a:schemeClr>
+                </a:solidFill>
+                <a:latin typeface="Inter"/>
+                <a:ea typeface="Inter"/>
+                <a:cs typeface="Inter"/>
+                <a:sym typeface="Inter"/>
+              </a:rPr>
+              <a:t>DATA LEAKAGE</a:t>
+            </a:r>
+            <a:r>
+              <a:rPr lang="it-IT" sz="1350" b="0" i="1" u="none" strike="noStrike" cap="none" dirty="0">
+                <a:solidFill>
+                  <a:schemeClr val="bg1">
+                    <a:lumMod val="85000"/>
+                  </a:schemeClr>
+                </a:solidFill>
+                <a:latin typeface="Inter"/>
+                <a:ea typeface="Inter"/>
+                <a:cs typeface="Inter"/>
+                <a:sym typeface="Inter"/>
+              </a:rPr>
+              <a:t>! La variante sicura senza leakage ha accuratezza del 67%, in tal caso la variante con </a:t>
+            </a:r>
+            <a:r>
+              <a:rPr lang="it-IT" sz="1350" b="0" i="1" u="none" strike="noStrike" cap="none" dirty="0" err="1">
+                <a:solidFill>
+                  <a:schemeClr val="bg1">
+                    <a:lumMod val="85000"/>
+                  </a:schemeClr>
+                </a:solidFill>
+                <a:latin typeface="Inter"/>
+                <a:ea typeface="Inter"/>
+                <a:cs typeface="Inter"/>
+                <a:sym typeface="Inter"/>
+              </a:rPr>
+              <a:t>GentleBoost</a:t>
+            </a:r>
+            <a:r>
+              <a:rPr lang="it-IT" sz="1350" b="0" i="1" u="none" strike="noStrike" cap="none" dirty="0">
+                <a:solidFill>
+                  <a:schemeClr val="bg1">
+                    <a:lumMod val="85000"/>
+                  </a:schemeClr>
+                </a:solidFill>
+                <a:latin typeface="Inter"/>
+                <a:ea typeface="Inter"/>
+                <a:cs typeface="Inter"/>
+                <a:sym typeface="Inter"/>
+              </a:rPr>
+              <a:t> con LOSO diventa la migliore.</a:t>
+            </a:r>
+            <a:endParaRPr lang="it-IT" dirty="0">
+              <a:solidFill>
+                <a:schemeClr val="bg1">
+                  <a:lumMod val="85000"/>
+                </a:schemeClr>
               </a:solidFill>
             </a:endParaRPr>
           </a:p>
@@ -15663,7 +16452,7 @@
         <p:spPr>
           <a:xfrm>
             <a:off x="571500" y="5346972"/>
-            <a:ext cx="11049000" cy="664797"/>
+            <a:ext cx="11049000" cy="997196"/>
           </a:xfrm>
           <a:prstGeom prst="rect">
             <a:avLst/>
@@ -16123,7 +16912,161 @@
                 <a:cs typeface="Inter"/>
                 <a:sym typeface="Inter"/>
               </a:rPr>
-              <a:t>.</a:t>
+              <a:t>. (</a:t>
+            </a:r>
+            <a:r>
+              <a:rPr lang="en-US" sz="1350" b="0" i="0" u="none" strike="noStrike" cap="none" dirty="0" err="1">
+                <a:solidFill>
+                  <a:schemeClr val="bg1">
+                    <a:lumMod val="85000"/>
+                  </a:schemeClr>
+                </a:solidFill>
+                <a:latin typeface="Inter"/>
+                <a:ea typeface="Inter"/>
+                <a:cs typeface="Inter"/>
+                <a:sym typeface="Inter"/>
+              </a:rPr>
+              <a:t>Anche</a:t>
+            </a:r>
+            <a:r>
+              <a:rPr lang="en-US" sz="1350" b="0" i="0" u="none" strike="noStrike" cap="none" dirty="0">
+                <a:solidFill>
+                  <a:schemeClr val="bg1">
+                    <a:lumMod val="85000"/>
+                  </a:schemeClr>
+                </a:solidFill>
+                <a:latin typeface="Inter"/>
+                <a:ea typeface="Inter"/>
+                <a:cs typeface="Inter"/>
+                <a:sym typeface="Inter"/>
+              </a:rPr>
+              <a:t> se la </a:t>
+            </a:r>
+            <a:r>
+              <a:rPr lang="en-US" sz="1350" b="0" i="0" u="none" strike="noStrike" cap="none" dirty="0" err="1">
+                <a:solidFill>
+                  <a:schemeClr val="bg1">
+                    <a:lumMod val="85000"/>
+                  </a:schemeClr>
+                </a:solidFill>
+                <a:latin typeface="Inter"/>
+                <a:ea typeface="Inter"/>
+                <a:cs typeface="Inter"/>
+                <a:sym typeface="Inter"/>
+              </a:rPr>
+              <a:t>variante</a:t>
+            </a:r>
+            <a:r>
+              <a:rPr lang="en-US" sz="1350" b="0" i="0" u="none" strike="noStrike" cap="none" dirty="0">
+                <a:solidFill>
+                  <a:schemeClr val="bg1">
+                    <a:lumMod val="85000"/>
+                  </a:schemeClr>
+                </a:solidFill>
+                <a:latin typeface="Inter"/>
+                <a:ea typeface="Inter"/>
+                <a:cs typeface="Inter"/>
+                <a:sym typeface="Inter"/>
+              </a:rPr>
+              <a:t> Migliore senza Data leakage, non </a:t>
+            </a:r>
+            <a:r>
+              <a:rPr lang="en-US" sz="1350" b="0" i="0" u="none" strike="noStrike" cap="none" dirty="0" err="1">
+                <a:solidFill>
+                  <a:schemeClr val="bg1">
+                    <a:lumMod val="85000"/>
+                  </a:schemeClr>
+                </a:solidFill>
+                <a:latin typeface="Inter"/>
+                <a:ea typeface="Inter"/>
+                <a:cs typeface="Inter"/>
+                <a:sym typeface="Inter"/>
+              </a:rPr>
+              <a:t>mostrata</a:t>
+            </a:r>
+            <a:r>
+              <a:rPr lang="en-US" sz="1350" b="0" i="0" u="none" strike="noStrike" cap="none" dirty="0">
+                <a:solidFill>
+                  <a:schemeClr val="bg1">
+                    <a:lumMod val="85000"/>
+                  </a:schemeClr>
+                </a:solidFill>
+                <a:latin typeface="Inter"/>
+                <a:ea typeface="Inter"/>
+                <a:cs typeface="Inter"/>
+                <a:sym typeface="Inter"/>
+              </a:rPr>
+              <a:t>, con </a:t>
+            </a:r>
+            <a:r>
+              <a:rPr lang="en-US" sz="1350" b="0" i="0" u="none" strike="noStrike" cap="none" dirty="0" err="1">
+                <a:solidFill>
+                  <a:schemeClr val="bg1">
+                    <a:lumMod val="85000"/>
+                  </a:schemeClr>
+                </a:solidFill>
+                <a:latin typeface="Inter"/>
+                <a:ea typeface="Inter"/>
+                <a:cs typeface="Inter"/>
+                <a:sym typeface="Inter"/>
+              </a:rPr>
+              <a:t>GentleBoost</a:t>
+            </a:r>
+            <a:r>
+              <a:rPr lang="en-US" sz="1350" b="0" i="0" u="none" strike="noStrike" cap="none" dirty="0">
+                <a:solidFill>
+                  <a:schemeClr val="bg1">
+                    <a:lumMod val="85000"/>
+                  </a:schemeClr>
+                </a:solidFill>
+                <a:latin typeface="Inter"/>
+                <a:ea typeface="Inter"/>
+                <a:cs typeface="Inter"/>
+                <a:sym typeface="Inter"/>
+              </a:rPr>
+              <a:t> e LOSO, </a:t>
+            </a:r>
+            <a:r>
+              <a:rPr lang="en-US" sz="1350" b="0" i="0" u="none" strike="noStrike" cap="none" dirty="0" err="1">
+                <a:solidFill>
+                  <a:schemeClr val="bg1">
+                    <a:lumMod val="85000"/>
+                  </a:schemeClr>
+                </a:solidFill>
+                <a:latin typeface="Inter"/>
+                <a:ea typeface="Inter"/>
+                <a:cs typeface="Inter"/>
+                <a:sym typeface="Inter"/>
+              </a:rPr>
+              <a:t>raggiunge</a:t>
+            </a:r>
+            <a:r>
+              <a:rPr lang="en-US" sz="1350" b="0" i="0" u="none" strike="noStrike" cap="none" dirty="0">
+                <a:solidFill>
+                  <a:schemeClr val="bg1">
+                    <a:lumMod val="85000"/>
+                  </a:schemeClr>
+                </a:solidFill>
+                <a:latin typeface="Inter"/>
+                <a:ea typeface="Inter"/>
+                <a:cs typeface="Inter"/>
+                <a:sym typeface="Inter"/>
+              </a:rPr>
+              <a:t> circa </a:t>
+            </a:r>
+            <a:r>
+              <a:rPr lang="en-US" sz="1350" b="0" i="0" u="none" strike="noStrike" cap="none">
+                <a:solidFill>
+                  <a:schemeClr val="bg1">
+                    <a:lumMod val="85000"/>
+                  </a:schemeClr>
+                </a:solidFill>
+                <a:latin typeface="Inter"/>
+                <a:ea typeface="Inter"/>
+                <a:cs typeface="Inter"/>
+                <a:sym typeface="Inter"/>
+              </a:rPr>
+              <a:t>il 70,8%)</a:t>
             </a:r>
             <a:endParaRPr dirty="0">
               <a:solidFill>
@@ -16959,6 +17902,255 @@
           </a:p>
         </p:txBody>
       </p:sp>
+      <p:sp>
+        <p:nvSpPr>
+          <p:cNvPr id="8" name="Google Shape;245;p23">
+            <a:extLst>
+              <a:ext uri="{FF2B5EF4-FFF2-40B4-BE49-F238E27FC236}">
+                <a16:creationId xmlns:a16="http://schemas.microsoft.com/office/drawing/2014/main" id="{8C45CFFC-F599-2638-D0FE-AA7708CB3232}"/>
+              </a:ext>
+            </a:extLst>
+          </p:cNvPr>
+          <p:cNvSpPr txBox="1"/>
+          <p:nvPr/>
+        </p:nvSpPr>
+        <p:spPr>
+          <a:xfrm>
+            <a:off x="278651" y="6352088"/>
+            <a:ext cx="10608423" cy="332399"/>
+          </a:xfrm>
+          <a:prstGeom prst="rect">
+            <a:avLst/>
+          </a:prstGeom>
+          <a:noFill/>
+          <a:ln>
+            <a:noFill/>
+          </a:ln>
+        </p:spPr>
+        <p:txBody>
+          <a:bodyPr spcFirstLastPara="1" wrap="square" lIns="0" tIns="0" rIns="0" bIns="0" anchor="t" anchorCtr="0">
+            <a:spAutoFit/>
+          </a:bodyPr>
+          <a:lstStyle/>
+          <a:p>
+            <a:pPr marL="0" marR="0" lvl="0" indent="0" algn="l" rtl="0">
+              <a:lnSpc>
+                <a:spcPct val="160000"/>
+              </a:lnSpc>
+              <a:spcBef>
+                <a:spcPts val="0"/>
+              </a:spcBef>
+              <a:spcAft>
+                <a:spcPts val="0"/>
+              </a:spcAft>
+              <a:buNone/>
+            </a:pPr>
+            <a:r>
+              <a:rPr lang="en-US" sz="1350" b="0" i="1" u="none" strike="noStrike" cap="none" dirty="0" err="1">
+                <a:solidFill>
+                  <a:schemeClr val="bg1">
+                    <a:lumMod val="85000"/>
+                  </a:schemeClr>
+                </a:solidFill>
+                <a:latin typeface="Inter"/>
+                <a:ea typeface="Inter"/>
+                <a:cs typeface="Inter"/>
+                <a:sym typeface="Inter"/>
+              </a:rPr>
+              <a:t>Tuttavia</a:t>
+            </a:r>
+            <a:r>
+              <a:rPr lang="en-US" sz="1350" b="0" i="1" u="none" strike="noStrike" cap="none" dirty="0">
+                <a:solidFill>
+                  <a:schemeClr val="bg1">
+                    <a:lumMod val="85000"/>
+                  </a:schemeClr>
+                </a:solidFill>
+                <a:latin typeface="Inter"/>
+                <a:ea typeface="Inter"/>
+                <a:cs typeface="Inter"/>
+                <a:sym typeface="Inter"/>
+              </a:rPr>
+              <a:t>, la </a:t>
+            </a:r>
+            <a:r>
+              <a:rPr lang="en-US" sz="1350" b="0" i="1" u="none" strike="noStrike" cap="none" dirty="0" err="1">
+                <a:solidFill>
+                  <a:schemeClr val="bg1">
+                    <a:lumMod val="85000"/>
+                  </a:schemeClr>
+                </a:solidFill>
+                <a:latin typeface="Inter"/>
+                <a:ea typeface="Inter"/>
+                <a:cs typeface="Inter"/>
+                <a:sym typeface="Inter"/>
+              </a:rPr>
+              <a:t>variante</a:t>
+            </a:r>
+            <a:r>
+              <a:rPr lang="en-US" sz="1350" b="0" i="1" u="none" strike="noStrike" cap="none" dirty="0">
+                <a:solidFill>
+                  <a:schemeClr val="bg1">
+                    <a:lumMod val="85000"/>
+                  </a:schemeClr>
+                </a:solidFill>
+                <a:latin typeface="Inter"/>
+                <a:ea typeface="Inter"/>
+                <a:cs typeface="Inter"/>
+                <a:sym typeface="Inter"/>
+              </a:rPr>
+              <a:t> </a:t>
+            </a:r>
+            <a:r>
+              <a:rPr lang="en-US" sz="1350" b="0" i="1" u="none" strike="noStrike" cap="none" dirty="0" err="1">
+                <a:solidFill>
+                  <a:schemeClr val="bg1">
+                    <a:lumMod val="85000"/>
+                  </a:schemeClr>
+                </a:solidFill>
+                <a:latin typeface="Inter"/>
+                <a:ea typeface="Inter"/>
+                <a:cs typeface="Inter"/>
+                <a:sym typeface="Inter"/>
+              </a:rPr>
+              <a:t>GentleBoost</a:t>
+            </a:r>
+            <a:r>
+              <a:rPr lang="en-US" sz="1350" b="0" i="1" u="none" strike="noStrike" cap="none" dirty="0">
+                <a:solidFill>
+                  <a:schemeClr val="bg1">
+                    <a:lumMod val="85000"/>
+                  </a:schemeClr>
+                </a:solidFill>
+                <a:latin typeface="Inter"/>
+                <a:ea typeface="Inter"/>
+                <a:cs typeface="Inter"/>
+                <a:sym typeface="Inter"/>
+              </a:rPr>
+              <a:t> con LOSO, senza Data Leakage, </a:t>
+            </a:r>
+            <a:r>
+              <a:rPr lang="en-US" sz="1350" b="0" i="1" u="none" strike="noStrike" cap="none" dirty="0" err="1">
+                <a:solidFill>
+                  <a:schemeClr val="bg1">
+                    <a:lumMod val="85000"/>
+                  </a:schemeClr>
+                </a:solidFill>
+                <a:latin typeface="Inter"/>
+                <a:ea typeface="Inter"/>
+                <a:cs typeface="Inter"/>
+                <a:sym typeface="Inter"/>
+              </a:rPr>
+              <a:t>si</a:t>
+            </a:r>
+            <a:r>
+              <a:rPr lang="en-US" sz="1350" b="0" i="1" u="none" strike="noStrike" cap="none" dirty="0">
+                <a:solidFill>
+                  <a:schemeClr val="bg1">
+                    <a:lumMod val="85000"/>
+                  </a:schemeClr>
+                </a:solidFill>
+                <a:latin typeface="Inter"/>
+                <a:ea typeface="Inter"/>
+                <a:cs typeface="Inter"/>
+                <a:sym typeface="Inter"/>
+              </a:rPr>
+              <a:t> </a:t>
+            </a:r>
+            <a:r>
+              <a:rPr lang="en-US" sz="1350" b="0" i="1" u="none" strike="noStrike" cap="none" dirty="0" err="1">
+                <a:solidFill>
+                  <a:schemeClr val="bg1">
+                    <a:lumMod val="85000"/>
+                  </a:schemeClr>
+                </a:solidFill>
+                <a:latin typeface="Inter"/>
+                <a:ea typeface="Inter"/>
+                <a:cs typeface="Inter"/>
+                <a:sym typeface="Inter"/>
+              </a:rPr>
+              <a:t>avvicina</a:t>
+            </a:r>
+            <a:r>
+              <a:rPr lang="en-US" sz="1350" b="0" i="1" u="none" strike="noStrike" cap="none" dirty="0">
+                <a:solidFill>
+                  <a:schemeClr val="bg1">
+                    <a:lumMod val="85000"/>
+                  </a:schemeClr>
+                </a:solidFill>
+                <a:latin typeface="Inter"/>
+                <a:ea typeface="Inter"/>
+                <a:cs typeface="Inter"/>
+                <a:sym typeface="Inter"/>
+              </a:rPr>
+              <a:t> ma non </a:t>
+            </a:r>
+            <a:r>
+              <a:rPr lang="en-US" sz="1350" b="0" i="1" u="none" strike="noStrike" cap="none" dirty="0" err="1">
+                <a:solidFill>
+                  <a:schemeClr val="bg1">
+                    <a:lumMod val="85000"/>
+                  </a:schemeClr>
+                </a:solidFill>
+                <a:latin typeface="Inter"/>
+                <a:ea typeface="Inter"/>
+                <a:cs typeface="Inter"/>
+                <a:sym typeface="Inter"/>
+              </a:rPr>
+              <a:t>raggiunge</a:t>
+            </a:r>
+            <a:r>
+              <a:rPr lang="en-US" sz="1350" b="0" i="1" u="none" strike="noStrike" cap="none" dirty="0">
+                <a:solidFill>
+                  <a:schemeClr val="bg1">
+                    <a:lumMod val="85000"/>
+                  </a:schemeClr>
+                </a:solidFill>
+                <a:latin typeface="Inter"/>
+                <a:ea typeface="Inter"/>
+                <a:cs typeface="Inter"/>
+                <a:sym typeface="Inter"/>
+              </a:rPr>
+              <a:t> </a:t>
+            </a:r>
+            <a:r>
+              <a:rPr lang="en-US" sz="1350" b="0" i="1" u="none" strike="noStrike" cap="none" dirty="0" err="1">
+                <a:solidFill>
+                  <a:schemeClr val="bg1">
+                    <a:lumMod val="85000"/>
+                  </a:schemeClr>
+                </a:solidFill>
+                <a:latin typeface="Inter"/>
+                <a:ea typeface="Inter"/>
+                <a:cs typeface="Inter"/>
+                <a:sym typeface="Inter"/>
+              </a:rPr>
+              <a:t>ancora</a:t>
+            </a:r>
+            <a:r>
+              <a:rPr lang="en-US" sz="1350" b="0" i="1" u="none" strike="noStrike" cap="none" dirty="0">
+                <a:solidFill>
+                  <a:schemeClr val="bg1">
+                    <a:lumMod val="85000"/>
+                  </a:schemeClr>
+                </a:solidFill>
+                <a:latin typeface="Inter"/>
+                <a:ea typeface="Inter"/>
+                <a:cs typeface="Inter"/>
+                <a:sym typeface="Inter"/>
+              </a:rPr>
+              <a:t> il paper di circa il 6,5%.</a:t>
+            </a:r>
+            <a:endParaRPr dirty="0">
+              <a:solidFill>
+                <a:schemeClr val="bg1">
+                  <a:lumMod val="85000"/>
+                </a:schemeClr>
+              </a:solidFill>
+            </a:endParaRPr>
+          </a:p>
+        </p:txBody>
+      </p:sp>
     </p:spTree>
   </p:cSld>
   <p:clrMapOvr>
@@ -17063,7 +18255,7 @@
                 <a:cs typeface="Poppins SemiBold"/>
                 <a:sym typeface="Poppins SemiBold"/>
               </a:rPr>
-              <a:t>Altro - </a:t>
+              <a:t>Altro – </a:t>
             </a:r>
             <a:r>
               <a:rPr lang="en-US" sz="3000" dirty="0" err="1">
@@ -17087,31 +18279,7 @@
                 <a:cs typeface="Poppins SemiBold"/>
                 <a:sym typeface="Poppins SemiBold"/>
               </a:rPr>
-              <a:t> (</a:t>
-            </a:r>
-            <a:r>
-              <a:rPr lang="en-US" sz="3000" dirty="0" err="1">
-                <a:solidFill>
-                  <a:srgbClr val="F8FAFC"/>
-                </a:solidFill>
-                <a:latin typeface="Poppins SemiBold"/>
-                <a:ea typeface="Poppins SemiBold"/>
-                <a:cs typeface="Poppins SemiBold"/>
-                <a:sym typeface="Poppins SemiBold"/>
-              </a:rPr>
-              <a:t>scartati</a:t>
-            </a:r>
-            <a:r>
-              <a:rPr lang="en-US" sz="3000" dirty="0">
-                <a:solidFill>
-                  <a:srgbClr val="F8FAFC"/>
-                </a:solidFill>
-                <a:latin typeface="Poppins SemiBold"/>
-                <a:ea typeface="Poppins SemiBold"/>
-                <a:cs typeface="Poppins SemiBold"/>
-                <a:sym typeface="Poppins SemiBold"/>
-              </a:rPr>
-              <a:t>) e screenshots</a:t>
+              <a:t> e screenshots</a:t>
             </a:r>
             <a:endParaRPr dirty="0"/>
           </a:p>
@@ -17126,7 +18294,7 @@
         <p:spPr>
           <a:xfrm>
             <a:off x="571500" y="1350200"/>
-            <a:ext cx="4287883" cy="2758069"/>
+            <a:ext cx="4287883" cy="2659190"/>
           </a:xfrm>
           <a:prstGeom prst="rect">
             <a:avLst/>
@@ -17379,7 +18547,7 @@
                 <a:cs typeface="Inter"/>
                 <a:sym typeface="Inter"/>
               </a:rPr>
-              <a:t> come da paper) e IBI, </a:t>
+              <a:t>, </a:t>
             </a:r>
             <a:r>
               <a:rPr lang="en-US" sz="1350" dirty="0" err="1">
@@ -17391,6 +18559,30 @@
                 <a:cs typeface="Inter"/>
                 <a:sym typeface="Inter"/>
               </a:rPr>
+              <a:t>differentemente</a:t>
+            </a:r>
+            <a:r>
+              <a:rPr lang="en-US" sz="1350" dirty="0">
+                <a:solidFill>
+                  <a:srgbClr val="CBD5E1"/>
+                </a:solidFill>
+                <a:latin typeface="Inter"/>
+                <a:ea typeface="Inter"/>
+                <a:cs typeface="Inter"/>
+                <a:sym typeface="Inter"/>
+              </a:rPr>
+              <a:t> dal paper) e IBI, </a:t>
+            </a:r>
+            <a:r>
+              <a:rPr lang="en-US" sz="1350" dirty="0" err="1">
+                <a:solidFill>
+                  <a:srgbClr val="CBD5E1"/>
+                </a:solidFill>
+                <a:latin typeface="Inter"/>
+                <a:ea typeface="Inter"/>
+                <a:cs typeface="Inter"/>
+                <a:sym typeface="Inter"/>
+              </a:rPr>
               <a:t>tuttavia</a:t>
             </a:r>
             <a:r>
@@ -17619,7 +18811,7 @@
                 <a:cs typeface="Inter"/>
                 <a:sym typeface="Inter"/>
               </a:rPr>
-              <a:t> e </a:t>
+              <a:t> (Circa il 64% di </a:t>
             </a:r>
             <a:r>
               <a:rPr lang="en-US" sz="1350" dirty="0" err="1">
@@ -17631,7 +18823,7 @@
                 <a:cs typeface="Inter"/>
                 <a:sym typeface="Inter"/>
               </a:rPr>
-              <a:t>l’accuratezza</a:t>
+              <a:t>accuratezza</a:t>
             </a:r>
             <a:r>
               <a:rPr lang="en-US" sz="1350" dirty="0">
@@ -17643,7 +18835,7 @@
                 <a:cs typeface="Inter"/>
                 <a:sym typeface="Inter"/>
               </a:rPr>
-              <a:t> del </a:t>
+              <a:t>). </a:t>
             </a:r>
             <a:r>
               <a:rPr lang="en-US" sz="1350" dirty="0" err="1">
@@ -17655,7 +18847,7 @@
                 <a:cs typeface="Inter"/>
                 <a:sym typeface="Inter"/>
               </a:rPr>
-              <a:t>modello</a:t>
+              <a:t>Risultati</a:t>
             </a:r>
             <a:r>
               <a:rPr lang="en-US" sz="1350" dirty="0">
@@ -17679,7 +18871,7 @@
                 <a:cs typeface="Inter"/>
                 <a:sym typeface="Inter"/>
               </a:rPr>
-              <a:t>minore</a:t>
+              <a:t>simili</a:t>
             </a:r>
             <a:r>
               <a:rPr lang="en-US" sz="1350" dirty="0">
@@ -17691,31 +18883,20 @@
                 <a:cs typeface="Inter"/>
                 <a:sym typeface="Inter"/>
               </a:rPr>
-              <a:t>.</a:t>
-            </a:r>
-            <a:endParaRPr sz="1350" dirty="0">
-              <a:solidFill>
-                <a:srgbClr val="CBD5E1"/>
-              </a:solidFill>
-              <a:latin typeface="Inter"/>
-              <a:ea typeface="Inter"/>
-              <a:cs typeface="Inter"/>
-              <a:sym typeface="Inter"/>
-            </a:endParaRPr>
-          </a:p>
-          <a:p>
-            <a:pPr marL="0" marR="0" lvl="0" indent="0" algn="l" rtl="0">
-              <a:lnSpc>
-                <a:spcPct val="160000"/>
-              </a:lnSpc>
-              <a:spcBef>
-                <a:spcPts val="0"/>
-              </a:spcBef>
-              <a:spcAft>
-                <a:spcPts val="0"/>
-              </a:spcAft>
-              <a:buNone/>
-            </a:pPr>
+              <a:t> </a:t>
+            </a:r>
+            <a:r>
+              <a:rPr lang="en-US" sz="1350" dirty="0" err="1">
+                <a:solidFill>
+                  <a:srgbClr val="CBD5E1"/>
+                </a:solidFill>
+                <a:latin typeface="Inter"/>
+                <a:ea typeface="Inter"/>
+                <a:cs typeface="Inter"/>
+                <a:sym typeface="Inter"/>
+              </a:rPr>
+              <a:t>rispettando</a:t>
+            </a:r>
             <a:r>
               <a:rPr lang="en-US" sz="1350" dirty="0">
                 <a:solidFill>
@@ -17726,7 +18907,7 @@
                 <a:cs typeface="Inter"/>
                 <a:sym typeface="Inter"/>
               </a:rPr>
-              <a:t>(Circa il 64% di </a:t>
+              <a:t> I </a:t>
             </a:r>
             <a:r>
               <a:rPr lang="en-US" sz="1350" dirty="0" err="1">
@@ -17738,7 +18919,7 @@
                 <a:cs typeface="Inter"/>
                 <a:sym typeface="Inter"/>
               </a:rPr>
-              <a:t>accuratezza</a:t>
+              <a:t>filtri</a:t>
             </a:r>
             <a:r>
               <a:rPr lang="en-US" sz="1350" dirty="0">
@@ -17750,22 +18931,20 @@
                 <a:cs typeface="Inter"/>
                 <a:sym typeface="Inter"/>
               </a:rPr>
-              <a:t>).</a:t>
-            </a:r>
-          </a:p>
-          <a:p>
-            <a:pPr marL="0" marR="0" lvl="0" indent="0" algn="l" rtl="0">
-              <a:lnSpc>
-                <a:spcPct val="160000"/>
-              </a:lnSpc>
-              <a:spcBef>
-                <a:spcPts val="0"/>
-              </a:spcBef>
-              <a:spcAft>
-                <a:spcPts val="0"/>
-              </a:spcAft>
-              <a:buNone/>
-            </a:pPr>
+              <a:t>, </a:t>
+            </a:r>
+            <a:r>
+              <a:rPr lang="en-US" sz="1350" dirty="0" err="1">
+                <a:solidFill>
+                  <a:srgbClr val="CBD5E1"/>
+                </a:solidFill>
+                <a:latin typeface="Inter"/>
+                <a:ea typeface="Inter"/>
+                <a:cs typeface="Inter"/>
+                <a:sym typeface="Inter"/>
+              </a:rPr>
+              <a:t>quindi</a:t>
+            </a:r>
             <a:r>
               <a:rPr lang="en-US" sz="1350" dirty="0">
                 <a:solidFill>
@@ -17776,7 +18955,7 @@
                 <a:cs typeface="Inter"/>
                 <a:sym typeface="Inter"/>
               </a:rPr>
-              <a:t>Sono </a:t>
+              <a:t> ne </a:t>
             </a:r>
             <a:r>
               <a:rPr lang="en-US" sz="1350" dirty="0" err="1">
@@ -17788,7 +18967,7 @@
                 <a:cs typeface="Inter"/>
                 <a:sym typeface="Inter"/>
               </a:rPr>
-              <a:t>quindi</a:t>
+              <a:t>sono</a:t>
             </a:r>
             <a:r>
               <a:rPr lang="en-US" sz="1350" dirty="0">
@@ -17836,7 +19015,31 @@
                 <a:cs typeface="Inter"/>
                 <a:sym typeface="Inter"/>
               </a:rPr>
-              <a:t>scartati</a:t>
+              <a:t>adottati</a:t>
+            </a:r>
+            <a:r>
+              <a:rPr lang="en-US" sz="1350" dirty="0">
+                <a:solidFill>
+                  <a:srgbClr val="CBD5E1"/>
+                </a:solidFill>
+                <a:latin typeface="Inter"/>
+                <a:ea typeface="Inter"/>
+                <a:cs typeface="Inter"/>
+                <a:sym typeface="Inter"/>
+              </a:rPr>
+              <a:t> </a:t>
+            </a:r>
+            <a:r>
+              <a:rPr lang="en-US" sz="1350" dirty="0" err="1">
+                <a:solidFill>
+                  <a:srgbClr val="CBD5E1"/>
+                </a:solidFill>
+                <a:latin typeface="Inter"/>
+                <a:ea typeface="Inter"/>
+                <a:cs typeface="Inter"/>
+                <a:sym typeface="Inter"/>
+              </a:rPr>
+              <a:t>altri</a:t>
             </a:r>
             <a:r>
               <a:rPr lang="en-US" sz="1350" dirty="0">
@@ -17884,8 +19087,8 @@
         </p:blipFill>
         <p:spPr>
           <a:xfrm>
-            <a:off x="5111167" y="1601349"/>
-            <a:ext cx="6331896" cy="3762782"/>
+            <a:off x="5892995" y="1102555"/>
+            <a:ext cx="4426423" cy="2630438"/>
           </a:xfrm>
           <a:prstGeom prst="roundRect">
             <a:avLst>
@@ -17930,8 +19133,8 @@
         </p:nvSpPr>
         <p:spPr>
           <a:xfrm>
-            <a:off x="6421873" y="5499977"/>
-            <a:ext cx="3947118" cy="307777"/>
+            <a:off x="5679145" y="3763191"/>
+            <a:ext cx="4848935" cy="307777"/>
           </a:xfrm>
           <a:prstGeom prst="rect">
             <a:avLst/>
@@ -17954,7 +19157,297 @@
                 <a:cs typeface="Inter"/>
                 <a:sym typeface="Inter"/>
               </a:rPr>
-              <a:t>Matrice di confusion finale (senza HR e IBI)</a:t>
+              <a:t>Matrice di confusion finale con K-Fold (senza HR e IBI)</a:t>
+            </a:r>
+            <a:endParaRPr lang="it-IT" dirty="0"/>
+          </a:p>
+        </p:txBody>
+      </p:sp>
+      <p:sp>
+        <p:nvSpPr>
+          <p:cNvPr id="2" name="Google Shape;282;p27">
+            <a:extLst>
+              <a:ext uri="{FF2B5EF4-FFF2-40B4-BE49-F238E27FC236}">
+                <a16:creationId xmlns:a16="http://schemas.microsoft.com/office/drawing/2014/main" id="{898DA238-2E6C-87D9-0684-DDFF77E0BA80}"/>
+              </a:ext>
+            </a:extLst>
+          </p:cNvPr>
+          <p:cNvSpPr txBox="1"/>
+          <p:nvPr/>
+        </p:nvSpPr>
+        <p:spPr>
+          <a:xfrm>
+            <a:off x="571499" y="4600907"/>
+            <a:ext cx="4287883" cy="1661993"/>
+          </a:xfrm>
+          <a:prstGeom prst="rect">
+            <a:avLst/>
+          </a:prstGeom>
+          <a:noFill/>
+          <a:ln>
+            <a:noFill/>
+          </a:ln>
+        </p:spPr>
+        <p:txBody>
+          <a:bodyPr spcFirstLastPara="1" wrap="square" lIns="0" tIns="0" rIns="0" bIns="0" anchor="t" anchorCtr="0">
+            <a:spAutoFit/>
+          </a:bodyPr>
+          <a:lstStyle/>
+          <a:p>
+            <a:pPr marL="0" marR="0" lvl="0" indent="0" algn="l" rtl="0">
+              <a:lnSpc>
+                <a:spcPct val="160000"/>
+              </a:lnSpc>
+              <a:spcBef>
+                <a:spcPts val="0"/>
+              </a:spcBef>
+              <a:spcAft>
+                <a:spcPts val="0"/>
+              </a:spcAft>
+              <a:buNone/>
+            </a:pPr>
+            <a:r>
+              <a:rPr lang="it-IT" sz="1350" b="1" dirty="0" err="1">
+                <a:solidFill>
+                  <a:schemeClr val="lt1"/>
+                </a:solidFill>
+                <a:latin typeface="Inter"/>
+                <a:ea typeface="Inter"/>
+                <a:cs typeface="Inter"/>
+                <a:sym typeface="Inter"/>
+              </a:rPr>
+              <a:t>GentleBoost</a:t>
+            </a:r>
+            <a:r>
+              <a:rPr lang="it-IT" sz="1350" b="1" dirty="0">
+                <a:solidFill>
+                  <a:schemeClr val="lt1"/>
+                </a:solidFill>
+                <a:latin typeface="Inter"/>
+                <a:ea typeface="Inter"/>
+                <a:cs typeface="Inter"/>
+                <a:sym typeface="Inter"/>
+              </a:rPr>
+              <a:t> con LOSO (al posto di K-Fold)</a:t>
+            </a:r>
+          </a:p>
+          <a:p>
+            <a:pPr marL="0" marR="0" lvl="0" indent="0" algn="l" rtl="0">
+              <a:lnSpc>
+                <a:spcPct val="160000"/>
+              </a:lnSpc>
+              <a:spcBef>
+                <a:spcPts val="0"/>
+              </a:spcBef>
+              <a:spcAft>
+                <a:spcPts val="0"/>
+              </a:spcAft>
+              <a:buNone/>
+            </a:pPr>
+            <a:r>
+              <a:rPr lang="it-IT" sz="1350" dirty="0">
+                <a:solidFill>
+                  <a:srgbClr val="CBD5E1"/>
+                </a:solidFill>
+                <a:latin typeface="Inter"/>
+                <a:ea typeface="Inter"/>
+                <a:cs typeface="Inter"/>
+                <a:sym typeface="Inter"/>
+              </a:rPr>
+              <a:t>Sono state inoltre testate versioni con LOSO al posto di K-Fold, con </a:t>
+            </a:r>
+            <a:r>
+              <a:rPr lang="it-IT" sz="1350" dirty="0" err="1">
+                <a:solidFill>
+                  <a:srgbClr val="CBD5E1"/>
+                </a:solidFill>
+                <a:latin typeface="Inter"/>
+                <a:ea typeface="Inter"/>
+                <a:cs typeface="Inter"/>
+                <a:sym typeface="Inter"/>
+              </a:rPr>
+              <a:t>GentleBoost</a:t>
+            </a:r>
+            <a:r>
+              <a:rPr lang="it-IT" sz="1350" dirty="0">
+                <a:solidFill>
+                  <a:srgbClr val="CBD5E1"/>
+                </a:solidFill>
+                <a:latin typeface="Inter"/>
+                <a:ea typeface="Inter"/>
+                <a:cs typeface="Inter"/>
+                <a:sym typeface="Inter"/>
+              </a:rPr>
+              <a:t> al posto di </a:t>
+            </a:r>
+            <a:r>
+              <a:rPr lang="it-IT" sz="1350" dirty="0" err="1">
+                <a:solidFill>
+                  <a:srgbClr val="CBD5E1"/>
+                </a:solidFill>
+                <a:latin typeface="Inter"/>
+                <a:ea typeface="Inter"/>
+                <a:cs typeface="Inter"/>
+                <a:sym typeface="Inter"/>
+              </a:rPr>
+              <a:t>RusBoost</a:t>
+            </a:r>
+            <a:r>
+              <a:rPr lang="it-IT" sz="1350" dirty="0">
+                <a:solidFill>
+                  <a:srgbClr val="CBD5E1"/>
+                </a:solidFill>
+                <a:latin typeface="Inter"/>
+                <a:ea typeface="Inter"/>
+                <a:cs typeface="Inter"/>
+                <a:sym typeface="Inter"/>
+              </a:rPr>
+              <a:t>, che non soffrono di Data Leakage ma raggiungono risultati non al livello del Paper.</a:t>
+            </a:r>
+          </a:p>
+        </p:txBody>
+      </p:sp>
+      <p:pic>
+        <p:nvPicPr>
+          <p:cNvPr id="5" name="Immagine 4">
+            <a:extLst>
+              <a:ext uri="{FF2B5EF4-FFF2-40B4-BE49-F238E27FC236}">
+                <a16:creationId xmlns:a16="http://schemas.microsoft.com/office/drawing/2014/main" id="{45DE4265-5AFB-7A9F-7FC9-D05C9DFDE82F}"/>
+              </a:ext>
+            </a:extLst>
+          </p:cNvPr>
+          <p:cNvPicPr>
+            <a:picLocks noChangeAspect="1"/>
+          </p:cNvPicPr>
+          <p:nvPr/>
+        </p:nvPicPr>
+        <p:blipFill>
+          <a:blip r:embed="rId5"/>
+          <a:stretch>
+            <a:fillRect/>
+          </a:stretch>
+        </p:blipFill>
+        <p:spPr>
+          <a:xfrm>
+            <a:off x="5887810" y="4190707"/>
+            <a:ext cx="4431607" cy="2239777"/>
+          </a:xfrm>
+          <a:prstGeom prst="roundRect">
+            <a:avLst>
+              <a:gd name="adj" fmla="val 16667"/>
+            </a:avLst>
+          </a:prstGeom>
+          <a:ln>
+            <a:noFill/>
+          </a:ln>
+          <a:effectLst>
+            <a:outerShdw blurRad="76200" dist="38100" dir="7800000" algn="tl" rotWithShape="0">
+              <a:srgbClr val="000000">
+                <a:alpha val="40000"/>
+              </a:srgbClr>
+            </a:outerShdw>
+          </a:effectLst>
+          <a:scene3d>
+            <a:camera prst="orthographicFront"/>
+            <a:lightRig rig="contrasting" dir="t">
+              <a:rot lat="0" lon="0" rev="4200000"/>
+            </a:lightRig>
+          </a:scene3d>
+          <a:sp3d prstMaterial="plastic">
+            <a:bevelT w="381000" h="114300" prst="relaxedInset"/>
+            <a:contourClr>
+              <a:srgbClr val="969696"/>
+            </a:contourClr>
+          </a:sp3d>
+        </p:spPr>
+      </p:pic>
+      <p:sp>
+        <p:nvSpPr>
+          <p:cNvPr id="6" name="CasellaDiTesto 5">
+            <a:extLst>
+              <a:ext uri="{FF2B5EF4-FFF2-40B4-BE49-F238E27FC236}">
+                <a16:creationId xmlns:a16="http://schemas.microsoft.com/office/drawing/2014/main" id="{5EFC5A06-B844-15E6-F0F9-A6EAE5150CD7}"/>
+              </a:ext>
+            </a:extLst>
+          </p:cNvPr>
+          <p:cNvSpPr txBox="1"/>
+          <p:nvPr/>
+        </p:nvSpPr>
+        <p:spPr>
+          <a:xfrm>
+            <a:off x="6155268" y="6521703"/>
+            <a:ext cx="4223418" cy="307777"/>
+          </a:xfrm>
+          <a:prstGeom prst="rect">
+            <a:avLst/>
+          </a:prstGeom>
+          <a:noFill/>
+        </p:spPr>
+        <p:txBody>
+          <a:bodyPr wrap="square">
+            <a:spAutoFit/>
+          </a:bodyPr>
+          <a:lstStyle/>
+          <a:p>
+            <a:r>
+              <a:rPr lang="en-US" sz="1400" dirty="0">
+                <a:solidFill>
+                  <a:srgbClr val="CBD5E1"/>
+                </a:solidFill>
+                <a:latin typeface="Inter"/>
+                <a:ea typeface="Inter"/>
+                <a:cs typeface="Inter"/>
+                <a:sym typeface="Inter"/>
+              </a:rPr>
+              <a:t>Matrice di </a:t>
+            </a:r>
+            <a:r>
+              <a:rPr lang="en-US" sz="1400" dirty="0" err="1">
+                <a:solidFill>
+                  <a:srgbClr val="CBD5E1"/>
+                </a:solidFill>
+                <a:latin typeface="Inter"/>
+                <a:ea typeface="Inter"/>
+                <a:cs typeface="Inter"/>
+                <a:sym typeface="Inter"/>
+              </a:rPr>
+              <a:t>confusioe</a:t>
+            </a:r>
+            <a:r>
+              <a:rPr lang="en-US" sz="1400" dirty="0">
+                <a:solidFill>
+                  <a:srgbClr val="CBD5E1"/>
+                </a:solidFill>
+                <a:latin typeface="Inter"/>
+                <a:ea typeface="Inter"/>
+                <a:cs typeface="Inter"/>
+                <a:sym typeface="Inter"/>
+              </a:rPr>
+              <a:t> con </a:t>
+            </a:r>
+            <a:r>
+              <a:rPr lang="en-US" sz="1400" dirty="0" err="1">
+                <a:solidFill>
+                  <a:srgbClr val="CBD5E1"/>
+                </a:solidFill>
+                <a:latin typeface="Inter"/>
+                <a:ea typeface="Inter"/>
+                <a:cs typeface="Inter"/>
+                <a:sym typeface="Inter"/>
+              </a:rPr>
+              <a:t>GentleBoost</a:t>
+            </a:r>
+            <a:r>
+              <a:rPr lang="en-US" sz="1400" dirty="0">
+                <a:solidFill>
+                  <a:srgbClr val="CBD5E1"/>
+                </a:solidFill>
+                <a:latin typeface="Inter"/>
+                <a:ea typeface="Inter"/>
+                <a:cs typeface="Inter"/>
+                <a:sym typeface="Inter"/>
+              </a:rPr>
+              <a:t> e LOSO</a:t>
             </a:r>
             <a:endParaRPr lang="it-IT" dirty="0"/>
           </a:p>
@@ -18105,7 +19598,7 @@
         </p:nvSpPr>
         <p:spPr>
           <a:xfrm>
-            <a:off x="571500" y="2868066"/>
+            <a:off x="571500" y="2051637"/>
             <a:ext cx="5286300" cy="540300"/>
           </a:xfrm>
           <a:prstGeom prst="rect">
@@ -18135,7 +19628,7 @@
               <a:buNone/>
             </a:pPr>
             <a:r>
-              <a:rPr lang="en-US" sz="1350" b="0" i="0" u="none" strike="noStrike" cap="none">
+              <a:rPr lang="en-US" sz="1350" b="0" i="0" u="none" strike="noStrike" cap="none" dirty="0" err="1">
                 <a:solidFill>
                   <a:srgbClr val="CBD5E1"/>
                 </a:solidFill>
@@ -18144,10 +19637,10 @@
                 <a:cs typeface="Inter"/>
                 <a:sym typeface="Inter"/>
               </a:rPr>
-              <a:t>Sviluppare una pipeline di elaborazione dati per distinguere gli stati psicofisiologici (Stress v</a:t>
-            </a:r>
-            <a:r>
-              <a:rPr lang="en-US" sz="1350">
+              <a:t>Sviluppare</a:t>
+            </a:r>
+            <a:r>
+              <a:rPr lang="en-US" sz="1350" b="0" i="0" u="none" strike="noStrike" cap="none" dirty="0">
                 <a:solidFill>
                   <a:srgbClr val="CBD5E1"/>
                 </a:solidFill>
@@ -18156,10 +19649,190 @@
                 <a:cs typeface="Inter"/>
                 <a:sym typeface="Inter"/>
               </a:rPr>
+              <a:t> </a:t>
+            </a:r>
+            <a:r>
+              <a:rPr lang="en-US" sz="1350" b="0" i="0" u="none" strike="noStrike" cap="none" dirty="0" err="1">
+                <a:solidFill>
+                  <a:srgbClr val="CBD5E1"/>
+                </a:solidFill>
+                <a:latin typeface="Inter"/>
+                <a:ea typeface="Inter"/>
+                <a:cs typeface="Inter"/>
+                <a:sym typeface="Inter"/>
+              </a:rPr>
+              <a:t>una</a:t>
+            </a:r>
+            <a:r>
+              <a:rPr lang="en-US" sz="1350" b="0" i="0" u="none" strike="noStrike" cap="none" dirty="0">
+                <a:solidFill>
+                  <a:srgbClr val="CBD5E1"/>
+                </a:solidFill>
+                <a:latin typeface="Inter"/>
+                <a:ea typeface="Inter"/>
+                <a:cs typeface="Inter"/>
+                <a:sym typeface="Inter"/>
+              </a:rPr>
+              <a:t> pipeline di </a:t>
+            </a:r>
+            <a:r>
+              <a:rPr lang="en-US" sz="1350" b="0" i="0" u="none" strike="noStrike" cap="none" dirty="0" err="1">
+                <a:solidFill>
+                  <a:srgbClr val="CBD5E1"/>
+                </a:solidFill>
+                <a:latin typeface="Inter"/>
+                <a:ea typeface="Inter"/>
+                <a:cs typeface="Inter"/>
+                <a:sym typeface="Inter"/>
+              </a:rPr>
+              <a:t>elaborazione</a:t>
+            </a:r>
+            <a:r>
+              <a:rPr lang="en-US" sz="1350" b="0" i="0" u="none" strike="noStrike" cap="none" dirty="0">
+                <a:solidFill>
+                  <a:srgbClr val="CBD5E1"/>
+                </a:solidFill>
+                <a:latin typeface="Inter"/>
+                <a:ea typeface="Inter"/>
+                <a:cs typeface="Inter"/>
+                <a:sym typeface="Inter"/>
+              </a:rPr>
+              <a:t> </a:t>
+            </a:r>
+            <a:r>
+              <a:rPr lang="en-US" sz="1350" b="0" i="0" u="none" strike="noStrike" cap="none" dirty="0" err="1">
+                <a:solidFill>
+                  <a:srgbClr val="CBD5E1"/>
+                </a:solidFill>
+                <a:latin typeface="Inter"/>
+                <a:ea typeface="Inter"/>
+                <a:cs typeface="Inter"/>
+                <a:sym typeface="Inter"/>
+              </a:rPr>
+              <a:t>dati</a:t>
+            </a:r>
+            <a:r>
+              <a:rPr lang="en-US" sz="1350" b="0" i="0" u="none" strike="noStrike" cap="none" dirty="0">
+                <a:solidFill>
+                  <a:srgbClr val="CBD5E1"/>
+                </a:solidFill>
+                <a:latin typeface="Inter"/>
+                <a:ea typeface="Inter"/>
+                <a:cs typeface="Inter"/>
+                <a:sym typeface="Inter"/>
+              </a:rPr>
+              <a:t> per </a:t>
+            </a:r>
+            <a:r>
+              <a:rPr lang="en-US" sz="1350" b="0" i="0" u="none" strike="noStrike" cap="none" dirty="0" err="1">
+                <a:solidFill>
+                  <a:srgbClr val="CBD5E1"/>
+                </a:solidFill>
+                <a:latin typeface="Inter"/>
+                <a:ea typeface="Inter"/>
+                <a:cs typeface="Inter"/>
+                <a:sym typeface="Inter"/>
+              </a:rPr>
+              <a:t>distinguere</a:t>
+            </a:r>
+            <a:r>
+              <a:rPr lang="en-US" sz="1350" b="0" i="0" u="none" strike="noStrike" cap="none" dirty="0">
+                <a:solidFill>
+                  <a:srgbClr val="CBD5E1"/>
+                </a:solidFill>
+                <a:latin typeface="Inter"/>
+                <a:ea typeface="Inter"/>
+                <a:cs typeface="Inter"/>
+                <a:sym typeface="Inter"/>
+              </a:rPr>
+              <a:t> </a:t>
+            </a:r>
+            <a:r>
+              <a:rPr lang="en-US" sz="1350" b="0" i="0" u="none" strike="noStrike" cap="none" dirty="0" err="1">
+                <a:solidFill>
+                  <a:srgbClr val="CBD5E1"/>
+                </a:solidFill>
+                <a:latin typeface="Inter"/>
+                <a:ea typeface="Inter"/>
+                <a:cs typeface="Inter"/>
+                <a:sym typeface="Inter"/>
+              </a:rPr>
+              <a:t>gli</a:t>
+            </a:r>
+            <a:r>
+              <a:rPr lang="en-US" sz="1350" b="0" i="0" u="none" strike="noStrike" cap="none" dirty="0">
+                <a:solidFill>
+                  <a:srgbClr val="CBD5E1"/>
+                </a:solidFill>
+                <a:latin typeface="Inter"/>
+                <a:ea typeface="Inter"/>
+                <a:cs typeface="Inter"/>
+                <a:sym typeface="Inter"/>
+              </a:rPr>
+              <a:t> </a:t>
+            </a:r>
+            <a:r>
+              <a:rPr lang="en-US" sz="1350" b="0" i="0" u="none" strike="noStrike" cap="none" dirty="0" err="1">
+                <a:solidFill>
+                  <a:srgbClr val="CBD5E1"/>
+                </a:solidFill>
+                <a:latin typeface="Inter"/>
+                <a:ea typeface="Inter"/>
+                <a:cs typeface="Inter"/>
+                <a:sym typeface="Inter"/>
+              </a:rPr>
+              <a:t>stati</a:t>
+            </a:r>
+            <a:r>
+              <a:rPr lang="en-US" sz="1350" b="0" i="0" u="none" strike="noStrike" cap="none" dirty="0">
+                <a:solidFill>
+                  <a:srgbClr val="CBD5E1"/>
+                </a:solidFill>
+                <a:latin typeface="Inter"/>
+                <a:ea typeface="Inter"/>
+                <a:cs typeface="Inter"/>
+                <a:sym typeface="Inter"/>
+              </a:rPr>
+              <a:t> </a:t>
+            </a:r>
+            <a:r>
+              <a:rPr lang="en-US" sz="1350" b="0" i="0" u="none" strike="noStrike" cap="none" dirty="0" err="1">
+                <a:solidFill>
+                  <a:srgbClr val="CBD5E1"/>
+                </a:solidFill>
+                <a:latin typeface="Inter"/>
+                <a:ea typeface="Inter"/>
+                <a:cs typeface="Inter"/>
+                <a:sym typeface="Inter"/>
+              </a:rPr>
+              <a:t>psicofisiologici</a:t>
+            </a:r>
+            <a:r>
+              <a:rPr lang="en-US" sz="1350" b="0" i="0" u="none" strike="noStrike" cap="none" dirty="0">
+                <a:solidFill>
+                  <a:srgbClr val="CBD5E1"/>
+                </a:solidFill>
+                <a:latin typeface="Inter"/>
+                <a:ea typeface="Inter"/>
+                <a:cs typeface="Inter"/>
+                <a:sym typeface="Inter"/>
+              </a:rPr>
+              <a:t> (Stress v</a:t>
+            </a:r>
+            <a:r>
+              <a:rPr lang="en-US" sz="1350" dirty="0">
+                <a:solidFill>
+                  <a:srgbClr val="CBD5E1"/>
+                </a:solidFill>
+                <a:latin typeface="Inter"/>
+                <a:ea typeface="Inter"/>
+                <a:cs typeface="Inter"/>
+                <a:sym typeface="Inter"/>
+              </a:rPr>
               <a:t>s</a:t>
             </a:r>
             <a:r>
-              <a:rPr lang="en-US" sz="1350" b="0" i="0" u="none" strike="noStrike" cap="none">
+              <a:rPr lang="en-US" sz="1350" b="0" i="0" u="none" strike="noStrike" cap="none" dirty="0">
                 <a:solidFill>
                   <a:srgbClr val="CBD5E1"/>
                 </a:solidFill>
@@ -18168,9 +19841,33 @@
                 <a:cs typeface="Inter"/>
                 <a:sym typeface="Inter"/>
               </a:rPr>
-              <a:t> Riposo).</a:t>
-            </a:r>
-            <a:endParaRPr/>
+              <a:t> </a:t>
+            </a:r>
+            <a:r>
+              <a:rPr lang="en-US" sz="1350" b="0" i="0" u="none" strike="noStrike" cap="none" dirty="0" err="1">
+                <a:solidFill>
+                  <a:srgbClr val="CBD5E1"/>
+                </a:solidFill>
+                <a:latin typeface="Inter"/>
+                <a:ea typeface="Inter"/>
+                <a:cs typeface="Inter"/>
+                <a:sym typeface="Inter"/>
+              </a:rPr>
+              <a:t>Riposo</a:t>
+            </a:r>
+            <a:r>
+              <a:rPr lang="en-US" sz="1350" b="0" i="0" u="none" strike="noStrike" cap="none" dirty="0">
+                <a:solidFill>
+                  <a:srgbClr val="CBD5E1"/>
+                </a:solidFill>
+                <a:latin typeface="Inter"/>
+                <a:ea typeface="Inter"/>
+                <a:cs typeface="Inter"/>
+                <a:sym typeface="Inter"/>
+              </a:rPr>
+              <a:t>).</a:t>
+            </a:r>
+            <a:endParaRPr dirty="0"/>
           </a:p>
         </p:txBody>
       </p:sp>
@@ -18182,7 +19879,7 @@
         </p:nvSpPr>
         <p:spPr>
           <a:xfrm>
-            <a:off x="571500" y="3559522"/>
+            <a:off x="571500" y="2743093"/>
             <a:ext cx="5286375" cy="997196"/>
           </a:xfrm>
           <a:prstGeom prst="rect">
@@ -18547,7 +20244,7 @@
         </p:nvSpPr>
         <p:spPr>
           <a:xfrm>
-            <a:off x="571500" y="4707874"/>
+            <a:off x="571500" y="3891445"/>
             <a:ext cx="5286300" cy="540300"/>
           </a:xfrm>
           <a:prstGeom prst="rect">
@@ -18933,7 +20630,7 @@
               <a:buNone/>
             </a:pPr>
             <a:r>
-              <a:rPr lang="en-US" sz="2100" b="0" i="0" u="none" strike="noStrike" cap="none">
+              <a:rPr lang="en-US" sz="2100" b="0" i="0" u="none" strike="noStrike" cap="none" dirty="0" err="1">
                 <a:solidFill>
                   <a:srgbClr val="38BDF8"/>
                 </a:solidFill>
@@ -18942,10 +20639,10 @@
                 <a:cs typeface="Poppins Medium"/>
                 <a:sym typeface="Poppins Medium"/>
               </a:rPr>
-              <a:t>Riferimento </a:t>
-            </a:r>
-            <a:r>
-              <a:rPr lang="en-US" sz="2100">
+              <a:t>Riferimento</a:t>
+            </a:r>
+            <a:r>
+              <a:rPr lang="en-US" sz="2100" b="0" i="0" u="none" strike="noStrike" cap="none" dirty="0">
                 <a:solidFill>
                   <a:srgbClr val="38BDF8"/>
                 </a:solidFill>
@@ -18954,9 +20651,21 @@
                 <a:cs typeface="Poppins Medium"/>
                 <a:sym typeface="Poppins Medium"/>
               </a:rPr>
+              <a:t> </a:t>
+            </a:r>
+            <a:r>
+              <a:rPr lang="en-US" sz="2100" dirty="0">
+                <a:solidFill>
+                  <a:srgbClr val="38BDF8"/>
+                </a:solidFill>
+                <a:latin typeface="Poppins Medium"/>
+                <a:ea typeface="Poppins Medium"/>
+                <a:cs typeface="Poppins Medium"/>
+                <a:sym typeface="Poppins Medium"/>
+              </a:rPr>
               <a:t>(Baseline)</a:t>
             </a:r>
-            <a:endParaRPr/>
+            <a:endParaRPr dirty="0"/>
           </a:p>
         </p:txBody>
       </p:sp>
@@ -18969,7 +20678,7 @@
         <p:spPr>
           <a:xfrm>
             <a:off x="962025" y="3210966"/>
-            <a:ext cx="4505400" cy="1329595"/>
+            <a:ext cx="4505400" cy="1994392"/>
           </a:xfrm>
           <a:prstGeom prst="rect">
             <a:avLst/>
@@ -19142,6 +20851,90 @@
               <a:t> (Campanella et al., 2023). </a:t>
             </a:r>
             <a:r>
+              <a:rPr lang="en-US" sz="1350" dirty="0">
+                <a:solidFill>
+                  <a:srgbClr val="CBD5E1"/>
+                </a:solidFill>
+                <a:latin typeface="Inter"/>
+                <a:ea typeface="Inter"/>
+                <a:cs typeface="Inter"/>
+                <a:sym typeface="Inter"/>
+              </a:rPr>
+              <a:t>Nel paper </a:t>
+            </a:r>
+            <a:r>
+              <a:rPr lang="en-US" sz="1350" dirty="0" err="1">
+                <a:solidFill>
+                  <a:srgbClr val="CBD5E1"/>
+                </a:solidFill>
+                <a:latin typeface="Inter"/>
+                <a:ea typeface="Inter"/>
+                <a:cs typeface="Inter"/>
+                <a:sym typeface="Inter"/>
+              </a:rPr>
+              <a:t>viene</a:t>
+            </a:r>
+            <a:r>
+              <a:rPr lang="en-US" sz="1350" dirty="0">
+                <a:solidFill>
+                  <a:srgbClr val="CBD5E1"/>
+                </a:solidFill>
+                <a:latin typeface="Inter"/>
+                <a:ea typeface="Inter"/>
+                <a:cs typeface="Inter"/>
+                <a:sym typeface="Inter"/>
+              </a:rPr>
+              <a:t> </a:t>
+            </a:r>
+            <a:r>
+              <a:rPr lang="en-US" sz="1350" dirty="0" err="1">
+                <a:solidFill>
+                  <a:srgbClr val="CBD5E1"/>
+                </a:solidFill>
+                <a:latin typeface="Inter"/>
+                <a:ea typeface="Inter"/>
+                <a:cs typeface="Inter"/>
+                <a:sym typeface="Inter"/>
+              </a:rPr>
+              <a:t>proposto</a:t>
+            </a:r>
+            <a:r>
+              <a:rPr lang="en-US" sz="1350" dirty="0">
+                <a:solidFill>
+                  <a:srgbClr val="CBD5E1"/>
+                </a:solidFill>
+                <a:latin typeface="Inter"/>
+                <a:ea typeface="Inter"/>
+                <a:cs typeface="Inter"/>
+                <a:sym typeface="Inter"/>
+              </a:rPr>
+              <a:t> </a:t>
+            </a:r>
+            <a:r>
+              <a:rPr lang="en-US" sz="1350" dirty="0" err="1">
+                <a:solidFill>
+                  <a:srgbClr val="CBD5E1"/>
+                </a:solidFill>
+                <a:latin typeface="Inter"/>
+                <a:ea typeface="Inter"/>
+                <a:cs typeface="Inter"/>
+                <a:sym typeface="Inter"/>
+              </a:rPr>
+              <a:t>l’utilizzo</a:t>
+            </a:r>
+            <a:r>
+              <a:rPr lang="en-US" sz="1350" dirty="0">
+                <a:solidFill>
+                  <a:srgbClr val="CBD5E1"/>
+                </a:solidFill>
+                <a:latin typeface="Inter"/>
+                <a:ea typeface="Inter"/>
+                <a:cs typeface="Inter"/>
+                <a:sym typeface="Inter"/>
+              </a:rPr>
+              <a:t> di </a:t>
+            </a:r>
+            <a:r>
               <a:rPr lang="en-US" sz="1350" b="0" i="0" u="none" strike="noStrike" cap="none" dirty="0" err="1">
                 <a:solidFill>
                   <a:srgbClr val="CBD5E1"/>
@@ -19151,7 +20944,7 @@
                 <a:cs typeface="Inter"/>
                 <a:sym typeface="Inter"/>
               </a:rPr>
-              <a:t>Gli</a:t>
+              <a:t>una</a:t>
             </a:r>
             <a:r>
               <a:rPr lang="en-US" sz="1350" b="0" i="0" u="none" strike="noStrike" cap="none" dirty="0">
@@ -19163,9 +20956,69 @@
                 <a:cs typeface="Inter"/>
                 <a:sym typeface="Inter"/>
               </a:rPr>
+              <a:t> pipeline </a:t>
+            </a:r>
+            <a:r>
+              <a:rPr lang="en-US" sz="1350" dirty="0" err="1">
+                <a:solidFill>
+                  <a:srgbClr val="CBD5E1"/>
+                </a:solidFill>
+                <a:latin typeface="Inter"/>
+                <a:ea typeface="Inter"/>
+                <a:cs typeface="Inter"/>
+                <a:sym typeface="Inter"/>
+              </a:rPr>
+              <a:t>utilizzando</a:t>
+            </a:r>
+            <a:r>
+              <a:rPr lang="en-US" sz="1350" dirty="0">
+                <a:solidFill>
+                  <a:srgbClr val="CBD5E1"/>
+                </a:solidFill>
+                <a:latin typeface="Inter"/>
+                <a:ea typeface="Inter"/>
+                <a:cs typeface="Inter"/>
+                <a:sym typeface="Inter"/>
+              </a:rPr>
               <a:t> </a:t>
             </a:r>
             <a:r>
+              <a:rPr lang="en-US" sz="1350" dirty="0" err="1">
+                <a:solidFill>
+                  <a:srgbClr val="CBD5E1"/>
+                </a:solidFill>
+                <a:latin typeface="Inter"/>
+                <a:ea typeface="Inter"/>
+                <a:cs typeface="Inter"/>
+                <a:sym typeface="Inter"/>
+              </a:rPr>
+              <a:t>solamente</a:t>
+            </a:r>
+            <a:r>
+              <a:rPr lang="en-US" sz="1350" dirty="0">
+                <a:solidFill>
+                  <a:srgbClr val="CBD5E1"/>
+                </a:solidFill>
+                <a:latin typeface="Inter"/>
+                <a:ea typeface="Inter"/>
+                <a:cs typeface="Inter"/>
+                <a:sym typeface="Inter"/>
+              </a:rPr>
+              <a:t> </a:t>
+            </a:r>
+            <a:r>
+              <a:rPr lang="en-US" sz="1350" b="0" i="0" u="none" strike="noStrike" cap="none" dirty="0">
+                <a:solidFill>
+                  <a:srgbClr val="CBD5E1"/>
+                </a:solidFill>
+                <a:latin typeface="Inter"/>
+                <a:ea typeface="Inter"/>
+                <a:cs typeface="Inter"/>
+                <a:sym typeface="Inter"/>
+              </a:rPr>
+              <a:t>due </a:t>
+            </a:r>
+            <a:r>
               <a:rPr lang="en-US" sz="1350" b="0" i="0" u="none" strike="noStrike" cap="none" dirty="0" err="1">
                 <a:solidFill>
                   <a:srgbClr val="CBD5E1"/>
@@ -19175,7 +21028,7 @@
                 <a:cs typeface="Inter"/>
                 <a:sym typeface="Inter"/>
               </a:rPr>
-              <a:t>autori</a:t>
+              <a:t>segnali</a:t>
             </a:r>
             <a:r>
               <a:rPr lang="en-US" sz="1350" b="0" i="0" u="none" strike="noStrike" cap="none" dirty="0">
@@ -19187,6 +21040,30 @@
                 <a:cs typeface="Inter"/>
                 <a:sym typeface="Inter"/>
               </a:rPr>
+              <a:t> (EDA e PPG). La loro </a:t>
+            </a:r>
+            <a:r>
+              <a:rPr lang="en-US" sz="1350" b="0" i="0" u="none" strike="noStrike" cap="none" dirty="0" err="1">
+                <a:solidFill>
+                  <a:srgbClr val="CBD5E1"/>
+                </a:solidFill>
+                <a:latin typeface="Inter"/>
+                <a:ea typeface="Inter"/>
+                <a:cs typeface="Inter"/>
+                <a:sym typeface="Inter"/>
+              </a:rPr>
+              <a:t>accuratezza</a:t>
+            </a:r>
+            <a:r>
+              <a:rPr lang="en-US" sz="1350" b="0" i="0" u="none" strike="noStrike" cap="none" dirty="0">
+                <a:solidFill>
+                  <a:srgbClr val="CBD5E1"/>
+                </a:solidFill>
+                <a:latin typeface="Inter"/>
+                <a:ea typeface="Inter"/>
+                <a:cs typeface="Inter"/>
+                <a:sym typeface="Inter"/>
+              </a:rPr>
               <a:t> </a:t>
             </a:r>
             <a:r>
@@ -19199,7 +21076,7 @@
                 <a:cs typeface="Inter"/>
                 <a:sym typeface="Inter"/>
               </a:rPr>
-              <a:t>propongono</a:t>
+              <a:t>massima</a:t>
             </a:r>
             <a:r>
               <a:rPr lang="en-US" sz="1350" b="0" i="0" u="none" strike="noStrike" cap="none" dirty="0">
@@ -19223,7 +21100,7 @@
                 <a:cs typeface="Inter"/>
                 <a:sym typeface="Inter"/>
               </a:rPr>
-              <a:t>una</a:t>
+              <a:t>dichiarata</a:t>
             </a:r>
             <a:r>
               <a:rPr lang="en-US" sz="1350" b="0" i="0" u="none" strike="noStrike" cap="none" dirty="0">
@@ -19235,10 +21112,10 @@
                 <a:cs typeface="Inter"/>
                 <a:sym typeface="Inter"/>
               </a:rPr>
-              <a:t> pipeline </a:t>
-            </a:r>
-            <a:r>
-              <a:rPr lang="en-US" sz="1350" dirty="0" err="1">
+              <a:t> è </a:t>
+            </a:r>
+            <a:r>
+              <a:rPr lang="en-US" sz="1350" b="0" i="0" u="none" strike="noStrike" cap="none" dirty="0" err="1">
                 <a:solidFill>
                   <a:srgbClr val="CBD5E1"/>
                 </a:solidFill>
@@ -19247,10 +21124,10 @@
                 <a:cs typeface="Inter"/>
                 <a:sym typeface="Inter"/>
               </a:rPr>
-              <a:t>utilizzando</a:t>
-            </a:r>
-            <a:r>
-              <a:rPr lang="en-US" sz="1350" dirty="0">
+              <a:t>stata</a:t>
+            </a:r>
+            <a:r>
+              <a:rPr lang="en-US" sz="1350" b="0" i="0" u="none" strike="noStrike" cap="none" dirty="0">
                 <a:solidFill>
                   <a:srgbClr val="CBD5E1"/>
                 </a:solidFill>
@@ -19259,10 +21136,10 @@
                 <a:cs typeface="Inter"/>
                 <a:sym typeface="Inter"/>
               </a:rPr>
-              <a:t> </a:t>
-            </a:r>
-            <a:r>
-              <a:rPr lang="en-US" sz="1350" dirty="0" err="1">
+              <a:t> del 76,5% (</a:t>
+            </a:r>
+            <a:r>
+              <a:rPr lang="en-US" sz="1350" b="0" i="0" u="none" strike="noStrike" cap="none" dirty="0" err="1">
                 <a:solidFill>
                   <a:srgbClr val="CBD5E1"/>
                 </a:solidFill>
@@ -19271,252 +21148,7 @@
                 <a:cs typeface="Inter"/>
                 <a:sym typeface="Inter"/>
               </a:rPr>
-              <a:t>solamente</a:t>
-            </a:r>
-            <a:r>
-              <a:rPr lang="en-US" sz="1350" dirty="0">
-                <a:solidFill>
-                  <a:srgbClr val="CBD5E1"/>
-                </a:solidFill>
-                <a:latin typeface="Inter"/>
-                <a:ea typeface="Inter"/>
-                <a:cs typeface="Inter"/>
-                <a:sym typeface="Inter"/>
-              </a:rPr>
-              <a:t> </a:t>
-            </a:r>
-            <a:r>
-              <a:rPr lang="en-US" sz="1350" b="0" i="0" u="none" strike="noStrike" cap="none" dirty="0">
-                <a:solidFill>
-                  <a:srgbClr val="CBD5E1"/>
-                </a:solidFill>
-                <a:latin typeface="Inter"/>
-                <a:ea typeface="Inter"/>
-                <a:cs typeface="Inter"/>
-                <a:sym typeface="Inter"/>
-              </a:rPr>
-              <a:t>due </a:t>
-            </a:r>
-            <a:r>
-              <a:rPr lang="en-US" sz="1350" b="0" i="0" u="none" strike="noStrike" cap="none" dirty="0" err="1">
-                <a:solidFill>
-                  <a:srgbClr val="CBD5E1"/>
-                </a:solidFill>
-                <a:latin typeface="Inter"/>
-                <a:ea typeface="Inter"/>
-                <a:cs typeface="Inter"/>
-                <a:sym typeface="Inter"/>
-              </a:rPr>
-              <a:t>segnali</a:t>
-            </a:r>
-            <a:r>
-              <a:rPr lang="en-US" sz="1350" b="0" i="0" u="none" strike="noStrike" cap="none" dirty="0">
-                <a:solidFill>
-                  <a:srgbClr val="CBD5E1"/>
-                </a:solidFill>
-                <a:latin typeface="Inter"/>
-                <a:ea typeface="Inter"/>
-                <a:cs typeface="Inter"/>
-                <a:sym typeface="Inter"/>
-              </a:rPr>
-              <a:t> (EDA e PPG).</a:t>
-            </a:r>
-            <a:endParaRPr dirty="0"/>
-          </a:p>
-        </p:txBody>
-      </p:sp>
-      <p:sp>
-        <p:nvSpPr>
-          <p:cNvPr id="106" name="Google Shape;106;p15"/>
-          <p:cNvSpPr txBox="1"/>
-          <p:nvPr/>
-        </p:nvSpPr>
-        <p:spPr>
-          <a:xfrm>
-            <a:off x="962025" y="4538275"/>
-            <a:ext cx="4505400" cy="664797"/>
-          </a:xfrm>
-          <a:prstGeom prst="rect">
-            <a:avLst/>
-          </a:prstGeom>
-          <a:noFill/>
-          <a:ln>
-            <a:noFill/>
-          </a:ln>
-        </p:spPr>
-        <p:txBody>
-          <a:bodyPr spcFirstLastPara="1" wrap="square" lIns="0" tIns="0" rIns="0" bIns="0" anchor="t" anchorCtr="0">
-            <a:spAutoFit/>
-          </a:bodyPr>
-          <a:lstStyle/>
-          <a:p>
-            <a:pPr marL="0" marR="0" lvl="0" indent="0" algn="l" rtl="0">
-              <a:lnSpc>
-                <a:spcPct val="160000"/>
-              </a:lnSpc>
-              <a:spcBef>
-                <a:spcPts val="0"/>
-              </a:spcBef>
-              <a:spcAft>
-                <a:spcPts val="0"/>
-              </a:spcAft>
-              <a:buNone/>
-            </a:pPr>
-            <a:r>
-              <a:rPr lang="en-US" sz="1350" dirty="0">
-                <a:solidFill>
-                  <a:srgbClr val="CBD5E1"/>
-                </a:solidFill>
-                <a:latin typeface="Inter"/>
-                <a:ea typeface="Inter"/>
-                <a:cs typeface="Inter"/>
-                <a:sym typeface="Inter"/>
-              </a:rPr>
-              <a:t>La loro </a:t>
-            </a:r>
-            <a:r>
-              <a:rPr lang="en-US" sz="1350" dirty="0" err="1">
-                <a:solidFill>
-                  <a:srgbClr val="CBD5E1"/>
-                </a:solidFill>
-                <a:latin typeface="Inter"/>
-                <a:ea typeface="Inter"/>
-                <a:cs typeface="Inter"/>
-                <a:sym typeface="Inter"/>
-              </a:rPr>
-              <a:t>ac</a:t>
-            </a:r>
-            <a:r>
-              <a:rPr lang="en-US" sz="1350" b="0" i="0" u="none" strike="noStrike" cap="none" dirty="0" err="1">
-                <a:solidFill>
-                  <a:srgbClr val="CBD5E1"/>
-                </a:solidFill>
-                <a:latin typeface="Inter"/>
-                <a:ea typeface="Inter"/>
-                <a:cs typeface="Inter"/>
-                <a:sym typeface="Inter"/>
-              </a:rPr>
-              <a:t>curatezza</a:t>
-            </a:r>
-            <a:r>
-              <a:rPr lang="en-US" sz="1350" b="0" i="0" u="none" strike="noStrike" cap="none" dirty="0">
-                <a:solidFill>
-                  <a:srgbClr val="CBD5E1"/>
-                </a:solidFill>
-                <a:latin typeface="Inter"/>
-                <a:ea typeface="Inter"/>
-                <a:cs typeface="Inter"/>
-                <a:sym typeface="Inter"/>
-              </a:rPr>
-              <a:t> </a:t>
-            </a:r>
-            <a:r>
-              <a:rPr lang="en-US" sz="1350" b="0" i="0" u="none" strike="noStrike" cap="none" dirty="0" err="1">
-                <a:solidFill>
-                  <a:srgbClr val="CBD5E1"/>
-                </a:solidFill>
-                <a:latin typeface="Inter"/>
-                <a:ea typeface="Inter"/>
-                <a:cs typeface="Inter"/>
-                <a:sym typeface="Inter"/>
-              </a:rPr>
-              <a:t>massima</a:t>
-            </a:r>
-            <a:r>
-              <a:rPr lang="en-US" sz="1350" b="0" i="0" u="none" strike="noStrike" cap="none" dirty="0">
-                <a:solidFill>
-                  <a:srgbClr val="CBD5E1"/>
-                </a:solidFill>
-                <a:latin typeface="Inter"/>
-                <a:ea typeface="Inter"/>
-                <a:cs typeface="Inter"/>
-                <a:sym typeface="Inter"/>
-              </a:rPr>
-              <a:t> </a:t>
-            </a:r>
-            <a:r>
-              <a:rPr lang="en-US" sz="1350" b="0" i="0" u="none" strike="noStrike" cap="none" dirty="0" err="1">
-                <a:solidFill>
-                  <a:srgbClr val="CBD5E1"/>
-                </a:solidFill>
-                <a:latin typeface="Inter"/>
-                <a:ea typeface="Inter"/>
-                <a:cs typeface="Inter"/>
-                <a:sym typeface="Inter"/>
-              </a:rPr>
-              <a:t>dichiarata</a:t>
-            </a:r>
-            <a:r>
-              <a:rPr lang="en-US" sz="1350" b="0" i="0" u="none" strike="noStrike" cap="none" dirty="0">
-                <a:solidFill>
-                  <a:srgbClr val="CBD5E1"/>
-                </a:solidFill>
-                <a:latin typeface="Inter"/>
-                <a:ea typeface="Inter"/>
-                <a:cs typeface="Inter"/>
-                <a:sym typeface="Inter"/>
-              </a:rPr>
-              <a:t> è </a:t>
-            </a:r>
-            <a:r>
-              <a:rPr lang="en-US" sz="1350" b="0" i="0" u="none" strike="noStrike" cap="none" dirty="0" err="1">
-                <a:solidFill>
-                  <a:srgbClr val="CBD5E1"/>
-                </a:solidFill>
-                <a:latin typeface="Inter"/>
-                <a:ea typeface="Inter"/>
-                <a:cs typeface="Inter"/>
-                <a:sym typeface="Inter"/>
-              </a:rPr>
-              <a:t>stata</a:t>
-            </a:r>
-            <a:r>
-              <a:rPr lang="en-US" sz="1350" b="0" i="0" u="none" strike="noStrike" cap="none" dirty="0">
-                <a:solidFill>
-                  <a:srgbClr val="CBD5E1"/>
-                </a:solidFill>
-                <a:latin typeface="Inter"/>
-                <a:ea typeface="Inter"/>
-                <a:cs typeface="Inter"/>
-                <a:sym typeface="Inter"/>
-              </a:rPr>
-              <a:t> del </a:t>
-            </a:r>
-            <a:r>
-              <a:rPr lang="en-US" sz="1350" b="1" i="0" u="none" strike="noStrike" cap="none" dirty="0">
-                <a:solidFill>
-                  <a:srgbClr val="CBD5E1"/>
-                </a:solidFill>
-                <a:latin typeface="Inter"/>
-                <a:ea typeface="Inter"/>
-                <a:cs typeface="Inter"/>
-                <a:sym typeface="Inter"/>
-              </a:rPr>
-              <a:t>76.5%</a:t>
-            </a:r>
-            <a:r>
-              <a:rPr lang="en-US" sz="1350" b="0" i="0" u="none" strike="noStrike" cap="none" dirty="0">
-                <a:solidFill>
-                  <a:srgbClr val="CBD5E1"/>
-                </a:solidFill>
-                <a:latin typeface="Inter"/>
-                <a:ea typeface="Inter"/>
-                <a:cs typeface="Inter"/>
-                <a:sym typeface="Inter"/>
-              </a:rPr>
-              <a:t> (</a:t>
-            </a:r>
-            <a:r>
-              <a:rPr lang="en-US" sz="1350" b="0" i="0" u="none" strike="noStrike" cap="none" dirty="0" err="1">
-                <a:solidFill>
-                  <a:srgbClr val="CBD5E1"/>
-                </a:solidFill>
-                <a:latin typeface="Inter"/>
-                <a:ea typeface="Inter"/>
-                <a:cs typeface="Inter"/>
-                <a:sym typeface="Inter"/>
-              </a:rPr>
-              <a:t>utilizzando</a:t>
+              <a:t>Utilizzando</a:t>
             </a:r>
             <a:r>
               <a:rPr lang="en-US" sz="1350" b="0" i="0" u="none" strike="noStrike" cap="none" dirty="0">
@@ -19835,91 +21467,7 @@
                 <a:cs typeface="Inter"/>
                 <a:sym typeface="Inter"/>
               </a:rPr>
-              <a:t>), </a:t>
-            </a:r>
-            <a:r>
-              <a:rPr lang="en-US" sz="1350" b="0" i="0" u="none" strike="noStrike" cap="none" dirty="0" err="1">
-                <a:solidFill>
-                  <a:srgbClr val="CBD5E1"/>
-                </a:solidFill>
-                <a:latin typeface="Inter"/>
-                <a:ea typeface="Inter"/>
-                <a:cs typeface="Inter"/>
-                <a:sym typeface="Inter"/>
-              </a:rPr>
-              <a:t>rendendo</a:t>
-            </a:r>
-            <a:r>
-              <a:rPr lang="en-US" sz="1350" b="0" i="0" u="none" strike="noStrike" cap="none" dirty="0">
-                <a:solidFill>
-                  <a:srgbClr val="CBD5E1"/>
-                </a:solidFill>
-                <a:latin typeface="Inter"/>
-                <a:ea typeface="Inter"/>
-                <a:cs typeface="Inter"/>
-                <a:sym typeface="Inter"/>
-              </a:rPr>
-              <a:t> </a:t>
-            </a:r>
-            <a:r>
-              <a:rPr lang="en-US" sz="1350" dirty="0">
-                <a:solidFill>
-                  <a:srgbClr val="CBD5E1"/>
-                </a:solidFill>
-                <a:latin typeface="Inter"/>
-                <a:ea typeface="Inter"/>
-                <a:cs typeface="Inter"/>
-                <a:sym typeface="Inter"/>
-              </a:rPr>
-              <a:t>le </a:t>
-            </a:r>
-            <a:r>
-              <a:rPr lang="en-US" sz="1350" dirty="0" err="1">
-                <a:solidFill>
-                  <a:srgbClr val="CBD5E1"/>
-                </a:solidFill>
-                <a:latin typeface="Inter"/>
-                <a:ea typeface="Inter"/>
-                <a:cs typeface="Inter"/>
-                <a:sym typeface="Inter"/>
-              </a:rPr>
-              <a:t>analisi</a:t>
-            </a:r>
-            <a:r>
-              <a:rPr lang="en-US" sz="1350" dirty="0">
-                <a:solidFill>
-                  <a:srgbClr val="CBD5E1"/>
-                </a:solidFill>
-                <a:latin typeface="Inter"/>
-                <a:ea typeface="Inter"/>
-                <a:cs typeface="Inter"/>
-                <a:sym typeface="Inter"/>
-              </a:rPr>
-              <a:t> </a:t>
-            </a:r>
-            <a:r>
-              <a:rPr lang="en-US" sz="1350" b="0" i="0" u="none" strike="noStrike" cap="none" dirty="0" err="1">
-                <a:solidFill>
-                  <a:srgbClr val="CBD5E1"/>
-                </a:solidFill>
-                <a:latin typeface="Inter"/>
-                <a:ea typeface="Inter"/>
-                <a:cs typeface="Inter"/>
-                <a:sym typeface="Inter"/>
-              </a:rPr>
-              <a:t>meno</a:t>
-            </a:r>
-            <a:r>
-              <a:rPr lang="en-US" sz="1350" b="0" i="0" u="none" strike="noStrike" cap="none" dirty="0">
-                <a:solidFill>
-                  <a:srgbClr val="CBD5E1"/>
-                </a:solidFill>
-                <a:latin typeface="Inter"/>
-                <a:ea typeface="Inter"/>
-                <a:cs typeface="Inter"/>
-                <a:sym typeface="Inter"/>
-              </a:rPr>
-              <a:t> precise.</a:t>
+              <a:t>.</a:t>
             </a:r>
             <a:endParaRPr dirty="0"/>
           </a:p>
@@ -19963,7 +21511,7 @@
               <a:buNone/>
             </a:pPr>
             <a:r>
-              <a:rPr lang="en-US" sz="1350" b="0" i="0" u="none" strike="noStrike" cap="none" dirty="0" err="1">
+              <a:rPr lang="en-US" sz="1350" dirty="0" err="1">
                 <a:solidFill>
                   <a:srgbClr val="CBD5E1"/>
                 </a:solidFill>
@@ -19972,10 +21520,10 @@
                 <a:cs typeface="Inter"/>
                 <a:sym typeface="Inter"/>
               </a:rPr>
-              <a:t>Inoltre</a:t>
-            </a:r>
-            <a:r>
-              <a:rPr lang="en-US" sz="1350" b="0" i="0" u="none" strike="noStrike" cap="none" dirty="0">
+              <a:t>Questo</a:t>
+            </a:r>
+            <a:r>
+              <a:rPr lang="en-US" sz="1350" dirty="0">
                 <a:solidFill>
                   <a:srgbClr val="CBD5E1"/>
                 </a:solidFill>
@@ -19984,10 +21532,10 @@
                 <a:cs typeface="Inter"/>
                 <a:sym typeface="Inter"/>
               </a:rPr>
-              <a:t>, </a:t>
-            </a:r>
-            <a:r>
-              <a:rPr lang="en-US" sz="1350" b="0" i="0" u="none" strike="noStrike" cap="none" dirty="0" err="1">
+              <a:t> </a:t>
+            </a:r>
+            <a:r>
+              <a:rPr lang="en-US" sz="1350" dirty="0" err="1">
                 <a:solidFill>
                   <a:srgbClr val="CBD5E1"/>
                 </a:solidFill>
@@ -19996,10 +21544,10 @@
                 <a:cs typeface="Inter"/>
                 <a:sym typeface="Inter"/>
               </a:rPr>
-              <a:t>l'estrazione</a:t>
-            </a:r>
-            <a:r>
-              <a:rPr lang="en-US" sz="1350" b="0" i="0" u="none" strike="noStrike" cap="none" dirty="0">
+              <a:t>può</a:t>
+            </a:r>
+            <a:r>
+              <a:rPr lang="en-US" sz="1350" dirty="0">
                 <a:solidFill>
                   <a:srgbClr val="CBD5E1"/>
                 </a:solidFill>
@@ -20008,7 +21556,19 @@
                 <a:cs typeface="Inter"/>
                 <a:sym typeface="Inter"/>
               </a:rPr>
-              <a:t> delle feature </a:t>
+              <a:t> </a:t>
+            </a:r>
+            <a:r>
+              <a:rPr lang="en-US" sz="1350" dirty="0" err="1">
+                <a:solidFill>
+                  <a:srgbClr val="CBD5E1"/>
+                </a:solidFill>
+                <a:latin typeface="Inter"/>
+                <a:ea typeface="Inter"/>
+                <a:cs typeface="Inter"/>
+                <a:sym typeface="Inter"/>
+              </a:rPr>
+              <a:t>essere</a:t>
             </a:r>
             <a:r>
               <a:rPr lang="en-US" sz="1350" dirty="0">
@@ -20020,7 +21580,7 @@
                 <a:cs typeface="Inter"/>
                 <a:sym typeface="Inter"/>
               </a:rPr>
-              <a:t>è </a:t>
+              <a:t> </a:t>
             </a:r>
             <a:r>
               <a:rPr lang="en-US" sz="1350" dirty="0" err="1">
@@ -20032,7 +21592,7 @@
                 <a:cs typeface="Inter"/>
                 <a:sym typeface="Inter"/>
               </a:rPr>
-              <a:t>stata</a:t>
+              <a:t>migliorato</a:t>
             </a:r>
             <a:r>
               <a:rPr lang="en-US" sz="1350" dirty="0">
@@ -20056,7 +21616,7 @@
                 <a:cs typeface="Inter"/>
                 <a:sym typeface="Inter"/>
               </a:rPr>
-              <a:t>fatta</a:t>
+              <a:t>tramite</a:t>
             </a:r>
             <a:r>
               <a:rPr lang="en-US" sz="1350" dirty="0">
@@ -20071,7 +21631,7 @@
               <a:t> </a:t>
             </a:r>
             <a:r>
-              <a:rPr lang="en-US" sz="1350" b="0" i="0" u="none" strike="noStrike" cap="none" dirty="0" err="1">
+              <a:rPr lang="en-US" sz="1350" dirty="0" err="1">
                 <a:solidFill>
                   <a:srgbClr val="CBD5E1"/>
                 </a:solidFill>
@@ -20080,10 +21640,10 @@
                 <a:cs typeface="Inter"/>
                 <a:sym typeface="Inter"/>
               </a:rPr>
-              <a:t>su</a:t>
-            </a:r>
-            <a:r>
-              <a:rPr lang="en-US" sz="1350" b="0" i="0" u="none" strike="noStrike" cap="none" dirty="0">
+              <a:t>l’estrazioni</a:t>
+            </a:r>
+            <a:r>
+              <a:rPr lang="en-US" sz="1350" dirty="0">
                 <a:solidFill>
                   <a:srgbClr val="CBD5E1"/>
                 </a:solidFill>
@@ -20092,10 +21652,58 @@
                 <a:cs typeface="Inter"/>
                 <a:sym typeface="Inter"/>
               </a:rPr>
+              <a:t> di </a:t>
+            </a:r>
+            <a:r>
+              <a:rPr lang="en-US" sz="1350" dirty="0" err="1">
+                <a:solidFill>
+                  <a:srgbClr val="CBD5E1"/>
+                </a:solidFill>
+                <a:latin typeface="Inter"/>
+                <a:ea typeface="Inter"/>
+                <a:cs typeface="Inter"/>
+                <a:sym typeface="Inter"/>
+              </a:rPr>
+              <a:t>più</a:t>
+            </a:r>
+            <a:r>
+              <a:rPr lang="en-US" sz="1350" dirty="0">
+                <a:solidFill>
+                  <a:srgbClr val="CBD5E1"/>
+                </a:solidFill>
+                <a:latin typeface="Inter"/>
+                <a:ea typeface="Inter"/>
+                <a:cs typeface="Inter"/>
+                <a:sym typeface="Inter"/>
+              </a:rPr>
+              <a:t> features </a:t>
+            </a:r>
+            <a:r>
+              <a:rPr lang="en-US" sz="1350" dirty="0" err="1">
+                <a:solidFill>
+                  <a:srgbClr val="CBD5E1"/>
+                </a:solidFill>
+                <a:latin typeface="Inter"/>
+                <a:ea typeface="Inter"/>
+                <a:cs typeface="Inter"/>
+                <a:sym typeface="Inter"/>
+              </a:rPr>
+              <a:t>utilizzando</a:t>
+            </a:r>
+            <a:r>
+              <a:rPr lang="en-US" sz="1350" dirty="0">
+                <a:solidFill>
+                  <a:srgbClr val="CBD5E1"/>
+                </a:solidFill>
+                <a:latin typeface="Inter"/>
+                <a:ea typeface="Inter"/>
+                <a:cs typeface="Inter"/>
+                <a:sym typeface="Inter"/>
+              </a:rPr>
               <a:t> </a:t>
             </a:r>
             <a:r>
-              <a:rPr lang="en-US" sz="1350" b="0" i="0" u="none" strike="noStrike" cap="none" dirty="0" err="1">
+              <a:rPr lang="en-US" sz="1350" dirty="0" err="1">
                 <a:solidFill>
                   <a:srgbClr val="CBD5E1"/>
                 </a:solidFill>
@@ -20107,7 +21715,7 @@
               <a:t>finestre</a:t>
             </a:r>
             <a:r>
-              <a:rPr lang="en-US" sz="1350" b="0" i="0" u="none" strike="noStrike" cap="none" dirty="0">
+              <a:rPr lang="en-US" sz="1350" dirty="0">
                 <a:solidFill>
                   <a:srgbClr val="CBD5E1"/>
                 </a:solidFill>
@@ -20116,10 +21724,10 @@
                 <a:cs typeface="Inter"/>
                 <a:sym typeface="Inter"/>
               </a:rPr>
-              <a:t> </a:t>
-            </a:r>
-            <a:r>
-              <a:rPr lang="en-US" sz="1350" b="0" i="0" u="none" strike="noStrike" cap="none" dirty="0" err="1">
+              <a:t> di </a:t>
+            </a:r>
+            <a:r>
+              <a:rPr lang="en-US" sz="1350" dirty="0" err="1">
                 <a:solidFill>
                   <a:srgbClr val="CBD5E1"/>
                 </a:solidFill>
@@ -20128,10 +21736,10 @@
                 <a:cs typeface="Inter"/>
                 <a:sym typeface="Inter"/>
               </a:rPr>
-              <a:t>fisse</a:t>
-            </a:r>
-            <a:r>
-              <a:rPr lang="en-US" sz="1350" b="0" i="0" u="none" strike="noStrike" cap="none" dirty="0">
+              <a:t>lunghezze</a:t>
+            </a:r>
+            <a:r>
+              <a:rPr lang="en-US" sz="1350" dirty="0">
                 <a:solidFill>
                   <a:srgbClr val="CBD5E1"/>
                 </a:solidFill>
@@ -20140,199 +21748,7 @@
                 <a:cs typeface="Inter"/>
                 <a:sym typeface="Inter"/>
               </a:rPr>
-              <a:t> senza </a:t>
-            </a:r>
-            <a:r>
-              <a:rPr lang="en-US" sz="1350" b="0" i="0" u="none" strike="noStrike" cap="none" dirty="0" err="1">
-                <a:solidFill>
-                  <a:srgbClr val="CBD5E1"/>
-                </a:solidFill>
-                <a:latin typeface="Inter"/>
-                <a:ea typeface="Inter"/>
-                <a:cs typeface="Inter"/>
-                <a:sym typeface="Inter"/>
-              </a:rPr>
-              <a:t>alcun</a:t>
-            </a:r>
-            <a:r>
-              <a:rPr lang="en-US" sz="1350" b="0" i="0" u="none" strike="noStrike" cap="none" dirty="0">
-                <a:solidFill>
-                  <a:srgbClr val="CBD5E1"/>
-                </a:solidFill>
-                <a:latin typeface="Inter"/>
-                <a:ea typeface="Inter"/>
-                <a:cs typeface="Inter"/>
-                <a:sym typeface="Inter"/>
-              </a:rPr>
-              <a:t> </a:t>
-            </a:r>
-            <a:r>
-              <a:rPr lang="en-US" sz="1350" b="0" i="0" u="none" strike="noStrike" cap="none" dirty="0" err="1">
-                <a:solidFill>
-                  <a:srgbClr val="CBD5E1"/>
-                </a:solidFill>
-                <a:latin typeface="Inter"/>
-                <a:ea typeface="Inter"/>
-                <a:cs typeface="Inter"/>
-                <a:sym typeface="Inter"/>
-              </a:rPr>
-              <a:t>tipo</a:t>
-            </a:r>
-            <a:r>
-              <a:rPr lang="en-US" sz="1350" b="0" i="0" u="none" strike="noStrike" cap="none" dirty="0">
-                <a:solidFill>
-                  <a:srgbClr val="CBD5E1"/>
-                </a:solidFill>
-                <a:latin typeface="Inter"/>
-                <a:ea typeface="Inter"/>
-                <a:cs typeface="Inter"/>
-                <a:sym typeface="Inter"/>
-              </a:rPr>
-              <a:t> di </a:t>
-            </a:r>
-            <a:r>
-              <a:rPr lang="en-US" sz="1350" dirty="0" err="1">
-                <a:solidFill>
-                  <a:srgbClr val="CBD5E1"/>
-                </a:solidFill>
-                <a:latin typeface="Inter"/>
-                <a:ea typeface="Inter"/>
-                <a:cs typeface="Inter"/>
-                <a:sym typeface="Inter"/>
-              </a:rPr>
-              <a:t>sovrapposizione</a:t>
-            </a:r>
-            <a:r>
-              <a:rPr lang="en-US" sz="1350" dirty="0">
-                <a:solidFill>
-                  <a:srgbClr val="CBD5E1"/>
-                </a:solidFill>
-                <a:latin typeface="Inter"/>
-                <a:ea typeface="Inter"/>
-                <a:cs typeface="Inter"/>
-                <a:sym typeface="Inter"/>
-              </a:rPr>
-              <a:t> </a:t>
-            </a:r>
-            <a:r>
-              <a:rPr lang="en-US" sz="1350" b="0" i="0" u="none" strike="noStrike" cap="none" dirty="0" err="1">
-                <a:solidFill>
-                  <a:srgbClr val="CBD5E1"/>
-                </a:solidFill>
-                <a:latin typeface="Inter"/>
-                <a:ea typeface="Inter"/>
-                <a:cs typeface="Inter"/>
-                <a:sym typeface="Inter"/>
-              </a:rPr>
-              <a:t>temporale</a:t>
-            </a:r>
-            <a:r>
-              <a:rPr lang="en-US" sz="1350" b="0" i="0" u="none" strike="noStrike" cap="none" dirty="0">
-                <a:solidFill>
-                  <a:srgbClr val="CBD5E1"/>
-                </a:solidFill>
-                <a:latin typeface="Inter"/>
-                <a:ea typeface="Inter"/>
-                <a:cs typeface="Inter"/>
-                <a:sym typeface="Inter"/>
-              </a:rPr>
-              <a:t>,</a:t>
-            </a:r>
-            <a:r>
-              <a:rPr lang="en-US" sz="1350" dirty="0">
-                <a:solidFill>
-                  <a:srgbClr val="CBD5E1"/>
-                </a:solidFill>
-                <a:latin typeface="Inter"/>
-                <a:ea typeface="Inter"/>
-                <a:cs typeface="Inter"/>
-                <a:sym typeface="Inter"/>
-              </a:rPr>
-              <a:t> dove </a:t>
-            </a:r>
-            <a:r>
-              <a:rPr lang="en-US" sz="1350" dirty="0" err="1">
-                <a:solidFill>
-                  <a:srgbClr val="CBD5E1"/>
-                </a:solidFill>
-                <a:latin typeface="Inter"/>
-                <a:ea typeface="Inter"/>
-                <a:cs typeface="Inter"/>
-                <a:sym typeface="Inter"/>
-              </a:rPr>
-              <a:t>potrebbero</a:t>
-            </a:r>
-            <a:r>
-              <a:rPr lang="en-US" sz="1350" dirty="0">
-                <a:solidFill>
-                  <a:srgbClr val="CBD5E1"/>
-                </a:solidFill>
-                <a:latin typeface="Inter"/>
-                <a:ea typeface="Inter"/>
-                <a:cs typeface="Inter"/>
-                <a:sym typeface="Inter"/>
-              </a:rPr>
-              <a:t> </a:t>
-            </a:r>
-            <a:r>
-              <a:rPr lang="en-US" sz="1350" dirty="0" err="1">
-                <a:solidFill>
-                  <a:srgbClr val="CBD5E1"/>
-                </a:solidFill>
-                <a:latin typeface="Inter"/>
-                <a:ea typeface="Inter"/>
-                <a:cs typeface="Inter"/>
-                <a:sym typeface="Inter"/>
-              </a:rPr>
-              <a:t>esserci</a:t>
-            </a:r>
-            <a:r>
-              <a:rPr lang="en-US" sz="1350" dirty="0">
-                <a:solidFill>
-                  <a:srgbClr val="CBD5E1"/>
-                </a:solidFill>
-                <a:latin typeface="Inter"/>
-                <a:ea typeface="Inter"/>
-                <a:cs typeface="Inter"/>
-                <a:sym typeface="Inter"/>
-              </a:rPr>
-              <a:t> </a:t>
-            </a:r>
-            <a:r>
-              <a:rPr lang="en-US" sz="1350" dirty="0" err="1">
-                <a:solidFill>
-                  <a:srgbClr val="CBD5E1"/>
-                </a:solidFill>
-                <a:latin typeface="Inter"/>
-                <a:ea typeface="Inter"/>
-                <a:cs typeface="Inter"/>
-                <a:sym typeface="Inter"/>
-              </a:rPr>
-              <a:t>informazioni</a:t>
-            </a:r>
-            <a:r>
-              <a:rPr lang="en-US" sz="1350" dirty="0">
-                <a:solidFill>
-                  <a:srgbClr val="CBD5E1"/>
-                </a:solidFill>
-                <a:latin typeface="Inter"/>
-                <a:ea typeface="Inter"/>
-                <a:cs typeface="Inter"/>
-                <a:sym typeface="Inter"/>
-              </a:rPr>
-              <a:t> </a:t>
-            </a:r>
-            <a:r>
-              <a:rPr lang="en-US" sz="1350" dirty="0" err="1">
-                <a:solidFill>
-                  <a:srgbClr val="CBD5E1"/>
-                </a:solidFill>
-                <a:latin typeface="Inter"/>
-                <a:ea typeface="Inter"/>
-                <a:cs typeface="Inter"/>
-                <a:sym typeface="Inter"/>
-              </a:rPr>
-              <a:t>utili</a:t>
+              <a:t> diverse (come da 60 a 30 secondi)</a:t>
             </a:r>
             <a:r>
               <a:rPr lang="en-US" sz="1350" b="0" i="0" u="none" strike="noStrike" cap="none" dirty="0">
@@ -21187,7 +22603,7 @@
         <p:spPr>
           <a:xfrm>
             <a:off x="8423375" y="3985326"/>
-            <a:ext cx="2901900" cy="1994392"/>
+            <a:ext cx="2901900" cy="1329595"/>
           </a:xfrm>
           <a:prstGeom prst="rect">
             <a:avLst/>
@@ -21261,6 +22677,30 @@
                 <a:cs typeface="Inter"/>
                 <a:sym typeface="Inter"/>
               </a:rPr>
+              <a:t> e </a:t>
+            </a:r>
+            <a:r>
+              <a:rPr lang="en-US" sz="1350" dirty="0" err="1">
+                <a:solidFill>
+                  <a:srgbClr val="CBD5E1"/>
+                </a:solidFill>
+                <a:latin typeface="Inter"/>
+                <a:ea typeface="Inter"/>
+                <a:cs typeface="Inter"/>
+                <a:sym typeface="Inter"/>
+              </a:rPr>
+              <a:t>dei</a:t>
+            </a:r>
+            <a:r>
+              <a:rPr lang="en-US" sz="1350" dirty="0">
+                <a:solidFill>
+                  <a:srgbClr val="CBD5E1"/>
+                </a:solidFill>
+                <a:latin typeface="Inter"/>
+                <a:ea typeface="Inter"/>
+                <a:cs typeface="Inter"/>
+                <a:sym typeface="Inter"/>
+              </a:rPr>
               <a:t> </a:t>
             </a:r>
             <a:r>
@@ -21273,7 +22713,7 @@
                 <a:cs typeface="Inter"/>
                 <a:sym typeface="Inter"/>
               </a:rPr>
-              <a:t>superficiale</a:t>
+              <a:t>movimenti</a:t>
             </a:r>
             <a:r>
               <a:rPr lang="en-US" sz="1350" dirty="0">
@@ -21285,7 +22725,7 @@
                 <a:cs typeface="Inter"/>
                 <a:sym typeface="Inter"/>
               </a:rPr>
-              <a:t> e </a:t>
+              <a:t> </a:t>
             </a:r>
             <a:r>
               <a:rPr lang="en-US" sz="1350" dirty="0" err="1">
@@ -21297,7 +22737,7 @@
                 <a:cs typeface="Inter"/>
                 <a:sym typeface="Inter"/>
               </a:rPr>
-              <a:t>dei</a:t>
+              <a:t>tramite</a:t>
             </a:r>
             <a:r>
               <a:rPr lang="en-US" sz="1350" dirty="0">
@@ -21321,7 +22761,7 @@
                 <a:cs typeface="Inter"/>
                 <a:sym typeface="Inter"/>
               </a:rPr>
-              <a:t>movimenti</a:t>
+              <a:t>accelerometro</a:t>
             </a:r>
             <a:r>
               <a:rPr lang="en-US" sz="1350" dirty="0">
@@ -21333,7 +22773,7 @@
                 <a:cs typeface="Inter"/>
                 <a:sym typeface="Inter"/>
               </a:rPr>
-              <a:t> </a:t>
+              <a:t> per </a:t>
             </a:r>
             <a:r>
               <a:rPr lang="en-US" sz="1350" dirty="0" err="1">
@@ -21345,7 +22785,7 @@
                 <a:cs typeface="Inter"/>
                 <a:sym typeface="Inter"/>
               </a:rPr>
-              <a:t>tramite</a:t>
+              <a:t>arricchire</a:t>
             </a:r>
             <a:r>
               <a:rPr lang="en-US" sz="1350" dirty="0">
@@ -21357,199 +22797,7 @@
                 <a:cs typeface="Inter"/>
                 <a:sym typeface="Inter"/>
               </a:rPr>
-              <a:t> </a:t>
-            </a:r>
-            <a:r>
-              <a:rPr lang="en-US" sz="1350" dirty="0" err="1">
-                <a:solidFill>
-                  <a:srgbClr val="CBD5E1"/>
-                </a:solidFill>
-                <a:latin typeface="Inter"/>
-                <a:ea typeface="Inter"/>
-                <a:cs typeface="Inter"/>
-                <a:sym typeface="Inter"/>
-              </a:rPr>
-              <a:t>accelerometro</a:t>
-            </a:r>
-            <a:r>
-              <a:rPr lang="en-US" sz="1350" dirty="0">
-                <a:solidFill>
-                  <a:srgbClr val="CBD5E1"/>
-                </a:solidFill>
-                <a:latin typeface="Inter"/>
-                <a:ea typeface="Inter"/>
-                <a:cs typeface="Inter"/>
-                <a:sym typeface="Inter"/>
-              </a:rPr>
-              <a:t> per </a:t>
-            </a:r>
-            <a:r>
-              <a:rPr lang="en-US" sz="1350" dirty="0" err="1">
-                <a:solidFill>
-                  <a:srgbClr val="CBD5E1"/>
-                </a:solidFill>
-                <a:latin typeface="Inter"/>
-                <a:ea typeface="Inter"/>
-                <a:cs typeface="Inter"/>
-                <a:sym typeface="Inter"/>
-              </a:rPr>
-              <a:t>arricchire</a:t>
-            </a:r>
-            <a:r>
-              <a:rPr lang="en-US" sz="1350" dirty="0">
-                <a:solidFill>
-                  <a:srgbClr val="CBD5E1"/>
-                </a:solidFill>
-                <a:latin typeface="Inter"/>
-                <a:ea typeface="Inter"/>
-                <a:cs typeface="Inter"/>
-                <a:sym typeface="Inter"/>
-              </a:rPr>
-              <a:t> le feature e </a:t>
-            </a:r>
-            <a:r>
-              <a:rPr lang="en-US" sz="1350" dirty="0" err="1">
-                <a:solidFill>
-                  <a:srgbClr val="CBD5E1"/>
-                </a:solidFill>
-                <a:latin typeface="Inter"/>
-                <a:ea typeface="Inter"/>
-                <a:cs typeface="Inter"/>
-                <a:sym typeface="Inter"/>
-              </a:rPr>
-              <a:t>valutare</a:t>
-            </a:r>
-            <a:r>
-              <a:rPr lang="en-US" sz="1350" dirty="0">
-                <a:solidFill>
-                  <a:srgbClr val="CBD5E1"/>
-                </a:solidFill>
-                <a:latin typeface="Inter"/>
-                <a:ea typeface="Inter"/>
-                <a:cs typeface="Inter"/>
-                <a:sym typeface="Inter"/>
-              </a:rPr>
-              <a:t> lo </a:t>
-            </a:r>
-            <a:r>
-              <a:rPr lang="en-US" sz="1350" dirty="0" err="1">
-                <a:solidFill>
-                  <a:srgbClr val="CBD5E1"/>
-                </a:solidFill>
-                <a:latin typeface="Inter"/>
-                <a:ea typeface="Inter"/>
-                <a:cs typeface="Inter"/>
-                <a:sym typeface="Inter"/>
-              </a:rPr>
-              <a:t>stato</a:t>
-            </a:r>
-            <a:r>
-              <a:rPr lang="en-US" sz="1350" dirty="0">
-                <a:solidFill>
-                  <a:srgbClr val="CBD5E1"/>
-                </a:solidFill>
-                <a:latin typeface="Inter"/>
-                <a:ea typeface="Inter"/>
-                <a:cs typeface="Inter"/>
-                <a:sym typeface="Inter"/>
-              </a:rPr>
-              <a:t> in base alle </a:t>
-            </a:r>
-            <a:r>
-              <a:rPr lang="en-US" sz="1350" dirty="0" err="1">
-                <a:solidFill>
-                  <a:srgbClr val="CBD5E1"/>
-                </a:solidFill>
-                <a:latin typeface="Inter"/>
-                <a:ea typeface="Inter"/>
-                <a:cs typeface="Inter"/>
-                <a:sym typeface="Inter"/>
-              </a:rPr>
-              <a:t>azioni</a:t>
-            </a:r>
-            <a:r>
-              <a:rPr lang="en-US" sz="1350" dirty="0">
-                <a:solidFill>
-                  <a:srgbClr val="CBD5E1"/>
-                </a:solidFill>
-                <a:latin typeface="Inter"/>
-                <a:ea typeface="Inter"/>
-                <a:cs typeface="Inter"/>
-                <a:sym typeface="Inter"/>
-              </a:rPr>
-              <a:t> </a:t>
-            </a:r>
-            <a:r>
-              <a:rPr lang="en-US" sz="1350" dirty="0" err="1">
-                <a:solidFill>
-                  <a:srgbClr val="CBD5E1"/>
-                </a:solidFill>
-                <a:latin typeface="Inter"/>
-                <a:ea typeface="Inter"/>
-                <a:cs typeface="Inter"/>
-                <a:sym typeface="Inter"/>
-              </a:rPr>
-              <a:t>fisiche</a:t>
-            </a:r>
-            <a:r>
-              <a:rPr lang="en-US" sz="1350" dirty="0">
-                <a:solidFill>
-                  <a:srgbClr val="CBD5E1"/>
-                </a:solidFill>
-                <a:latin typeface="Inter"/>
-                <a:ea typeface="Inter"/>
-                <a:cs typeface="Inter"/>
-                <a:sym typeface="Inter"/>
-              </a:rPr>
-              <a:t> e </a:t>
-            </a:r>
-            <a:r>
-              <a:rPr lang="en-US" sz="1350" dirty="0" err="1">
-                <a:solidFill>
-                  <a:srgbClr val="CBD5E1"/>
-                </a:solidFill>
-                <a:latin typeface="Inter"/>
-                <a:ea typeface="Inter"/>
-                <a:cs typeface="Inter"/>
-                <a:sym typeface="Inter"/>
-              </a:rPr>
-              <a:t>all’attività</a:t>
-            </a:r>
-            <a:r>
-              <a:rPr lang="en-US" sz="1350" dirty="0">
-                <a:solidFill>
-                  <a:srgbClr val="CBD5E1"/>
-                </a:solidFill>
-                <a:latin typeface="Inter"/>
-                <a:ea typeface="Inter"/>
-                <a:cs typeface="Inter"/>
-                <a:sym typeface="Inter"/>
-              </a:rPr>
-              <a:t> </a:t>
-            </a:r>
-            <a:r>
-              <a:rPr lang="en-US" sz="1350" dirty="0" err="1">
-                <a:solidFill>
-                  <a:srgbClr val="CBD5E1"/>
-                </a:solidFill>
-                <a:latin typeface="Inter"/>
-                <a:ea typeface="Inter"/>
-                <a:cs typeface="Inter"/>
-                <a:sym typeface="Inter"/>
-              </a:rPr>
-              <a:t>corporea</a:t>
-            </a:r>
-            <a:r>
-              <a:rPr lang="en-US" sz="1350" dirty="0">
-                <a:solidFill>
-                  <a:srgbClr val="CBD5E1"/>
-                </a:solidFill>
-                <a:latin typeface="Inter"/>
-                <a:ea typeface="Inter"/>
-                <a:cs typeface="Inter"/>
-                <a:sym typeface="Inter"/>
-              </a:rPr>
-              <a:t>.</a:t>
+              <a:t> le feature.</a:t>
             </a:r>
             <a:endParaRPr dirty="0"/>
           </a:p>
@@ -23296,7 +24544,7 @@
         <p:spPr>
           <a:xfrm>
             <a:off x="1809750" y="2905125"/>
-            <a:ext cx="9048900" cy="738664"/>
+            <a:ext cx="9048900" cy="1477328"/>
           </a:xfrm>
           <a:prstGeom prst="rect">
             <a:avLst/>
@@ -23522,7 +24770,581 @@
                 <a:cs typeface="Inter"/>
                 <a:sym typeface="Inter"/>
               </a:rPr>
-              <a:t> da 60 secondi con overlapping di 30 secondi.</a:t>
+              <a:t> da 60 secondi con overlapping di 30 (</a:t>
+            </a:r>
+            <a:r>
+              <a:rPr lang="en-US" sz="1500" b="0" i="0" u="none" strike="noStrike" cap="none" dirty="0" err="1">
+                <a:solidFill>
+                  <a:schemeClr val="bg1">
+                    <a:lumMod val="85000"/>
+                  </a:schemeClr>
+                </a:solidFill>
+                <a:latin typeface="Inter"/>
+                <a:ea typeface="Inter"/>
+                <a:cs typeface="Inter"/>
+                <a:sym typeface="Inter"/>
+              </a:rPr>
+              <a:t>nella</a:t>
+            </a:r>
+            <a:r>
+              <a:rPr lang="en-US" sz="1500" b="0" i="0" u="none" strike="noStrike" cap="none" dirty="0">
+                <a:solidFill>
+                  <a:schemeClr val="bg1">
+                    <a:lumMod val="85000"/>
+                  </a:schemeClr>
+                </a:solidFill>
+                <a:latin typeface="Inter"/>
+                <a:ea typeface="Inter"/>
+                <a:cs typeface="Inter"/>
+                <a:sym typeface="Inter"/>
+              </a:rPr>
+              <a:t> </a:t>
+            </a:r>
+            <a:r>
+              <a:rPr lang="en-US" sz="1500" b="0" i="0" u="none" strike="noStrike" cap="none" dirty="0" err="1">
+                <a:solidFill>
+                  <a:schemeClr val="bg1">
+                    <a:lumMod val="85000"/>
+                  </a:schemeClr>
+                </a:solidFill>
+                <a:latin typeface="Inter"/>
+                <a:ea typeface="Inter"/>
+                <a:cs typeface="Inter"/>
+                <a:sym typeface="Inter"/>
+              </a:rPr>
+              <a:t>variante</a:t>
+            </a:r>
+            <a:r>
+              <a:rPr lang="en-US" sz="1500" b="0" i="0" u="none" strike="noStrike" cap="none" dirty="0">
+                <a:solidFill>
+                  <a:schemeClr val="bg1">
+                    <a:lumMod val="85000"/>
+                  </a:schemeClr>
+                </a:solidFill>
+                <a:latin typeface="Inter"/>
+                <a:ea typeface="Inter"/>
+                <a:cs typeface="Inter"/>
+                <a:sym typeface="Inter"/>
+              </a:rPr>
+              <a:t> </a:t>
+            </a:r>
+            <a:r>
+              <a:rPr lang="en-US" sz="1500" b="0" i="0" u="none" strike="noStrike" cap="none" dirty="0" err="1">
+                <a:solidFill>
+                  <a:schemeClr val="bg1">
+                    <a:lumMod val="85000"/>
+                  </a:schemeClr>
+                </a:solidFill>
+                <a:latin typeface="Inter"/>
+                <a:ea typeface="Inter"/>
+                <a:cs typeface="Inter"/>
+                <a:sym typeface="Inter"/>
+              </a:rPr>
+              <a:t>dell’algoritmo</a:t>
+            </a:r>
+            <a:r>
+              <a:rPr lang="en-US" sz="1500" b="0" i="0" u="none" strike="noStrike" cap="none" dirty="0">
+                <a:solidFill>
+                  <a:schemeClr val="bg1">
+                    <a:lumMod val="85000"/>
+                  </a:schemeClr>
+                </a:solidFill>
+                <a:latin typeface="Inter"/>
+                <a:ea typeface="Inter"/>
+                <a:cs typeface="Inter"/>
+                <a:sym typeface="Inter"/>
+              </a:rPr>
+              <a:t> “</a:t>
+            </a:r>
+            <a:r>
+              <a:rPr lang="en-US" sz="1500" b="0" i="0" u="none" strike="noStrike" cap="none" dirty="0" err="1">
+                <a:solidFill>
+                  <a:schemeClr val="bg1">
+                    <a:lumMod val="85000"/>
+                  </a:schemeClr>
+                </a:solidFill>
+                <a:latin typeface="Inter"/>
+                <a:ea typeface="Inter"/>
+                <a:cs typeface="Inter"/>
+                <a:sym typeface="Inter"/>
+              </a:rPr>
+              <a:t>sicuro</a:t>
+            </a:r>
+            <a:r>
+              <a:rPr lang="en-US" sz="1500" dirty="0">
+                <a:solidFill>
+                  <a:schemeClr val="bg1">
+                    <a:lumMod val="85000"/>
+                  </a:schemeClr>
+                </a:solidFill>
+                <a:latin typeface="Inter"/>
+                <a:ea typeface="Inter"/>
+                <a:cs typeface="Inter"/>
+                <a:sym typeface="Inter"/>
+              </a:rPr>
+              <a:t>/safe”, non </a:t>
+            </a:r>
+            <a:r>
+              <a:rPr lang="en-US" sz="1500" dirty="0" err="1">
+                <a:solidFill>
+                  <a:schemeClr val="bg1">
+                    <a:lumMod val="85000"/>
+                  </a:schemeClr>
+                </a:solidFill>
+                <a:latin typeface="Inter"/>
+                <a:ea typeface="Inter"/>
+                <a:cs typeface="Inter"/>
+                <a:sym typeface="Inter"/>
+              </a:rPr>
+              <a:t>viene</a:t>
+            </a:r>
+            <a:r>
+              <a:rPr lang="en-US" sz="1500" dirty="0">
+                <a:solidFill>
+                  <a:schemeClr val="bg1">
+                    <a:lumMod val="85000"/>
+                  </a:schemeClr>
+                </a:solidFill>
+                <a:latin typeface="Inter"/>
+                <a:ea typeface="Inter"/>
+                <a:cs typeface="Inter"/>
+                <a:sym typeface="Inter"/>
+              </a:rPr>
+              <a:t> </a:t>
+            </a:r>
+            <a:r>
+              <a:rPr lang="en-US" sz="1500" dirty="0" err="1">
+                <a:solidFill>
+                  <a:schemeClr val="bg1">
+                    <a:lumMod val="85000"/>
+                  </a:schemeClr>
+                </a:solidFill>
+                <a:latin typeface="Inter"/>
+                <a:ea typeface="Inter"/>
+                <a:cs typeface="Inter"/>
+                <a:sym typeface="Inter"/>
+              </a:rPr>
+              <a:t>effetturato</a:t>
+            </a:r>
+            <a:r>
+              <a:rPr lang="en-US" sz="1500" dirty="0">
+                <a:solidFill>
+                  <a:schemeClr val="bg1">
+                    <a:lumMod val="85000"/>
+                  </a:schemeClr>
+                </a:solidFill>
+                <a:latin typeface="Inter"/>
+                <a:ea typeface="Inter"/>
+                <a:cs typeface="Inter"/>
+                <a:sym typeface="Inter"/>
+              </a:rPr>
+              <a:t> </a:t>
+            </a:r>
+            <a:r>
+              <a:rPr lang="en-US" sz="1500" dirty="0" err="1">
+                <a:solidFill>
+                  <a:schemeClr val="bg1">
+                    <a:lumMod val="85000"/>
+                  </a:schemeClr>
+                </a:solidFill>
+                <a:latin typeface="Inter"/>
+                <a:ea typeface="Inter"/>
+                <a:cs typeface="Inter"/>
+                <a:sym typeface="Inter"/>
+              </a:rPr>
+              <a:t>l’overlapping</a:t>
+            </a:r>
+            <a:r>
+              <a:rPr lang="en-US" sz="1500" dirty="0">
+                <a:solidFill>
+                  <a:schemeClr val="bg1">
+                    <a:lumMod val="85000"/>
+                  </a:schemeClr>
+                </a:solidFill>
+                <a:latin typeface="Inter"/>
+                <a:ea typeface="Inter"/>
+                <a:cs typeface="Inter"/>
+                <a:sym typeface="Inter"/>
+              </a:rPr>
+              <a:t> per </a:t>
+            </a:r>
+            <a:r>
+              <a:rPr lang="en-US" sz="1500" dirty="0" err="1">
+                <a:solidFill>
+                  <a:schemeClr val="bg1">
+                    <a:lumMod val="85000"/>
+                  </a:schemeClr>
+                </a:solidFill>
+                <a:latin typeface="Inter"/>
+                <a:ea typeface="Inter"/>
+                <a:cs typeface="Inter"/>
+                <a:sym typeface="Inter"/>
+              </a:rPr>
+              <a:t>evitare</a:t>
+            </a:r>
+            <a:r>
+              <a:rPr lang="en-US" sz="1500" dirty="0">
+                <a:solidFill>
+                  <a:schemeClr val="bg1">
+                    <a:lumMod val="85000"/>
+                  </a:schemeClr>
+                </a:solidFill>
+                <a:latin typeface="Inter"/>
+                <a:ea typeface="Inter"/>
+                <a:cs typeface="Inter"/>
+                <a:sym typeface="Inter"/>
+              </a:rPr>
+              <a:t> Data Leak con K-Fold, </a:t>
+            </a:r>
+            <a:r>
+              <a:rPr lang="en-US" sz="1500" dirty="0" err="1">
+                <a:solidFill>
+                  <a:schemeClr val="bg1">
+                    <a:lumMod val="85000"/>
+                  </a:schemeClr>
+                </a:solidFill>
+                <a:latin typeface="Inter"/>
+                <a:ea typeface="Inter"/>
+                <a:cs typeface="Inter"/>
+                <a:sym typeface="Inter"/>
+              </a:rPr>
+              <a:t>tuttavia</a:t>
+            </a:r>
+            <a:r>
+              <a:rPr lang="en-US" sz="1500" dirty="0">
+                <a:solidFill>
+                  <a:schemeClr val="bg1">
+                    <a:lumMod val="85000"/>
+                  </a:schemeClr>
+                </a:solidFill>
+                <a:latin typeface="Inter"/>
+                <a:ea typeface="Inter"/>
+                <a:cs typeface="Inter"/>
+                <a:sym typeface="Inter"/>
+              </a:rPr>
+              <a:t> </a:t>
+            </a:r>
+            <a:r>
+              <a:rPr lang="en-US" sz="1500" dirty="0" err="1">
+                <a:solidFill>
+                  <a:schemeClr val="bg1">
+                    <a:lumMod val="85000"/>
+                  </a:schemeClr>
+                </a:solidFill>
+                <a:latin typeface="Inter"/>
+                <a:ea typeface="Inter"/>
+                <a:cs typeface="Inter"/>
+                <a:sym typeface="Inter"/>
+              </a:rPr>
+              <a:t>viene</a:t>
+            </a:r>
+            <a:r>
+              <a:rPr lang="en-US" sz="1500" dirty="0">
+                <a:solidFill>
+                  <a:schemeClr val="bg1">
+                    <a:lumMod val="85000"/>
+                  </a:schemeClr>
+                </a:solidFill>
+                <a:latin typeface="Inter"/>
+                <a:ea typeface="Inter"/>
+                <a:cs typeface="Inter"/>
+                <a:sym typeface="Inter"/>
+              </a:rPr>
+              <a:t> </a:t>
+            </a:r>
+            <a:r>
+              <a:rPr lang="en-US" sz="1500" dirty="0" err="1">
+                <a:solidFill>
+                  <a:schemeClr val="bg1">
+                    <a:lumMod val="85000"/>
+                  </a:schemeClr>
+                </a:solidFill>
+                <a:latin typeface="Inter"/>
+                <a:ea typeface="Inter"/>
+                <a:cs typeface="Inter"/>
+                <a:sym typeface="Inter"/>
+              </a:rPr>
+              <a:t>effettuato</a:t>
+            </a:r>
+            <a:r>
+              <a:rPr lang="en-US" sz="1500" dirty="0">
+                <a:solidFill>
+                  <a:schemeClr val="bg1">
+                    <a:lumMod val="85000"/>
+                  </a:schemeClr>
+                </a:solidFill>
+                <a:latin typeface="Inter"/>
+                <a:ea typeface="Inter"/>
+                <a:cs typeface="Inter"/>
+                <a:sym typeface="Inter"/>
+              </a:rPr>
+              <a:t> </a:t>
+            </a:r>
+            <a:r>
+              <a:rPr lang="en-US" sz="1500" dirty="0" err="1">
+                <a:solidFill>
+                  <a:schemeClr val="bg1">
+                    <a:lumMod val="85000"/>
+                  </a:schemeClr>
+                </a:solidFill>
+                <a:latin typeface="Inter"/>
+                <a:ea typeface="Inter"/>
+                <a:cs typeface="Inter"/>
+                <a:sym typeface="Inter"/>
+              </a:rPr>
+              <a:t>comunque</a:t>
+            </a:r>
+            <a:r>
+              <a:rPr lang="en-US" sz="1500" dirty="0">
+                <a:solidFill>
+                  <a:schemeClr val="bg1">
+                    <a:lumMod val="85000"/>
+                  </a:schemeClr>
+                </a:solidFill>
+                <a:latin typeface="Inter"/>
+                <a:ea typeface="Inter"/>
+                <a:cs typeface="Inter"/>
+                <a:sym typeface="Inter"/>
+              </a:rPr>
+              <a:t> </a:t>
+            </a:r>
+            <a:r>
+              <a:rPr lang="en-US" sz="1500" dirty="0" err="1">
+                <a:solidFill>
+                  <a:schemeClr val="bg1">
+                    <a:lumMod val="85000"/>
+                  </a:schemeClr>
+                </a:solidFill>
+                <a:latin typeface="Inter"/>
+                <a:ea typeface="Inter"/>
+                <a:cs typeface="Inter"/>
+                <a:sym typeface="Inter"/>
+              </a:rPr>
+              <a:t>nella</a:t>
+            </a:r>
+            <a:r>
+              <a:rPr lang="en-US" sz="1500" dirty="0">
+                <a:solidFill>
+                  <a:schemeClr val="bg1">
+                    <a:lumMod val="85000"/>
+                  </a:schemeClr>
+                </a:solidFill>
+                <a:latin typeface="Inter"/>
+                <a:ea typeface="Inter"/>
+                <a:cs typeface="Inter"/>
+                <a:sym typeface="Inter"/>
+              </a:rPr>
+              <a:t> </a:t>
+            </a:r>
+            <a:r>
+              <a:rPr lang="en-US" sz="1500" dirty="0" err="1">
+                <a:solidFill>
+                  <a:schemeClr val="bg1">
+                    <a:lumMod val="85000"/>
+                  </a:schemeClr>
+                </a:solidFill>
+                <a:latin typeface="Inter"/>
+                <a:ea typeface="Inter"/>
+                <a:cs typeface="Inter"/>
+                <a:sym typeface="Inter"/>
+              </a:rPr>
+              <a:t>variante</a:t>
+            </a:r>
+            <a:r>
+              <a:rPr lang="en-US" sz="1500" dirty="0">
+                <a:solidFill>
+                  <a:schemeClr val="bg1">
+                    <a:lumMod val="85000"/>
+                  </a:schemeClr>
+                </a:solidFill>
+                <a:latin typeface="Inter"/>
+                <a:ea typeface="Inter"/>
+                <a:cs typeface="Inter"/>
+                <a:sym typeface="Inter"/>
+              </a:rPr>
+              <a:t> con </a:t>
+            </a:r>
+            <a:r>
+              <a:rPr lang="en-US" sz="1500" dirty="0" err="1">
+                <a:solidFill>
+                  <a:schemeClr val="bg1">
+                    <a:lumMod val="85000"/>
+                  </a:schemeClr>
+                </a:solidFill>
+                <a:latin typeface="Inter"/>
+                <a:ea typeface="Inter"/>
+                <a:cs typeface="Inter"/>
+                <a:sym typeface="Inter"/>
+              </a:rPr>
+              <a:t>anche</a:t>
+            </a:r>
+            <a:r>
+              <a:rPr lang="en-US" sz="1500" dirty="0">
+                <a:solidFill>
+                  <a:schemeClr val="bg1">
+                    <a:lumMod val="85000"/>
+                  </a:schemeClr>
+                </a:solidFill>
+                <a:latin typeface="Inter"/>
+                <a:ea typeface="Inter"/>
+                <a:cs typeface="Inter"/>
+                <a:sym typeface="Inter"/>
+              </a:rPr>
+              <a:t> </a:t>
+            </a:r>
+            <a:r>
+              <a:rPr lang="en-US" sz="1500" dirty="0" err="1">
+                <a:solidFill>
+                  <a:schemeClr val="bg1">
+                    <a:lumMod val="85000"/>
+                  </a:schemeClr>
+                </a:solidFill>
+                <a:latin typeface="Inter"/>
+                <a:ea typeface="Inter"/>
+                <a:cs typeface="Inter"/>
+                <a:sym typeface="Inter"/>
+              </a:rPr>
+              <a:t>GentleBoost</a:t>
+            </a:r>
+            <a:r>
+              <a:rPr lang="en-US" sz="1500" dirty="0">
+                <a:solidFill>
+                  <a:schemeClr val="bg1">
+                    <a:lumMod val="85000"/>
+                  </a:schemeClr>
+                </a:solidFill>
+                <a:latin typeface="Inter"/>
+                <a:ea typeface="Inter"/>
+                <a:cs typeface="Inter"/>
+                <a:sym typeface="Inter"/>
+              </a:rPr>
+              <a:t> e LOSO, con </a:t>
+            </a:r>
+            <a:r>
+              <a:rPr lang="en-US" sz="1500" dirty="0" err="1">
+                <a:solidFill>
+                  <a:schemeClr val="bg1">
+                    <a:lumMod val="85000"/>
+                  </a:schemeClr>
+                </a:solidFill>
+                <a:latin typeface="Inter"/>
+                <a:ea typeface="Inter"/>
+                <a:cs typeface="Inter"/>
+                <a:sym typeface="Inter"/>
+              </a:rPr>
+              <a:t>mitigazioni</a:t>
+            </a:r>
+            <a:r>
+              <a:rPr lang="en-US" sz="1500" dirty="0">
+                <a:solidFill>
+                  <a:schemeClr val="bg1">
+                    <a:lumMod val="85000"/>
+                  </a:schemeClr>
+                </a:solidFill>
+                <a:latin typeface="Inter"/>
+                <a:ea typeface="Inter"/>
+                <a:cs typeface="Inter"/>
+                <a:sym typeface="Inter"/>
+              </a:rPr>
+              <a:t> per </a:t>
+            </a:r>
+            <a:r>
+              <a:rPr lang="en-US" sz="1500" dirty="0" err="1">
+                <a:solidFill>
+                  <a:schemeClr val="bg1">
+                    <a:lumMod val="85000"/>
+                  </a:schemeClr>
+                </a:solidFill>
+                <a:latin typeface="Inter"/>
+                <a:ea typeface="Inter"/>
+                <a:cs typeface="Inter"/>
+                <a:sym typeface="Inter"/>
+              </a:rPr>
+              <a:t>evitare</a:t>
+            </a:r>
+            <a:r>
+              <a:rPr lang="en-US" sz="1500" dirty="0">
+                <a:solidFill>
+                  <a:schemeClr val="bg1">
+                    <a:lumMod val="85000"/>
+                  </a:schemeClr>
+                </a:solidFill>
+                <a:latin typeface="Inter"/>
+                <a:ea typeface="Inter"/>
+                <a:cs typeface="Inter"/>
+                <a:sym typeface="Inter"/>
+              </a:rPr>
+              <a:t> Data Leak e </a:t>
+            </a:r>
+            <a:r>
+              <a:rPr lang="en-US" sz="1500" dirty="0" err="1">
+                <a:solidFill>
+                  <a:schemeClr val="bg1">
+                    <a:lumMod val="85000"/>
+                  </a:schemeClr>
+                </a:solidFill>
+                <a:latin typeface="Inter"/>
+                <a:ea typeface="Inter"/>
+                <a:cs typeface="Inter"/>
+                <a:sym typeface="Inter"/>
+              </a:rPr>
+              <a:t>altri</a:t>
+            </a:r>
+            <a:r>
+              <a:rPr lang="en-US" sz="1500" dirty="0">
+                <a:solidFill>
+                  <a:schemeClr val="bg1">
+                    <a:lumMod val="85000"/>
+                  </a:schemeClr>
+                </a:solidFill>
+                <a:latin typeface="Inter"/>
+                <a:ea typeface="Inter"/>
+                <a:cs typeface="Inter"/>
+                <a:sym typeface="Inter"/>
+              </a:rPr>
+              <a:t> </a:t>
+            </a:r>
+            <a:r>
+              <a:rPr lang="en-US" sz="1500" dirty="0" err="1">
+                <a:solidFill>
+                  <a:schemeClr val="bg1">
+                    <a:lumMod val="85000"/>
+                  </a:schemeClr>
+                </a:solidFill>
+                <a:latin typeface="Inter"/>
+                <a:ea typeface="Inter"/>
+                <a:cs typeface="Inter"/>
+                <a:sym typeface="Inter"/>
+              </a:rPr>
+              <a:t>miglioramenti</a:t>
+            </a:r>
+            <a:r>
+              <a:rPr lang="en-US" sz="1500" dirty="0">
+                <a:solidFill>
+                  <a:schemeClr val="bg1">
+                    <a:lumMod val="85000"/>
+                  </a:schemeClr>
+                </a:solidFill>
+                <a:latin typeface="Inter"/>
+                <a:ea typeface="Inter"/>
+                <a:cs typeface="Inter"/>
+                <a:sym typeface="Inter"/>
+              </a:rPr>
+              <a:t>)</a:t>
+            </a:r>
+            <a:r>
+              <a:rPr lang="en-US" sz="1500" b="0" i="0" u="none" strike="noStrike" cap="none" dirty="0">
+                <a:solidFill>
+                  <a:schemeClr val="bg1">
+                    <a:lumMod val="85000"/>
+                  </a:schemeClr>
+                </a:solidFill>
+                <a:latin typeface="Inter"/>
+                <a:ea typeface="Inter"/>
+                <a:cs typeface="Inter"/>
+                <a:sym typeface="Inter"/>
+              </a:rPr>
+              <a:t>.</a:t>
             </a:r>
             <a:endParaRPr dirty="0">
               <a:solidFill>
@@ -23542,7 +25364,7 @@
         </p:nvSpPr>
         <p:spPr>
           <a:xfrm>
-            <a:off x="1809750" y="3752850"/>
+            <a:off x="1809600" y="4457700"/>
             <a:ext cx="9048750" cy="738664"/>
           </a:xfrm>
           <a:prstGeom prst="rect">
@@ -23913,7 +25735,7 @@
         </p:nvSpPr>
         <p:spPr>
           <a:xfrm>
-            <a:off x="1809750" y="4600575"/>
+            <a:off x="1809600" y="5305425"/>
             <a:ext cx="9048900" cy="738664"/>
           </a:xfrm>
           <a:prstGeom prst="rect">
@@ -24199,7 +26021,7 @@
         </p:blipFill>
         <p:spPr>
           <a:xfrm>
-            <a:off x="1333500" y="3786187"/>
+            <a:off x="1333350" y="4491037"/>
             <a:ext cx="304800" cy="276225"/>
           </a:xfrm>
           <a:prstGeom prst="rect">
@@ -24226,7 +26048,7 @@
         </p:blipFill>
         <p:spPr>
           <a:xfrm>
-            <a:off x="1333500" y="4633912"/>
+            <a:off x="1333350" y="5338762"/>
             <a:ext cx="333375" cy="276225"/>
           </a:xfrm>
           <a:prstGeom prst="rect">
@@ -24363,8 +26185,8 @@
         </p:blipFill>
         <p:spPr>
           <a:xfrm>
-            <a:off x="6334125" y="2095500"/>
-            <a:ext cx="5286375" cy="3619500"/>
+            <a:off x="6285713" y="591915"/>
+            <a:ext cx="5452249" cy="2586447"/>
           </a:xfrm>
           <a:prstGeom prst="rect">
             <a:avLst/>
@@ -25442,33 +27264,6 @@
           </a:p>
         </p:txBody>
       </p:sp>
-      <p:pic>
-        <p:nvPicPr>
-          <p:cNvPr id="181" name="Google Shape;181;p19" descr="image.png"/>
-          <p:cNvPicPr preferRelativeResize="0"/>
-          <p:nvPr/>
-        </p:nvPicPr>
-        <p:blipFill rotWithShape="1">
-          <a:blip r:embed="rId5">
-            <a:alphaModFix/>
-          </a:blip>
-          <a:srcRect/>
-          <a:stretch/>
-        </p:blipFill>
-        <p:spPr>
-          <a:xfrm>
-            <a:off x="6343650" y="2105025"/>
-            <a:ext cx="5267325" cy="3600450"/>
-          </a:xfrm>
-          <a:prstGeom prst="rect">
-            <a:avLst/>
-          </a:prstGeom>
-          <a:noFill/>
-          <a:ln>
-            <a:noFill/>
-          </a:ln>
-        </p:spPr>
-      </p:pic>
       <p:sp>
         <p:nvSpPr>
           <p:cNvPr id="182" name="Google Shape;182;p19"/>
@@ -25535,6 +27330,99 @@
           </a:p>
         </p:txBody>
       </p:sp>
+      <p:pic>
+        <p:nvPicPr>
+          <p:cNvPr id="3" name="Immagine 2">
+            <a:extLst>
+              <a:ext uri="{FF2B5EF4-FFF2-40B4-BE49-F238E27FC236}">
+                <a16:creationId xmlns:a16="http://schemas.microsoft.com/office/drawing/2014/main" id="{81649526-8FBF-F96B-D12C-018A74A1B2FD}"/>
+              </a:ext>
+            </a:extLst>
+          </p:cNvPr>
+          <p:cNvPicPr>
+            <a:picLocks noChangeAspect="1"/>
+          </p:cNvPicPr>
+          <p:nvPr/>
+        </p:nvPicPr>
+        <p:blipFill>
+          <a:blip r:embed="rId5"/>
+          <a:stretch>
+            <a:fillRect/>
+          </a:stretch>
+        </p:blipFill>
+        <p:spPr>
+          <a:xfrm>
+            <a:off x="6382020" y="677342"/>
+            <a:ext cx="5355942" cy="2415595"/>
+          </a:xfrm>
+          <a:prstGeom prst="rect">
+            <a:avLst/>
+          </a:prstGeom>
+        </p:spPr>
+      </p:pic>
+      <p:pic>
+        <p:nvPicPr>
+          <p:cNvPr id="5" name="Immagine 4">
+            <a:extLst>
+              <a:ext uri="{FF2B5EF4-FFF2-40B4-BE49-F238E27FC236}">
+                <a16:creationId xmlns:a16="http://schemas.microsoft.com/office/drawing/2014/main" id="{AA48C4B3-FAD5-DCA2-2DD8-890A05DA5C6B}"/>
+              </a:ext>
+            </a:extLst>
+          </p:cNvPr>
+          <p:cNvPicPr>
+            <a:picLocks noChangeAspect="1"/>
+          </p:cNvPicPr>
+          <p:nvPr/>
+        </p:nvPicPr>
+        <p:blipFill>
+          <a:blip r:embed="rId6"/>
+          <a:stretch>
+            <a:fillRect/>
+          </a:stretch>
+        </p:blipFill>
+        <p:spPr>
+          <a:xfrm>
+            <a:off x="6381490" y="3506208"/>
+            <a:ext cx="5369534" cy="2386460"/>
+          </a:xfrm>
+          <a:prstGeom prst="rect">
+            <a:avLst/>
+          </a:prstGeom>
+        </p:spPr>
+      </p:pic>
+      <p:pic>
+        <p:nvPicPr>
+          <p:cNvPr id="6" name="Google Shape;170;p19" descr="image.png">
+            <a:extLst>
+              <a:ext uri="{FF2B5EF4-FFF2-40B4-BE49-F238E27FC236}">
+                <a16:creationId xmlns:a16="http://schemas.microsoft.com/office/drawing/2014/main" id="{EA2D10FB-101C-177B-A6FA-8C6A6FC0B085}"/>
+              </a:ext>
+            </a:extLst>
+          </p:cNvPr>
+          <p:cNvPicPr preferRelativeResize="0"/>
+          <p:nvPr/>
+        </p:nvPicPr>
+        <p:blipFill rotWithShape="1">
+          <a:blip r:embed="rId4">
+            <a:alphaModFix/>
+          </a:blip>
+          <a:srcRect/>
+          <a:stretch/>
+        </p:blipFill>
+        <p:spPr>
+          <a:xfrm>
+            <a:off x="6298775" y="3427594"/>
+            <a:ext cx="5452249" cy="2586447"/>
+          </a:xfrm>
+          <a:prstGeom prst="rect">
+            <a:avLst/>
+          </a:prstGeom>
+          <a:noFill/>
+          <a:ln>
+            <a:noFill/>
+          </a:ln>
+        </p:spPr>
+      </p:pic>
     </p:spTree>
   </p:cSld>
   <p:clrMapOvr>
@@ -25611,7 +27499,7 @@
         <p:spPr>
           <a:xfrm>
             <a:off x="571500" y="2152650"/>
-            <a:ext cx="3492549" cy="3505051"/>
+            <a:ext cx="3492549" cy="3804013"/>
           </a:xfrm>
           <a:prstGeom prst="rect">
             <a:avLst/>
@@ -25638,7 +27526,7 @@
         <p:spPr>
           <a:xfrm>
             <a:off x="4349799" y="2152650"/>
-            <a:ext cx="3492549" cy="3505051"/>
+            <a:ext cx="3492549" cy="3804013"/>
           </a:xfrm>
           <a:prstGeom prst="rect">
             <a:avLst/>
@@ -25665,7 +27553,7 @@
         <p:spPr>
           <a:xfrm>
             <a:off x="8128099" y="2152650"/>
-            <a:ext cx="3492549" cy="3505051"/>
+            <a:ext cx="3492549" cy="3804013"/>
           </a:xfrm>
           <a:prstGeom prst="rect">
             <a:avLst/>
@@ -25762,7 +27650,7 @@
         <p:spPr>
           <a:xfrm>
             <a:off x="866775" y="3848100"/>
-            <a:ext cx="2901900" cy="1329595"/>
+            <a:ext cx="2901900" cy="1994392"/>
           </a:xfrm>
           <a:prstGeom prst="rect">
             <a:avLst/>
@@ -26097,6 +27985,48 @@
                 <a:sym typeface="Inter"/>
               </a:rPr>
               <a:t>stato</a:t>
+            </a:r>
+            <a:r>
+              <a:rPr lang="en-US" sz="1350" dirty="0">
+                <a:solidFill>
+                  <a:schemeClr val="bg1">
+                    <a:lumMod val="85000"/>
+                  </a:schemeClr>
+                </a:solidFill>
+                <a:latin typeface="Inter"/>
+                <a:ea typeface="Inter"/>
+                <a:cs typeface="Inter"/>
+                <a:sym typeface="Inter"/>
+              </a:rPr>
+              <a:t> (solo in </a:t>
+            </a:r>
+            <a:r>
+              <a:rPr lang="en-US" sz="1350" dirty="0" err="1">
+                <a:solidFill>
+                  <a:schemeClr val="bg1">
+                    <a:lumMod val="85000"/>
+                  </a:schemeClr>
+                </a:solidFill>
+                <a:latin typeface="Inter"/>
+                <a:ea typeface="Inter"/>
+                <a:cs typeface="Inter"/>
+                <a:sym typeface="Inter"/>
+              </a:rPr>
+              <a:t>varianti</a:t>
+            </a:r>
+            <a:r>
+              <a:rPr lang="en-US" sz="1350" dirty="0">
+                <a:solidFill>
+                  <a:schemeClr val="bg1">
+                    <a:lumMod val="85000"/>
+                  </a:schemeClr>
+                </a:solidFill>
+                <a:latin typeface="Inter"/>
+                <a:ea typeface="Inter"/>
+                <a:cs typeface="Inter"/>
+                <a:sym typeface="Inter"/>
+              </a:rPr>
+              <a:t> main ed exp, e senza data leakage in exp con LOSO)</a:t>
             </a:r>
             <a:r>
               <a:rPr lang="en-US" sz="1350" b="0" i="0" u="none" strike="noStrike" cap="none" dirty="0">
@@ -26561,8 +28491,8 @@
         </p:nvSpPr>
         <p:spPr>
           <a:xfrm>
-            <a:off x="8423374" y="3305175"/>
-            <a:ext cx="1340167" cy="400050"/>
+            <a:off x="8275761" y="3267417"/>
+            <a:ext cx="3197126" cy="323165"/>
           </a:xfrm>
           <a:prstGeom prst="rect">
             <a:avLst/>
@@ -26599,6 +28529,30 @@
               </a:rPr>
               <a:t>RUSBoost</a:t>
             </a:r>
+            <a:r>
+              <a:rPr lang="en-US" sz="2100" b="0" i="0" u="none" strike="noStrike" cap="none" dirty="0">
+                <a:solidFill>
+                  <a:srgbClr val="38BDF8"/>
+                </a:solidFill>
+                <a:latin typeface="Poppins Medium"/>
+                <a:ea typeface="Poppins Medium"/>
+                <a:cs typeface="Poppins Medium"/>
+                <a:sym typeface="Poppins Medium"/>
+              </a:rPr>
+              <a:t> e </a:t>
+            </a:r>
+            <a:r>
+              <a:rPr lang="en-US" sz="2100" b="0" i="0" u="none" strike="noStrike" cap="none" dirty="0" err="1">
+                <a:solidFill>
+                  <a:srgbClr val="38BDF8"/>
+                </a:solidFill>
+                <a:latin typeface="Poppins Medium"/>
+                <a:ea typeface="Poppins Medium"/>
+                <a:cs typeface="Poppins Medium"/>
+                <a:sym typeface="Poppins Medium"/>
+              </a:rPr>
+              <a:t>GentleBoost</a:t>
+            </a:r>
             <a:endParaRPr dirty="0"/>
           </a:p>
         </p:txBody>
@@ -26612,7 +28566,7 @@
         <p:spPr>
           <a:xfrm>
             <a:off x="8423374" y="3848100"/>
-            <a:ext cx="2901900" cy="1661993"/>
+            <a:ext cx="2901900" cy="1994392"/>
           </a:xfrm>
           <a:prstGeom prst="rect">
             <a:avLst/>
@@ -26708,7 +28662,49 @@
                 <a:cs typeface="Inter"/>
                 <a:sym typeface="Inter"/>
               </a:rPr>
-              <a:t> del dataset </a:t>
+              <a:t> del dataset, è </a:t>
+            </a:r>
+            <a:r>
+              <a:rPr lang="en-US" sz="1350" b="0" i="0" u="none" strike="noStrike" cap="none" dirty="0" err="1">
+                <a:solidFill>
+                  <a:schemeClr val="bg1">
+                    <a:lumMod val="85000"/>
+                  </a:schemeClr>
+                </a:solidFill>
+                <a:latin typeface="Inter"/>
+                <a:ea typeface="Inter"/>
+                <a:cs typeface="Inter"/>
+                <a:sym typeface="Inter"/>
+              </a:rPr>
+              <a:t>stato</a:t>
+            </a:r>
+            <a:r>
+              <a:rPr lang="en-US" sz="1350" b="0" i="0" u="none" strike="noStrike" cap="none" dirty="0">
+                <a:solidFill>
+                  <a:schemeClr val="bg1">
+                    <a:lumMod val="85000"/>
+                  </a:schemeClr>
+                </a:solidFill>
+                <a:latin typeface="Inter"/>
+                <a:ea typeface="Inter"/>
+                <a:cs typeface="Inter"/>
+                <a:sym typeface="Inter"/>
+              </a:rPr>
+              <a:t> </a:t>
+            </a:r>
+            <a:r>
+              <a:rPr lang="en-US" sz="1350" dirty="0" err="1">
+                <a:solidFill>
+                  <a:schemeClr val="bg1">
+                    <a:lumMod val="85000"/>
+                  </a:schemeClr>
+                </a:solidFill>
+                <a:latin typeface="Inter"/>
+                <a:ea typeface="Inter"/>
+                <a:cs typeface="Inter"/>
+                <a:sym typeface="Inter"/>
+              </a:rPr>
+              <a:t>utilizzato</a:t>
             </a:r>
             <a:r>
               <a:rPr lang="en-US" sz="1350" dirty="0">
@@ -26722,52 +28718,24 @@
                 <a:cs typeface="Inter"/>
                 <a:sym typeface="Inter"/>
               </a:rPr>
-              <a:t>(</a:t>
-            </a:r>
-            <a:r>
-              <a:rPr lang="en-US" sz="1350" dirty="0" err="1">
-                <a:solidFill>
-                  <a:schemeClr val="bg1">
-                    <a:lumMod val="85000"/>
-                  </a:schemeClr>
-                </a:solidFill>
-                <a:latin typeface="Inter"/>
-                <a:ea typeface="Inter"/>
-                <a:cs typeface="Inter"/>
-                <a:sym typeface="Inter"/>
-              </a:rPr>
-              <a:t>essendoci</a:t>
-            </a:r>
-            <a:r>
-              <a:rPr lang="en-US" sz="1350" dirty="0">
-                <a:solidFill>
-                  <a:schemeClr val="bg1">
-                    <a:lumMod val="85000"/>
-                  </a:schemeClr>
-                </a:solidFill>
-                <a:latin typeface="Inter"/>
-                <a:ea typeface="Inter"/>
-                <a:cs typeface="Inter"/>
-                <a:sym typeface="Inter"/>
-              </a:rPr>
               <a:t> </a:t>
             </a:r>
             <a:r>
-              <a:rPr lang="en-US" sz="1350" dirty="0" err="1">
-                <a:solidFill>
-                  <a:schemeClr val="bg1">
-                    <a:lumMod val="85000"/>
-                  </a:schemeClr>
-                </a:solidFill>
-                <a:latin typeface="Inter"/>
-                <a:ea typeface="Inter"/>
-                <a:cs typeface="Inter"/>
-                <a:sym typeface="Inter"/>
-              </a:rPr>
-              <a:t>più</a:t>
-            </a:r>
-            <a:r>
-              <a:rPr lang="en-US" sz="1350" dirty="0">
+              <a:rPr lang="en-US" sz="1350" b="0" i="0" u="none" strike="noStrike" cap="none" dirty="0" err="1">
+                <a:solidFill>
+                  <a:schemeClr val="bg1">
+                    <a:lumMod val="85000"/>
+                  </a:schemeClr>
+                </a:solidFill>
+                <a:latin typeface="Inter"/>
+                <a:ea typeface="Inter"/>
+                <a:cs typeface="Inter"/>
+                <a:sym typeface="Inter"/>
+              </a:rPr>
+              <a:t>l'algoritmo</a:t>
+            </a:r>
+            <a:r>
+              <a:rPr lang="en-US" sz="1350" b="0" i="0" u="none" strike="noStrike" cap="none" dirty="0">
                 <a:solidFill>
                   <a:schemeClr val="bg1">
                     <a:lumMod val="85000"/>
@@ -26781,32 +28749,18 @@
               <a:t> </a:t>
             </a:r>
             <a:r>
-              <a:rPr lang="en-US" sz="1350" dirty="0" err="1">
-                <a:solidFill>
-                  <a:schemeClr val="bg1">
-                    <a:lumMod val="85000"/>
-                  </a:schemeClr>
-                </a:solidFill>
-                <a:latin typeface="Inter"/>
-                <a:ea typeface="Inter"/>
-                <a:cs typeface="Inter"/>
-                <a:sym typeface="Inter"/>
-              </a:rPr>
-              <a:t>campioni</a:t>
-            </a:r>
-            <a:r>
-              <a:rPr lang="en-US" sz="1350" dirty="0">
-                <a:solidFill>
-                  <a:schemeClr val="bg1">
-                    <a:lumMod val="85000"/>
-                  </a:schemeClr>
-                </a:solidFill>
-                <a:latin typeface="Inter"/>
-                <a:ea typeface="Inter"/>
-                <a:cs typeface="Inter"/>
-                <a:sym typeface="Inter"/>
-              </a:rPr>
-              <a:t> di </a:t>
+              <a:rPr lang="en-US" sz="1350" b="0" i="0" u="none" strike="noStrike" cap="none" dirty="0" err="1">
+                <a:solidFill>
+                  <a:schemeClr val="bg1">
+                    <a:lumMod val="85000"/>
+                  </a:schemeClr>
+                </a:solidFill>
+                <a:latin typeface="Inter"/>
+                <a:ea typeface="Inter"/>
+                <a:cs typeface="Inter"/>
+                <a:sym typeface="Inter"/>
+              </a:rPr>
+              <a:t>RUSBoost</a:t>
             </a:r>
             <a:r>
               <a:rPr lang="en-US" sz="1350" b="0" i="0" u="none" strike="noStrike" cap="none" dirty="0">
@@ -26820,7 +28774,7 @@
                 <a:cs typeface="Inter"/>
                 <a:sym typeface="Inter"/>
               </a:rPr>
-              <a:t> Stress), è </a:t>
+              <a:t> </a:t>
             </a:r>
             <a:r>
               <a:rPr lang="en-US" sz="1350" b="0" i="0" u="none" strike="noStrike" cap="none" dirty="0" err="1">
@@ -26834,7 +28788,7 @@
                 <a:cs typeface="Inter"/>
                 <a:sym typeface="Inter"/>
               </a:rPr>
-              <a:t>stato</a:t>
+              <a:t>nell’Ensemble</a:t>
             </a:r>
             <a:r>
               <a:rPr lang="en-US" sz="1350" b="0" i="0" u="none" strike="noStrike" cap="none" dirty="0">
@@ -26848,37 +28802,65 @@
                 <a:cs typeface="Inter"/>
                 <a:sym typeface="Inter"/>
               </a:rPr>
+              <a:t> Random Forest e K-Fold, </a:t>
+            </a:r>
+            <a:r>
+              <a:rPr lang="en-US" sz="1350" b="0" i="0" u="none" strike="noStrike" cap="none" dirty="0" err="1">
+                <a:solidFill>
+                  <a:schemeClr val="bg1">
+                    <a:lumMod val="85000"/>
+                  </a:schemeClr>
+                </a:solidFill>
+                <a:latin typeface="Inter"/>
+                <a:ea typeface="Inter"/>
+                <a:cs typeface="Inter"/>
+                <a:sym typeface="Inter"/>
+              </a:rPr>
+              <a:t>mentre</a:t>
+            </a:r>
+            <a:r>
+              <a:rPr lang="en-US" sz="1350" b="0" i="0" u="none" strike="noStrike" cap="none" dirty="0">
+                <a:solidFill>
+                  <a:schemeClr val="bg1">
+                    <a:lumMod val="85000"/>
+                  </a:schemeClr>
+                </a:solidFill>
+                <a:latin typeface="Inter"/>
+                <a:ea typeface="Inter"/>
+                <a:cs typeface="Inter"/>
+                <a:sym typeface="Inter"/>
+              </a:rPr>
+              <a:t> LOSO </a:t>
+            </a:r>
+            <a:r>
+              <a:rPr lang="en-US" sz="1350" b="0" i="0" u="none" strike="noStrike" cap="none" dirty="0" err="1">
+                <a:solidFill>
+                  <a:schemeClr val="bg1">
+                    <a:lumMod val="85000"/>
+                  </a:schemeClr>
+                </a:solidFill>
+                <a:latin typeface="Inter"/>
+                <a:ea typeface="Inter"/>
+                <a:cs typeface="Inter"/>
+                <a:sym typeface="Inter"/>
+              </a:rPr>
+              <a:t>nella</a:t>
+            </a:r>
+            <a:r>
+              <a:rPr lang="en-US" sz="1350" b="0" i="0" u="none" strike="noStrike" cap="none" dirty="0">
+                <a:solidFill>
+                  <a:schemeClr val="bg1">
+                    <a:lumMod val="85000"/>
+                  </a:schemeClr>
+                </a:solidFill>
+                <a:latin typeface="Inter"/>
+                <a:ea typeface="Inter"/>
+                <a:cs typeface="Inter"/>
+                <a:sym typeface="Inter"/>
+              </a:rPr>
               <a:t> </a:t>
             </a:r>
             <a:r>
-              <a:rPr lang="en-US" sz="1350" dirty="0" err="1">
-                <a:solidFill>
-                  <a:schemeClr val="bg1">
-                    <a:lumMod val="85000"/>
-                  </a:schemeClr>
-                </a:solidFill>
-                <a:latin typeface="Inter"/>
-                <a:ea typeface="Inter"/>
-                <a:cs typeface="Inter"/>
-                <a:sym typeface="Inter"/>
-              </a:rPr>
-              <a:t>utilizzato</a:t>
-            </a:r>
-            <a:r>
-              <a:rPr lang="en-US" sz="1350" dirty="0">
-                <a:solidFill>
-                  <a:schemeClr val="bg1">
-                    <a:lumMod val="85000"/>
-                  </a:schemeClr>
-                </a:solidFill>
-                <a:latin typeface="Inter"/>
-                <a:ea typeface="Inter"/>
-                <a:cs typeface="Inter"/>
-                <a:sym typeface="Inter"/>
-              </a:rPr>
-              <a:t> </a:t>
-            </a:r>
-            <a:r>
               <a:rPr lang="en-US" sz="1350" b="0" i="0" u="none" strike="noStrike" cap="none" dirty="0" err="1">
                 <a:solidFill>
                   <a:schemeClr val="bg1">
@@ -26890,7 +28872,7 @@
                 <a:cs typeface="Inter"/>
                 <a:sym typeface="Inter"/>
               </a:rPr>
-              <a:t>l'algoritmo</a:t>
+              <a:t>variante</a:t>
             </a:r>
             <a:r>
               <a:rPr lang="en-US" sz="1350" b="0" i="0" u="none" strike="noStrike" cap="none" dirty="0">
@@ -26904,7 +28886,7 @@
                 <a:cs typeface="Inter"/>
                 <a:sym typeface="Inter"/>
               </a:rPr>
-              <a:t> </a:t>
+              <a:t> con </a:t>
             </a:r>
             <a:r>
               <a:rPr lang="en-US" sz="1350" b="0" i="0" u="none" strike="noStrike" cap="none" dirty="0" err="1">
@@ -26918,7 +28900,7 @@
                 <a:cs typeface="Inter"/>
                 <a:sym typeface="Inter"/>
               </a:rPr>
-              <a:t>RUSBoost</a:t>
+              <a:t>GentleBoost</a:t>
             </a:r>
             <a:r>
               <a:rPr lang="en-US" sz="1350" b="0" i="0" u="none" strike="noStrike" cap="none" dirty="0">
@@ -26932,35 +28914,7 @@
                 <a:cs typeface="Inter"/>
                 <a:sym typeface="Inter"/>
               </a:rPr>
-              <a:t> </a:t>
-            </a:r>
-            <a:r>
-              <a:rPr lang="en-US" sz="1350" b="0" i="0" u="none" strike="noStrike" cap="none" dirty="0" err="1">
-                <a:solidFill>
-                  <a:schemeClr val="bg1">
-                    <a:lumMod val="85000"/>
-                  </a:schemeClr>
-                </a:solidFill>
-                <a:latin typeface="Inter"/>
-                <a:ea typeface="Inter"/>
-                <a:cs typeface="Inter"/>
-                <a:sym typeface="Inter"/>
-              </a:rPr>
-              <a:t>nell'ensemble</a:t>
-            </a:r>
-            <a:r>
-              <a:rPr lang="en-US" sz="1350" b="0" i="0" u="none" strike="noStrike" cap="none" dirty="0">
-                <a:solidFill>
-                  <a:schemeClr val="bg1">
-                    <a:lumMod val="85000"/>
-                  </a:schemeClr>
-                </a:solidFill>
-                <a:latin typeface="Inter"/>
-                <a:ea typeface="Inter"/>
-                <a:cs typeface="Inter"/>
-                <a:sym typeface="Inter"/>
-              </a:rPr>
-              <a:t> Random Forest.</a:t>
+              <a:t>.</a:t>
             </a:r>
             <a:endParaRPr dirty="0">
               <a:solidFill>

--- a/Progetto Interfacce Uomo-Macchina.pptx
+++ b/Progetto Interfacce Uomo-Macchina.pptx
@@ -19177,7 +19177,7 @@
         </p:nvSpPr>
         <p:spPr>
           <a:xfrm>
-            <a:off x="571499" y="4600907"/>
+            <a:off x="571500" y="4513265"/>
             <a:ext cx="4287883" cy="1661993"/>
           </a:xfrm>
           <a:prstGeom prst="rect">
@@ -19228,7 +19228,7 @@
                 <a:cs typeface="Inter"/>
                 <a:sym typeface="Inter"/>
               </a:rPr>
-              <a:t> con LOSO (al posto di K-Fold)</a:t>
+              <a:t> con LOSO</a:t>
             </a:r>
           </a:p>
           <a:p>
@@ -19254,7 +19254,7 @@
                 <a:cs typeface="Inter"/>
                 <a:sym typeface="Inter"/>
               </a:rPr>
-              <a:t>Sono state inoltre testate versioni con LOSO al posto di K-Fold, con </a:t>
+              <a:t>Sono state inoltre testate versioni con LOSO (</a:t>
             </a:r>
             <a:r>
               <a:rPr lang="it-IT" sz="1350" dirty="0" err="1">
@@ -19266,6 +19266,30 @@
                 <a:cs typeface="Inter"/>
                 <a:sym typeface="Inter"/>
               </a:rPr>
+              <a:t>Leave</a:t>
+            </a:r>
+            <a:r>
+              <a:rPr lang="it-IT" sz="1350" dirty="0">
+                <a:solidFill>
+                  <a:srgbClr val="CBD5E1"/>
+                </a:solidFill>
+                <a:latin typeface="Inter"/>
+                <a:ea typeface="Inter"/>
+                <a:cs typeface="Inter"/>
+                <a:sym typeface="Inter"/>
+              </a:rPr>
+              <a:t>-One-Subject-Out), con </a:t>
+            </a:r>
+            <a:r>
+              <a:rPr lang="it-IT" sz="1350" dirty="0" err="1">
+                <a:solidFill>
+                  <a:srgbClr val="CBD5E1"/>
+                </a:solidFill>
+                <a:latin typeface="Inter"/>
+                <a:ea typeface="Inter"/>
+                <a:cs typeface="Inter"/>
+                <a:sym typeface="Inter"/>
+              </a:rPr>
               <a:t>GentleBoost</a:t>
             </a:r>
             <a:r>
@@ -19304,15 +19328,107 @@
               </a:rPr>
               <a:t>, che non soffrono di Data Leakage ma raggiungono risultati non al livello del Paper.</a:t>
             </a:r>
+          </a:p>
+        </p:txBody>
+      </p:sp>
+      <p:sp>
+        <p:nvSpPr>
+          <p:cNvPr id="6" name="CasellaDiTesto 5">
+            <a:extLst>
+              <a:ext uri="{FF2B5EF4-FFF2-40B4-BE49-F238E27FC236}">
+                <a16:creationId xmlns:a16="http://schemas.microsoft.com/office/drawing/2014/main" id="{5EFC5A06-B844-15E6-F0F9-A6EAE5150CD7}"/>
+              </a:ext>
+            </a:extLst>
+          </p:cNvPr>
+          <p:cNvSpPr txBox="1"/>
+          <p:nvPr/>
+        </p:nvSpPr>
+        <p:spPr>
+          <a:xfrm>
+            <a:off x="5991903" y="6490353"/>
+            <a:ext cx="4223418" cy="307777"/>
+          </a:xfrm>
+          <a:prstGeom prst="rect">
+            <a:avLst/>
+          </a:prstGeom>
+          <a:noFill/>
+        </p:spPr>
+        <p:txBody>
+          <a:bodyPr wrap="square">
+            <a:spAutoFit/>
+          </a:bodyPr>
+          <a:lstStyle/>
+          <a:p>
+            <a:r>
+              <a:rPr lang="en-US" sz="1400" dirty="0">
+                <a:solidFill>
+                  <a:srgbClr val="CBD5E1"/>
+                </a:solidFill>
+                <a:latin typeface="Inter"/>
+                <a:ea typeface="Inter"/>
+                <a:cs typeface="Inter"/>
+                <a:sym typeface="Inter"/>
+              </a:rPr>
+              <a:t>Matrice di </a:t>
+            </a:r>
+            <a:r>
+              <a:rPr lang="en-US" sz="1400" dirty="0" err="1">
+                <a:solidFill>
+                  <a:srgbClr val="CBD5E1"/>
+                </a:solidFill>
+                <a:latin typeface="Inter"/>
+                <a:ea typeface="Inter"/>
+                <a:cs typeface="Inter"/>
+                <a:sym typeface="Inter"/>
+              </a:rPr>
+              <a:t>confusione</a:t>
+            </a:r>
+            <a:r>
+              <a:rPr lang="en-US" sz="1400" dirty="0">
+                <a:solidFill>
+                  <a:srgbClr val="CBD5E1"/>
+                </a:solidFill>
+                <a:latin typeface="Inter"/>
+                <a:ea typeface="Inter"/>
+                <a:cs typeface="Inter"/>
+                <a:sym typeface="Inter"/>
+              </a:rPr>
+              <a:t> con </a:t>
+            </a:r>
+            <a:r>
+              <a:rPr lang="en-US" sz="1400" dirty="0" err="1">
+                <a:solidFill>
+                  <a:srgbClr val="CBD5E1"/>
+                </a:solidFill>
+                <a:latin typeface="Inter"/>
+                <a:ea typeface="Inter"/>
+                <a:cs typeface="Inter"/>
+                <a:sym typeface="Inter"/>
+              </a:rPr>
+              <a:t>GentleBoost</a:t>
+            </a:r>
+            <a:r>
+              <a:rPr lang="en-US" sz="1400" dirty="0">
+                <a:solidFill>
+                  <a:srgbClr val="CBD5E1"/>
+                </a:solidFill>
+                <a:latin typeface="Inter"/>
+                <a:ea typeface="Inter"/>
+                <a:cs typeface="Inter"/>
+                <a:sym typeface="Inter"/>
+              </a:rPr>
+              <a:t> e LOSO</a:t>
+            </a:r>
+            <a:endParaRPr lang="it-IT" dirty="0"/>
           </a:p>
         </p:txBody>
       </p:sp>
       <p:pic>
         <p:nvPicPr>
-          <p:cNvPr id="5" name="Immagine 4">
+          <p:cNvPr id="8" name="Immagine 7">
             <a:extLst>
               <a:ext uri="{FF2B5EF4-FFF2-40B4-BE49-F238E27FC236}">
-                <a16:creationId xmlns:a16="http://schemas.microsoft.com/office/drawing/2014/main" id="{45DE4265-5AFB-7A9F-7FC9-D05C9DFDE82F}"/>
+                <a16:creationId xmlns:a16="http://schemas.microsoft.com/office/drawing/2014/main" id="{86A96034-F068-7441-D27D-728C13871E88}"/>
               </a:ext>
             </a:extLst>
           </p:cNvPr>
@@ -19329,8 +19445,8 @@
         </p:blipFill>
         <p:spPr>
           <a:xfrm>
-            <a:off x="5887810" y="4190707"/>
-            <a:ext cx="4431607" cy="2239777"/>
+            <a:off x="5582792" y="4225541"/>
+            <a:ext cx="5041640" cy="2237443"/>
           </a:xfrm>
           <a:prstGeom prst="roundRect">
             <a:avLst>
@@ -19361,98 +19477,6 @@
           </a:sp3d>
         </p:spPr>
       </p:pic>
-      <p:sp>
-        <p:nvSpPr>
-          <p:cNvPr id="6" name="CasellaDiTesto 5">
-            <a:extLst>
-              <a:ext uri="{FF2B5EF4-FFF2-40B4-BE49-F238E27FC236}">
-                <a16:creationId xmlns:a16="http://schemas.microsoft.com/office/drawing/2014/main" id="{5EFC5A06-B844-15E6-F0F9-A6EAE5150CD7}"/>
-              </a:ext>
-            </a:extLst>
-          </p:cNvPr>
-          <p:cNvSpPr txBox="1"/>
-          <p:nvPr/>
-        </p:nvSpPr>
-        <p:spPr>
-          <a:xfrm>
-            <a:off x="6155268" y="6521703"/>
-            <a:ext cx="4223418" cy="307777"/>
-          </a:xfrm>
-          <a:prstGeom prst="rect">
-            <a:avLst/>
-          </a:prstGeom>
-          <a:noFill/>
-        </p:spPr>
-        <p:txBody>
-          <a:bodyPr wrap="square">
-            <a:spAutoFit/>
-          </a:bodyPr>
-          <a:lstStyle/>
-          <a:p>
-            <a:r>
-              <a:rPr lang="en-US" sz="1400" dirty="0">
-                <a:solidFill>
-                  <a:srgbClr val="CBD5E1"/>
-                </a:solidFill>
-                <a:latin typeface="Inter"/>
-                <a:ea typeface="Inter"/>
-                <a:cs typeface="Inter"/>
-                <a:sym typeface="Inter"/>
-              </a:rPr>
-              <a:t>Matrice di </a:t>
-            </a:r>
-            <a:r>
-              <a:rPr lang="en-US" sz="1400" dirty="0" err="1">
-                <a:solidFill>
-                  <a:srgbClr val="CBD5E1"/>
-                </a:solidFill>
-                <a:latin typeface="Inter"/>
-                <a:ea typeface="Inter"/>
-                <a:cs typeface="Inter"/>
-                <a:sym typeface="Inter"/>
-              </a:rPr>
-              <a:t>confusioe</a:t>
-            </a:r>
-            <a:r>
-              <a:rPr lang="en-US" sz="1400" dirty="0">
-                <a:solidFill>
-                  <a:srgbClr val="CBD5E1"/>
-                </a:solidFill>
-                <a:latin typeface="Inter"/>
-                <a:ea typeface="Inter"/>
-                <a:cs typeface="Inter"/>
-                <a:sym typeface="Inter"/>
-              </a:rPr>
-              <a:t> con </a:t>
-            </a:r>
-            <a:r>
-              <a:rPr lang="en-US" sz="1400" dirty="0" err="1">
-                <a:solidFill>
-                  <a:srgbClr val="CBD5E1"/>
-                </a:solidFill>
-                <a:latin typeface="Inter"/>
-                <a:ea typeface="Inter"/>
-                <a:cs typeface="Inter"/>
-                <a:sym typeface="Inter"/>
-              </a:rPr>
-              <a:t>GentleBoost</a:t>
-            </a:r>
-            <a:r>
-              <a:rPr lang="en-US" sz="1400" dirty="0">
-                <a:solidFill>
-                  <a:srgbClr val="CBD5E1"/>
-                </a:solidFill>
-                <a:latin typeface="Inter"/>
-                <a:ea typeface="Inter"/>
-                <a:cs typeface="Inter"/>
-                <a:sym typeface="Inter"/>
-              </a:rPr>
-              <a:t> e LOSO</a:t>
-            </a:r>
-            <a:endParaRPr lang="it-IT" dirty="0"/>
-          </a:p>
-        </p:txBody>
-      </p:sp>
     </p:spTree>
   </p:cSld>
   <p:clrMapOvr>
@@ -20556,8 +20580,8 @@
         </p:blipFill>
         <p:spPr>
           <a:xfrm>
-            <a:off x="571500" y="2277516"/>
-            <a:ext cx="5286375" cy="3255466"/>
+            <a:off x="571500" y="2277515"/>
+            <a:ext cx="5286375" cy="3490237"/>
           </a:xfrm>
           <a:prstGeom prst="rect">
             <a:avLst/>
@@ -20584,7 +20608,7 @@
         <p:spPr>
           <a:xfrm>
             <a:off x="6334125" y="2277516"/>
-            <a:ext cx="5286375" cy="3255466"/>
+            <a:ext cx="5286375" cy="3490238"/>
           </a:xfrm>
           <a:prstGeom prst="rect">
             <a:avLst/>
@@ -21136,7 +21160,31 @@
                 <a:cs typeface="Inter"/>
                 <a:sym typeface="Inter"/>
               </a:rPr>
-              <a:t> del 76,5% (</a:t>
+              <a:t> del </a:t>
+            </a:r>
+            <a:r>
+              <a:rPr lang="en-US" sz="1350" b="1" i="0" u="none" strike="noStrike" cap="none" dirty="0">
+                <a:solidFill>
+                  <a:srgbClr val="CBD5E1"/>
+                </a:solidFill>
+                <a:latin typeface="Inter"/>
+                <a:ea typeface="Inter"/>
+                <a:cs typeface="Inter"/>
+                <a:sym typeface="Inter"/>
+              </a:rPr>
+              <a:t>76,5%</a:t>
+            </a:r>
+            <a:r>
+              <a:rPr lang="en-US" sz="1350" b="0" i="0" u="none" strike="noStrike" cap="none" dirty="0">
+                <a:solidFill>
+                  <a:srgbClr val="CBD5E1"/>
+                </a:solidFill>
+                <a:latin typeface="Inter"/>
+                <a:ea typeface="Inter"/>
+                <a:cs typeface="Inter"/>
+                <a:sym typeface="Inter"/>
+              </a:rPr>
+              <a:t> (</a:t>
             </a:r>
             <a:r>
               <a:rPr lang="en-US" sz="1350" b="0" i="0" u="none" strike="noStrike" cap="none" dirty="0" err="1">
@@ -21237,7 +21285,7 @@
         <p:spPr>
           <a:xfrm>
             <a:off x="6724650" y="3210966"/>
-            <a:ext cx="4505400" cy="997196"/>
+            <a:ext cx="4505400" cy="2326791"/>
           </a:xfrm>
           <a:prstGeom prst="rect">
             <a:avLst/>
@@ -21469,34 +21517,7 @@
               </a:rPr>
               <a:t>.</a:t>
             </a:r>
-            <a:endParaRPr dirty="0"/>
           </a:p>
-        </p:txBody>
-      </p:sp>
-      <p:sp>
-        <p:nvSpPr>
-          <p:cNvPr id="109" name="Google Shape;109;p15"/>
-          <p:cNvSpPr txBox="1"/>
-          <p:nvPr/>
-        </p:nvSpPr>
-        <p:spPr>
-          <a:xfrm>
-            <a:off x="6724650" y="4162322"/>
-            <a:ext cx="4505400" cy="997196"/>
-          </a:xfrm>
-          <a:prstGeom prst="rect">
-            <a:avLst/>
-          </a:prstGeom>
-          <a:noFill/>
-          <a:ln>
-            <a:noFill/>
-          </a:ln>
-        </p:spPr>
-        <p:txBody>
-          <a:bodyPr spcFirstLastPara="1" wrap="square" lIns="0" tIns="0" rIns="0" bIns="0" anchor="t" anchorCtr="0">
-            <a:spAutoFit/>
-          </a:bodyPr>
-          <a:lstStyle/>
           <a:p>
             <a:pPr marL="0" marR="0" lvl="0" indent="0" algn="l" rtl="0">
               <a:lnSpc>
@@ -21517,7 +21538,6 @@
                 </a:solidFill>
                 <a:latin typeface="Inter"/>
                 <a:ea typeface="Inter"/>
-                <a:cs typeface="Inter"/>
                 <a:sym typeface="Inter"/>
               </a:rPr>
               <a:t>Questo</a:t>
@@ -21529,7 +21549,6 @@
                 </a:solidFill>
                 <a:latin typeface="Inter"/>
                 <a:ea typeface="Inter"/>
-                <a:cs typeface="Inter"/>
                 <a:sym typeface="Inter"/>
               </a:rPr>
               <a:t> </a:t>
@@ -21541,7 +21560,6 @@
                 </a:solidFill>
                 <a:latin typeface="Inter"/>
                 <a:ea typeface="Inter"/>
-                <a:cs typeface="Inter"/>
                 <a:sym typeface="Inter"/>
               </a:rPr>
               <a:t>può</a:t>
@@ -21553,7 +21571,6 @@
                 </a:solidFill>
                 <a:latin typeface="Inter"/>
                 <a:ea typeface="Inter"/>
-                <a:cs typeface="Inter"/>
                 <a:sym typeface="Inter"/>
               </a:rPr>
               <a:t> </a:t>
@@ -21565,7 +21582,6 @@
                 </a:solidFill>
                 <a:latin typeface="Inter"/>
                 <a:ea typeface="Inter"/>
-                <a:cs typeface="Inter"/>
                 <a:sym typeface="Inter"/>
               </a:rPr>
               <a:t>essere</a:t>
@@ -21577,7 +21593,6 @@
                 </a:solidFill>
                 <a:latin typeface="Inter"/>
                 <a:ea typeface="Inter"/>
-                <a:cs typeface="Inter"/>
                 <a:sym typeface="Inter"/>
               </a:rPr>
               <a:t> </a:t>
@@ -21589,7 +21604,6 @@
                 </a:solidFill>
                 <a:latin typeface="Inter"/>
                 <a:ea typeface="Inter"/>
-                <a:cs typeface="Inter"/>
                 <a:sym typeface="Inter"/>
               </a:rPr>
               <a:t>migliorato</a:t>
@@ -21601,7 +21615,50 @@
                 </a:solidFill>
                 <a:latin typeface="Inter"/>
                 <a:ea typeface="Inter"/>
-                <a:cs typeface="Inter"/>
+                <a:sym typeface="Inter"/>
+              </a:rPr>
+              <a:t> (per </a:t>
+            </a:r>
+            <a:r>
+              <a:rPr lang="en-US" sz="1350" dirty="0" err="1">
+                <a:solidFill>
+                  <a:srgbClr val="CBD5E1"/>
+                </a:solidFill>
+                <a:latin typeface="Inter"/>
+                <a:ea typeface="Inter"/>
+                <a:sym typeface="Inter"/>
+              </a:rPr>
+              <a:t>esempio</a:t>
+            </a:r>
+            <a:r>
+              <a:rPr lang="en-US" sz="1350" dirty="0">
+                <a:solidFill>
+                  <a:srgbClr val="CBD5E1"/>
+                </a:solidFill>
+                <a:latin typeface="Inter"/>
+                <a:ea typeface="Inter"/>
+                <a:sym typeface="Inter"/>
+              </a:rPr>
+              <a:t>) </a:t>
+            </a:r>
+            <a:r>
+              <a:rPr lang="en-US" sz="1350" dirty="0" err="1">
+                <a:solidFill>
+                  <a:srgbClr val="CBD5E1"/>
+                </a:solidFill>
+                <a:latin typeface="Inter"/>
+                <a:ea typeface="Inter"/>
+                <a:sym typeface="Inter"/>
+              </a:rPr>
+              <a:t>tramite</a:t>
+            </a:r>
+            <a:r>
+              <a:rPr lang="en-US" sz="1350" dirty="0">
+                <a:solidFill>
+                  <a:srgbClr val="CBD5E1"/>
+                </a:solidFill>
+                <a:latin typeface="Inter"/>
+                <a:ea typeface="Inter"/>
                 <a:sym typeface="Inter"/>
               </a:rPr>
               <a:t> </a:t>
@@ -21613,10 +21670,9 @@
                 </a:solidFill>
                 <a:latin typeface="Inter"/>
                 <a:ea typeface="Inter"/>
-                <a:cs typeface="Inter"/>
-                <a:sym typeface="Inter"/>
-              </a:rPr>
-              <a:t>tramite</a:t>
+                <a:sym typeface="Inter"/>
+              </a:rPr>
+              <a:t>l’estrazione</a:t>
             </a:r>
             <a:r>
               <a:rPr lang="en-US" sz="1350" dirty="0">
@@ -21625,7 +21681,50 @@
                 </a:solidFill>
                 <a:latin typeface="Inter"/>
                 <a:ea typeface="Inter"/>
-                <a:cs typeface="Inter"/>
+                <a:sym typeface="Inter"/>
+              </a:rPr>
+              <a:t> di </a:t>
+            </a:r>
+            <a:r>
+              <a:rPr lang="en-US" sz="1350" dirty="0" err="1">
+                <a:solidFill>
+                  <a:srgbClr val="CBD5E1"/>
+                </a:solidFill>
+                <a:latin typeface="Inter"/>
+                <a:ea typeface="Inter"/>
+                <a:sym typeface="Inter"/>
+              </a:rPr>
+              <a:t>più</a:t>
+            </a:r>
+            <a:r>
+              <a:rPr lang="en-US" sz="1350" dirty="0">
+                <a:solidFill>
+                  <a:srgbClr val="CBD5E1"/>
+                </a:solidFill>
+                <a:latin typeface="Inter"/>
+                <a:ea typeface="Inter"/>
+                <a:sym typeface="Inter"/>
+              </a:rPr>
+              <a:t> features </a:t>
+            </a:r>
+            <a:r>
+              <a:rPr lang="en-US" sz="1350" dirty="0" err="1">
+                <a:solidFill>
+                  <a:srgbClr val="CBD5E1"/>
+                </a:solidFill>
+                <a:latin typeface="Inter"/>
+                <a:ea typeface="Inter"/>
+                <a:sym typeface="Inter"/>
+              </a:rPr>
+              <a:t>utilizzando</a:t>
+            </a:r>
+            <a:r>
+              <a:rPr lang="en-US" sz="1350" dirty="0">
+                <a:solidFill>
+                  <a:srgbClr val="CBD5E1"/>
+                </a:solidFill>
+                <a:latin typeface="Inter"/>
+                <a:ea typeface="Inter"/>
                 <a:sym typeface="Inter"/>
               </a:rPr>
               <a:t> </a:t>
@@ -21637,10 +21736,9 @@
                 </a:solidFill>
                 <a:latin typeface="Inter"/>
                 <a:ea typeface="Inter"/>
-                <a:cs typeface="Inter"/>
-                <a:sym typeface="Inter"/>
-              </a:rPr>
-              <a:t>l’estrazioni</a:t>
+                <a:sym typeface="Inter"/>
+              </a:rPr>
+              <a:t>finestre</a:t>
             </a:r>
             <a:r>
               <a:rPr lang="en-US" sz="1350" dirty="0">
@@ -21649,7 +21747,6 @@
                 </a:solidFill>
                 <a:latin typeface="Inter"/>
                 <a:ea typeface="Inter"/>
-                <a:cs typeface="Inter"/>
                 <a:sym typeface="Inter"/>
               </a:rPr>
               <a:t> di </a:t>
@@ -21661,10 +21758,9 @@
                 </a:solidFill>
                 <a:latin typeface="Inter"/>
                 <a:ea typeface="Inter"/>
-                <a:cs typeface="Inter"/>
-                <a:sym typeface="Inter"/>
-              </a:rPr>
-              <a:t>più</a:t>
+                <a:sym typeface="Inter"/>
+              </a:rPr>
+              <a:t>lunghezze</a:t>
             </a:r>
             <a:r>
               <a:rPr lang="en-US" sz="1350" dirty="0">
@@ -21673,10 +21769,9 @@
                 </a:solidFill>
                 <a:latin typeface="Inter"/>
                 <a:ea typeface="Inter"/>
-                <a:cs typeface="Inter"/>
-                <a:sym typeface="Inter"/>
-              </a:rPr>
-              <a:t> features </a:t>
+                <a:sym typeface="Inter"/>
+              </a:rPr>
+              <a:t> diverse (come da 60 a 30 secondi) è </a:t>
             </a:r>
             <a:r>
               <a:rPr lang="en-US" sz="1350" dirty="0" err="1">
@@ -21685,10 +21780,9 @@
                 </a:solidFill>
                 <a:latin typeface="Inter"/>
                 <a:ea typeface="Inter"/>
-                <a:cs typeface="Inter"/>
-                <a:sym typeface="Inter"/>
-              </a:rPr>
-              <a:t>utilizzando</a:t>
+                <a:sym typeface="Inter"/>
+              </a:rPr>
+              <a:t>utilizzo</a:t>
             </a:r>
             <a:r>
               <a:rPr lang="en-US" sz="1350" dirty="0">
@@ -21697,10 +21791,9 @@
                 </a:solidFill>
                 <a:latin typeface="Inter"/>
                 <a:ea typeface="Inter"/>
-                <a:cs typeface="Inter"/>
-                <a:sym typeface="Inter"/>
-              </a:rPr>
-              <a:t> </a:t>
+                <a:sym typeface="Inter"/>
+              </a:rPr>
+              <a:t> di </a:t>
             </a:r>
             <a:r>
               <a:rPr lang="en-US" sz="1350" dirty="0" err="1">
@@ -21709,10 +21802,9 @@
                 </a:solidFill>
                 <a:latin typeface="Inter"/>
                 <a:ea typeface="Inter"/>
-                <a:cs typeface="Inter"/>
-                <a:sym typeface="Inter"/>
-              </a:rPr>
-              <a:t>finestre</a:t>
+                <a:sym typeface="Inter"/>
+              </a:rPr>
+              <a:t>RusBoost</a:t>
             </a:r>
             <a:r>
               <a:rPr lang="en-US" sz="1350" dirty="0">
@@ -21721,43 +21813,6 @@
                 </a:solidFill>
                 <a:latin typeface="Inter"/>
                 <a:ea typeface="Inter"/>
-                <a:cs typeface="Inter"/>
-                <a:sym typeface="Inter"/>
-              </a:rPr>
-              <a:t> di </a:t>
-            </a:r>
-            <a:r>
-              <a:rPr lang="en-US" sz="1350" dirty="0" err="1">
-                <a:solidFill>
-                  <a:srgbClr val="CBD5E1"/>
-                </a:solidFill>
-                <a:latin typeface="Inter"/>
-                <a:ea typeface="Inter"/>
-                <a:cs typeface="Inter"/>
-                <a:sym typeface="Inter"/>
-              </a:rPr>
-              <a:t>lunghezze</a:t>
-            </a:r>
-            <a:r>
-              <a:rPr lang="en-US" sz="1350" dirty="0">
-                <a:solidFill>
-                  <a:srgbClr val="CBD5E1"/>
-                </a:solidFill>
-                <a:latin typeface="Inter"/>
-                <a:ea typeface="Inter"/>
-                <a:cs typeface="Inter"/>
-                <a:sym typeface="Inter"/>
-              </a:rPr>
-              <a:t> diverse (come da 60 a 30 secondi)</a:t>
-            </a:r>
-            <a:r>
-              <a:rPr lang="en-US" sz="1350" b="0" i="0" u="none" strike="noStrike" cap="none" dirty="0">
-                <a:solidFill>
-                  <a:srgbClr val="CBD5E1"/>
-                </a:solidFill>
-                <a:latin typeface="Inter"/>
-                <a:ea typeface="Inter"/>
-                <a:cs typeface="Inter"/>
                 <a:sym typeface="Inter"/>
               </a:rPr>
               <a:t>.</a:t>
@@ -24332,8 +24387,9 @@
             <a:r>
               <a:rPr lang="en-US" sz="1500" b="0" i="0" u="none" strike="noStrike" cap="none" dirty="0" err="1">
                 <a:solidFill>
-                  <a:schemeClr val="bg1">
-                    <a:lumMod val="85000"/>
+                  <a:schemeClr val="bg2">
+                    <a:lumMod val="20000"/>
+                    <a:lumOff val="80000"/>
                   </a:schemeClr>
                 </a:solidFill>
                 <a:latin typeface="Inter"/>
@@ -24346,8 +24402,9 @@
             <a:r>
               <a:rPr lang="en-US" sz="1500" b="0" i="0" u="none" strike="noStrike" cap="none" dirty="0">
                 <a:solidFill>
-                  <a:schemeClr val="bg1">
-                    <a:lumMod val="85000"/>
+                  <a:schemeClr val="bg2">
+                    <a:lumMod val="20000"/>
+                    <a:lumOff val="80000"/>
                   </a:schemeClr>
                 </a:solidFill>
                 <a:latin typeface="Inter"/>
@@ -24360,8 +24417,9 @@
             <a:r>
               <a:rPr lang="en-US" sz="1500" b="0" i="0" u="none" strike="noStrike" cap="none" dirty="0" err="1">
                 <a:solidFill>
-                  <a:schemeClr val="bg1">
-                    <a:lumMod val="85000"/>
+                  <a:schemeClr val="bg2">
+                    <a:lumMod val="20000"/>
+                    <a:lumOff val="80000"/>
                   </a:schemeClr>
                 </a:solidFill>
                 <a:latin typeface="Inter"/>
@@ -24374,8 +24432,9 @@
             <a:r>
               <a:rPr lang="en-US" sz="1500" b="0" i="0" u="none" strike="noStrike" cap="none" dirty="0">
                 <a:solidFill>
-                  <a:schemeClr val="bg1">
-                    <a:lumMod val="85000"/>
+                  <a:schemeClr val="bg2">
+                    <a:lumMod val="20000"/>
+                    <a:lumOff val="80000"/>
                   </a:schemeClr>
                 </a:solidFill>
                 <a:latin typeface="Inter"/>
@@ -24388,8 +24447,9 @@
             <a:r>
               <a:rPr lang="en-US" sz="1500" b="0" i="0" u="none" strike="noStrike" cap="none" dirty="0" err="1">
                 <a:solidFill>
-                  <a:schemeClr val="bg1">
-                    <a:lumMod val="85000"/>
+                  <a:schemeClr val="bg2">
+                    <a:lumMod val="20000"/>
+                    <a:lumOff val="80000"/>
                   </a:schemeClr>
                 </a:solidFill>
                 <a:latin typeface="Inter"/>
@@ -24402,8 +24462,9 @@
             <a:r>
               <a:rPr lang="en-US" sz="1500" b="0" i="0" u="none" strike="noStrike" cap="none" dirty="0">
                 <a:solidFill>
-                  <a:schemeClr val="bg1">
-                    <a:lumMod val="85000"/>
+                  <a:schemeClr val="bg2">
+                    <a:lumMod val="20000"/>
+                    <a:lumOff val="80000"/>
                   </a:schemeClr>
                 </a:solidFill>
                 <a:latin typeface="Inter"/>
@@ -24416,8 +24477,9 @@
             <a:r>
               <a:rPr lang="en-US" sz="1500" b="0" i="0" u="none" strike="noStrike" cap="none" dirty="0" err="1">
                 <a:solidFill>
-                  <a:schemeClr val="bg1">
-                    <a:lumMod val="85000"/>
+                  <a:schemeClr val="bg2">
+                    <a:lumMod val="20000"/>
+                    <a:lumOff val="80000"/>
                   </a:schemeClr>
                 </a:solidFill>
                 <a:latin typeface="Inter"/>
@@ -24430,8 +24492,9 @@
             <a:r>
               <a:rPr lang="en-US" sz="1500" b="0" i="0" u="none" strike="noStrike" cap="none" dirty="0">
                 <a:solidFill>
-                  <a:schemeClr val="bg1">
-                    <a:lumMod val="85000"/>
+                  <a:schemeClr val="bg2">
+                    <a:lumMod val="20000"/>
+                    <a:lumOff val="80000"/>
                   </a:schemeClr>
                 </a:solidFill>
                 <a:latin typeface="Inter"/>
@@ -24444,8 +24507,9 @@
             <a:r>
               <a:rPr lang="en-US" sz="1500" b="0" i="0" u="none" strike="noStrike" cap="none" dirty="0" err="1">
                 <a:solidFill>
-                  <a:schemeClr val="bg1">
-                    <a:lumMod val="85000"/>
+                  <a:schemeClr val="bg2">
+                    <a:lumMod val="20000"/>
+                    <a:lumOff val="80000"/>
                   </a:schemeClr>
                 </a:solidFill>
                 <a:latin typeface="Inter"/>
@@ -24458,8 +24522,9 @@
             <a:r>
               <a:rPr lang="en-US" sz="1500" b="0" i="0" u="none" strike="noStrike" cap="none" dirty="0">
                 <a:solidFill>
-                  <a:schemeClr val="bg1">
-                    <a:lumMod val="85000"/>
+                  <a:schemeClr val="bg2">
+                    <a:lumMod val="20000"/>
+                    <a:lumOff val="80000"/>
                   </a:schemeClr>
                 </a:solidFill>
                 <a:latin typeface="Inter"/>
@@ -24472,8 +24537,9 @@
             <a:r>
               <a:rPr lang="en-US" sz="1500" b="0" i="0" u="none" strike="noStrike" cap="none" dirty="0" err="1">
                 <a:solidFill>
-                  <a:schemeClr val="bg1">
-                    <a:lumMod val="85000"/>
+                  <a:schemeClr val="bg2">
+                    <a:lumMod val="20000"/>
+                    <a:lumOff val="80000"/>
                   </a:schemeClr>
                 </a:solidFill>
                 <a:latin typeface="Inter"/>
@@ -24486,8 +24552,9 @@
             <a:r>
               <a:rPr lang="en-US" sz="1500" b="0" i="0" u="none" strike="noStrike" cap="none" dirty="0">
                 <a:solidFill>
-                  <a:schemeClr val="bg1">
-                    <a:lumMod val="85000"/>
+                  <a:schemeClr val="bg2">
+                    <a:lumMod val="20000"/>
+                    <a:lumOff val="80000"/>
                   </a:schemeClr>
                 </a:solidFill>
                 <a:latin typeface="Inter"/>
@@ -24500,8 +24567,9 @@
             <a:r>
               <a:rPr lang="en-US" sz="1500" b="0" i="0" u="none" strike="noStrike" cap="none" dirty="0" err="1">
                 <a:solidFill>
-                  <a:schemeClr val="bg1">
-                    <a:lumMod val="85000"/>
+                  <a:schemeClr val="bg2">
+                    <a:lumMod val="20000"/>
+                    <a:lumOff val="80000"/>
                   </a:schemeClr>
                 </a:solidFill>
                 <a:latin typeface="Inter"/>
@@ -24514,8 +24582,9 @@
             <a:r>
               <a:rPr lang="en-US" sz="1500" b="0" i="0" u="none" strike="noStrike" cap="none" dirty="0">
                 <a:solidFill>
-                  <a:schemeClr val="bg1">
-                    <a:lumMod val="85000"/>
+                  <a:schemeClr val="bg2">
+                    <a:lumMod val="20000"/>
+                    <a:lumOff val="80000"/>
                   </a:schemeClr>
                 </a:solidFill>
                 <a:latin typeface="Inter"/>
@@ -24527,8 +24596,9 @@
             </a:r>
             <a:endParaRPr dirty="0">
               <a:solidFill>
-                <a:schemeClr val="bg1">
-                  <a:lumMod val="85000"/>
+                <a:schemeClr val="bg2">
+                  <a:lumMod val="20000"/>
+                  <a:lumOff val="80000"/>
                 </a:schemeClr>
               </a:solidFill>
             </a:endParaRPr>
@@ -24635,8 +24705,9 @@
             <a:r>
               <a:rPr lang="en-US" sz="1500" b="0" i="0" u="none" strike="noStrike" cap="none" dirty="0" err="1">
                 <a:solidFill>
-                  <a:schemeClr val="bg1">
-                    <a:lumMod val="85000"/>
+                  <a:schemeClr val="bg2">
+                    <a:lumMod val="20000"/>
+                    <a:lumOff val="80000"/>
                   </a:schemeClr>
                 </a:solidFill>
                 <a:latin typeface="Inter"/>
@@ -24649,8 +24720,9 @@
             <a:r>
               <a:rPr lang="en-US" sz="1500" b="0" i="0" u="none" strike="noStrike" cap="none" dirty="0">
                 <a:solidFill>
-                  <a:schemeClr val="bg1">
-                    <a:lumMod val="85000"/>
+                  <a:schemeClr val="bg2">
+                    <a:lumMod val="20000"/>
+                    <a:lumOff val="80000"/>
                   </a:schemeClr>
                 </a:solidFill>
                 <a:latin typeface="Inter"/>
@@ -24663,8 +24735,9 @@
             <a:r>
               <a:rPr lang="en-US" sz="1500" b="0" i="0" u="none" strike="noStrike" cap="none" dirty="0" err="1">
                 <a:solidFill>
-                  <a:schemeClr val="bg1">
-                    <a:lumMod val="85000"/>
+                  <a:schemeClr val="bg2">
+                    <a:lumMod val="20000"/>
+                    <a:lumOff val="80000"/>
                   </a:schemeClr>
                 </a:solidFill>
                 <a:latin typeface="Inter"/>
@@ -24677,8 +24750,9 @@
             <a:r>
               <a:rPr lang="en-US" sz="1500" b="0" i="0" u="none" strike="noStrike" cap="none" dirty="0">
                 <a:solidFill>
-                  <a:schemeClr val="bg1">
-                    <a:lumMod val="85000"/>
+                  <a:schemeClr val="bg2">
+                    <a:lumMod val="20000"/>
+                    <a:lumOff val="80000"/>
                   </a:schemeClr>
                 </a:solidFill>
                 <a:latin typeface="Inter"/>
@@ -24691,8 +24765,9 @@
             <a:r>
               <a:rPr lang="en-US" sz="1500" b="0" i="0" u="none" strike="noStrike" cap="none" dirty="0" err="1">
                 <a:solidFill>
-                  <a:schemeClr val="bg1">
-                    <a:lumMod val="85000"/>
+                  <a:schemeClr val="bg2">
+                    <a:lumMod val="20000"/>
+                    <a:lumOff val="80000"/>
                   </a:schemeClr>
                 </a:solidFill>
                 <a:latin typeface="Inter"/>
@@ -24705,8 +24780,9 @@
             <a:r>
               <a:rPr lang="en-US" sz="1500" b="0" i="0" u="none" strike="noStrike" cap="none" dirty="0">
                 <a:solidFill>
-                  <a:schemeClr val="bg1">
-                    <a:lumMod val="85000"/>
+                  <a:schemeClr val="bg2">
+                    <a:lumMod val="20000"/>
+                    <a:lumOff val="80000"/>
                   </a:schemeClr>
                 </a:solidFill>
                 <a:latin typeface="Inter"/>
@@ -24719,8 +24795,9 @@
             <a:r>
               <a:rPr lang="en-US" sz="1500" b="0" i="0" u="none" strike="noStrike" cap="none" dirty="0" err="1">
                 <a:solidFill>
-                  <a:schemeClr val="bg1">
-                    <a:lumMod val="85000"/>
+                  <a:schemeClr val="bg2">
+                    <a:lumMod val="20000"/>
+                    <a:lumOff val="80000"/>
                   </a:schemeClr>
                 </a:solidFill>
                 <a:latin typeface="Inter"/>
@@ -24733,8 +24810,9 @@
             <a:r>
               <a:rPr lang="en-US" sz="1500" b="0" i="0" u="none" strike="noStrike" cap="none" dirty="0">
                 <a:solidFill>
-                  <a:schemeClr val="bg1">
-                    <a:lumMod val="85000"/>
+                  <a:schemeClr val="bg2">
+                    <a:lumMod val="20000"/>
+                    <a:lumOff val="80000"/>
                   </a:schemeClr>
                 </a:solidFill>
                 <a:latin typeface="Inter"/>
@@ -24747,8 +24825,9 @@
             <a:r>
               <a:rPr lang="en-US" sz="1500" b="0" i="0" u="none" strike="noStrike" cap="none" dirty="0" err="1">
                 <a:solidFill>
-                  <a:schemeClr val="bg1">
-                    <a:lumMod val="85000"/>
+                  <a:schemeClr val="bg2">
+                    <a:lumMod val="20000"/>
+                    <a:lumOff val="80000"/>
                   </a:schemeClr>
                 </a:solidFill>
                 <a:latin typeface="Inter"/>
@@ -24761,8 +24840,9 @@
             <a:r>
               <a:rPr lang="en-US" sz="1500" b="0" i="0" u="none" strike="noStrike" cap="none" dirty="0">
                 <a:solidFill>
-                  <a:schemeClr val="bg1">
-                    <a:lumMod val="85000"/>
+                  <a:schemeClr val="bg2">
+                    <a:lumMod val="20000"/>
+                    <a:lumOff val="80000"/>
                   </a:schemeClr>
                 </a:solidFill>
                 <a:latin typeface="Inter"/>
@@ -24775,8 +24855,9 @@
             <a:r>
               <a:rPr lang="en-US" sz="1500" b="0" i="0" u="none" strike="noStrike" cap="none" dirty="0" err="1">
                 <a:solidFill>
-                  <a:schemeClr val="bg1">
-                    <a:lumMod val="85000"/>
+                  <a:schemeClr val="bg2">
+                    <a:lumMod val="20000"/>
+                    <a:lumOff val="80000"/>
                   </a:schemeClr>
                 </a:solidFill>
                 <a:latin typeface="Inter"/>
@@ -24789,8 +24870,9 @@
             <a:r>
               <a:rPr lang="en-US" sz="1500" b="0" i="0" u="none" strike="noStrike" cap="none" dirty="0">
                 <a:solidFill>
-                  <a:schemeClr val="bg1">
-                    <a:lumMod val="85000"/>
+                  <a:schemeClr val="bg2">
+                    <a:lumMod val="20000"/>
+                    <a:lumOff val="80000"/>
                   </a:schemeClr>
                 </a:solidFill>
                 <a:latin typeface="Inter"/>
@@ -24803,8 +24885,9 @@
             <a:r>
               <a:rPr lang="en-US" sz="1500" b="0" i="0" u="none" strike="noStrike" cap="none" dirty="0" err="1">
                 <a:solidFill>
-                  <a:schemeClr val="bg1">
-                    <a:lumMod val="85000"/>
+                  <a:schemeClr val="bg2">
+                    <a:lumMod val="20000"/>
+                    <a:lumOff val="80000"/>
                   </a:schemeClr>
                 </a:solidFill>
                 <a:latin typeface="Inter"/>
@@ -24817,8 +24900,9 @@
             <a:r>
               <a:rPr lang="en-US" sz="1500" b="0" i="0" u="none" strike="noStrike" cap="none" dirty="0">
                 <a:solidFill>
-                  <a:schemeClr val="bg1">
-                    <a:lumMod val="85000"/>
+                  <a:schemeClr val="bg2">
+                    <a:lumMod val="20000"/>
+                    <a:lumOff val="80000"/>
                   </a:schemeClr>
                 </a:solidFill>
                 <a:latin typeface="Inter"/>
@@ -24831,8 +24915,9 @@
             <a:r>
               <a:rPr lang="en-US" sz="1500" b="0" i="0" u="none" strike="noStrike" cap="none" dirty="0" err="1">
                 <a:solidFill>
-                  <a:schemeClr val="bg1">
-                    <a:lumMod val="85000"/>
+                  <a:schemeClr val="bg2">
+                    <a:lumMod val="20000"/>
+                    <a:lumOff val="80000"/>
                   </a:schemeClr>
                 </a:solidFill>
                 <a:latin typeface="Inter"/>
@@ -24845,8 +24930,9 @@
             <a:r>
               <a:rPr lang="en-US" sz="1500" b="0" i="0" u="none" strike="noStrike" cap="none" dirty="0">
                 <a:solidFill>
-                  <a:schemeClr val="bg1">
-                    <a:lumMod val="85000"/>
+                  <a:schemeClr val="bg2">
+                    <a:lumMod val="20000"/>
+                    <a:lumOff val="80000"/>
                   </a:schemeClr>
                 </a:solidFill>
                 <a:latin typeface="Inter"/>
@@ -24859,8 +24945,9 @@
             <a:r>
               <a:rPr lang="en-US" sz="1500" b="0" i="0" u="none" strike="noStrike" cap="none" dirty="0" err="1">
                 <a:solidFill>
-                  <a:schemeClr val="bg1">
-                    <a:lumMod val="85000"/>
+                  <a:schemeClr val="bg2">
+                    <a:lumMod val="20000"/>
+                    <a:lumOff val="80000"/>
                   </a:schemeClr>
                 </a:solidFill>
                 <a:latin typeface="Inter"/>
@@ -24873,8 +24960,9 @@
             <a:r>
               <a:rPr lang="en-US" sz="1500" dirty="0">
                 <a:solidFill>
-                  <a:schemeClr val="bg1">
-                    <a:lumMod val="85000"/>
+                  <a:schemeClr val="bg2">
+                    <a:lumMod val="20000"/>
+                    <a:lumOff val="80000"/>
                   </a:schemeClr>
                 </a:solidFill>
                 <a:latin typeface="Inter"/>
@@ -24887,8 +24975,9 @@
             <a:r>
               <a:rPr lang="en-US" sz="1500" dirty="0" err="1">
                 <a:solidFill>
-                  <a:schemeClr val="bg1">
-                    <a:lumMod val="85000"/>
+                  <a:schemeClr val="bg2">
+                    <a:lumMod val="20000"/>
+                    <a:lumOff val="80000"/>
                   </a:schemeClr>
                 </a:solidFill>
                 <a:latin typeface="Inter"/>
@@ -24901,8 +24990,9 @@
             <a:r>
               <a:rPr lang="en-US" sz="1500" dirty="0">
                 <a:solidFill>
-                  <a:schemeClr val="bg1">
-                    <a:lumMod val="85000"/>
+                  <a:schemeClr val="bg2">
+                    <a:lumMod val="20000"/>
+                    <a:lumOff val="80000"/>
                   </a:schemeClr>
                 </a:solidFill>
                 <a:latin typeface="Inter"/>
@@ -24915,8 +25005,9 @@
             <a:r>
               <a:rPr lang="en-US" sz="1500" dirty="0" err="1">
                 <a:solidFill>
-                  <a:schemeClr val="bg1">
-                    <a:lumMod val="85000"/>
+                  <a:schemeClr val="bg2">
+                    <a:lumMod val="20000"/>
+                    <a:lumOff val="80000"/>
                   </a:schemeClr>
                 </a:solidFill>
                 <a:latin typeface="Inter"/>
@@ -24929,8 +25020,9 @@
             <a:r>
               <a:rPr lang="en-US" sz="1500" dirty="0">
                 <a:solidFill>
-                  <a:schemeClr val="bg1">
-                    <a:lumMod val="85000"/>
+                  <a:schemeClr val="bg2">
+                    <a:lumMod val="20000"/>
+                    <a:lumOff val="80000"/>
                   </a:schemeClr>
                 </a:solidFill>
                 <a:latin typeface="Inter"/>
@@ -24943,8 +25035,9 @@
             <a:r>
               <a:rPr lang="en-US" sz="1500" dirty="0" err="1">
                 <a:solidFill>
-                  <a:schemeClr val="bg1">
-                    <a:lumMod val="85000"/>
+                  <a:schemeClr val="bg2">
+                    <a:lumMod val="20000"/>
+                    <a:lumOff val="80000"/>
                   </a:schemeClr>
                 </a:solidFill>
                 <a:latin typeface="Inter"/>
@@ -24957,8 +25050,9 @@
             <a:r>
               <a:rPr lang="en-US" sz="1500" dirty="0">
                 <a:solidFill>
-                  <a:schemeClr val="bg1">
-                    <a:lumMod val="85000"/>
+                  <a:schemeClr val="bg2">
+                    <a:lumMod val="20000"/>
+                    <a:lumOff val="80000"/>
                   </a:schemeClr>
                 </a:solidFill>
                 <a:latin typeface="Inter"/>
@@ -24971,8 +25065,9 @@
             <a:r>
               <a:rPr lang="en-US" sz="1500" dirty="0" err="1">
                 <a:solidFill>
-                  <a:schemeClr val="bg1">
-                    <a:lumMod val="85000"/>
+                  <a:schemeClr val="bg2">
+                    <a:lumMod val="20000"/>
+                    <a:lumOff val="80000"/>
                   </a:schemeClr>
                 </a:solidFill>
                 <a:latin typeface="Inter"/>
@@ -24985,8 +25080,9 @@
             <a:r>
               <a:rPr lang="en-US" sz="1500" dirty="0">
                 <a:solidFill>
-                  <a:schemeClr val="bg1">
-                    <a:lumMod val="85000"/>
+                  <a:schemeClr val="bg2">
+                    <a:lumMod val="20000"/>
+                    <a:lumOff val="80000"/>
                   </a:schemeClr>
                 </a:solidFill>
                 <a:latin typeface="Inter"/>
@@ -24999,8 +25095,9 @@
             <a:r>
               <a:rPr lang="en-US" sz="1500" dirty="0" err="1">
                 <a:solidFill>
-                  <a:schemeClr val="bg1">
-                    <a:lumMod val="85000"/>
+                  <a:schemeClr val="bg2">
+                    <a:lumMod val="20000"/>
+                    <a:lumOff val="80000"/>
                   </a:schemeClr>
                 </a:solidFill>
                 <a:latin typeface="Inter"/>
@@ -25013,8 +25110,9 @@
             <a:r>
               <a:rPr lang="en-US" sz="1500" dirty="0">
                 <a:solidFill>
-                  <a:schemeClr val="bg1">
-                    <a:lumMod val="85000"/>
+                  <a:schemeClr val="bg2">
+                    <a:lumMod val="20000"/>
+                    <a:lumOff val="80000"/>
                   </a:schemeClr>
                 </a:solidFill>
                 <a:latin typeface="Inter"/>
@@ -25027,8 +25125,9 @@
             <a:r>
               <a:rPr lang="en-US" sz="1500" dirty="0" err="1">
                 <a:solidFill>
-                  <a:schemeClr val="bg1">
-                    <a:lumMod val="85000"/>
+                  <a:schemeClr val="bg2">
+                    <a:lumMod val="20000"/>
+                    <a:lumOff val="80000"/>
                   </a:schemeClr>
                 </a:solidFill>
                 <a:latin typeface="Inter"/>
@@ -25041,8 +25140,9 @@
             <a:r>
               <a:rPr lang="en-US" sz="1500" dirty="0">
                 <a:solidFill>
-                  <a:schemeClr val="bg1">
-                    <a:lumMod val="85000"/>
+                  <a:schemeClr val="bg2">
+                    <a:lumMod val="20000"/>
+                    <a:lumOff val="80000"/>
                   </a:schemeClr>
                 </a:solidFill>
                 <a:latin typeface="Inter"/>
@@ -25055,8 +25155,9 @@
             <a:r>
               <a:rPr lang="en-US" sz="1500" dirty="0" err="1">
                 <a:solidFill>
-                  <a:schemeClr val="bg1">
-                    <a:lumMod val="85000"/>
+                  <a:schemeClr val="bg2">
+                    <a:lumMod val="20000"/>
+                    <a:lumOff val="80000"/>
                   </a:schemeClr>
                 </a:solidFill>
                 <a:latin typeface="Inter"/>
@@ -25069,8 +25170,9 @@
             <a:r>
               <a:rPr lang="en-US" sz="1500" dirty="0">
                 <a:solidFill>
-                  <a:schemeClr val="bg1">
-                    <a:lumMod val="85000"/>
+                  <a:schemeClr val="bg2">
+                    <a:lumMod val="20000"/>
+                    <a:lumOff val="80000"/>
                   </a:schemeClr>
                 </a:solidFill>
                 <a:latin typeface="Inter"/>
@@ -25083,8 +25185,9 @@
             <a:r>
               <a:rPr lang="en-US" sz="1500" dirty="0" err="1">
                 <a:solidFill>
-                  <a:schemeClr val="bg1">
-                    <a:lumMod val="85000"/>
+                  <a:schemeClr val="bg2">
+                    <a:lumMod val="20000"/>
+                    <a:lumOff val="80000"/>
                   </a:schemeClr>
                 </a:solidFill>
                 <a:latin typeface="Inter"/>
@@ -25097,8 +25200,9 @@
             <a:r>
               <a:rPr lang="en-US" sz="1500" dirty="0">
                 <a:solidFill>
-                  <a:schemeClr val="bg1">
-                    <a:lumMod val="85000"/>
+                  <a:schemeClr val="bg2">
+                    <a:lumMod val="20000"/>
+                    <a:lumOff val="80000"/>
                   </a:schemeClr>
                 </a:solidFill>
                 <a:latin typeface="Inter"/>
@@ -25111,8 +25215,9 @@
             <a:r>
               <a:rPr lang="en-US" sz="1500" dirty="0" err="1">
                 <a:solidFill>
-                  <a:schemeClr val="bg1">
-                    <a:lumMod val="85000"/>
+                  <a:schemeClr val="bg2">
+                    <a:lumMod val="20000"/>
+                    <a:lumOff val="80000"/>
                   </a:schemeClr>
                 </a:solidFill>
                 <a:latin typeface="Inter"/>
@@ -25125,8 +25230,9 @@
             <a:r>
               <a:rPr lang="en-US" sz="1500" dirty="0">
                 <a:solidFill>
-                  <a:schemeClr val="bg1">
-                    <a:lumMod val="85000"/>
+                  <a:schemeClr val="bg2">
+                    <a:lumMod val="20000"/>
+                    <a:lumOff val="80000"/>
                   </a:schemeClr>
                 </a:solidFill>
                 <a:latin typeface="Inter"/>
@@ -25139,8 +25245,9 @@
             <a:r>
               <a:rPr lang="en-US" sz="1500" dirty="0" err="1">
                 <a:solidFill>
-                  <a:schemeClr val="bg1">
-                    <a:lumMod val="85000"/>
+                  <a:schemeClr val="bg2">
+                    <a:lumMod val="20000"/>
+                    <a:lumOff val="80000"/>
                   </a:schemeClr>
                 </a:solidFill>
                 <a:latin typeface="Inter"/>
@@ -25153,8 +25260,9 @@
             <a:r>
               <a:rPr lang="en-US" sz="1500" dirty="0">
                 <a:solidFill>
-                  <a:schemeClr val="bg1">
-                    <a:lumMod val="85000"/>
+                  <a:schemeClr val="bg2">
+                    <a:lumMod val="20000"/>
+                    <a:lumOff val="80000"/>
                   </a:schemeClr>
                 </a:solidFill>
                 <a:latin typeface="Inter"/>
@@ -25167,8 +25275,9 @@
             <a:r>
               <a:rPr lang="en-US" sz="1500" dirty="0" err="1">
                 <a:solidFill>
-                  <a:schemeClr val="bg1">
-                    <a:lumMod val="85000"/>
+                  <a:schemeClr val="bg2">
+                    <a:lumMod val="20000"/>
+                    <a:lumOff val="80000"/>
                   </a:schemeClr>
                 </a:solidFill>
                 <a:latin typeface="Inter"/>
@@ -25181,8 +25290,9 @@
             <a:r>
               <a:rPr lang="en-US" sz="1500" dirty="0">
                 <a:solidFill>
-                  <a:schemeClr val="bg1">
-                    <a:lumMod val="85000"/>
+                  <a:schemeClr val="bg2">
+                    <a:lumMod val="20000"/>
+                    <a:lumOff val="80000"/>
                   </a:schemeClr>
                 </a:solidFill>
                 <a:latin typeface="Inter"/>
@@ -25195,8 +25305,9 @@
             <a:r>
               <a:rPr lang="en-US" sz="1500" dirty="0" err="1">
                 <a:solidFill>
-                  <a:schemeClr val="bg1">
-                    <a:lumMod val="85000"/>
+                  <a:schemeClr val="bg2">
+                    <a:lumMod val="20000"/>
+                    <a:lumOff val="80000"/>
                   </a:schemeClr>
                 </a:solidFill>
                 <a:latin typeface="Inter"/>
@@ -25209,8 +25320,9 @@
             <a:r>
               <a:rPr lang="en-US" sz="1500" dirty="0">
                 <a:solidFill>
-                  <a:schemeClr val="bg1">
-                    <a:lumMod val="85000"/>
+                  <a:schemeClr val="bg2">
+                    <a:lumMod val="20000"/>
+                    <a:lumOff val="80000"/>
                   </a:schemeClr>
                 </a:solidFill>
                 <a:latin typeface="Inter"/>
@@ -25223,8 +25335,9 @@
             <a:r>
               <a:rPr lang="en-US" sz="1500" dirty="0" err="1">
                 <a:solidFill>
-                  <a:schemeClr val="bg1">
-                    <a:lumMod val="85000"/>
+                  <a:schemeClr val="bg2">
+                    <a:lumMod val="20000"/>
+                    <a:lumOff val="80000"/>
                   </a:schemeClr>
                 </a:solidFill>
                 <a:latin typeface="Inter"/>
@@ -25237,8 +25350,9 @@
             <a:r>
               <a:rPr lang="en-US" sz="1500" dirty="0">
                 <a:solidFill>
-                  <a:schemeClr val="bg1">
-                    <a:lumMod val="85000"/>
+                  <a:schemeClr val="bg2">
+                    <a:lumMod val="20000"/>
+                    <a:lumOff val="80000"/>
                   </a:schemeClr>
                 </a:solidFill>
                 <a:latin typeface="Inter"/>
@@ -25251,8 +25365,9 @@
             <a:r>
               <a:rPr lang="en-US" sz="1500" dirty="0" err="1">
                 <a:solidFill>
-                  <a:schemeClr val="bg1">
-                    <a:lumMod val="85000"/>
+                  <a:schemeClr val="bg2">
+                    <a:lumMod val="20000"/>
+                    <a:lumOff val="80000"/>
                   </a:schemeClr>
                 </a:solidFill>
                 <a:latin typeface="Inter"/>
@@ -25265,8 +25380,9 @@
             <a:r>
               <a:rPr lang="en-US" sz="1500" dirty="0">
                 <a:solidFill>
-                  <a:schemeClr val="bg1">
-                    <a:lumMod val="85000"/>
+                  <a:schemeClr val="bg2">
+                    <a:lumMod val="20000"/>
+                    <a:lumOff val="80000"/>
                   </a:schemeClr>
                 </a:solidFill>
                 <a:latin typeface="Inter"/>
@@ -25279,8 +25395,9 @@
             <a:r>
               <a:rPr lang="en-US" sz="1500" dirty="0" err="1">
                 <a:solidFill>
-                  <a:schemeClr val="bg1">
-                    <a:lumMod val="85000"/>
+                  <a:schemeClr val="bg2">
+                    <a:lumMod val="20000"/>
+                    <a:lumOff val="80000"/>
                   </a:schemeClr>
                 </a:solidFill>
                 <a:latin typeface="Inter"/>
@@ -25293,8 +25410,9 @@
             <a:r>
               <a:rPr lang="en-US" sz="1500" dirty="0">
                 <a:solidFill>
-                  <a:schemeClr val="bg1">
-                    <a:lumMod val="85000"/>
+                  <a:schemeClr val="bg2">
+                    <a:lumMod val="20000"/>
+                    <a:lumOff val="80000"/>
                   </a:schemeClr>
                 </a:solidFill>
                 <a:latin typeface="Inter"/>
@@ -25307,8 +25425,9 @@
             <a:r>
               <a:rPr lang="en-US" sz="1500" dirty="0" err="1">
                 <a:solidFill>
-                  <a:schemeClr val="bg1">
-                    <a:lumMod val="85000"/>
+                  <a:schemeClr val="bg2">
+                    <a:lumMod val="20000"/>
+                    <a:lumOff val="80000"/>
                   </a:schemeClr>
                 </a:solidFill>
                 <a:latin typeface="Inter"/>
@@ -25321,8 +25440,9 @@
             <a:r>
               <a:rPr lang="en-US" sz="1500" dirty="0">
                 <a:solidFill>
-                  <a:schemeClr val="bg1">
-                    <a:lumMod val="85000"/>
+                  <a:schemeClr val="bg2">
+                    <a:lumMod val="20000"/>
+                    <a:lumOff val="80000"/>
                   </a:schemeClr>
                 </a:solidFill>
                 <a:latin typeface="Inter"/>
@@ -25335,8 +25455,9 @@
             <a:r>
               <a:rPr lang="en-US" sz="1500" b="0" i="0" u="none" strike="noStrike" cap="none" dirty="0">
                 <a:solidFill>
-                  <a:schemeClr val="bg1">
-                    <a:lumMod val="85000"/>
+                  <a:schemeClr val="bg2">
+                    <a:lumMod val="20000"/>
+                    <a:lumOff val="80000"/>
                   </a:schemeClr>
                 </a:solidFill>
                 <a:latin typeface="Inter"/>
@@ -25348,8 +25469,9 @@
             </a:r>
             <a:endParaRPr dirty="0">
               <a:solidFill>
-                <a:schemeClr val="bg1">
-                  <a:lumMod val="85000"/>
+                <a:schemeClr val="bg2">
+                  <a:lumMod val="20000"/>
+                  <a:lumOff val="80000"/>
                 </a:schemeClr>
               </a:solidFill>
             </a:endParaRPr>
@@ -25468,8 +25590,9 @@
             <a:r>
               <a:rPr lang="en-US" sz="1500" b="0" i="0" u="none" strike="noStrike" cap="none" dirty="0" err="1">
                 <a:solidFill>
-                  <a:schemeClr val="bg1">
-                    <a:lumMod val="85000"/>
+                  <a:schemeClr val="bg2">
+                    <a:lumMod val="20000"/>
+                    <a:lumOff val="80000"/>
                   </a:schemeClr>
                 </a:solidFill>
                 <a:latin typeface="Inter"/>
@@ -25482,8 +25605,9 @@
             <a:r>
               <a:rPr lang="en-US" sz="1500" b="0" i="0" u="none" strike="noStrike" cap="none" dirty="0">
                 <a:solidFill>
-                  <a:schemeClr val="bg1">
-                    <a:lumMod val="85000"/>
+                  <a:schemeClr val="bg2">
+                    <a:lumMod val="20000"/>
+                    <a:lumOff val="80000"/>
                   </a:schemeClr>
                 </a:solidFill>
                 <a:latin typeface="Inter"/>
@@ -25496,8 +25620,9 @@
             <a:r>
               <a:rPr lang="en-US" sz="1500" b="0" i="0" u="none" strike="noStrike" cap="none" dirty="0" err="1">
                 <a:solidFill>
-                  <a:schemeClr val="bg1">
-                    <a:lumMod val="85000"/>
+                  <a:schemeClr val="bg2">
+                    <a:lumMod val="20000"/>
+                    <a:lumOff val="80000"/>
                   </a:schemeClr>
                 </a:solidFill>
                 <a:latin typeface="Inter"/>
@@ -25510,8 +25635,9 @@
             <a:r>
               <a:rPr lang="en-US" sz="1500" b="0" i="0" u="none" strike="noStrike" cap="none" dirty="0">
                 <a:solidFill>
-                  <a:schemeClr val="bg1">
-                    <a:lumMod val="85000"/>
+                  <a:schemeClr val="bg2">
+                    <a:lumMod val="20000"/>
+                    <a:lumOff val="80000"/>
                   </a:schemeClr>
                 </a:solidFill>
                 <a:latin typeface="Inter"/>
@@ -25524,8 +25650,9 @@
             <a:r>
               <a:rPr lang="en-US" sz="1500" b="0" i="0" u="none" strike="noStrike" cap="none" dirty="0" err="1">
                 <a:solidFill>
-                  <a:schemeClr val="bg1">
-                    <a:lumMod val="85000"/>
+                  <a:schemeClr val="bg2">
+                    <a:lumMod val="20000"/>
+                    <a:lumOff val="80000"/>
                   </a:schemeClr>
                 </a:solidFill>
                 <a:latin typeface="Inter"/>
@@ -25538,8 +25665,9 @@
             <a:r>
               <a:rPr lang="en-US" sz="1500" b="0" i="0" u="none" strike="noStrike" cap="none" dirty="0">
                 <a:solidFill>
-                  <a:schemeClr val="bg1">
-                    <a:lumMod val="85000"/>
+                  <a:schemeClr val="bg2">
+                    <a:lumMod val="20000"/>
+                    <a:lumOff val="80000"/>
                   </a:schemeClr>
                 </a:solidFill>
                 <a:latin typeface="Inter"/>
@@ -25552,8 +25680,9 @@
             <a:r>
               <a:rPr lang="en-US" sz="1500" b="0" i="0" u="none" strike="noStrike" cap="none" dirty="0" err="1">
                 <a:solidFill>
-                  <a:schemeClr val="bg1">
-                    <a:lumMod val="85000"/>
+                  <a:schemeClr val="bg2">
+                    <a:lumMod val="20000"/>
+                    <a:lumOff val="80000"/>
                   </a:schemeClr>
                 </a:solidFill>
                 <a:latin typeface="Inter"/>
@@ -25566,8 +25695,9 @@
             <a:r>
               <a:rPr lang="en-US" sz="1500" b="0" i="0" u="none" strike="noStrike" cap="none" dirty="0">
                 <a:solidFill>
-                  <a:schemeClr val="bg1">
-                    <a:lumMod val="85000"/>
+                  <a:schemeClr val="bg2">
+                    <a:lumMod val="20000"/>
+                    <a:lumOff val="80000"/>
                   </a:schemeClr>
                 </a:solidFill>
                 <a:latin typeface="Inter"/>
@@ -25580,8 +25710,9 @@
             <a:r>
               <a:rPr lang="en-US" sz="1500" b="0" i="0" u="none" strike="noStrike" cap="none" dirty="0" err="1">
                 <a:solidFill>
-                  <a:schemeClr val="bg1">
-                    <a:lumMod val="85000"/>
+                  <a:schemeClr val="bg2">
+                    <a:lumMod val="20000"/>
+                    <a:lumOff val="80000"/>
                   </a:schemeClr>
                 </a:solidFill>
                 <a:latin typeface="Inter"/>
@@ -25594,8 +25725,9 @@
             <a:r>
               <a:rPr lang="en-US" sz="1500" b="0" i="0" u="none" strike="noStrike" cap="none" dirty="0">
                 <a:solidFill>
-                  <a:schemeClr val="bg1">
-                    <a:lumMod val="85000"/>
+                  <a:schemeClr val="bg2">
+                    <a:lumMod val="20000"/>
+                    <a:lumOff val="80000"/>
                   </a:schemeClr>
                 </a:solidFill>
                 <a:latin typeface="Inter"/>
@@ -25608,8 +25740,9 @@
             <a:r>
               <a:rPr lang="en-US" sz="1500" b="0" i="0" u="none" strike="noStrike" cap="none" dirty="0" err="1">
                 <a:solidFill>
-                  <a:schemeClr val="bg1">
-                    <a:lumMod val="85000"/>
+                  <a:schemeClr val="bg2">
+                    <a:lumMod val="20000"/>
+                    <a:lumOff val="80000"/>
                   </a:schemeClr>
                 </a:solidFill>
                 <a:latin typeface="Inter"/>
@@ -25622,8 +25755,9 @@
             <a:r>
               <a:rPr lang="en-US" sz="1500" b="0" i="0" u="none" strike="noStrike" cap="none" dirty="0">
                 <a:solidFill>
-                  <a:schemeClr val="bg1">
-                    <a:lumMod val="85000"/>
+                  <a:schemeClr val="bg2">
+                    <a:lumMod val="20000"/>
+                    <a:lumOff val="80000"/>
                   </a:schemeClr>
                 </a:solidFill>
                 <a:latin typeface="Inter"/>
@@ -25636,8 +25770,9 @@
             <a:r>
               <a:rPr lang="en-US" sz="1500" b="0" i="0" u="none" strike="noStrike" cap="none" dirty="0" err="1">
                 <a:solidFill>
-                  <a:schemeClr val="bg1">
-                    <a:lumMod val="85000"/>
+                  <a:schemeClr val="bg2">
+                    <a:lumMod val="20000"/>
+                    <a:lumOff val="80000"/>
                   </a:schemeClr>
                 </a:solidFill>
                 <a:latin typeface="Inter"/>
@@ -25650,8 +25785,9 @@
             <a:r>
               <a:rPr lang="en-US" sz="1500" b="0" i="0" u="none" strike="noStrike" cap="none" dirty="0">
                 <a:solidFill>
-                  <a:schemeClr val="bg1">
-                    <a:lumMod val="85000"/>
+                  <a:schemeClr val="bg2">
+                    <a:lumMod val="20000"/>
+                    <a:lumOff val="80000"/>
                   </a:schemeClr>
                 </a:solidFill>
                 <a:latin typeface="Inter"/>
@@ -25664,8 +25800,9 @@
             <a:r>
               <a:rPr lang="en-US" sz="1500" b="0" i="0" u="none" strike="noStrike" cap="none" dirty="0" err="1">
                 <a:solidFill>
-                  <a:schemeClr val="bg1">
-                    <a:lumMod val="85000"/>
+                  <a:schemeClr val="bg2">
+                    <a:lumMod val="20000"/>
+                    <a:lumOff val="80000"/>
                   </a:schemeClr>
                 </a:solidFill>
                 <a:latin typeface="Inter"/>
@@ -25678,8 +25815,9 @@
             <a:r>
               <a:rPr lang="en-US" sz="1500" b="0" i="0" u="none" strike="noStrike" cap="none" dirty="0">
                 <a:solidFill>
-                  <a:schemeClr val="bg1">
-                    <a:lumMod val="85000"/>
+                  <a:schemeClr val="bg2">
+                    <a:lumMod val="20000"/>
+                    <a:lumOff val="80000"/>
                   </a:schemeClr>
                 </a:solidFill>
                 <a:latin typeface="Inter"/>
@@ -25692,8 +25830,9 @@
             <a:r>
               <a:rPr lang="en-US" sz="1500" b="0" i="0" u="none" strike="noStrike" cap="none" dirty="0" err="1">
                 <a:solidFill>
-                  <a:schemeClr val="bg1">
-                    <a:lumMod val="85000"/>
+                  <a:schemeClr val="bg2">
+                    <a:lumMod val="20000"/>
+                    <a:lumOff val="80000"/>
                   </a:schemeClr>
                 </a:solidFill>
                 <a:latin typeface="Inter"/>
@@ -25706,8 +25845,9 @@
             <a:r>
               <a:rPr lang="en-US" sz="1500" b="0" i="0" u="none" strike="noStrike" cap="none" dirty="0">
                 <a:solidFill>
-                  <a:schemeClr val="bg1">
-                    <a:lumMod val="85000"/>
+                  <a:schemeClr val="bg2">
+                    <a:lumMod val="20000"/>
+                    <a:lumOff val="80000"/>
                   </a:schemeClr>
                 </a:solidFill>
                 <a:latin typeface="Inter"/>
@@ -25719,8 +25859,9 @@
             </a:r>
             <a:endParaRPr dirty="0">
               <a:solidFill>
-                <a:schemeClr val="bg1">
-                  <a:lumMod val="85000"/>
+                <a:schemeClr val="bg2">
+                  <a:lumMod val="20000"/>
+                  <a:lumOff val="80000"/>
                 </a:schemeClr>
               </a:solidFill>
             </a:endParaRPr>
@@ -25791,8 +25932,9 @@
             <a:r>
               <a:rPr lang="en-US" sz="1500" dirty="0" err="1">
                 <a:solidFill>
-                  <a:schemeClr val="bg1">
-                    <a:lumMod val="85000"/>
+                  <a:schemeClr val="bg2">
+                    <a:lumMod val="20000"/>
+                    <a:lumOff val="80000"/>
                   </a:schemeClr>
                 </a:solidFill>
                 <a:latin typeface="Inter"/>
@@ -25805,8 +25947,9 @@
             <a:r>
               <a:rPr lang="en-US" sz="1500" dirty="0">
                 <a:solidFill>
-                  <a:schemeClr val="bg1">
-                    <a:lumMod val="85000"/>
+                  <a:schemeClr val="bg2">
+                    <a:lumMod val="20000"/>
+                    <a:lumOff val="80000"/>
                   </a:schemeClr>
                 </a:solidFill>
                 <a:latin typeface="Inter"/>
@@ -25819,8 +25962,9 @@
             <a:r>
               <a:rPr lang="en-US" sz="1500" dirty="0" err="1">
                 <a:solidFill>
-                  <a:schemeClr val="bg1">
-                    <a:lumMod val="85000"/>
+                  <a:schemeClr val="bg2">
+                    <a:lumMod val="20000"/>
+                    <a:lumOff val="80000"/>
                   </a:schemeClr>
                 </a:solidFill>
                 <a:latin typeface="Inter"/>
@@ -25833,8 +25977,9 @@
             <a:r>
               <a:rPr lang="en-US" sz="1500" dirty="0">
                 <a:solidFill>
-                  <a:schemeClr val="bg1">
-                    <a:lumMod val="85000"/>
+                  <a:schemeClr val="bg2">
+                    <a:lumMod val="20000"/>
+                    <a:lumOff val="80000"/>
                   </a:schemeClr>
                 </a:solidFill>
                 <a:latin typeface="Inter"/>
@@ -25847,8 +25992,9 @@
             <a:r>
               <a:rPr lang="en-US" sz="1500" dirty="0" err="1">
                 <a:solidFill>
-                  <a:schemeClr val="bg1">
-                    <a:lumMod val="85000"/>
+                  <a:schemeClr val="bg2">
+                    <a:lumMod val="20000"/>
+                    <a:lumOff val="80000"/>
                   </a:schemeClr>
                 </a:solidFill>
                 <a:latin typeface="Inter"/>
@@ -25861,8 +26007,9 @@
             <a:r>
               <a:rPr lang="en-US" sz="1500" dirty="0">
                 <a:solidFill>
-                  <a:schemeClr val="bg1">
-                    <a:lumMod val="85000"/>
+                  <a:schemeClr val="bg2">
+                    <a:lumMod val="20000"/>
+                    <a:lumOff val="80000"/>
                   </a:schemeClr>
                 </a:solidFill>
                 <a:latin typeface="Inter"/>
@@ -25875,8 +26022,9 @@
             <a:r>
               <a:rPr lang="en-US" sz="1500" b="0" i="0" u="none" strike="noStrike" cap="none" dirty="0">
                 <a:solidFill>
-                  <a:schemeClr val="bg1">
-                    <a:lumMod val="85000"/>
+                  <a:schemeClr val="bg2">
+                    <a:lumMod val="20000"/>
+                    <a:lumOff val="80000"/>
                   </a:schemeClr>
                 </a:solidFill>
                 <a:latin typeface="Inter"/>
@@ -25889,8 +26037,9 @@
             <a:r>
               <a:rPr lang="en-US" sz="1500" b="0" i="0" u="none" strike="noStrike" cap="none" dirty="0" err="1">
                 <a:solidFill>
-                  <a:schemeClr val="bg1">
-                    <a:lumMod val="85000"/>
+                  <a:schemeClr val="bg2">
+                    <a:lumMod val="20000"/>
+                    <a:lumOff val="80000"/>
                   </a:schemeClr>
                 </a:solidFill>
                 <a:latin typeface="Inter"/>
@@ -25903,8 +26052,9 @@
             <a:r>
               <a:rPr lang="en-US" sz="1500" b="0" i="0" u="none" strike="noStrike" cap="none" dirty="0">
                 <a:solidFill>
-                  <a:schemeClr val="bg1">
-                    <a:lumMod val="85000"/>
+                  <a:schemeClr val="bg2">
+                    <a:lumMod val="20000"/>
+                    <a:lumOff val="80000"/>
                   </a:schemeClr>
                 </a:solidFill>
                 <a:latin typeface="Inter"/>
@@ -25917,8 +26067,9 @@
             <a:r>
               <a:rPr lang="en-US" sz="1500" b="0" i="0" u="none" strike="noStrike" cap="none" dirty="0" err="1">
                 <a:solidFill>
-                  <a:schemeClr val="bg1">
-                    <a:lumMod val="85000"/>
+                  <a:schemeClr val="bg2">
+                    <a:lumMod val="20000"/>
+                    <a:lumOff val="80000"/>
                   </a:schemeClr>
                 </a:solidFill>
                 <a:latin typeface="Inter"/>
@@ -25931,8 +26082,9 @@
             <a:r>
               <a:rPr lang="en-US" sz="1500" b="0" i="0" u="none" strike="noStrike" cap="none" dirty="0">
                 <a:solidFill>
-                  <a:schemeClr val="bg1">
-                    <a:lumMod val="85000"/>
+                  <a:schemeClr val="bg2">
+                    <a:lumMod val="20000"/>
+                    <a:lumOff val="80000"/>
                   </a:schemeClr>
                 </a:solidFill>
                 <a:latin typeface="Inter"/>
@@ -25944,8 +26096,9 @@
             </a:r>
             <a:endParaRPr dirty="0">
               <a:solidFill>
-                <a:schemeClr val="bg1">
-                  <a:lumMod val="85000"/>
+                <a:schemeClr val="bg2">
+                  <a:lumMod val="20000"/>
+                  <a:lumOff val="80000"/>
                 </a:schemeClr>
               </a:solidFill>
             </a:endParaRPr>
@@ -25967,7 +26120,7 @@
         </p:blipFill>
         <p:spPr>
           <a:xfrm>
-            <a:off x="1333500" y="2395537"/>
+            <a:off x="1333350" y="2455307"/>
             <a:ext cx="266700" cy="276225"/>
           </a:xfrm>
           <a:prstGeom prst="rect">
@@ -25994,7 +26147,7 @@
         </p:blipFill>
         <p:spPr>
           <a:xfrm>
-            <a:off x="1333500" y="2938462"/>
+            <a:off x="1333350" y="3017043"/>
             <a:ext cx="266700" cy="276225"/>
           </a:xfrm>
           <a:prstGeom prst="rect">
@@ -26021,7 +26174,7 @@
         </p:blipFill>
         <p:spPr>
           <a:xfrm>
-            <a:off x="1333350" y="4491037"/>
+            <a:off x="1329902" y="4550807"/>
             <a:ext cx="304800" cy="276225"/>
           </a:xfrm>
           <a:prstGeom prst="rect">
@@ -26048,7 +26201,7 @@
         </p:blipFill>
         <p:spPr>
           <a:xfrm>
-            <a:off x="1333350" y="5338762"/>
+            <a:off x="1329902" y="5398532"/>
             <a:ext cx="333375" cy="276225"/>
           </a:xfrm>
           <a:prstGeom prst="rect">

--- a/Progetto Interfacce Uomo-Macchina.pptx
+++ b/Progetto Interfacce Uomo-Macchina.pptx
@@ -5,7 +5,7 @@
     <p:sldMasterId id="2147483659" r:id="rId1"/>
   </p:sldMasterIdLst>
   <p:notesMasterIdLst>
-    <p:notesMasterId r:id="rId12"/>
+    <p:notesMasterId r:id="rId14"/>
   </p:notesMasterIdLst>
   <p:sldIdLst>
     <p:sldId id="256" r:id="rId2"/>
@@ -16,46 +16,48 @@
     <p:sldId id="261" r:id="rId7"/>
     <p:sldId id="262" r:id="rId8"/>
     <p:sldId id="264" r:id="rId9"/>
-    <p:sldId id="266" r:id="rId10"/>
-    <p:sldId id="269" r:id="rId11"/>
+    <p:sldId id="270" r:id="rId10"/>
+    <p:sldId id="271" r:id="rId11"/>
+    <p:sldId id="266" r:id="rId12"/>
+    <p:sldId id="269" r:id="rId13"/>
   </p:sldIdLst>
   <p:sldSz cx="12192000" cy="6858000"/>
   <p:notesSz cx="6858000" cy="9144000"/>
   <p:embeddedFontLst>
     <p:embeddedFont>
       <p:font typeface="Inter" panose="020B0604020202020204" charset="0"/>
-      <p:regular r:id="rId13"/>
-      <p:bold r:id="rId14"/>
-      <p:italic r:id="rId15"/>
-      <p:boldItalic r:id="rId16"/>
+      <p:regular r:id="rId15"/>
+      <p:bold r:id="rId16"/>
+      <p:italic r:id="rId17"/>
+      <p:boldItalic r:id="rId18"/>
     </p:embeddedFont>
     <p:embeddedFont>
       <p:font typeface="Inter SemiBold" panose="020B0604020202020204" charset="0"/>
-      <p:regular r:id="rId17"/>
-      <p:bold r:id="rId18"/>
-      <p:italic r:id="rId19"/>
-      <p:boldItalic r:id="rId20"/>
+      <p:regular r:id="rId19"/>
+      <p:bold r:id="rId20"/>
+      <p:italic r:id="rId21"/>
+      <p:boldItalic r:id="rId22"/>
     </p:embeddedFont>
     <p:embeddedFont>
       <p:font typeface="Poppins" panose="00000500000000000000" pitchFamily="2" charset="0"/>
-      <p:regular r:id="rId21"/>
-      <p:bold r:id="rId22"/>
-      <p:italic r:id="rId23"/>
-      <p:boldItalic r:id="rId24"/>
+      <p:regular r:id="rId23"/>
+      <p:bold r:id="rId24"/>
+      <p:italic r:id="rId25"/>
+      <p:boldItalic r:id="rId26"/>
     </p:embeddedFont>
     <p:embeddedFont>
       <p:font typeface="Poppins Medium" panose="00000600000000000000" pitchFamily="2" charset="0"/>
-      <p:regular r:id="rId25"/>
-      <p:bold r:id="rId26"/>
-      <p:italic r:id="rId27"/>
-      <p:boldItalic r:id="rId28"/>
+      <p:regular r:id="rId27"/>
+      <p:bold r:id="rId28"/>
+      <p:italic r:id="rId29"/>
+      <p:boldItalic r:id="rId30"/>
     </p:embeddedFont>
     <p:embeddedFont>
       <p:font typeface="Poppins SemiBold" panose="00000700000000000000" pitchFamily="2" charset="0"/>
-      <p:regular r:id="rId29"/>
-      <p:bold r:id="rId30"/>
-      <p:italic r:id="rId31"/>
-      <p:boldItalic r:id="rId32"/>
+      <p:regular r:id="rId31"/>
+      <p:bold r:id="rId32"/>
+      <p:italic r:id="rId33"/>
+      <p:boldItalic r:id="rId34"/>
     </p:embeddedFont>
   </p:embeddedFontLst>
   <p:defaultTextStyle>
@@ -856,6 +858,237 @@
   <p:cSld>
     <p:spTree>
       <p:nvGrpSpPr>
+        <p:cNvPr id="1" name="Shape 235">
+          <a:extLst>
+            <a:ext uri="{FF2B5EF4-FFF2-40B4-BE49-F238E27FC236}">
+              <a16:creationId xmlns:a16="http://schemas.microsoft.com/office/drawing/2014/main" id="{5797EEAE-C704-1567-06EC-14860AC4EAE7}"/>
+            </a:ext>
+          </a:extLst>
+        </p:cNvPr>
+        <p:cNvGrpSpPr/>
+        <p:nvPr/>
+      </p:nvGrpSpPr>
+      <p:grpSpPr>
+        <a:xfrm>
+          <a:off x="0" y="0"/>
+          <a:ext cx="0" cy="0"/>
+          <a:chOff x="0" y="0"/>
+          <a:chExt cx="0" cy="0"/>
+        </a:xfrm>
+      </p:grpSpPr>
+      <p:sp>
+        <p:nvSpPr>
+          <p:cNvPr id="236" name="Google Shape;236;p11:notes">
+            <a:extLst>
+              <a:ext uri="{FF2B5EF4-FFF2-40B4-BE49-F238E27FC236}">
+                <a16:creationId xmlns:a16="http://schemas.microsoft.com/office/drawing/2014/main" id="{D818527A-00BB-2239-79E6-9A5E081F9440}"/>
+              </a:ext>
+            </a:extLst>
+          </p:cNvPr>
+          <p:cNvSpPr txBox="1">
+            <a:spLocks noGrp="1"/>
+          </p:cNvSpPr>
+          <p:nvPr>
+            <p:ph type="body" idx="1"/>
+          </p:nvPr>
+        </p:nvSpPr>
+        <p:spPr>
+          <a:xfrm>
+            <a:off x="685800" y="4343400"/>
+            <a:ext cx="5486400" cy="4114800"/>
+          </a:xfrm>
+          <a:prstGeom prst="rect">
+            <a:avLst/>
+          </a:prstGeom>
+        </p:spPr>
+        <p:txBody>
+          <a:bodyPr spcFirstLastPara="1" wrap="square" lIns="91425" tIns="91425" rIns="91425" bIns="91425" anchor="t" anchorCtr="0">
+            <a:noAutofit/>
+          </a:bodyPr>
+          <a:lstStyle/>
+          <a:p>
+            <a:pPr marL="0" lvl="0" indent="0" algn="l" rtl="0">
+              <a:spcBef>
+                <a:spcPts val="0"/>
+              </a:spcBef>
+              <a:spcAft>
+                <a:spcPts val="0"/>
+              </a:spcAft>
+              <a:buNone/>
+            </a:pPr>
+            <a:endParaRPr/>
+          </a:p>
+        </p:txBody>
+      </p:sp>
+      <p:sp>
+        <p:nvSpPr>
+          <p:cNvPr id="237" name="Google Shape;237;p11:notes">
+            <a:extLst>
+              <a:ext uri="{FF2B5EF4-FFF2-40B4-BE49-F238E27FC236}">
+                <a16:creationId xmlns:a16="http://schemas.microsoft.com/office/drawing/2014/main" id="{0D7A1178-8FA4-1FC1-B0AD-77DA497C514A}"/>
+              </a:ext>
+            </a:extLst>
+          </p:cNvPr>
+          <p:cNvSpPr>
+            <a:spLocks noGrp="1" noRot="1" noChangeAspect="1"/>
+          </p:cNvSpPr>
+          <p:nvPr>
+            <p:ph type="sldImg" idx="2"/>
+          </p:nvPr>
+        </p:nvSpPr>
+        <p:spPr>
+          <a:xfrm>
+            <a:off x="381000" y="685800"/>
+            <a:ext cx="6096000" cy="3429000"/>
+          </a:xfrm>
+          <a:custGeom>
+            <a:avLst/>
+            <a:gdLst/>
+            <a:ahLst/>
+            <a:cxnLst/>
+            <a:rect l="l" t="t" r="r" b="b"/>
+            <a:pathLst>
+              <a:path w="120000" h="120000" extrusionOk="0">
+                <a:moveTo>
+                  <a:pt x="0" y="0"/>
+                </a:moveTo>
+                <a:lnTo>
+                  <a:pt x="120000" y="0"/>
+                </a:lnTo>
+                <a:lnTo>
+                  <a:pt x="120000" y="120000"/>
+                </a:lnTo>
+                <a:lnTo>
+                  <a:pt x="0" y="120000"/>
+                </a:lnTo>
+                <a:close/>
+              </a:path>
+            </a:pathLst>
+          </a:custGeom>
+        </p:spPr>
+      </p:sp>
+    </p:spTree>
+    <p:extLst>
+      <p:ext uri="{BB962C8B-B14F-4D97-AF65-F5344CB8AC3E}">
+        <p14:creationId xmlns:p14="http://schemas.microsoft.com/office/powerpoint/2010/main" val="3187622858"/>
+      </p:ext>
+    </p:extLst>
+  </p:cSld>
+  <p:clrMapOvr>
+    <a:masterClrMapping/>
+  </p:clrMapOvr>
+</p:notes>
+</file>
+
+<file path=ppt/notesSlides/notesSlide11.xml><?xml version="1.0" encoding="utf-8"?>
+<p:notes xmlns:a="http://schemas.openxmlformats.org/drawingml/2006/main" xmlns:r="http://schemas.openxmlformats.org/officeDocument/2006/relationships" xmlns:p="http://schemas.openxmlformats.org/presentationml/2006/main" showMasterSp="0" showMasterPhAnim="0">
+  <p:cSld>
+    <p:spTree>
+      <p:nvGrpSpPr>
+        <p:cNvPr id="1" name="Shape 235"/>
+        <p:cNvGrpSpPr/>
+        <p:nvPr/>
+      </p:nvGrpSpPr>
+      <p:grpSpPr>
+        <a:xfrm>
+          <a:off x="0" y="0"/>
+          <a:ext cx="0" cy="0"/>
+          <a:chOff x="0" y="0"/>
+          <a:chExt cx="0" cy="0"/>
+        </a:xfrm>
+      </p:grpSpPr>
+      <p:sp>
+        <p:nvSpPr>
+          <p:cNvPr id="236" name="Google Shape;236;p11:notes"/>
+          <p:cNvSpPr txBox="1">
+            <a:spLocks noGrp="1"/>
+          </p:cNvSpPr>
+          <p:nvPr>
+            <p:ph type="body" idx="1"/>
+          </p:nvPr>
+        </p:nvSpPr>
+        <p:spPr>
+          <a:xfrm>
+            <a:off x="685800" y="4343400"/>
+            <a:ext cx="5486400" cy="4114800"/>
+          </a:xfrm>
+          <a:prstGeom prst="rect">
+            <a:avLst/>
+          </a:prstGeom>
+        </p:spPr>
+        <p:txBody>
+          <a:bodyPr spcFirstLastPara="1" wrap="square" lIns="91425" tIns="91425" rIns="91425" bIns="91425" anchor="t" anchorCtr="0">
+            <a:noAutofit/>
+          </a:bodyPr>
+          <a:lstStyle/>
+          <a:p>
+            <a:pPr marL="0" lvl="0" indent="0" algn="l" rtl="0">
+              <a:spcBef>
+                <a:spcPts val="0"/>
+              </a:spcBef>
+              <a:spcAft>
+                <a:spcPts val="0"/>
+              </a:spcAft>
+              <a:buNone/>
+            </a:pPr>
+            <a:endParaRPr/>
+          </a:p>
+        </p:txBody>
+      </p:sp>
+      <p:sp>
+        <p:nvSpPr>
+          <p:cNvPr id="237" name="Google Shape;237;p11:notes"/>
+          <p:cNvSpPr>
+            <a:spLocks noGrp="1" noRot="1" noChangeAspect="1"/>
+          </p:cNvSpPr>
+          <p:nvPr>
+            <p:ph type="sldImg" idx="2"/>
+          </p:nvPr>
+        </p:nvSpPr>
+        <p:spPr>
+          <a:xfrm>
+            <a:off x="381000" y="685800"/>
+            <a:ext cx="6096000" cy="3429000"/>
+          </a:xfrm>
+          <a:custGeom>
+            <a:avLst/>
+            <a:gdLst/>
+            <a:ahLst/>
+            <a:cxnLst/>
+            <a:rect l="l" t="t" r="r" b="b"/>
+            <a:pathLst>
+              <a:path w="120000" h="120000" extrusionOk="0">
+                <a:moveTo>
+                  <a:pt x="0" y="0"/>
+                </a:moveTo>
+                <a:lnTo>
+                  <a:pt x="120000" y="0"/>
+                </a:lnTo>
+                <a:lnTo>
+                  <a:pt x="120000" y="120000"/>
+                </a:lnTo>
+                <a:lnTo>
+                  <a:pt x="0" y="120000"/>
+                </a:lnTo>
+                <a:close/>
+              </a:path>
+            </a:pathLst>
+          </a:custGeom>
+        </p:spPr>
+      </p:sp>
+    </p:spTree>
+  </p:cSld>
+  <p:clrMapOvr>
+    <a:masterClrMapping/>
+  </p:clrMapOvr>
+</p:notes>
+</file>
+
+<file path=ppt/notesSlides/notesSlide12.xml><?xml version="1.0" encoding="utf-8"?>
+<p:notes xmlns:a="http://schemas.openxmlformats.org/drawingml/2006/main" xmlns:r="http://schemas.openxmlformats.org/officeDocument/2006/relationships" xmlns:p="http://schemas.openxmlformats.org/presentationml/2006/main" showMasterSp="0" showMasterPhAnim="0">
+  <p:cSld>
+    <p:spTree>
+      <p:nvGrpSpPr>
         <p:cNvPr id="1" name="Shape 266"/>
         <p:cNvGrpSpPr/>
         <p:nvPr/>
@@ -1688,7 +1921,13 @@
   <p:cSld>
     <p:spTree>
       <p:nvGrpSpPr>
-        <p:cNvPr id="1" name="Shape 235"/>
+        <p:cNvPr id="1" name="Shape 235">
+          <a:extLst>
+            <a:ext uri="{FF2B5EF4-FFF2-40B4-BE49-F238E27FC236}">
+              <a16:creationId xmlns:a16="http://schemas.microsoft.com/office/drawing/2014/main" id="{C66B4C5F-542B-EDEA-557A-9A5CA104505C}"/>
+            </a:ext>
+          </a:extLst>
+        </p:cNvPr>
         <p:cNvGrpSpPr/>
         <p:nvPr/>
       </p:nvGrpSpPr>
@@ -1702,7 +1941,13 @@
       </p:grpSpPr>
       <p:sp>
         <p:nvSpPr>
-          <p:cNvPr id="236" name="Google Shape;236;p11:notes"/>
+          <p:cNvPr id="236" name="Google Shape;236;p11:notes">
+            <a:extLst>
+              <a:ext uri="{FF2B5EF4-FFF2-40B4-BE49-F238E27FC236}">
+                <a16:creationId xmlns:a16="http://schemas.microsoft.com/office/drawing/2014/main" id="{CB983873-06BF-DFD3-4480-C11642AFF19F}"/>
+              </a:ext>
+            </a:extLst>
+          </p:cNvPr>
           <p:cNvSpPr txBox="1">
             <a:spLocks noGrp="1"/>
           </p:cNvSpPr>
@@ -1740,7 +1985,13 @@
       </p:sp>
       <p:sp>
         <p:nvSpPr>
-          <p:cNvPr id="237" name="Google Shape;237;p11:notes"/>
+          <p:cNvPr id="237" name="Google Shape;237;p11:notes">
+            <a:extLst>
+              <a:ext uri="{FF2B5EF4-FFF2-40B4-BE49-F238E27FC236}">
+                <a16:creationId xmlns:a16="http://schemas.microsoft.com/office/drawing/2014/main" id="{D955A440-C8A6-5E74-59B3-45B847AB0632}"/>
+              </a:ext>
+            </a:extLst>
+          </p:cNvPr>
           <p:cNvSpPr>
             <a:spLocks noGrp="1" noRot="1" noChangeAspect="1"/>
           </p:cNvSpPr>
@@ -1780,6 +2031,11 @@
         </p:spPr>
       </p:sp>
     </p:spTree>
+    <p:extLst>
+      <p:ext uri="{BB962C8B-B14F-4D97-AF65-F5344CB8AC3E}">
+        <p14:creationId xmlns:p14="http://schemas.microsoft.com/office/powerpoint/2010/main" val="3894689867"/>
+      </p:ext>
+    </p:extLst>
   </p:cSld>
   <p:clrMapOvr>
     <a:masterClrMapping/>
@@ -2189,703 +2445,6 @@
 </file>
 
 <file path=ppt/slideLayouts/slideLayout10.xml><?xml version="1.0" encoding="utf-8"?>
-<p:sldLayout xmlns:a="http://schemas.openxmlformats.org/drawingml/2006/main" xmlns:r="http://schemas.openxmlformats.org/officeDocument/2006/relationships" xmlns:p="http://schemas.openxmlformats.org/presentationml/2006/main" matchingName="Title and Vertical Text" type="vertTx">
-  <p:cSld name="VERTICAL_TEXT">
-    <p:spTree>
-      <p:nvGrpSpPr>
-        <p:cNvPr id="1" name="Shape 68"/>
-        <p:cNvGrpSpPr/>
-        <p:nvPr/>
-      </p:nvGrpSpPr>
-      <p:grpSpPr>
-        <a:xfrm>
-          <a:off x="0" y="0"/>
-          <a:ext cx="0" cy="0"/>
-          <a:chOff x="0" y="0"/>
-          <a:chExt cx="0" cy="0"/>
-        </a:xfrm>
-      </p:grpSpPr>
-      <p:sp>
-        <p:nvSpPr>
-          <p:cNvPr id="69" name="Google Shape;69;p11"/>
-          <p:cNvSpPr txBox="1">
-            <a:spLocks noGrp="1"/>
-          </p:cNvSpPr>
-          <p:nvPr>
-            <p:ph type="title"/>
-          </p:nvPr>
-        </p:nvSpPr>
-        <p:spPr>
-          <a:xfrm>
-            <a:off x="457200" y="274638"/>
-            <a:ext cx="8229600" cy="1143000"/>
-          </a:xfrm>
-          <a:prstGeom prst="rect">
-            <a:avLst/>
-          </a:prstGeom>
-          <a:noFill/>
-          <a:ln>
-            <a:noFill/>
-          </a:ln>
-        </p:spPr>
-        <p:txBody>
-          <a:bodyPr spcFirstLastPara="1" wrap="square" lIns="91425" tIns="45700" rIns="91425" bIns="45700" anchor="ctr" anchorCtr="0">
-            <a:normAutofit/>
-          </a:bodyPr>
-          <a:lstStyle>
-            <a:lvl1pPr lvl="0" algn="ctr">
-              <a:spcBef>
-                <a:spcPts val="0"/>
-              </a:spcBef>
-              <a:spcAft>
-                <a:spcPts val="0"/>
-              </a:spcAft>
-              <a:buClr>
-                <a:schemeClr val="dk1"/>
-              </a:buClr>
-              <a:buSzPts val="1800"/>
-              <a:buNone/>
-              <a:defRPr/>
-            </a:lvl1pPr>
-            <a:lvl2pPr lvl="1">
-              <a:spcBef>
-                <a:spcPts val="0"/>
-              </a:spcBef>
-              <a:spcAft>
-                <a:spcPts val="0"/>
-              </a:spcAft>
-              <a:buSzPts val="1400"/>
-              <a:buNone/>
-              <a:defRPr/>
-            </a:lvl2pPr>
-            <a:lvl3pPr lvl="2">
-              <a:spcBef>
-                <a:spcPts val="0"/>
-              </a:spcBef>
-              <a:spcAft>
-                <a:spcPts val="0"/>
-              </a:spcAft>
-              <a:buSzPts val="1400"/>
-              <a:buNone/>
-              <a:defRPr/>
-            </a:lvl3pPr>
-            <a:lvl4pPr lvl="3">
-              <a:spcBef>
-                <a:spcPts val="0"/>
-              </a:spcBef>
-              <a:spcAft>
-                <a:spcPts val="0"/>
-              </a:spcAft>
-              <a:buSzPts val="1400"/>
-              <a:buNone/>
-              <a:defRPr/>
-            </a:lvl4pPr>
-            <a:lvl5pPr lvl="4">
-              <a:spcBef>
-                <a:spcPts val="0"/>
-              </a:spcBef>
-              <a:spcAft>
-                <a:spcPts val="0"/>
-              </a:spcAft>
-              <a:buSzPts val="1400"/>
-              <a:buNone/>
-              <a:defRPr/>
-            </a:lvl5pPr>
-            <a:lvl6pPr lvl="5">
-              <a:spcBef>
-                <a:spcPts val="0"/>
-              </a:spcBef>
-              <a:spcAft>
-                <a:spcPts val="0"/>
-              </a:spcAft>
-              <a:buSzPts val="1400"/>
-              <a:buNone/>
-              <a:defRPr/>
-            </a:lvl6pPr>
-            <a:lvl7pPr lvl="6">
-              <a:spcBef>
-                <a:spcPts val="0"/>
-              </a:spcBef>
-              <a:spcAft>
-                <a:spcPts val="0"/>
-              </a:spcAft>
-              <a:buSzPts val="1400"/>
-              <a:buNone/>
-              <a:defRPr/>
-            </a:lvl7pPr>
-            <a:lvl8pPr lvl="7">
-              <a:spcBef>
-                <a:spcPts val="0"/>
-              </a:spcBef>
-              <a:spcAft>
-                <a:spcPts val="0"/>
-              </a:spcAft>
-              <a:buSzPts val="1400"/>
-              <a:buNone/>
-              <a:defRPr/>
-            </a:lvl8pPr>
-            <a:lvl9pPr lvl="8">
-              <a:spcBef>
-                <a:spcPts val="0"/>
-              </a:spcBef>
-              <a:spcAft>
-                <a:spcPts val="0"/>
-              </a:spcAft>
-              <a:buSzPts val="1400"/>
-              <a:buNone/>
-              <a:defRPr/>
-            </a:lvl9pPr>
-          </a:lstStyle>
-          <a:p>
-            <a:endParaRPr/>
-          </a:p>
-        </p:txBody>
-      </p:sp>
-      <p:sp>
-        <p:nvSpPr>
-          <p:cNvPr id="70" name="Google Shape;70;p11"/>
-          <p:cNvSpPr txBox="1">
-            <a:spLocks noGrp="1"/>
-          </p:cNvSpPr>
-          <p:nvPr>
-            <p:ph type="body" idx="1"/>
-          </p:nvPr>
-        </p:nvSpPr>
-        <p:spPr>
-          <a:xfrm rot="5400000">
-            <a:off x="2309019" y="-251618"/>
-            <a:ext cx="4525963" cy="8229600"/>
-          </a:xfrm>
-          <a:prstGeom prst="rect">
-            <a:avLst/>
-          </a:prstGeom>
-          <a:noFill/>
-          <a:ln>
-            <a:noFill/>
-          </a:ln>
-        </p:spPr>
-        <p:txBody>
-          <a:bodyPr spcFirstLastPara="1" wrap="square" lIns="91425" tIns="45700" rIns="91425" bIns="45700" anchor="t" anchorCtr="0">
-            <a:normAutofit/>
-          </a:bodyPr>
-          <a:lstStyle>
-            <a:lvl1pPr marL="457200" lvl="0" indent="-342900" algn="l">
-              <a:spcBef>
-                <a:spcPts val="360"/>
-              </a:spcBef>
-              <a:spcAft>
-                <a:spcPts val="0"/>
-              </a:spcAft>
-              <a:buClr>
-                <a:schemeClr val="dk1"/>
-              </a:buClr>
-              <a:buSzPts val="1800"/>
-              <a:buChar char="•"/>
-              <a:defRPr/>
-            </a:lvl1pPr>
-            <a:lvl2pPr marL="914400" lvl="1" indent="-342900" algn="l">
-              <a:spcBef>
-                <a:spcPts val="360"/>
-              </a:spcBef>
-              <a:spcAft>
-                <a:spcPts val="0"/>
-              </a:spcAft>
-              <a:buClr>
-                <a:schemeClr val="dk1"/>
-              </a:buClr>
-              <a:buSzPts val="1800"/>
-              <a:buChar char="–"/>
-              <a:defRPr/>
-            </a:lvl2pPr>
-            <a:lvl3pPr marL="1371600" lvl="2" indent="-342900" algn="l">
-              <a:spcBef>
-                <a:spcPts val="360"/>
-              </a:spcBef>
-              <a:spcAft>
-                <a:spcPts val="0"/>
-              </a:spcAft>
-              <a:buClr>
-                <a:schemeClr val="dk1"/>
-              </a:buClr>
-              <a:buSzPts val="1800"/>
-              <a:buChar char="•"/>
-              <a:defRPr/>
-            </a:lvl3pPr>
-            <a:lvl4pPr marL="1828800" lvl="3" indent="-342900" algn="l">
-              <a:spcBef>
-                <a:spcPts val="360"/>
-              </a:spcBef>
-              <a:spcAft>
-                <a:spcPts val="0"/>
-              </a:spcAft>
-              <a:buClr>
-                <a:schemeClr val="dk1"/>
-              </a:buClr>
-              <a:buSzPts val="1800"/>
-              <a:buChar char="–"/>
-              <a:defRPr/>
-            </a:lvl4pPr>
-            <a:lvl5pPr marL="2286000" lvl="4" indent="-342900" algn="l">
-              <a:spcBef>
-                <a:spcPts val="360"/>
-              </a:spcBef>
-              <a:spcAft>
-                <a:spcPts val="0"/>
-              </a:spcAft>
-              <a:buClr>
-                <a:schemeClr val="dk1"/>
-              </a:buClr>
-              <a:buSzPts val="1800"/>
-              <a:buChar char="»"/>
-              <a:defRPr/>
-            </a:lvl5pPr>
-            <a:lvl6pPr marL="2743200" lvl="5" indent="-342900" algn="l">
-              <a:spcBef>
-                <a:spcPts val="360"/>
-              </a:spcBef>
-              <a:spcAft>
-                <a:spcPts val="0"/>
-              </a:spcAft>
-              <a:buClr>
-                <a:schemeClr val="dk1"/>
-              </a:buClr>
-              <a:buSzPts val="1800"/>
-              <a:buChar char="•"/>
-              <a:defRPr/>
-            </a:lvl6pPr>
-            <a:lvl7pPr marL="3200400" lvl="6" indent="-342900" algn="l">
-              <a:spcBef>
-                <a:spcPts val="360"/>
-              </a:spcBef>
-              <a:spcAft>
-                <a:spcPts val="0"/>
-              </a:spcAft>
-              <a:buClr>
-                <a:schemeClr val="dk1"/>
-              </a:buClr>
-              <a:buSzPts val="1800"/>
-              <a:buChar char="•"/>
-              <a:defRPr/>
-            </a:lvl7pPr>
-            <a:lvl8pPr marL="3657600" lvl="7" indent="-342900" algn="l">
-              <a:spcBef>
-                <a:spcPts val="360"/>
-              </a:spcBef>
-              <a:spcAft>
-                <a:spcPts val="0"/>
-              </a:spcAft>
-              <a:buClr>
-                <a:schemeClr val="dk1"/>
-              </a:buClr>
-              <a:buSzPts val="1800"/>
-              <a:buChar char="•"/>
-              <a:defRPr/>
-            </a:lvl8pPr>
-            <a:lvl9pPr marL="4114800" lvl="8" indent="-342900" algn="l">
-              <a:spcBef>
-                <a:spcPts val="360"/>
-              </a:spcBef>
-              <a:spcAft>
-                <a:spcPts val="0"/>
-              </a:spcAft>
-              <a:buClr>
-                <a:schemeClr val="dk1"/>
-              </a:buClr>
-              <a:buSzPts val="1800"/>
-              <a:buChar char="•"/>
-              <a:defRPr/>
-            </a:lvl9pPr>
-          </a:lstStyle>
-          <a:p>
-            <a:endParaRPr/>
-          </a:p>
-        </p:txBody>
-      </p:sp>
-      <p:sp>
-        <p:nvSpPr>
-          <p:cNvPr id="71" name="Google Shape;71;p11"/>
-          <p:cNvSpPr txBox="1">
-            <a:spLocks noGrp="1"/>
-          </p:cNvSpPr>
-          <p:nvPr>
-            <p:ph type="dt" idx="10"/>
-          </p:nvPr>
-        </p:nvSpPr>
-        <p:spPr>
-          <a:xfrm>
-            <a:off x="457200" y="6356350"/>
-            <a:ext cx="2133600" cy="365125"/>
-          </a:xfrm>
-          <a:prstGeom prst="rect">
-            <a:avLst/>
-          </a:prstGeom>
-          <a:noFill/>
-          <a:ln>
-            <a:noFill/>
-          </a:ln>
-        </p:spPr>
-        <p:txBody>
-          <a:bodyPr spcFirstLastPara="1" wrap="square" lIns="91425" tIns="45700" rIns="91425" bIns="45700" anchor="ctr" anchorCtr="0">
-            <a:noAutofit/>
-          </a:bodyPr>
-          <a:lstStyle>
-            <a:lvl1pPr lvl="0" algn="l">
-              <a:spcBef>
-                <a:spcPts val="0"/>
-              </a:spcBef>
-              <a:spcAft>
-                <a:spcPts val="0"/>
-              </a:spcAft>
-              <a:buSzPts val="1400"/>
-              <a:buNone/>
-              <a:defRPr/>
-            </a:lvl1pPr>
-            <a:lvl2pPr lvl="1" algn="l">
-              <a:spcBef>
-                <a:spcPts val="0"/>
-              </a:spcBef>
-              <a:spcAft>
-                <a:spcPts val="0"/>
-              </a:spcAft>
-              <a:buSzPts val="1400"/>
-              <a:buNone/>
-              <a:defRPr/>
-            </a:lvl2pPr>
-            <a:lvl3pPr lvl="2" algn="l">
-              <a:spcBef>
-                <a:spcPts val="0"/>
-              </a:spcBef>
-              <a:spcAft>
-                <a:spcPts val="0"/>
-              </a:spcAft>
-              <a:buSzPts val="1400"/>
-              <a:buNone/>
-              <a:defRPr/>
-            </a:lvl3pPr>
-            <a:lvl4pPr lvl="3" algn="l">
-              <a:spcBef>
-                <a:spcPts val="0"/>
-              </a:spcBef>
-              <a:spcAft>
-                <a:spcPts val="0"/>
-              </a:spcAft>
-              <a:buSzPts val="1400"/>
-              <a:buNone/>
-              <a:defRPr/>
-            </a:lvl4pPr>
-            <a:lvl5pPr lvl="4" algn="l">
-              <a:spcBef>
-                <a:spcPts val="0"/>
-              </a:spcBef>
-              <a:spcAft>
-                <a:spcPts val="0"/>
-              </a:spcAft>
-              <a:buSzPts val="1400"/>
-              <a:buNone/>
-              <a:defRPr/>
-            </a:lvl5pPr>
-            <a:lvl6pPr lvl="5" algn="l">
-              <a:spcBef>
-                <a:spcPts val="0"/>
-              </a:spcBef>
-              <a:spcAft>
-                <a:spcPts val="0"/>
-              </a:spcAft>
-              <a:buSzPts val="1400"/>
-              <a:buNone/>
-              <a:defRPr/>
-            </a:lvl6pPr>
-            <a:lvl7pPr lvl="6" algn="l">
-              <a:spcBef>
-                <a:spcPts val="0"/>
-              </a:spcBef>
-              <a:spcAft>
-                <a:spcPts val="0"/>
-              </a:spcAft>
-              <a:buSzPts val="1400"/>
-              <a:buNone/>
-              <a:defRPr/>
-            </a:lvl7pPr>
-            <a:lvl8pPr lvl="7" algn="l">
-              <a:spcBef>
-                <a:spcPts val="0"/>
-              </a:spcBef>
-              <a:spcAft>
-                <a:spcPts val="0"/>
-              </a:spcAft>
-              <a:buSzPts val="1400"/>
-              <a:buNone/>
-              <a:defRPr/>
-            </a:lvl8pPr>
-            <a:lvl9pPr lvl="8" algn="l">
-              <a:spcBef>
-                <a:spcPts val="0"/>
-              </a:spcBef>
-              <a:spcAft>
-                <a:spcPts val="0"/>
-              </a:spcAft>
-              <a:buSzPts val="1400"/>
-              <a:buNone/>
-              <a:defRPr/>
-            </a:lvl9pPr>
-          </a:lstStyle>
-          <a:p>
-            <a:endParaRPr/>
-          </a:p>
-        </p:txBody>
-      </p:sp>
-      <p:sp>
-        <p:nvSpPr>
-          <p:cNvPr id="72" name="Google Shape;72;p11"/>
-          <p:cNvSpPr txBox="1">
-            <a:spLocks noGrp="1"/>
-          </p:cNvSpPr>
-          <p:nvPr>
-            <p:ph type="ftr" idx="11"/>
-          </p:nvPr>
-        </p:nvSpPr>
-        <p:spPr>
-          <a:xfrm>
-            <a:off x="3124200" y="6356350"/>
-            <a:ext cx="2895600" cy="365125"/>
-          </a:xfrm>
-          <a:prstGeom prst="rect">
-            <a:avLst/>
-          </a:prstGeom>
-          <a:noFill/>
-          <a:ln>
-            <a:noFill/>
-          </a:ln>
-        </p:spPr>
-        <p:txBody>
-          <a:bodyPr spcFirstLastPara="1" wrap="square" lIns="91425" tIns="45700" rIns="91425" bIns="45700" anchor="ctr" anchorCtr="0">
-            <a:noAutofit/>
-          </a:bodyPr>
-          <a:lstStyle>
-            <a:lvl1pPr lvl="0" algn="ctr">
-              <a:spcBef>
-                <a:spcPts val="0"/>
-              </a:spcBef>
-              <a:spcAft>
-                <a:spcPts val="0"/>
-              </a:spcAft>
-              <a:buSzPts val="1400"/>
-              <a:buNone/>
-              <a:defRPr/>
-            </a:lvl1pPr>
-            <a:lvl2pPr lvl="1" algn="l">
-              <a:spcBef>
-                <a:spcPts val="0"/>
-              </a:spcBef>
-              <a:spcAft>
-                <a:spcPts val="0"/>
-              </a:spcAft>
-              <a:buSzPts val="1400"/>
-              <a:buNone/>
-              <a:defRPr/>
-            </a:lvl2pPr>
-            <a:lvl3pPr lvl="2" algn="l">
-              <a:spcBef>
-                <a:spcPts val="0"/>
-              </a:spcBef>
-              <a:spcAft>
-                <a:spcPts val="0"/>
-              </a:spcAft>
-              <a:buSzPts val="1400"/>
-              <a:buNone/>
-              <a:defRPr/>
-            </a:lvl3pPr>
-            <a:lvl4pPr lvl="3" algn="l">
-              <a:spcBef>
-                <a:spcPts val="0"/>
-              </a:spcBef>
-              <a:spcAft>
-                <a:spcPts val="0"/>
-              </a:spcAft>
-              <a:buSzPts val="1400"/>
-              <a:buNone/>
-              <a:defRPr/>
-            </a:lvl4pPr>
-            <a:lvl5pPr lvl="4" algn="l">
-              <a:spcBef>
-                <a:spcPts val="0"/>
-              </a:spcBef>
-              <a:spcAft>
-                <a:spcPts val="0"/>
-              </a:spcAft>
-              <a:buSzPts val="1400"/>
-              <a:buNone/>
-              <a:defRPr/>
-            </a:lvl5pPr>
-            <a:lvl6pPr lvl="5" algn="l">
-              <a:spcBef>
-                <a:spcPts val="0"/>
-              </a:spcBef>
-              <a:spcAft>
-                <a:spcPts val="0"/>
-              </a:spcAft>
-              <a:buSzPts val="1400"/>
-              <a:buNone/>
-              <a:defRPr/>
-            </a:lvl6pPr>
-            <a:lvl7pPr lvl="6" algn="l">
-              <a:spcBef>
-                <a:spcPts val="0"/>
-              </a:spcBef>
-              <a:spcAft>
-                <a:spcPts val="0"/>
-              </a:spcAft>
-              <a:buSzPts val="1400"/>
-              <a:buNone/>
-              <a:defRPr/>
-            </a:lvl7pPr>
-            <a:lvl8pPr lvl="7" algn="l">
-              <a:spcBef>
-                <a:spcPts val="0"/>
-              </a:spcBef>
-              <a:spcAft>
-                <a:spcPts val="0"/>
-              </a:spcAft>
-              <a:buSzPts val="1400"/>
-              <a:buNone/>
-              <a:defRPr/>
-            </a:lvl8pPr>
-            <a:lvl9pPr lvl="8" algn="l">
-              <a:spcBef>
-                <a:spcPts val="0"/>
-              </a:spcBef>
-              <a:spcAft>
-                <a:spcPts val="0"/>
-              </a:spcAft>
-              <a:buSzPts val="1400"/>
-              <a:buNone/>
-              <a:defRPr/>
-            </a:lvl9pPr>
-          </a:lstStyle>
-          <a:p>
-            <a:endParaRPr/>
-          </a:p>
-        </p:txBody>
-      </p:sp>
-      <p:sp>
-        <p:nvSpPr>
-          <p:cNvPr id="73" name="Google Shape;73;p11"/>
-          <p:cNvSpPr txBox="1">
-            <a:spLocks noGrp="1"/>
-          </p:cNvSpPr>
-          <p:nvPr>
-            <p:ph type="sldNum" idx="12"/>
-          </p:nvPr>
-        </p:nvSpPr>
-        <p:spPr>
-          <a:xfrm>
-            <a:off x="6553200" y="6356350"/>
-            <a:ext cx="2133600" cy="365125"/>
-          </a:xfrm>
-          <a:prstGeom prst="rect">
-            <a:avLst/>
-          </a:prstGeom>
-          <a:noFill/>
-          <a:ln>
-            <a:noFill/>
-          </a:ln>
-        </p:spPr>
-        <p:txBody>
-          <a:bodyPr spcFirstLastPara="1" wrap="square" lIns="91425" tIns="45700" rIns="91425" bIns="45700" anchor="ctr" anchorCtr="0">
-            <a:noAutofit/>
-          </a:bodyPr>
-          <a:lstStyle>
-            <a:lvl1pPr marL="0" lvl="0" indent="0" algn="r">
-              <a:spcBef>
-                <a:spcPts val="0"/>
-              </a:spcBef>
-              <a:buNone/>
-              <a:defRPr/>
-            </a:lvl1pPr>
-            <a:lvl2pPr marL="0" lvl="1" indent="0" algn="r">
-              <a:spcBef>
-                <a:spcPts val="0"/>
-              </a:spcBef>
-              <a:buNone/>
-              <a:defRPr/>
-            </a:lvl2pPr>
-            <a:lvl3pPr marL="0" lvl="2" indent="0" algn="r">
-              <a:spcBef>
-                <a:spcPts val="0"/>
-              </a:spcBef>
-              <a:buNone/>
-              <a:defRPr/>
-            </a:lvl3pPr>
-            <a:lvl4pPr marL="0" lvl="3" indent="0" algn="r">
-              <a:spcBef>
-                <a:spcPts val="0"/>
-              </a:spcBef>
-              <a:buNone/>
-              <a:defRPr/>
-            </a:lvl4pPr>
-            <a:lvl5pPr marL="0" lvl="4" indent="0" algn="r">
-              <a:spcBef>
-                <a:spcPts val="0"/>
-              </a:spcBef>
-              <a:buNone/>
-              <a:defRPr/>
-            </a:lvl5pPr>
-            <a:lvl6pPr marL="0" lvl="5" indent="0" algn="r">
-              <a:spcBef>
-                <a:spcPts val="0"/>
-              </a:spcBef>
-              <a:buNone/>
-              <a:defRPr/>
-            </a:lvl6pPr>
-            <a:lvl7pPr marL="0" lvl="6" indent="0" algn="r">
-              <a:spcBef>
-                <a:spcPts val="0"/>
-              </a:spcBef>
-              <a:buNone/>
-              <a:defRPr/>
-            </a:lvl7pPr>
-            <a:lvl8pPr marL="0" lvl="7" indent="0" algn="r">
-              <a:spcBef>
-                <a:spcPts val="0"/>
-              </a:spcBef>
-              <a:buNone/>
-              <a:defRPr/>
-            </a:lvl8pPr>
-            <a:lvl9pPr marL="0" lvl="8" indent="0" algn="r">
-              <a:spcBef>
-                <a:spcPts val="0"/>
-              </a:spcBef>
-              <a:buNone/>
-              <a:defRPr/>
-            </a:lvl9pPr>
-          </a:lstStyle>
-          <a:p>
-            <a:pPr marL="0" lvl="0" indent="0" algn="r" rtl="0">
-              <a:spcBef>
-                <a:spcPts val="0"/>
-              </a:spcBef>
-              <a:spcAft>
-                <a:spcPts val="0"/>
-              </a:spcAft>
-              <a:buNone/>
-            </a:pPr>
-            <a:fld id="{00000000-1234-1234-1234-123412341234}" type="slidenum">
-              <a:rPr lang="en-US"/>
-              <a:t>‹N›</a:t>
-            </a:fld>
-            <a:endParaRPr/>
-          </a:p>
-        </p:txBody>
-      </p:sp>
-    </p:spTree>
-  </p:cSld>
-  <p:clrMapOvr>
-    <a:masterClrMapping/>
-  </p:clrMapOvr>
-</p:sldLayout>
-</file>
-
-<file path=ppt/slideLayouts/slideLayout11.xml><?xml version="1.0" encoding="utf-8"?>
 <p:sldLayout xmlns:a="http://schemas.openxmlformats.org/drawingml/2006/main" xmlns:r="http://schemas.openxmlformats.org/officeDocument/2006/relationships" xmlns:p="http://schemas.openxmlformats.org/presentationml/2006/main" matchingName="Vertical Title and Text" type="vertTitleAndTx">
   <p:cSld name="VERTICAL_TITLE_AND_VERTICAL_TEXT">
     <p:spTree>
@@ -3583,739 +3142,6 @@
 </file>
 
 <file path=ppt/slideLayouts/slideLayout2.xml><?xml version="1.0" encoding="utf-8"?>
-<p:sldLayout xmlns:a="http://schemas.openxmlformats.org/drawingml/2006/main" xmlns:r="http://schemas.openxmlformats.org/officeDocument/2006/relationships" xmlns:p="http://schemas.openxmlformats.org/presentationml/2006/main" matchingName="Title Slide" type="title">
-  <p:cSld name="TITLE">
-    <p:spTree>
-      <p:nvGrpSpPr>
-        <p:cNvPr id="1" name="Shape 15"/>
-        <p:cNvGrpSpPr/>
-        <p:nvPr/>
-      </p:nvGrpSpPr>
-      <p:grpSpPr>
-        <a:xfrm>
-          <a:off x="0" y="0"/>
-          <a:ext cx="0" cy="0"/>
-          <a:chOff x="0" y="0"/>
-          <a:chExt cx="0" cy="0"/>
-        </a:xfrm>
-      </p:grpSpPr>
-      <p:sp>
-        <p:nvSpPr>
-          <p:cNvPr id="16" name="Google Shape;16;p3"/>
-          <p:cNvSpPr txBox="1">
-            <a:spLocks noGrp="1"/>
-          </p:cNvSpPr>
-          <p:nvPr>
-            <p:ph type="ctrTitle"/>
-          </p:nvPr>
-        </p:nvSpPr>
-        <p:spPr>
-          <a:xfrm>
-            <a:off x="685800" y="2130425"/>
-            <a:ext cx="7772400" cy="1470025"/>
-          </a:xfrm>
-          <a:prstGeom prst="rect">
-            <a:avLst/>
-          </a:prstGeom>
-          <a:noFill/>
-          <a:ln>
-            <a:noFill/>
-          </a:ln>
-        </p:spPr>
-        <p:txBody>
-          <a:bodyPr spcFirstLastPara="1" wrap="square" lIns="91425" tIns="45700" rIns="91425" bIns="45700" anchor="ctr" anchorCtr="0">
-            <a:normAutofit/>
-          </a:bodyPr>
-          <a:lstStyle>
-            <a:lvl1pPr lvl="0" algn="ctr">
-              <a:spcBef>
-                <a:spcPts val="0"/>
-              </a:spcBef>
-              <a:spcAft>
-                <a:spcPts val="0"/>
-              </a:spcAft>
-              <a:buClr>
-                <a:schemeClr val="dk1"/>
-              </a:buClr>
-              <a:buSzPts val="1800"/>
-              <a:buNone/>
-              <a:defRPr/>
-            </a:lvl1pPr>
-            <a:lvl2pPr lvl="1">
-              <a:spcBef>
-                <a:spcPts val="0"/>
-              </a:spcBef>
-              <a:spcAft>
-                <a:spcPts val="0"/>
-              </a:spcAft>
-              <a:buSzPts val="1400"/>
-              <a:buNone/>
-              <a:defRPr/>
-            </a:lvl2pPr>
-            <a:lvl3pPr lvl="2">
-              <a:spcBef>
-                <a:spcPts val="0"/>
-              </a:spcBef>
-              <a:spcAft>
-                <a:spcPts val="0"/>
-              </a:spcAft>
-              <a:buSzPts val="1400"/>
-              <a:buNone/>
-              <a:defRPr/>
-            </a:lvl3pPr>
-            <a:lvl4pPr lvl="3">
-              <a:spcBef>
-                <a:spcPts val="0"/>
-              </a:spcBef>
-              <a:spcAft>
-                <a:spcPts val="0"/>
-              </a:spcAft>
-              <a:buSzPts val="1400"/>
-              <a:buNone/>
-              <a:defRPr/>
-            </a:lvl4pPr>
-            <a:lvl5pPr lvl="4">
-              <a:spcBef>
-                <a:spcPts val="0"/>
-              </a:spcBef>
-              <a:spcAft>
-                <a:spcPts val="0"/>
-              </a:spcAft>
-              <a:buSzPts val="1400"/>
-              <a:buNone/>
-              <a:defRPr/>
-            </a:lvl5pPr>
-            <a:lvl6pPr lvl="5">
-              <a:spcBef>
-                <a:spcPts val="0"/>
-              </a:spcBef>
-              <a:spcAft>
-                <a:spcPts val="0"/>
-              </a:spcAft>
-              <a:buSzPts val="1400"/>
-              <a:buNone/>
-              <a:defRPr/>
-            </a:lvl6pPr>
-            <a:lvl7pPr lvl="6">
-              <a:spcBef>
-                <a:spcPts val="0"/>
-              </a:spcBef>
-              <a:spcAft>
-                <a:spcPts val="0"/>
-              </a:spcAft>
-              <a:buSzPts val="1400"/>
-              <a:buNone/>
-              <a:defRPr/>
-            </a:lvl7pPr>
-            <a:lvl8pPr lvl="7">
-              <a:spcBef>
-                <a:spcPts val="0"/>
-              </a:spcBef>
-              <a:spcAft>
-                <a:spcPts val="0"/>
-              </a:spcAft>
-              <a:buSzPts val="1400"/>
-              <a:buNone/>
-              <a:defRPr/>
-            </a:lvl8pPr>
-            <a:lvl9pPr lvl="8">
-              <a:spcBef>
-                <a:spcPts val="0"/>
-              </a:spcBef>
-              <a:spcAft>
-                <a:spcPts val="0"/>
-              </a:spcAft>
-              <a:buSzPts val="1400"/>
-              <a:buNone/>
-              <a:defRPr/>
-            </a:lvl9pPr>
-          </a:lstStyle>
-          <a:p>
-            <a:endParaRPr/>
-          </a:p>
-        </p:txBody>
-      </p:sp>
-      <p:sp>
-        <p:nvSpPr>
-          <p:cNvPr id="17" name="Google Shape;17;p3"/>
-          <p:cNvSpPr txBox="1">
-            <a:spLocks noGrp="1"/>
-          </p:cNvSpPr>
-          <p:nvPr>
-            <p:ph type="subTitle" idx="1"/>
-          </p:nvPr>
-        </p:nvSpPr>
-        <p:spPr>
-          <a:xfrm>
-            <a:off x="1371600" y="3886200"/>
-            <a:ext cx="6400800" cy="1752600"/>
-          </a:xfrm>
-          <a:prstGeom prst="rect">
-            <a:avLst/>
-          </a:prstGeom>
-          <a:noFill/>
-          <a:ln>
-            <a:noFill/>
-          </a:ln>
-        </p:spPr>
-        <p:txBody>
-          <a:bodyPr spcFirstLastPara="1" wrap="square" lIns="91425" tIns="45700" rIns="91425" bIns="45700" anchor="t" anchorCtr="0">
-            <a:normAutofit/>
-          </a:bodyPr>
-          <a:lstStyle>
-            <a:lvl1pPr lvl="0" algn="ctr">
-              <a:spcBef>
-                <a:spcPts val="640"/>
-              </a:spcBef>
-              <a:spcAft>
-                <a:spcPts val="0"/>
-              </a:spcAft>
-              <a:buClr>
-                <a:srgbClr val="888888"/>
-              </a:buClr>
-              <a:buSzPts val="3200"/>
-              <a:buNone/>
-              <a:defRPr>
-                <a:solidFill>
-                  <a:srgbClr val="888888"/>
-                </a:solidFill>
-              </a:defRPr>
-            </a:lvl1pPr>
-            <a:lvl2pPr lvl="1" algn="ctr">
-              <a:spcBef>
-                <a:spcPts val="560"/>
-              </a:spcBef>
-              <a:spcAft>
-                <a:spcPts val="0"/>
-              </a:spcAft>
-              <a:buClr>
-                <a:srgbClr val="888888"/>
-              </a:buClr>
-              <a:buSzPts val="2800"/>
-              <a:buNone/>
-              <a:defRPr>
-                <a:solidFill>
-                  <a:srgbClr val="888888"/>
-                </a:solidFill>
-              </a:defRPr>
-            </a:lvl2pPr>
-            <a:lvl3pPr lvl="2" algn="ctr">
-              <a:spcBef>
-                <a:spcPts val="480"/>
-              </a:spcBef>
-              <a:spcAft>
-                <a:spcPts val="0"/>
-              </a:spcAft>
-              <a:buClr>
-                <a:srgbClr val="888888"/>
-              </a:buClr>
-              <a:buSzPts val="2400"/>
-              <a:buNone/>
-              <a:defRPr>
-                <a:solidFill>
-                  <a:srgbClr val="888888"/>
-                </a:solidFill>
-              </a:defRPr>
-            </a:lvl3pPr>
-            <a:lvl4pPr lvl="3" algn="ctr">
-              <a:spcBef>
-                <a:spcPts val="400"/>
-              </a:spcBef>
-              <a:spcAft>
-                <a:spcPts val="0"/>
-              </a:spcAft>
-              <a:buClr>
-                <a:srgbClr val="888888"/>
-              </a:buClr>
-              <a:buSzPts val="2000"/>
-              <a:buNone/>
-              <a:defRPr>
-                <a:solidFill>
-                  <a:srgbClr val="888888"/>
-                </a:solidFill>
-              </a:defRPr>
-            </a:lvl4pPr>
-            <a:lvl5pPr lvl="4" algn="ctr">
-              <a:spcBef>
-                <a:spcPts val="400"/>
-              </a:spcBef>
-              <a:spcAft>
-                <a:spcPts val="0"/>
-              </a:spcAft>
-              <a:buClr>
-                <a:srgbClr val="888888"/>
-              </a:buClr>
-              <a:buSzPts val="2000"/>
-              <a:buNone/>
-              <a:defRPr>
-                <a:solidFill>
-                  <a:srgbClr val="888888"/>
-                </a:solidFill>
-              </a:defRPr>
-            </a:lvl5pPr>
-            <a:lvl6pPr lvl="5" algn="ctr">
-              <a:spcBef>
-                <a:spcPts val="400"/>
-              </a:spcBef>
-              <a:spcAft>
-                <a:spcPts val="0"/>
-              </a:spcAft>
-              <a:buClr>
-                <a:srgbClr val="888888"/>
-              </a:buClr>
-              <a:buSzPts val="2000"/>
-              <a:buNone/>
-              <a:defRPr>
-                <a:solidFill>
-                  <a:srgbClr val="888888"/>
-                </a:solidFill>
-              </a:defRPr>
-            </a:lvl6pPr>
-            <a:lvl7pPr lvl="6" algn="ctr">
-              <a:spcBef>
-                <a:spcPts val="400"/>
-              </a:spcBef>
-              <a:spcAft>
-                <a:spcPts val="0"/>
-              </a:spcAft>
-              <a:buClr>
-                <a:srgbClr val="888888"/>
-              </a:buClr>
-              <a:buSzPts val="2000"/>
-              <a:buNone/>
-              <a:defRPr>
-                <a:solidFill>
-                  <a:srgbClr val="888888"/>
-                </a:solidFill>
-              </a:defRPr>
-            </a:lvl7pPr>
-            <a:lvl8pPr lvl="7" algn="ctr">
-              <a:spcBef>
-                <a:spcPts val="400"/>
-              </a:spcBef>
-              <a:spcAft>
-                <a:spcPts val="0"/>
-              </a:spcAft>
-              <a:buClr>
-                <a:srgbClr val="888888"/>
-              </a:buClr>
-              <a:buSzPts val="2000"/>
-              <a:buNone/>
-              <a:defRPr>
-                <a:solidFill>
-                  <a:srgbClr val="888888"/>
-                </a:solidFill>
-              </a:defRPr>
-            </a:lvl8pPr>
-            <a:lvl9pPr lvl="8" algn="ctr">
-              <a:spcBef>
-                <a:spcPts val="400"/>
-              </a:spcBef>
-              <a:spcAft>
-                <a:spcPts val="0"/>
-              </a:spcAft>
-              <a:buClr>
-                <a:srgbClr val="888888"/>
-              </a:buClr>
-              <a:buSzPts val="2000"/>
-              <a:buNone/>
-              <a:defRPr>
-                <a:solidFill>
-                  <a:srgbClr val="888888"/>
-                </a:solidFill>
-              </a:defRPr>
-            </a:lvl9pPr>
-          </a:lstStyle>
-          <a:p>
-            <a:endParaRPr/>
-          </a:p>
-        </p:txBody>
-      </p:sp>
-      <p:sp>
-        <p:nvSpPr>
-          <p:cNvPr id="18" name="Google Shape;18;p3"/>
-          <p:cNvSpPr txBox="1">
-            <a:spLocks noGrp="1"/>
-          </p:cNvSpPr>
-          <p:nvPr>
-            <p:ph type="dt" idx="10"/>
-          </p:nvPr>
-        </p:nvSpPr>
-        <p:spPr>
-          <a:xfrm>
-            <a:off x="457200" y="6356350"/>
-            <a:ext cx="2133600" cy="365125"/>
-          </a:xfrm>
-          <a:prstGeom prst="rect">
-            <a:avLst/>
-          </a:prstGeom>
-          <a:noFill/>
-          <a:ln>
-            <a:noFill/>
-          </a:ln>
-        </p:spPr>
-        <p:txBody>
-          <a:bodyPr spcFirstLastPara="1" wrap="square" lIns="91425" tIns="45700" rIns="91425" bIns="45700" anchor="ctr" anchorCtr="0">
-            <a:noAutofit/>
-          </a:bodyPr>
-          <a:lstStyle>
-            <a:lvl1pPr lvl="0" algn="l">
-              <a:spcBef>
-                <a:spcPts val="0"/>
-              </a:spcBef>
-              <a:spcAft>
-                <a:spcPts val="0"/>
-              </a:spcAft>
-              <a:buSzPts val="1400"/>
-              <a:buNone/>
-              <a:defRPr/>
-            </a:lvl1pPr>
-            <a:lvl2pPr lvl="1" algn="l">
-              <a:spcBef>
-                <a:spcPts val="0"/>
-              </a:spcBef>
-              <a:spcAft>
-                <a:spcPts val="0"/>
-              </a:spcAft>
-              <a:buSzPts val="1400"/>
-              <a:buNone/>
-              <a:defRPr/>
-            </a:lvl2pPr>
-            <a:lvl3pPr lvl="2" algn="l">
-              <a:spcBef>
-                <a:spcPts val="0"/>
-              </a:spcBef>
-              <a:spcAft>
-                <a:spcPts val="0"/>
-              </a:spcAft>
-              <a:buSzPts val="1400"/>
-              <a:buNone/>
-              <a:defRPr/>
-            </a:lvl3pPr>
-            <a:lvl4pPr lvl="3" algn="l">
-              <a:spcBef>
-                <a:spcPts val="0"/>
-              </a:spcBef>
-              <a:spcAft>
-                <a:spcPts val="0"/>
-              </a:spcAft>
-              <a:buSzPts val="1400"/>
-              <a:buNone/>
-              <a:defRPr/>
-            </a:lvl4pPr>
-            <a:lvl5pPr lvl="4" algn="l">
-              <a:spcBef>
-                <a:spcPts val="0"/>
-              </a:spcBef>
-              <a:spcAft>
-                <a:spcPts val="0"/>
-              </a:spcAft>
-              <a:buSzPts val="1400"/>
-              <a:buNone/>
-              <a:defRPr/>
-            </a:lvl5pPr>
-            <a:lvl6pPr lvl="5" algn="l">
-              <a:spcBef>
-                <a:spcPts val="0"/>
-              </a:spcBef>
-              <a:spcAft>
-                <a:spcPts val="0"/>
-              </a:spcAft>
-              <a:buSzPts val="1400"/>
-              <a:buNone/>
-              <a:defRPr/>
-            </a:lvl6pPr>
-            <a:lvl7pPr lvl="6" algn="l">
-              <a:spcBef>
-                <a:spcPts val="0"/>
-              </a:spcBef>
-              <a:spcAft>
-                <a:spcPts val="0"/>
-              </a:spcAft>
-              <a:buSzPts val="1400"/>
-              <a:buNone/>
-              <a:defRPr/>
-            </a:lvl7pPr>
-            <a:lvl8pPr lvl="7" algn="l">
-              <a:spcBef>
-                <a:spcPts val="0"/>
-              </a:spcBef>
-              <a:spcAft>
-                <a:spcPts val="0"/>
-              </a:spcAft>
-              <a:buSzPts val="1400"/>
-              <a:buNone/>
-              <a:defRPr/>
-            </a:lvl8pPr>
-            <a:lvl9pPr lvl="8" algn="l">
-              <a:spcBef>
-                <a:spcPts val="0"/>
-              </a:spcBef>
-              <a:spcAft>
-                <a:spcPts val="0"/>
-              </a:spcAft>
-              <a:buSzPts val="1400"/>
-              <a:buNone/>
-              <a:defRPr/>
-            </a:lvl9pPr>
-          </a:lstStyle>
-          <a:p>
-            <a:endParaRPr/>
-          </a:p>
-        </p:txBody>
-      </p:sp>
-      <p:sp>
-        <p:nvSpPr>
-          <p:cNvPr id="19" name="Google Shape;19;p3"/>
-          <p:cNvSpPr txBox="1">
-            <a:spLocks noGrp="1"/>
-          </p:cNvSpPr>
-          <p:nvPr>
-            <p:ph type="ftr" idx="11"/>
-          </p:nvPr>
-        </p:nvSpPr>
-        <p:spPr>
-          <a:xfrm>
-            <a:off x="3124200" y="6356350"/>
-            <a:ext cx="2895600" cy="365125"/>
-          </a:xfrm>
-          <a:prstGeom prst="rect">
-            <a:avLst/>
-          </a:prstGeom>
-          <a:noFill/>
-          <a:ln>
-            <a:noFill/>
-          </a:ln>
-        </p:spPr>
-        <p:txBody>
-          <a:bodyPr spcFirstLastPara="1" wrap="square" lIns="91425" tIns="45700" rIns="91425" bIns="45700" anchor="ctr" anchorCtr="0">
-            <a:noAutofit/>
-          </a:bodyPr>
-          <a:lstStyle>
-            <a:lvl1pPr lvl="0" algn="ctr">
-              <a:spcBef>
-                <a:spcPts val="0"/>
-              </a:spcBef>
-              <a:spcAft>
-                <a:spcPts val="0"/>
-              </a:spcAft>
-              <a:buSzPts val="1400"/>
-              <a:buNone/>
-              <a:defRPr/>
-            </a:lvl1pPr>
-            <a:lvl2pPr lvl="1" algn="l">
-              <a:spcBef>
-                <a:spcPts val="0"/>
-              </a:spcBef>
-              <a:spcAft>
-                <a:spcPts val="0"/>
-              </a:spcAft>
-              <a:buSzPts val="1400"/>
-              <a:buNone/>
-              <a:defRPr/>
-            </a:lvl2pPr>
-            <a:lvl3pPr lvl="2" algn="l">
-              <a:spcBef>
-                <a:spcPts val="0"/>
-              </a:spcBef>
-              <a:spcAft>
-                <a:spcPts val="0"/>
-              </a:spcAft>
-              <a:buSzPts val="1400"/>
-              <a:buNone/>
-              <a:defRPr/>
-            </a:lvl3pPr>
-            <a:lvl4pPr lvl="3" algn="l">
-              <a:spcBef>
-                <a:spcPts val="0"/>
-              </a:spcBef>
-              <a:spcAft>
-                <a:spcPts val="0"/>
-              </a:spcAft>
-              <a:buSzPts val="1400"/>
-              <a:buNone/>
-              <a:defRPr/>
-            </a:lvl4pPr>
-            <a:lvl5pPr lvl="4" algn="l">
-              <a:spcBef>
-                <a:spcPts val="0"/>
-              </a:spcBef>
-              <a:spcAft>
-                <a:spcPts val="0"/>
-              </a:spcAft>
-              <a:buSzPts val="1400"/>
-              <a:buNone/>
-              <a:defRPr/>
-            </a:lvl5pPr>
-            <a:lvl6pPr lvl="5" algn="l">
-              <a:spcBef>
-                <a:spcPts val="0"/>
-              </a:spcBef>
-              <a:spcAft>
-                <a:spcPts val="0"/>
-              </a:spcAft>
-              <a:buSzPts val="1400"/>
-              <a:buNone/>
-              <a:defRPr/>
-            </a:lvl6pPr>
-            <a:lvl7pPr lvl="6" algn="l">
-              <a:spcBef>
-                <a:spcPts val="0"/>
-              </a:spcBef>
-              <a:spcAft>
-                <a:spcPts val="0"/>
-              </a:spcAft>
-              <a:buSzPts val="1400"/>
-              <a:buNone/>
-              <a:defRPr/>
-            </a:lvl7pPr>
-            <a:lvl8pPr lvl="7" algn="l">
-              <a:spcBef>
-                <a:spcPts val="0"/>
-              </a:spcBef>
-              <a:spcAft>
-                <a:spcPts val="0"/>
-              </a:spcAft>
-              <a:buSzPts val="1400"/>
-              <a:buNone/>
-              <a:defRPr/>
-            </a:lvl8pPr>
-            <a:lvl9pPr lvl="8" algn="l">
-              <a:spcBef>
-                <a:spcPts val="0"/>
-              </a:spcBef>
-              <a:spcAft>
-                <a:spcPts val="0"/>
-              </a:spcAft>
-              <a:buSzPts val="1400"/>
-              <a:buNone/>
-              <a:defRPr/>
-            </a:lvl9pPr>
-          </a:lstStyle>
-          <a:p>
-            <a:endParaRPr/>
-          </a:p>
-        </p:txBody>
-      </p:sp>
-      <p:sp>
-        <p:nvSpPr>
-          <p:cNvPr id="20" name="Google Shape;20;p3"/>
-          <p:cNvSpPr txBox="1">
-            <a:spLocks noGrp="1"/>
-          </p:cNvSpPr>
-          <p:nvPr>
-            <p:ph type="sldNum" idx="12"/>
-          </p:nvPr>
-        </p:nvSpPr>
-        <p:spPr>
-          <a:xfrm>
-            <a:off x="6553200" y="6356350"/>
-            <a:ext cx="2133600" cy="365125"/>
-          </a:xfrm>
-          <a:prstGeom prst="rect">
-            <a:avLst/>
-          </a:prstGeom>
-          <a:noFill/>
-          <a:ln>
-            <a:noFill/>
-          </a:ln>
-        </p:spPr>
-        <p:txBody>
-          <a:bodyPr spcFirstLastPara="1" wrap="square" lIns="91425" tIns="45700" rIns="91425" bIns="45700" anchor="ctr" anchorCtr="0">
-            <a:noAutofit/>
-          </a:bodyPr>
-          <a:lstStyle>
-            <a:lvl1pPr marL="0" lvl="0" indent="0" algn="r">
-              <a:spcBef>
-                <a:spcPts val="0"/>
-              </a:spcBef>
-              <a:buNone/>
-              <a:defRPr/>
-            </a:lvl1pPr>
-            <a:lvl2pPr marL="0" lvl="1" indent="0" algn="r">
-              <a:spcBef>
-                <a:spcPts val="0"/>
-              </a:spcBef>
-              <a:buNone/>
-              <a:defRPr/>
-            </a:lvl2pPr>
-            <a:lvl3pPr marL="0" lvl="2" indent="0" algn="r">
-              <a:spcBef>
-                <a:spcPts val="0"/>
-              </a:spcBef>
-              <a:buNone/>
-              <a:defRPr/>
-            </a:lvl3pPr>
-            <a:lvl4pPr marL="0" lvl="3" indent="0" algn="r">
-              <a:spcBef>
-                <a:spcPts val="0"/>
-              </a:spcBef>
-              <a:buNone/>
-              <a:defRPr/>
-            </a:lvl4pPr>
-            <a:lvl5pPr marL="0" lvl="4" indent="0" algn="r">
-              <a:spcBef>
-                <a:spcPts val="0"/>
-              </a:spcBef>
-              <a:buNone/>
-              <a:defRPr/>
-            </a:lvl5pPr>
-            <a:lvl6pPr marL="0" lvl="5" indent="0" algn="r">
-              <a:spcBef>
-                <a:spcPts val="0"/>
-              </a:spcBef>
-              <a:buNone/>
-              <a:defRPr/>
-            </a:lvl6pPr>
-            <a:lvl7pPr marL="0" lvl="6" indent="0" algn="r">
-              <a:spcBef>
-                <a:spcPts val="0"/>
-              </a:spcBef>
-              <a:buNone/>
-              <a:defRPr/>
-            </a:lvl7pPr>
-            <a:lvl8pPr marL="0" lvl="7" indent="0" algn="r">
-              <a:spcBef>
-                <a:spcPts val="0"/>
-              </a:spcBef>
-              <a:buNone/>
-              <a:defRPr/>
-            </a:lvl8pPr>
-            <a:lvl9pPr marL="0" lvl="8" indent="0" algn="r">
-              <a:spcBef>
-                <a:spcPts val="0"/>
-              </a:spcBef>
-              <a:buNone/>
-              <a:defRPr/>
-            </a:lvl9pPr>
-          </a:lstStyle>
-          <a:p>
-            <a:pPr marL="0" lvl="0" indent="0" algn="r" rtl="0">
-              <a:spcBef>
-                <a:spcPts val="0"/>
-              </a:spcBef>
-              <a:spcAft>
-                <a:spcPts val="0"/>
-              </a:spcAft>
-              <a:buNone/>
-            </a:pPr>
-            <a:fld id="{00000000-1234-1234-1234-123412341234}" type="slidenum">
-              <a:rPr lang="en-US"/>
-              <a:t>‹N›</a:t>
-            </a:fld>
-            <a:endParaRPr/>
-          </a:p>
-        </p:txBody>
-      </p:sp>
-    </p:spTree>
-  </p:cSld>
-  <p:clrMapOvr>
-    <a:masterClrMapping/>
-  </p:clrMapOvr>
-</p:sldLayout>
-</file>
-
-<file path=ppt/slideLayouts/slideLayout3.xml><?xml version="1.0" encoding="utf-8"?>
 <p:sldLayout xmlns:a="http://schemas.openxmlformats.org/drawingml/2006/main" xmlns:r="http://schemas.openxmlformats.org/officeDocument/2006/relationships" xmlns:p="http://schemas.openxmlformats.org/presentationml/2006/main" matchingName="Title and Content" type="obj">
   <p:cSld name="OBJECT">
     <p:spTree>
@@ -5012,7 +3838,7 @@
 </p:sldLayout>
 </file>
 
-<file path=ppt/slideLayouts/slideLayout4.xml><?xml version="1.0" encoding="utf-8"?>
+<file path=ppt/slideLayouts/slideLayout3.xml><?xml version="1.0" encoding="utf-8"?>
 <p:sldLayout xmlns:a="http://schemas.openxmlformats.org/drawingml/2006/main" xmlns:r="http://schemas.openxmlformats.org/officeDocument/2006/relationships" xmlns:p="http://schemas.openxmlformats.org/presentationml/2006/main" matchingName="Section Header" type="secHead">
   <p:cSld name="SECTION_HEADER">
     <p:spTree>
@@ -5746,7 +4572,7 @@
 </p:sldLayout>
 </file>
 
-<file path=ppt/slideLayouts/slideLayout5.xml><?xml version="1.0" encoding="utf-8"?>
+<file path=ppt/slideLayouts/slideLayout4.xml><?xml version="1.0" encoding="utf-8"?>
 <p:sldLayout xmlns:a="http://schemas.openxmlformats.org/drawingml/2006/main" xmlns:r="http://schemas.openxmlformats.org/officeDocument/2006/relationships" xmlns:p="http://schemas.openxmlformats.org/presentationml/2006/main" matchingName="Two Content" type="twoObj">
   <p:cSld name="TWO_OBJECTS">
     <p:spTree>
@@ -6603,7 +5429,7 @@
 </p:sldLayout>
 </file>
 
-<file path=ppt/slideLayouts/slideLayout6.xml><?xml version="1.0" encoding="utf-8"?>
+<file path=ppt/slideLayouts/slideLayout5.xml><?xml version="1.0" encoding="utf-8"?>
 <p:sldLayout xmlns:a="http://schemas.openxmlformats.org/drawingml/2006/main" xmlns:r="http://schemas.openxmlformats.org/officeDocument/2006/relationships" xmlns:p="http://schemas.openxmlformats.org/presentationml/2006/main" matchingName="Comparison" type="twoTxTwoObj">
   <p:cSld name="TWO_OBJECTS_WITH_TEXT">
     <p:spTree>
@@ -7781,7 +6607,7 @@
 </p:sldLayout>
 </file>
 
-<file path=ppt/slideLayouts/slideLayout7.xml><?xml version="1.0" encoding="utf-8"?>
+<file path=ppt/slideLayouts/slideLayout6.xml><?xml version="1.0" encoding="utf-8"?>
 <p:sldLayout xmlns:a="http://schemas.openxmlformats.org/drawingml/2006/main" xmlns:r="http://schemas.openxmlformats.org/officeDocument/2006/relationships" xmlns:p="http://schemas.openxmlformats.org/presentationml/2006/main" matchingName="Title Only" type="titleOnly">
   <p:cSld name="TITLE_ONLY">
     <p:spTree>
@@ -8318,7 +7144,7 @@
 </p:sldLayout>
 </file>
 
-<file path=ppt/slideLayouts/slideLayout8.xml><?xml version="1.0" encoding="utf-8"?>
+<file path=ppt/slideLayouts/slideLayout7.xml><?xml version="1.0" encoding="utf-8"?>
 <p:sldLayout xmlns:a="http://schemas.openxmlformats.org/drawingml/2006/main" xmlns:r="http://schemas.openxmlformats.org/officeDocument/2006/relationships" xmlns:p="http://schemas.openxmlformats.org/presentationml/2006/main" matchingName="Content with Caption" type="objTx">
   <p:cSld name="OBJECT_WITH_CAPTION_TEXT">
     <p:spTree>
@@ -9176,7 +8002,7 @@
 </p:sldLayout>
 </file>
 
-<file path=ppt/slideLayouts/slideLayout9.xml><?xml version="1.0" encoding="utf-8"?>
+<file path=ppt/slideLayouts/slideLayout8.xml><?xml version="1.0" encoding="utf-8"?>
 <p:sldLayout xmlns:a="http://schemas.openxmlformats.org/drawingml/2006/main" xmlns:r="http://schemas.openxmlformats.org/officeDocument/2006/relationships" xmlns:p="http://schemas.openxmlformats.org/presentationml/2006/main" matchingName="Picture with Caption" type="picTx">
   <p:cSld name="PICTURE_WITH_CAPTION_TEXT">
     <p:spTree>
@@ -9783,6 +8609,703 @@
       <p:sp>
         <p:nvSpPr>
           <p:cNvPr id="67" name="Google Shape;67;p10"/>
+          <p:cNvSpPr txBox="1">
+            <a:spLocks noGrp="1"/>
+          </p:cNvSpPr>
+          <p:nvPr>
+            <p:ph type="sldNum" idx="12"/>
+          </p:nvPr>
+        </p:nvSpPr>
+        <p:spPr>
+          <a:xfrm>
+            <a:off x="6553200" y="6356350"/>
+            <a:ext cx="2133600" cy="365125"/>
+          </a:xfrm>
+          <a:prstGeom prst="rect">
+            <a:avLst/>
+          </a:prstGeom>
+          <a:noFill/>
+          <a:ln>
+            <a:noFill/>
+          </a:ln>
+        </p:spPr>
+        <p:txBody>
+          <a:bodyPr spcFirstLastPara="1" wrap="square" lIns="91425" tIns="45700" rIns="91425" bIns="45700" anchor="ctr" anchorCtr="0">
+            <a:noAutofit/>
+          </a:bodyPr>
+          <a:lstStyle>
+            <a:lvl1pPr marL="0" lvl="0" indent="0" algn="r">
+              <a:spcBef>
+                <a:spcPts val="0"/>
+              </a:spcBef>
+              <a:buNone/>
+              <a:defRPr/>
+            </a:lvl1pPr>
+            <a:lvl2pPr marL="0" lvl="1" indent="0" algn="r">
+              <a:spcBef>
+                <a:spcPts val="0"/>
+              </a:spcBef>
+              <a:buNone/>
+              <a:defRPr/>
+            </a:lvl2pPr>
+            <a:lvl3pPr marL="0" lvl="2" indent="0" algn="r">
+              <a:spcBef>
+                <a:spcPts val="0"/>
+              </a:spcBef>
+              <a:buNone/>
+              <a:defRPr/>
+            </a:lvl3pPr>
+            <a:lvl4pPr marL="0" lvl="3" indent="0" algn="r">
+              <a:spcBef>
+                <a:spcPts val="0"/>
+              </a:spcBef>
+              <a:buNone/>
+              <a:defRPr/>
+            </a:lvl4pPr>
+            <a:lvl5pPr marL="0" lvl="4" indent="0" algn="r">
+              <a:spcBef>
+                <a:spcPts val="0"/>
+              </a:spcBef>
+              <a:buNone/>
+              <a:defRPr/>
+            </a:lvl5pPr>
+            <a:lvl6pPr marL="0" lvl="5" indent="0" algn="r">
+              <a:spcBef>
+                <a:spcPts val="0"/>
+              </a:spcBef>
+              <a:buNone/>
+              <a:defRPr/>
+            </a:lvl6pPr>
+            <a:lvl7pPr marL="0" lvl="6" indent="0" algn="r">
+              <a:spcBef>
+                <a:spcPts val="0"/>
+              </a:spcBef>
+              <a:buNone/>
+              <a:defRPr/>
+            </a:lvl7pPr>
+            <a:lvl8pPr marL="0" lvl="7" indent="0" algn="r">
+              <a:spcBef>
+                <a:spcPts val="0"/>
+              </a:spcBef>
+              <a:buNone/>
+              <a:defRPr/>
+            </a:lvl8pPr>
+            <a:lvl9pPr marL="0" lvl="8" indent="0" algn="r">
+              <a:spcBef>
+                <a:spcPts val="0"/>
+              </a:spcBef>
+              <a:buNone/>
+              <a:defRPr/>
+            </a:lvl9pPr>
+          </a:lstStyle>
+          <a:p>
+            <a:pPr marL="0" lvl="0" indent="0" algn="r" rtl="0">
+              <a:spcBef>
+                <a:spcPts val="0"/>
+              </a:spcBef>
+              <a:spcAft>
+                <a:spcPts val="0"/>
+              </a:spcAft>
+              <a:buNone/>
+            </a:pPr>
+            <a:fld id="{00000000-1234-1234-1234-123412341234}" type="slidenum">
+              <a:rPr lang="en-US"/>
+              <a:t>‹N›</a:t>
+            </a:fld>
+            <a:endParaRPr/>
+          </a:p>
+        </p:txBody>
+      </p:sp>
+    </p:spTree>
+  </p:cSld>
+  <p:clrMapOvr>
+    <a:masterClrMapping/>
+  </p:clrMapOvr>
+</p:sldLayout>
+</file>
+
+<file path=ppt/slideLayouts/slideLayout9.xml><?xml version="1.0" encoding="utf-8"?>
+<p:sldLayout xmlns:a="http://schemas.openxmlformats.org/drawingml/2006/main" xmlns:r="http://schemas.openxmlformats.org/officeDocument/2006/relationships" xmlns:p="http://schemas.openxmlformats.org/presentationml/2006/main" matchingName="Title and Vertical Text" type="vertTx">
+  <p:cSld name="VERTICAL_TEXT">
+    <p:spTree>
+      <p:nvGrpSpPr>
+        <p:cNvPr id="1" name="Shape 68"/>
+        <p:cNvGrpSpPr/>
+        <p:nvPr/>
+      </p:nvGrpSpPr>
+      <p:grpSpPr>
+        <a:xfrm>
+          <a:off x="0" y="0"/>
+          <a:ext cx="0" cy="0"/>
+          <a:chOff x="0" y="0"/>
+          <a:chExt cx="0" cy="0"/>
+        </a:xfrm>
+      </p:grpSpPr>
+      <p:sp>
+        <p:nvSpPr>
+          <p:cNvPr id="69" name="Google Shape;69;p11"/>
+          <p:cNvSpPr txBox="1">
+            <a:spLocks noGrp="1"/>
+          </p:cNvSpPr>
+          <p:nvPr>
+            <p:ph type="title"/>
+          </p:nvPr>
+        </p:nvSpPr>
+        <p:spPr>
+          <a:xfrm>
+            <a:off x="457200" y="274638"/>
+            <a:ext cx="8229600" cy="1143000"/>
+          </a:xfrm>
+          <a:prstGeom prst="rect">
+            <a:avLst/>
+          </a:prstGeom>
+          <a:noFill/>
+          <a:ln>
+            <a:noFill/>
+          </a:ln>
+        </p:spPr>
+        <p:txBody>
+          <a:bodyPr spcFirstLastPara="1" wrap="square" lIns="91425" tIns="45700" rIns="91425" bIns="45700" anchor="ctr" anchorCtr="0">
+            <a:normAutofit/>
+          </a:bodyPr>
+          <a:lstStyle>
+            <a:lvl1pPr lvl="0" algn="ctr">
+              <a:spcBef>
+                <a:spcPts val="0"/>
+              </a:spcBef>
+              <a:spcAft>
+                <a:spcPts val="0"/>
+              </a:spcAft>
+              <a:buClr>
+                <a:schemeClr val="dk1"/>
+              </a:buClr>
+              <a:buSzPts val="1800"/>
+              <a:buNone/>
+              <a:defRPr/>
+            </a:lvl1pPr>
+            <a:lvl2pPr lvl="1">
+              <a:spcBef>
+                <a:spcPts val="0"/>
+              </a:spcBef>
+              <a:spcAft>
+                <a:spcPts val="0"/>
+              </a:spcAft>
+              <a:buSzPts val="1400"/>
+              <a:buNone/>
+              <a:defRPr/>
+            </a:lvl2pPr>
+            <a:lvl3pPr lvl="2">
+              <a:spcBef>
+                <a:spcPts val="0"/>
+              </a:spcBef>
+              <a:spcAft>
+                <a:spcPts val="0"/>
+              </a:spcAft>
+              <a:buSzPts val="1400"/>
+              <a:buNone/>
+              <a:defRPr/>
+            </a:lvl3pPr>
+            <a:lvl4pPr lvl="3">
+              <a:spcBef>
+                <a:spcPts val="0"/>
+              </a:spcBef>
+              <a:spcAft>
+                <a:spcPts val="0"/>
+              </a:spcAft>
+              <a:buSzPts val="1400"/>
+              <a:buNone/>
+              <a:defRPr/>
+            </a:lvl4pPr>
+            <a:lvl5pPr lvl="4">
+              <a:spcBef>
+                <a:spcPts val="0"/>
+              </a:spcBef>
+              <a:spcAft>
+                <a:spcPts val="0"/>
+              </a:spcAft>
+              <a:buSzPts val="1400"/>
+              <a:buNone/>
+              <a:defRPr/>
+            </a:lvl5pPr>
+            <a:lvl6pPr lvl="5">
+              <a:spcBef>
+                <a:spcPts val="0"/>
+              </a:spcBef>
+              <a:spcAft>
+                <a:spcPts val="0"/>
+              </a:spcAft>
+              <a:buSzPts val="1400"/>
+              <a:buNone/>
+              <a:defRPr/>
+            </a:lvl6pPr>
+            <a:lvl7pPr lvl="6">
+              <a:spcBef>
+                <a:spcPts val="0"/>
+              </a:spcBef>
+              <a:spcAft>
+                <a:spcPts val="0"/>
+              </a:spcAft>
+              <a:buSzPts val="1400"/>
+              <a:buNone/>
+              <a:defRPr/>
+            </a:lvl7pPr>
+            <a:lvl8pPr lvl="7">
+              <a:spcBef>
+                <a:spcPts val="0"/>
+              </a:spcBef>
+              <a:spcAft>
+                <a:spcPts val="0"/>
+              </a:spcAft>
+              <a:buSzPts val="1400"/>
+              <a:buNone/>
+              <a:defRPr/>
+            </a:lvl8pPr>
+            <a:lvl9pPr lvl="8">
+              <a:spcBef>
+                <a:spcPts val="0"/>
+              </a:spcBef>
+              <a:spcAft>
+                <a:spcPts val="0"/>
+              </a:spcAft>
+              <a:buSzPts val="1400"/>
+              <a:buNone/>
+              <a:defRPr/>
+            </a:lvl9pPr>
+          </a:lstStyle>
+          <a:p>
+            <a:endParaRPr/>
+          </a:p>
+        </p:txBody>
+      </p:sp>
+      <p:sp>
+        <p:nvSpPr>
+          <p:cNvPr id="70" name="Google Shape;70;p11"/>
+          <p:cNvSpPr txBox="1">
+            <a:spLocks noGrp="1"/>
+          </p:cNvSpPr>
+          <p:nvPr>
+            <p:ph type="body" idx="1"/>
+          </p:nvPr>
+        </p:nvSpPr>
+        <p:spPr>
+          <a:xfrm rot="5400000">
+            <a:off x="2309019" y="-251618"/>
+            <a:ext cx="4525963" cy="8229600"/>
+          </a:xfrm>
+          <a:prstGeom prst="rect">
+            <a:avLst/>
+          </a:prstGeom>
+          <a:noFill/>
+          <a:ln>
+            <a:noFill/>
+          </a:ln>
+        </p:spPr>
+        <p:txBody>
+          <a:bodyPr spcFirstLastPara="1" wrap="square" lIns="91425" tIns="45700" rIns="91425" bIns="45700" anchor="t" anchorCtr="0">
+            <a:normAutofit/>
+          </a:bodyPr>
+          <a:lstStyle>
+            <a:lvl1pPr marL="457200" lvl="0" indent="-342900" algn="l">
+              <a:spcBef>
+                <a:spcPts val="360"/>
+              </a:spcBef>
+              <a:spcAft>
+                <a:spcPts val="0"/>
+              </a:spcAft>
+              <a:buClr>
+                <a:schemeClr val="dk1"/>
+              </a:buClr>
+              <a:buSzPts val="1800"/>
+              <a:buChar char="•"/>
+              <a:defRPr/>
+            </a:lvl1pPr>
+            <a:lvl2pPr marL="914400" lvl="1" indent="-342900" algn="l">
+              <a:spcBef>
+                <a:spcPts val="360"/>
+              </a:spcBef>
+              <a:spcAft>
+                <a:spcPts val="0"/>
+              </a:spcAft>
+              <a:buClr>
+                <a:schemeClr val="dk1"/>
+              </a:buClr>
+              <a:buSzPts val="1800"/>
+              <a:buChar char="–"/>
+              <a:defRPr/>
+            </a:lvl2pPr>
+            <a:lvl3pPr marL="1371600" lvl="2" indent="-342900" algn="l">
+              <a:spcBef>
+                <a:spcPts val="360"/>
+              </a:spcBef>
+              <a:spcAft>
+                <a:spcPts val="0"/>
+              </a:spcAft>
+              <a:buClr>
+                <a:schemeClr val="dk1"/>
+              </a:buClr>
+              <a:buSzPts val="1800"/>
+              <a:buChar char="•"/>
+              <a:defRPr/>
+            </a:lvl3pPr>
+            <a:lvl4pPr marL="1828800" lvl="3" indent="-342900" algn="l">
+              <a:spcBef>
+                <a:spcPts val="360"/>
+              </a:spcBef>
+              <a:spcAft>
+                <a:spcPts val="0"/>
+              </a:spcAft>
+              <a:buClr>
+                <a:schemeClr val="dk1"/>
+              </a:buClr>
+              <a:buSzPts val="1800"/>
+              <a:buChar char="–"/>
+              <a:defRPr/>
+            </a:lvl4pPr>
+            <a:lvl5pPr marL="2286000" lvl="4" indent="-342900" algn="l">
+              <a:spcBef>
+                <a:spcPts val="360"/>
+              </a:spcBef>
+              <a:spcAft>
+                <a:spcPts val="0"/>
+              </a:spcAft>
+              <a:buClr>
+                <a:schemeClr val="dk1"/>
+              </a:buClr>
+              <a:buSzPts val="1800"/>
+              <a:buChar char="»"/>
+              <a:defRPr/>
+            </a:lvl5pPr>
+            <a:lvl6pPr marL="2743200" lvl="5" indent="-342900" algn="l">
+              <a:spcBef>
+                <a:spcPts val="360"/>
+              </a:spcBef>
+              <a:spcAft>
+                <a:spcPts val="0"/>
+              </a:spcAft>
+              <a:buClr>
+                <a:schemeClr val="dk1"/>
+              </a:buClr>
+              <a:buSzPts val="1800"/>
+              <a:buChar char="•"/>
+              <a:defRPr/>
+            </a:lvl6pPr>
+            <a:lvl7pPr marL="3200400" lvl="6" indent="-342900" algn="l">
+              <a:spcBef>
+                <a:spcPts val="360"/>
+              </a:spcBef>
+              <a:spcAft>
+                <a:spcPts val="0"/>
+              </a:spcAft>
+              <a:buClr>
+                <a:schemeClr val="dk1"/>
+              </a:buClr>
+              <a:buSzPts val="1800"/>
+              <a:buChar char="•"/>
+              <a:defRPr/>
+            </a:lvl7pPr>
+            <a:lvl8pPr marL="3657600" lvl="7" indent="-342900" algn="l">
+              <a:spcBef>
+                <a:spcPts val="360"/>
+              </a:spcBef>
+              <a:spcAft>
+                <a:spcPts val="0"/>
+              </a:spcAft>
+              <a:buClr>
+                <a:schemeClr val="dk1"/>
+              </a:buClr>
+              <a:buSzPts val="1800"/>
+              <a:buChar char="•"/>
+              <a:defRPr/>
+            </a:lvl8pPr>
+            <a:lvl9pPr marL="4114800" lvl="8" indent="-342900" algn="l">
+              <a:spcBef>
+                <a:spcPts val="360"/>
+              </a:spcBef>
+              <a:spcAft>
+                <a:spcPts val="0"/>
+              </a:spcAft>
+              <a:buClr>
+                <a:schemeClr val="dk1"/>
+              </a:buClr>
+              <a:buSzPts val="1800"/>
+              <a:buChar char="•"/>
+              <a:defRPr/>
+            </a:lvl9pPr>
+          </a:lstStyle>
+          <a:p>
+            <a:endParaRPr/>
+          </a:p>
+        </p:txBody>
+      </p:sp>
+      <p:sp>
+        <p:nvSpPr>
+          <p:cNvPr id="71" name="Google Shape;71;p11"/>
+          <p:cNvSpPr txBox="1">
+            <a:spLocks noGrp="1"/>
+          </p:cNvSpPr>
+          <p:nvPr>
+            <p:ph type="dt" idx="10"/>
+          </p:nvPr>
+        </p:nvSpPr>
+        <p:spPr>
+          <a:xfrm>
+            <a:off x="457200" y="6356350"/>
+            <a:ext cx="2133600" cy="365125"/>
+          </a:xfrm>
+          <a:prstGeom prst="rect">
+            <a:avLst/>
+          </a:prstGeom>
+          <a:noFill/>
+          <a:ln>
+            <a:noFill/>
+          </a:ln>
+        </p:spPr>
+        <p:txBody>
+          <a:bodyPr spcFirstLastPara="1" wrap="square" lIns="91425" tIns="45700" rIns="91425" bIns="45700" anchor="ctr" anchorCtr="0">
+            <a:noAutofit/>
+          </a:bodyPr>
+          <a:lstStyle>
+            <a:lvl1pPr lvl="0" algn="l">
+              <a:spcBef>
+                <a:spcPts val="0"/>
+              </a:spcBef>
+              <a:spcAft>
+                <a:spcPts val="0"/>
+              </a:spcAft>
+              <a:buSzPts val="1400"/>
+              <a:buNone/>
+              <a:defRPr/>
+            </a:lvl1pPr>
+            <a:lvl2pPr lvl="1" algn="l">
+              <a:spcBef>
+                <a:spcPts val="0"/>
+              </a:spcBef>
+              <a:spcAft>
+                <a:spcPts val="0"/>
+              </a:spcAft>
+              <a:buSzPts val="1400"/>
+              <a:buNone/>
+              <a:defRPr/>
+            </a:lvl2pPr>
+            <a:lvl3pPr lvl="2" algn="l">
+              <a:spcBef>
+                <a:spcPts val="0"/>
+              </a:spcBef>
+              <a:spcAft>
+                <a:spcPts val="0"/>
+              </a:spcAft>
+              <a:buSzPts val="1400"/>
+              <a:buNone/>
+              <a:defRPr/>
+            </a:lvl3pPr>
+            <a:lvl4pPr lvl="3" algn="l">
+              <a:spcBef>
+                <a:spcPts val="0"/>
+              </a:spcBef>
+              <a:spcAft>
+                <a:spcPts val="0"/>
+              </a:spcAft>
+              <a:buSzPts val="1400"/>
+              <a:buNone/>
+              <a:defRPr/>
+            </a:lvl4pPr>
+            <a:lvl5pPr lvl="4" algn="l">
+              <a:spcBef>
+                <a:spcPts val="0"/>
+              </a:spcBef>
+              <a:spcAft>
+                <a:spcPts val="0"/>
+              </a:spcAft>
+              <a:buSzPts val="1400"/>
+              <a:buNone/>
+              <a:defRPr/>
+            </a:lvl5pPr>
+            <a:lvl6pPr lvl="5" algn="l">
+              <a:spcBef>
+                <a:spcPts val="0"/>
+              </a:spcBef>
+              <a:spcAft>
+                <a:spcPts val="0"/>
+              </a:spcAft>
+              <a:buSzPts val="1400"/>
+              <a:buNone/>
+              <a:defRPr/>
+            </a:lvl6pPr>
+            <a:lvl7pPr lvl="6" algn="l">
+              <a:spcBef>
+                <a:spcPts val="0"/>
+              </a:spcBef>
+              <a:spcAft>
+                <a:spcPts val="0"/>
+              </a:spcAft>
+              <a:buSzPts val="1400"/>
+              <a:buNone/>
+              <a:defRPr/>
+            </a:lvl7pPr>
+            <a:lvl8pPr lvl="7" algn="l">
+              <a:spcBef>
+                <a:spcPts val="0"/>
+              </a:spcBef>
+              <a:spcAft>
+                <a:spcPts val="0"/>
+              </a:spcAft>
+              <a:buSzPts val="1400"/>
+              <a:buNone/>
+              <a:defRPr/>
+            </a:lvl8pPr>
+            <a:lvl9pPr lvl="8" algn="l">
+              <a:spcBef>
+                <a:spcPts val="0"/>
+              </a:spcBef>
+              <a:spcAft>
+                <a:spcPts val="0"/>
+              </a:spcAft>
+              <a:buSzPts val="1400"/>
+              <a:buNone/>
+              <a:defRPr/>
+            </a:lvl9pPr>
+          </a:lstStyle>
+          <a:p>
+            <a:endParaRPr/>
+          </a:p>
+        </p:txBody>
+      </p:sp>
+      <p:sp>
+        <p:nvSpPr>
+          <p:cNvPr id="72" name="Google Shape;72;p11"/>
+          <p:cNvSpPr txBox="1">
+            <a:spLocks noGrp="1"/>
+          </p:cNvSpPr>
+          <p:nvPr>
+            <p:ph type="ftr" idx="11"/>
+          </p:nvPr>
+        </p:nvSpPr>
+        <p:spPr>
+          <a:xfrm>
+            <a:off x="3124200" y="6356350"/>
+            <a:ext cx="2895600" cy="365125"/>
+          </a:xfrm>
+          <a:prstGeom prst="rect">
+            <a:avLst/>
+          </a:prstGeom>
+          <a:noFill/>
+          <a:ln>
+            <a:noFill/>
+          </a:ln>
+        </p:spPr>
+        <p:txBody>
+          <a:bodyPr spcFirstLastPara="1" wrap="square" lIns="91425" tIns="45700" rIns="91425" bIns="45700" anchor="ctr" anchorCtr="0">
+            <a:noAutofit/>
+          </a:bodyPr>
+          <a:lstStyle>
+            <a:lvl1pPr lvl="0" algn="ctr">
+              <a:spcBef>
+                <a:spcPts val="0"/>
+              </a:spcBef>
+              <a:spcAft>
+                <a:spcPts val="0"/>
+              </a:spcAft>
+              <a:buSzPts val="1400"/>
+              <a:buNone/>
+              <a:defRPr/>
+            </a:lvl1pPr>
+            <a:lvl2pPr lvl="1" algn="l">
+              <a:spcBef>
+                <a:spcPts val="0"/>
+              </a:spcBef>
+              <a:spcAft>
+                <a:spcPts val="0"/>
+              </a:spcAft>
+              <a:buSzPts val="1400"/>
+              <a:buNone/>
+              <a:defRPr/>
+            </a:lvl2pPr>
+            <a:lvl3pPr lvl="2" algn="l">
+              <a:spcBef>
+                <a:spcPts val="0"/>
+              </a:spcBef>
+              <a:spcAft>
+                <a:spcPts val="0"/>
+              </a:spcAft>
+              <a:buSzPts val="1400"/>
+              <a:buNone/>
+              <a:defRPr/>
+            </a:lvl3pPr>
+            <a:lvl4pPr lvl="3" algn="l">
+              <a:spcBef>
+                <a:spcPts val="0"/>
+              </a:spcBef>
+              <a:spcAft>
+                <a:spcPts val="0"/>
+              </a:spcAft>
+              <a:buSzPts val="1400"/>
+              <a:buNone/>
+              <a:defRPr/>
+            </a:lvl4pPr>
+            <a:lvl5pPr lvl="4" algn="l">
+              <a:spcBef>
+                <a:spcPts val="0"/>
+              </a:spcBef>
+              <a:spcAft>
+                <a:spcPts val="0"/>
+              </a:spcAft>
+              <a:buSzPts val="1400"/>
+              <a:buNone/>
+              <a:defRPr/>
+            </a:lvl5pPr>
+            <a:lvl6pPr lvl="5" algn="l">
+              <a:spcBef>
+                <a:spcPts val="0"/>
+              </a:spcBef>
+              <a:spcAft>
+                <a:spcPts val="0"/>
+              </a:spcAft>
+              <a:buSzPts val="1400"/>
+              <a:buNone/>
+              <a:defRPr/>
+            </a:lvl6pPr>
+            <a:lvl7pPr lvl="6" algn="l">
+              <a:spcBef>
+                <a:spcPts val="0"/>
+              </a:spcBef>
+              <a:spcAft>
+                <a:spcPts val="0"/>
+              </a:spcAft>
+              <a:buSzPts val="1400"/>
+              <a:buNone/>
+              <a:defRPr/>
+            </a:lvl7pPr>
+            <a:lvl8pPr lvl="7" algn="l">
+              <a:spcBef>
+                <a:spcPts val="0"/>
+              </a:spcBef>
+              <a:spcAft>
+                <a:spcPts val="0"/>
+              </a:spcAft>
+              <a:buSzPts val="1400"/>
+              <a:buNone/>
+              <a:defRPr/>
+            </a:lvl8pPr>
+            <a:lvl9pPr lvl="8" algn="l">
+              <a:spcBef>
+                <a:spcPts val="0"/>
+              </a:spcBef>
+              <a:spcAft>
+                <a:spcPts val="0"/>
+              </a:spcAft>
+              <a:buSzPts val="1400"/>
+              <a:buNone/>
+              <a:defRPr/>
+            </a:lvl9pPr>
+          </a:lstStyle>
+          <a:p>
+            <a:endParaRPr/>
+          </a:p>
+        </p:txBody>
+      </p:sp>
+      <p:sp>
+        <p:nvSpPr>
+          <p:cNvPr id="73" name="Google Shape;73;p11"/>
           <p:cNvSpPr txBox="1">
             <a:spLocks noGrp="1"/>
           </p:cNvSpPr>
@@ -10906,16 +10429,15 @@
   <p:clrMap bg1="lt1" tx1="dk1" bg2="dk2" tx2="lt2" accent1="accent1" accent2="accent2" accent3="accent3" accent4="accent4" accent5="accent5" accent6="accent6" hlink="hlink" folHlink="folHlink"/>
   <p:sldLayoutIdLst>
     <p:sldLayoutId id="2147483648" r:id="rId1"/>
-    <p:sldLayoutId id="2147483649" r:id="rId2"/>
-    <p:sldLayoutId id="2147483650" r:id="rId3"/>
-    <p:sldLayoutId id="2147483651" r:id="rId4"/>
-    <p:sldLayoutId id="2147483652" r:id="rId5"/>
-    <p:sldLayoutId id="2147483653" r:id="rId6"/>
-    <p:sldLayoutId id="2147483654" r:id="rId7"/>
-    <p:sldLayoutId id="2147483655" r:id="rId8"/>
-    <p:sldLayoutId id="2147483656" r:id="rId9"/>
-    <p:sldLayoutId id="2147483657" r:id="rId10"/>
-    <p:sldLayoutId id="2147483658" r:id="rId11"/>
+    <p:sldLayoutId id="2147483650" r:id="rId2"/>
+    <p:sldLayoutId id="2147483651" r:id="rId3"/>
+    <p:sldLayoutId id="2147483652" r:id="rId4"/>
+    <p:sldLayoutId id="2147483653" r:id="rId5"/>
+    <p:sldLayoutId id="2147483654" r:id="rId6"/>
+    <p:sldLayoutId id="2147483655" r:id="rId7"/>
+    <p:sldLayoutId id="2147483656" r:id="rId8"/>
+    <p:sldLayoutId id="2147483657" r:id="rId9"/>
+    <p:sldLayoutId id="2147483658" r:id="rId10"/>
   </p:sldLayoutIdLst>
   <p:hf sldNum="0" hdr="0" ftr="0" dt="0"/>
   <p:txStyles>
@@ -11939,6 +11461,2724 @@
     </p:bg>
     <p:spTree>
       <p:nvGrpSpPr>
+        <p:cNvPr id="1" name="Shape 238">
+          <a:extLst>
+            <a:ext uri="{FF2B5EF4-FFF2-40B4-BE49-F238E27FC236}">
+              <a16:creationId xmlns:a16="http://schemas.microsoft.com/office/drawing/2014/main" id="{CE9469F5-0835-FBAF-CF8E-0300554704F4}"/>
+            </a:ext>
+          </a:extLst>
+        </p:cNvPr>
+        <p:cNvGrpSpPr/>
+        <p:nvPr/>
+      </p:nvGrpSpPr>
+      <p:grpSpPr>
+        <a:xfrm>
+          <a:off x="0" y="0"/>
+          <a:ext cx="0" cy="0"/>
+          <a:chOff x="0" y="0"/>
+          <a:chExt cx="0" cy="0"/>
+        </a:xfrm>
+      </p:grpSpPr>
+      <p:pic>
+        <p:nvPicPr>
+          <p:cNvPr id="239" name="Google Shape;239;p23" descr="image.png">
+            <a:extLst>
+              <a:ext uri="{FF2B5EF4-FFF2-40B4-BE49-F238E27FC236}">
+                <a16:creationId xmlns:a16="http://schemas.microsoft.com/office/drawing/2014/main" id="{67A1D27E-BF5F-6F2F-BF11-AC44AAF4D806}"/>
+              </a:ext>
+            </a:extLst>
+          </p:cNvPr>
+          <p:cNvPicPr preferRelativeResize="0"/>
+          <p:nvPr/>
+        </p:nvPicPr>
+        <p:blipFill rotWithShape="1">
+          <a:blip r:embed="rId3">
+            <a:alphaModFix/>
+          </a:blip>
+          <a:srcRect/>
+          <a:stretch/>
+        </p:blipFill>
+        <p:spPr>
+          <a:xfrm>
+            <a:off x="0" y="0"/>
+            <a:ext cx="12192000" cy="6858000"/>
+          </a:xfrm>
+          <a:prstGeom prst="rect">
+            <a:avLst/>
+          </a:prstGeom>
+          <a:noFill/>
+          <a:ln>
+            <a:noFill/>
+          </a:ln>
+        </p:spPr>
+      </p:pic>
+      <p:sp>
+        <p:nvSpPr>
+          <p:cNvPr id="246" name="Google Shape;246;p23">
+            <a:extLst>
+              <a:ext uri="{FF2B5EF4-FFF2-40B4-BE49-F238E27FC236}">
+                <a16:creationId xmlns:a16="http://schemas.microsoft.com/office/drawing/2014/main" id="{0050B759-50F6-86FB-CE1A-9B83568E6061}"/>
+              </a:ext>
+            </a:extLst>
+          </p:cNvPr>
+          <p:cNvSpPr txBox="1"/>
+          <p:nvPr/>
+        </p:nvSpPr>
+        <p:spPr>
+          <a:xfrm>
+            <a:off x="571500" y="571500"/>
+            <a:ext cx="10355118" cy="461665"/>
+          </a:xfrm>
+          <a:prstGeom prst="rect">
+            <a:avLst/>
+          </a:prstGeom>
+          <a:noFill/>
+          <a:ln>
+            <a:noFill/>
+          </a:ln>
+        </p:spPr>
+        <p:txBody>
+          <a:bodyPr spcFirstLastPara="1" wrap="square" lIns="0" tIns="0" rIns="0" bIns="0" anchor="t" anchorCtr="0">
+            <a:spAutoFit/>
+          </a:bodyPr>
+          <a:lstStyle/>
+          <a:p>
+            <a:pPr marL="0" marR="0" lvl="0" indent="0" algn="l" rtl="0">
+              <a:spcBef>
+                <a:spcPts val="0"/>
+              </a:spcBef>
+              <a:spcAft>
+                <a:spcPts val="0"/>
+              </a:spcAft>
+              <a:buNone/>
+            </a:pPr>
+            <a:r>
+              <a:rPr lang="it-IT" sz="3000" dirty="0">
+                <a:solidFill>
+                  <a:schemeClr val="bg1"/>
+                </a:solidFill>
+                <a:latin typeface="Poppins SemiBold"/>
+                <a:ea typeface="Poppins SemiBold"/>
+                <a:cs typeface="Poppins SemiBold"/>
+                <a:sym typeface="Poppins SemiBold"/>
+              </a:rPr>
+              <a:t>Ulteriori c</a:t>
+            </a:r>
+            <a:r>
+              <a:rPr lang="it-IT" sz="3000" b="0" i="0" u="none" strike="noStrike" cap="none" dirty="0">
+                <a:solidFill>
+                  <a:schemeClr val="bg1"/>
+                </a:solidFill>
+                <a:latin typeface="Poppins SemiBold"/>
+                <a:ea typeface="Poppins SemiBold"/>
+                <a:cs typeface="Poppins SemiBold"/>
+                <a:sym typeface="Poppins SemiBold"/>
+              </a:rPr>
+              <a:t>onfront</a:t>
+            </a:r>
+            <a:r>
+              <a:rPr lang="it-IT" sz="3000" dirty="0">
+                <a:solidFill>
+                  <a:schemeClr val="bg1"/>
+                </a:solidFill>
+                <a:latin typeface="Poppins SemiBold"/>
+                <a:ea typeface="Poppins SemiBold"/>
+                <a:cs typeface="Poppins SemiBold"/>
+                <a:sym typeface="Poppins SemiBold"/>
+              </a:rPr>
+              <a:t>i</a:t>
+            </a:r>
+            <a:endParaRPr lang="it-IT" dirty="0">
+              <a:solidFill>
+                <a:schemeClr val="bg1"/>
+              </a:solidFill>
+            </a:endParaRPr>
+          </a:p>
+        </p:txBody>
+      </p:sp>
+      <p:sp>
+        <p:nvSpPr>
+          <p:cNvPr id="5" name="Google Shape;94;p14">
+            <a:extLst>
+              <a:ext uri="{FF2B5EF4-FFF2-40B4-BE49-F238E27FC236}">
+                <a16:creationId xmlns:a16="http://schemas.microsoft.com/office/drawing/2014/main" id="{960EF3A0-6660-895B-608A-2F5D49173964}"/>
+              </a:ext>
+            </a:extLst>
+          </p:cNvPr>
+          <p:cNvSpPr txBox="1"/>
+          <p:nvPr/>
+        </p:nvSpPr>
+        <p:spPr>
+          <a:xfrm>
+            <a:off x="571499" y="1080720"/>
+            <a:ext cx="8738755" cy="332399"/>
+          </a:xfrm>
+          <a:prstGeom prst="rect">
+            <a:avLst/>
+          </a:prstGeom>
+          <a:noFill/>
+          <a:ln>
+            <a:noFill/>
+          </a:ln>
+        </p:spPr>
+        <p:txBody>
+          <a:bodyPr spcFirstLastPara="1" wrap="square" lIns="0" tIns="0" rIns="0" bIns="0" anchor="t" anchorCtr="0">
+            <a:spAutoFit/>
+          </a:bodyPr>
+          <a:lstStyle/>
+          <a:p>
+            <a:pPr marL="0" marR="0" lvl="0" indent="0" algn="l" rtl="0">
+              <a:lnSpc>
+                <a:spcPct val="160000"/>
+              </a:lnSpc>
+              <a:spcBef>
+                <a:spcPts val="0"/>
+              </a:spcBef>
+              <a:spcAft>
+                <a:spcPts val="0"/>
+              </a:spcAft>
+              <a:buNone/>
+            </a:pPr>
+            <a:r>
+              <a:rPr lang="it-IT" sz="1350" b="0" i="0" u="none" strike="noStrike" cap="none" dirty="0">
+                <a:solidFill>
+                  <a:srgbClr val="CBD5E1"/>
+                </a:solidFill>
+                <a:latin typeface="Inter"/>
+                <a:ea typeface="Inter"/>
+                <a:cs typeface="Inter"/>
+                <a:sym typeface="Inter"/>
+              </a:rPr>
+              <a:t>Rispettivamente: RF (50 </a:t>
+            </a:r>
+            <a:r>
+              <a:rPr lang="it-IT" sz="1350" b="0" i="0" u="none" strike="noStrike" cap="none" dirty="0" err="1">
+                <a:solidFill>
+                  <a:srgbClr val="CBD5E1"/>
+                </a:solidFill>
+                <a:latin typeface="Inter"/>
+                <a:ea typeface="Inter"/>
+                <a:cs typeface="Inter"/>
+                <a:sym typeface="Inter"/>
+              </a:rPr>
+              <a:t>Learners</a:t>
+            </a:r>
+            <a:r>
+              <a:rPr lang="it-IT" sz="1350" b="0" i="0" u="none" strike="noStrike" cap="none" dirty="0">
+                <a:solidFill>
+                  <a:srgbClr val="CBD5E1"/>
+                </a:solidFill>
+                <a:latin typeface="Inter"/>
+                <a:ea typeface="Inter"/>
+                <a:cs typeface="Inter"/>
+                <a:sym typeface="Inter"/>
+              </a:rPr>
+              <a:t>, 1000 </a:t>
+            </a:r>
+            <a:r>
+              <a:rPr lang="it-IT" sz="1350" b="0" i="0" u="none" strike="noStrike" cap="none" dirty="0" err="1">
+                <a:solidFill>
+                  <a:srgbClr val="CBD5E1"/>
+                </a:solidFill>
+                <a:latin typeface="Inter"/>
+                <a:ea typeface="Inter"/>
+                <a:cs typeface="Inter"/>
+                <a:sym typeface="Inter"/>
+              </a:rPr>
+              <a:t>Splits</a:t>
+            </a:r>
+            <a:r>
+              <a:rPr lang="it-IT" sz="1350" b="0" i="0" u="none" strike="noStrike" cap="none" dirty="0">
+                <a:solidFill>
+                  <a:srgbClr val="CBD5E1"/>
+                </a:solidFill>
+                <a:latin typeface="Inter"/>
+                <a:ea typeface="Inter"/>
+                <a:cs typeface="Inter"/>
+                <a:sym typeface="Inter"/>
+              </a:rPr>
+              <a:t>), SVM (Kernel Cubico), </a:t>
+            </a:r>
+            <a:r>
+              <a:rPr lang="it-IT" sz="1350" b="0" i="0" u="none" strike="noStrike" cap="none" dirty="0" err="1">
+                <a:solidFill>
+                  <a:srgbClr val="CBD5E1"/>
+                </a:solidFill>
+                <a:latin typeface="Inter"/>
+                <a:ea typeface="Inter"/>
+                <a:cs typeface="Inter"/>
+                <a:sym typeface="Inter"/>
+              </a:rPr>
+              <a:t>Logistic</a:t>
+            </a:r>
+            <a:r>
+              <a:rPr lang="it-IT" sz="1350" b="0" i="0" u="none" strike="noStrike" cap="none" dirty="0">
+                <a:solidFill>
+                  <a:srgbClr val="CBD5E1"/>
+                </a:solidFill>
+                <a:latin typeface="Inter"/>
+                <a:ea typeface="Inter"/>
+                <a:cs typeface="Inter"/>
+                <a:sym typeface="Inter"/>
+              </a:rPr>
+              <a:t> </a:t>
+            </a:r>
+            <a:r>
+              <a:rPr lang="it-IT" sz="1350" b="0" i="0" u="none" strike="noStrike" cap="none" dirty="0" err="1">
+                <a:solidFill>
+                  <a:srgbClr val="CBD5E1"/>
+                </a:solidFill>
+                <a:latin typeface="Inter"/>
+                <a:ea typeface="Inter"/>
+                <a:cs typeface="Inter"/>
+                <a:sym typeface="Inter"/>
+              </a:rPr>
+              <a:t>Regression</a:t>
+            </a:r>
+            <a:endParaRPr lang="it-IT" dirty="0"/>
+          </a:p>
+        </p:txBody>
+      </p:sp>
+      <p:sp>
+        <p:nvSpPr>
+          <p:cNvPr id="2" name="Google Shape;242;p23">
+            <a:extLst>
+              <a:ext uri="{FF2B5EF4-FFF2-40B4-BE49-F238E27FC236}">
+                <a16:creationId xmlns:a16="http://schemas.microsoft.com/office/drawing/2014/main" id="{E47D3048-3245-400D-50F1-63F19628C0D1}"/>
+              </a:ext>
+            </a:extLst>
+          </p:cNvPr>
+          <p:cNvSpPr txBox="1"/>
+          <p:nvPr/>
+        </p:nvSpPr>
+        <p:spPr>
+          <a:xfrm>
+            <a:off x="688846" y="3377571"/>
+            <a:ext cx="2290257" cy="323165"/>
+          </a:xfrm>
+          <a:prstGeom prst="rect">
+            <a:avLst/>
+          </a:prstGeom>
+          <a:noFill/>
+          <a:ln>
+            <a:noFill/>
+          </a:ln>
+        </p:spPr>
+        <p:txBody>
+          <a:bodyPr spcFirstLastPara="1" wrap="square" lIns="0" tIns="0" rIns="0" bIns="0" anchor="t" anchorCtr="0">
+            <a:spAutoFit/>
+          </a:bodyPr>
+          <a:lstStyle/>
+          <a:p>
+            <a:pPr marL="0" marR="0" lvl="0" indent="0" algn="l" rtl="0">
+              <a:spcBef>
+                <a:spcPts val="0"/>
+              </a:spcBef>
+              <a:spcAft>
+                <a:spcPts val="0"/>
+              </a:spcAft>
+              <a:buNone/>
+            </a:pPr>
+            <a:r>
+              <a:rPr lang="en-US" sz="2100" b="0" i="0" u="none" strike="noStrike" cap="none" dirty="0">
+                <a:solidFill>
+                  <a:srgbClr val="38BDF8"/>
+                </a:solidFill>
+                <a:latin typeface="Poppins Medium"/>
+                <a:ea typeface="Poppins Medium"/>
+                <a:cs typeface="Poppins Medium"/>
+                <a:sym typeface="Poppins Medium"/>
+              </a:rPr>
+              <a:t>Stress</a:t>
+            </a:r>
+            <a:endParaRPr dirty="0"/>
+          </a:p>
+        </p:txBody>
+      </p:sp>
+      <p:sp>
+        <p:nvSpPr>
+          <p:cNvPr id="3" name="Google Shape;244;p23">
+            <a:extLst>
+              <a:ext uri="{FF2B5EF4-FFF2-40B4-BE49-F238E27FC236}">
+                <a16:creationId xmlns:a16="http://schemas.microsoft.com/office/drawing/2014/main" id="{493C8206-8BCF-0DDE-15C8-612F76983D1F}"/>
+              </a:ext>
+            </a:extLst>
+          </p:cNvPr>
+          <p:cNvSpPr txBox="1"/>
+          <p:nvPr/>
+        </p:nvSpPr>
+        <p:spPr>
+          <a:xfrm>
+            <a:off x="688846" y="3887119"/>
+            <a:ext cx="2918329" cy="1246495"/>
+          </a:xfrm>
+          <a:prstGeom prst="rect">
+            <a:avLst/>
+          </a:prstGeom>
+          <a:noFill/>
+          <a:ln>
+            <a:noFill/>
+          </a:ln>
+        </p:spPr>
+        <p:txBody>
+          <a:bodyPr spcFirstLastPara="1" wrap="square" lIns="0" tIns="0" rIns="0" bIns="0" anchor="t" anchorCtr="0">
+            <a:spAutoFit/>
+          </a:bodyPr>
+          <a:lstStyle/>
+          <a:p>
+            <a:pPr lvl="0">
+              <a:lnSpc>
+                <a:spcPct val="120000"/>
+              </a:lnSpc>
+            </a:pPr>
+            <a:r>
+              <a:rPr lang="en-US" sz="1350" b="1" dirty="0" err="1">
+                <a:solidFill>
+                  <a:schemeClr val="bg2">
+                    <a:lumMod val="20000"/>
+                    <a:lumOff val="80000"/>
+                  </a:schemeClr>
+                </a:solidFill>
+                <a:latin typeface="Inter"/>
+                <a:ea typeface="Inter"/>
+                <a:cs typeface="Inter"/>
+                <a:sym typeface="Inter"/>
+              </a:rPr>
+              <a:t>Accuratezza</a:t>
+            </a:r>
+            <a:r>
+              <a:rPr lang="en-US" sz="1350" b="1" dirty="0">
+                <a:solidFill>
+                  <a:schemeClr val="bg2">
+                    <a:lumMod val="20000"/>
+                    <a:lumOff val="80000"/>
+                  </a:schemeClr>
+                </a:solidFill>
+                <a:latin typeface="Inter"/>
+                <a:ea typeface="Inter"/>
+                <a:cs typeface="Inter"/>
+                <a:sym typeface="Inter"/>
+              </a:rPr>
+              <a:t>:</a:t>
+            </a:r>
+            <a:r>
+              <a:rPr lang="en-US" sz="1350" dirty="0">
+                <a:solidFill>
+                  <a:schemeClr val="bg1">
+                    <a:lumMod val="85000"/>
+                  </a:schemeClr>
+                </a:solidFill>
+                <a:latin typeface="Inter"/>
+                <a:ea typeface="Inter"/>
+                <a:cs typeface="Inter"/>
+                <a:sym typeface="Inter"/>
+              </a:rPr>
+              <a:t> 72.77%</a:t>
+            </a:r>
+            <a:endParaRPr lang="en-US" sz="1350" b="1" i="0" u="none" strike="noStrike" cap="none" dirty="0">
+              <a:solidFill>
+                <a:schemeClr val="bg2">
+                  <a:lumMod val="20000"/>
+                  <a:lumOff val="80000"/>
+                </a:schemeClr>
+              </a:solidFill>
+              <a:latin typeface="Inter"/>
+              <a:ea typeface="Inter"/>
+              <a:cs typeface="Inter"/>
+              <a:sym typeface="Inter"/>
+            </a:endParaRPr>
+          </a:p>
+          <a:p>
+            <a:pPr marL="0" marR="0" lvl="0" indent="0" algn="l" rtl="0">
+              <a:lnSpc>
+                <a:spcPct val="120000"/>
+              </a:lnSpc>
+              <a:spcBef>
+                <a:spcPts val="0"/>
+              </a:spcBef>
+              <a:spcAft>
+                <a:spcPts val="0"/>
+              </a:spcAft>
+              <a:buNone/>
+            </a:pPr>
+            <a:endParaRPr lang="en-US" sz="1350" b="1" dirty="0">
+              <a:solidFill>
+                <a:schemeClr val="bg2">
+                  <a:lumMod val="20000"/>
+                  <a:lumOff val="80000"/>
+                </a:schemeClr>
+              </a:solidFill>
+              <a:latin typeface="Inter"/>
+              <a:ea typeface="Inter"/>
+              <a:cs typeface="Inter"/>
+              <a:sym typeface="Inter"/>
+            </a:endParaRPr>
+          </a:p>
+          <a:p>
+            <a:pPr marL="0" marR="0" lvl="0" indent="0" algn="l" rtl="0">
+              <a:lnSpc>
+                <a:spcPct val="120000"/>
+              </a:lnSpc>
+              <a:spcBef>
+                <a:spcPts val="0"/>
+              </a:spcBef>
+              <a:spcAft>
+                <a:spcPts val="0"/>
+              </a:spcAft>
+              <a:buNone/>
+            </a:pPr>
+            <a:r>
+              <a:rPr lang="en-US" sz="1350" b="1" i="0" u="none" strike="noStrike" cap="none" dirty="0" err="1">
+                <a:solidFill>
+                  <a:schemeClr val="bg2">
+                    <a:lumMod val="20000"/>
+                    <a:lumOff val="80000"/>
+                  </a:schemeClr>
+                </a:solidFill>
+                <a:latin typeface="Inter"/>
+                <a:ea typeface="Inter"/>
+                <a:cs typeface="Inter"/>
+                <a:sym typeface="Inter"/>
+              </a:rPr>
+              <a:t>Precisione</a:t>
+            </a:r>
+            <a:r>
+              <a:rPr lang="en-US" sz="1350" b="1" i="0" u="none" strike="noStrike" cap="none" dirty="0">
+                <a:solidFill>
+                  <a:schemeClr val="bg2">
+                    <a:lumMod val="20000"/>
+                    <a:lumOff val="80000"/>
+                  </a:schemeClr>
+                </a:solidFill>
+                <a:latin typeface="Inter"/>
+                <a:ea typeface="Inter"/>
+                <a:cs typeface="Inter"/>
+                <a:sym typeface="Inter"/>
+              </a:rPr>
+              <a:t>:</a:t>
+            </a:r>
+            <a:r>
+              <a:rPr lang="en-US" sz="1350" b="0" i="0" u="none" strike="noStrike" cap="none" dirty="0">
+                <a:solidFill>
+                  <a:schemeClr val="bg2">
+                    <a:lumMod val="20000"/>
+                    <a:lumOff val="80000"/>
+                  </a:schemeClr>
+                </a:solidFill>
+                <a:latin typeface="Inter"/>
+                <a:ea typeface="Inter"/>
+                <a:cs typeface="Inter"/>
+                <a:sym typeface="Inter"/>
+              </a:rPr>
+              <a:t> </a:t>
+            </a:r>
+            <a:r>
+              <a:rPr lang="en-US" sz="1350" dirty="0">
+                <a:solidFill>
+                  <a:schemeClr val="bg1">
+                    <a:lumMod val="85000"/>
+                  </a:schemeClr>
+                </a:solidFill>
+                <a:latin typeface="Inter"/>
+                <a:ea typeface="Inter"/>
+                <a:cs typeface="Inter"/>
+                <a:sym typeface="Inter"/>
+              </a:rPr>
+              <a:t>75</a:t>
+            </a:r>
+            <a:r>
+              <a:rPr lang="en-US" sz="1350" b="0" i="0" u="none" strike="noStrike" cap="none" dirty="0">
+                <a:solidFill>
+                  <a:schemeClr val="bg1">
+                    <a:lumMod val="85000"/>
+                  </a:schemeClr>
+                </a:solidFill>
+                <a:latin typeface="Inter"/>
+                <a:ea typeface="Inter"/>
+                <a:cs typeface="Inter"/>
+                <a:sym typeface="Inter"/>
+              </a:rPr>
+              <a:t>%</a:t>
+            </a:r>
+            <a:br>
+              <a:rPr lang="en-US" sz="1800" b="0" i="0" u="none" strike="noStrike" cap="none" dirty="0">
+                <a:solidFill>
+                  <a:schemeClr val="dk1"/>
+                </a:solidFill>
+                <a:latin typeface="Calibri"/>
+                <a:ea typeface="Calibri"/>
+                <a:cs typeface="Calibri"/>
+                <a:sym typeface="Calibri"/>
+              </a:rPr>
+            </a:br>
+            <a:r>
+              <a:rPr lang="en-US" sz="1350" b="1" i="0" u="none" strike="noStrike" cap="none" dirty="0">
+                <a:solidFill>
+                  <a:schemeClr val="bg2">
+                    <a:lumMod val="20000"/>
+                    <a:lumOff val="80000"/>
+                  </a:schemeClr>
+                </a:solidFill>
+                <a:latin typeface="Inter"/>
+                <a:ea typeface="Inter"/>
+                <a:cs typeface="Inter"/>
+                <a:sym typeface="Inter"/>
+              </a:rPr>
+              <a:t>Recall:</a:t>
+            </a:r>
+            <a:r>
+              <a:rPr lang="en-US" sz="1350" b="0" i="0" u="none" strike="noStrike" cap="none" dirty="0">
+                <a:solidFill>
+                  <a:schemeClr val="bg2">
+                    <a:lumMod val="20000"/>
+                    <a:lumOff val="80000"/>
+                  </a:schemeClr>
+                </a:solidFill>
+                <a:latin typeface="Inter"/>
+                <a:ea typeface="Inter"/>
+                <a:cs typeface="Inter"/>
+                <a:sym typeface="Inter"/>
+              </a:rPr>
+              <a:t> </a:t>
+            </a:r>
+            <a:r>
+              <a:rPr lang="en-US" sz="1350" b="0" i="0" u="none" strike="noStrike" cap="none" dirty="0">
+                <a:solidFill>
+                  <a:schemeClr val="bg1">
+                    <a:lumMod val="85000"/>
+                  </a:schemeClr>
+                </a:solidFill>
+                <a:latin typeface="Inter"/>
+                <a:ea typeface="Inter"/>
+                <a:cs typeface="Inter"/>
+                <a:sym typeface="Inter"/>
+              </a:rPr>
+              <a:t>77%</a:t>
+            </a:r>
+            <a:br>
+              <a:rPr lang="en-US" sz="1800" b="0" i="0" u="none" strike="noStrike" cap="none" dirty="0">
+                <a:solidFill>
+                  <a:schemeClr val="dk1"/>
+                </a:solidFill>
+                <a:latin typeface="Calibri"/>
+                <a:ea typeface="Calibri"/>
+                <a:cs typeface="Calibri"/>
+                <a:sym typeface="Calibri"/>
+              </a:rPr>
+            </a:br>
+            <a:r>
+              <a:rPr lang="en-US" sz="1350" b="1" i="0" u="none" strike="noStrike" cap="none" dirty="0">
+                <a:solidFill>
+                  <a:schemeClr val="bg2">
+                    <a:lumMod val="20000"/>
+                    <a:lumOff val="80000"/>
+                  </a:schemeClr>
+                </a:solidFill>
+                <a:latin typeface="Inter"/>
+                <a:ea typeface="Inter"/>
+                <a:cs typeface="Inter"/>
+                <a:sym typeface="Inter"/>
+              </a:rPr>
+              <a:t>F1-Score:</a:t>
+            </a:r>
+            <a:r>
+              <a:rPr lang="en-US" sz="1350" b="0" i="0" u="none" strike="noStrike" cap="none" dirty="0">
+                <a:solidFill>
+                  <a:schemeClr val="bg2">
+                    <a:lumMod val="20000"/>
+                    <a:lumOff val="80000"/>
+                  </a:schemeClr>
+                </a:solidFill>
+                <a:latin typeface="Inter"/>
+                <a:ea typeface="Inter"/>
+                <a:cs typeface="Inter"/>
+                <a:sym typeface="Inter"/>
+              </a:rPr>
+              <a:t> </a:t>
+            </a:r>
+            <a:r>
+              <a:rPr lang="en-US" sz="1350" b="0" i="0" u="none" strike="noStrike" cap="none" dirty="0">
+                <a:solidFill>
+                  <a:schemeClr val="bg1">
+                    <a:lumMod val="85000"/>
+                  </a:schemeClr>
+                </a:solidFill>
+                <a:latin typeface="Inter"/>
+                <a:ea typeface="Inter"/>
+                <a:cs typeface="Inter"/>
+                <a:sym typeface="Inter"/>
+              </a:rPr>
+              <a:t>76%</a:t>
+            </a:r>
+          </a:p>
+        </p:txBody>
+      </p:sp>
+      <p:sp>
+        <p:nvSpPr>
+          <p:cNvPr id="8" name="Google Shape;242;p23">
+            <a:extLst>
+              <a:ext uri="{FF2B5EF4-FFF2-40B4-BE49-F238E27FC236}">
+                <a16:creationId xmlns:a16="http://schemas.microsoft.com/office/drawing/2014/main" id="{E8270794-652B-71F1-44F5-250AB2DFD394}"/>
+              </a:ext>
+            </a:extLst>
+          </p:cNvPr>
+          <p:cNvSpPr txBox="1"/>
+          <p:nvPr/>
+        </p:nvSpPr>
+        <p:spPr>
+          <a:xfrm>
+            <a:off x="688846" y="2961214"/>
+            <a:ext cx="2290257" cy="323165"/>
+          </a:xfrm>
+          <a:prstGeom prst="rect">
+            <a:avLst/>
+          </a:prstGeom>
+          <a:noFill/>
+          <a:ln>
+            <a:noFill/>
+          </a:ln>
+        </p:spPr>
+        <p:txBody>
+          <a:bodyPr spcFirstLastPara="1" wrap="square" lIns="0" tIns="0" rIns="0" bIns="0" anchor="t" anchorCtr="0">
+            <a:spAutoFit/>
+          </a:bodyPr>
+          <a:lstStyle/>
+          <a:p>
+            <a:pPr marL="0" marR="0" lvl="0" indent="0" algn="l" rtl="0">
+              <a:spcBef>
+                <a:spcPts val="0"/>
+              </a:spcBef>
+              <a:spcAft>
+                <a:spcPts val="0"/>
+              </a:spcAft>
+              <a:buNone/>
+            </a:pPr>
+            <a:r>
+              <a:rPr lang="en-US" sz="2100" b="1" i="0" u="none" strike="noStrike" cap="none" dirty="0">
+                <a:solidFill>
+                  <a:srgbClr val="38BDF8"/>
+                </a:solidFill>
+                <a:latin typeface="Poppins Medium"/>
+                <a:ea typeface="Poppins Medium"/>
+                <a:cs typeface="Poppins Medium"/>
+                <a:sym typeface="Poppins Medium"/>
+              </a:rPr>
+              <a:t>Random Forest</a:t>
+            </a:r>
+            <a:endParaRPr b="1" dirty="0"/>
+          </a:p>
+        </p:txBody>
+      </p:sp>
+      <p:sp>
+        <p:nvSpPr>
+          <p:cNvPr id="9" name="Google Shape;242;p23">
+            <a:extLst>
+              <a:ext uri="{FF2B5EF4-FFF2-40B4-BE49-F238E27FC236}">
+                <a16:creationId xmlns:a16="http://schemas.microsoft.com/office/drawing/2014/main" id="{8BB35FC6-AAEA-1B6B-0A3C-6FB66AC6ACE9}"/>
+              </a:ext>
+            </a:extLst>
+          </p:cNvPr>
+          <p:cNvSpPr txBox="1"/>
+          <p:nvPr/>
+        </p:nvSpPr>
+        <p:spPr>
+          <a:xfrm>
+            <a:off x="4464202" y="3370305"/>
+            <a:ext cx="2290257" cy="323165"/>
+          </a:xfrm>
+          <a:prstGeom prst="rect">
+            <a:avLst/>
+          </a:prstGeom>
+          <a:noFill/>
+          <a:ln>
+            <a:noFill/>
+          </a:ln>
+        </p:spPr>
+        <p:txBody>
+          <a:bodyPr spcFirstLastPara="1" wrap="square" lIns="0" tIns="0" rIns="0" bIns="0" anchor="t" anchorCtr="0">
+            <a:spAutoFit/>
+          </a:bodyPr>
+          <a:lstStyle/>
+          <a:p>
+            <a:pPr marL="0" marR="0" lvl="0" indent="0" algn="l" rtl="0">
+              <a:spcBef>
+                <a:spcPts val="0"/>
+              </a:spcBef>
+              <a:spcAft>
+                <a:spcPts val="0"/>
+              </a:spcAft>
+              <a:buNone/>
+            </a:pPr>
+            <a:r>
+              <a:rPr lang="en-US" sz="2100" b="0" i="0" u="none" strike="noStrike" cap="none" dirty="0">
+                <a:solidFill>
+                  <a:srgbClr val="38BDF8"/>
+                </a:solidFill>
+                <a:latin typeface="Poppins Medium"/>
+                <a:ea typeface="Poppins Medium"/>
+                <a:cs typeface="Poppins Medium"/>
+                <a:sym typeface="Poppins Medium"/>
+              </a:rPr>
+              <a:t>Stress</a:t>
+            </a:r>
+            <a:endParaRPr dirty="0"/>
+          </a:p>
+        </p:txBody>
+      </p:sp>
+      <p:sp>
+        <p:nvSpPr>
+          <p:cNvPr id="10" name="Google Shape;244;p23">
+            <a:extLst>
+              <a:ext uri="{FF2B5EF4-FFF2-40B4-BE49-F238E27FC236}">
+                <a16:creationId xmlns:a16="http://schemas.microsoft.com/office/drawing/2014/main" id="{A278B431-E26E-759D-9D89-E80F56AA3C32}"/>
+              </a:ext>
+            </a:extLst>
+          </p:cNvPr>
+          <p:cNvSpPr txBox="1"/>
+          <p:nvPr/>
+        </p:nvSpPr>
+        <p:spPr>
+          <a:xfrm>
+            <a:off x="4464202" y="3879853"/>
+            <a:ext cx="2918329" cy="1246495"/>
+          </a:xfrm>
+          <a:prstGeom prst="rect">
+            <a:avLst/>
+          </a:prstGeom>
+          <a:noFill/>
+          <a:ln>
+            <a:noFill/>
+          </a:ln>
+        </p:spPr>
+        <p:txBody>
+          <a:bodyPr spcFirstLastPara="1" wrap="square" lIns="0" tIns="0" rIns="0" bIns="0" anchor="t" anchorCtr="0">
+            <a:spAutoFit/>
+          </a:bodyPr>
+          <a:lstStyle/>
+          <a:p>
+            <a:pPr>
+              <a:lnSpc>
+                <a:spcPct val="120000"/>
+              </a:lnSpc>
+            </a:pPr>
+            <a:r>
+              <a:rPr lang="en-US" sz="1350" b="1" dirty="0" err="1">
+                <a:solidFill>
+                  <a:schemeClr val="bg2">
+                    <a:lumMod val="20000"/>
+                    <a:lumOff val="80000"/>
+                  </a:schemeClr>
+                </a:solidFill>
+                <a:latin typeface="Inter"/>
+                <a:ea typeface="Inter"/>
+                <a:cs typeface="Inter"/>
+                <a:sym typeface="Inter"/>
+              </a:rPr>
+              <a:t>Accuratezza</a:t>
+            </a:r>
+            <a:r>
+              <a:rPr lang="en-US" sz="1350" b="1" dirty="0">
+                <a:solidFill>
+                  <a:schemeClr val="bg2">
+                    <a:lumMod val="20000"/>
+                    <a:lumOff val="80000"/>
+                  </a:schemeClr>
+                </a:solidFill>
+                <a:latin typeface="Inter"/>
+                <a:ea typeface="Inter"/>
+                <a:cs typeface="Inter"/>
+                <a:sym typeface="Inter"/>
+              </a:rPr>
+              <a:t>:</a:t>
+            </a:r>
+            <a:r>
+              <a:rPr lang="en-US" sz="1350" dirty="0">
+                <a:solidFill>
+                  <a:schemeClr val="bg1">
+                    <a:lumMod val="85000"/>
+                  </a:schemeClr>
+                </a:solidFill>
+                <a:latin typeface="Inter"/>
+                <a:ea typeface="Inter"/>
+                <a:cs typeface="Inter"/>
+                <a:sym typeface="Inter"/>
+              </a:rPr>
+              <a:t> 72.10%</a:t>
+            </a:r>
+            <a:endParaRPr lang="en-US" sz="1350" b="1" i="0" u="none" strike="noStrike" cap="none" dirty="0">
+              <a:solidFill>
+                <a:schemeClr val="bg2">
+                  <a:lumMod val="20000"/>
+                  <a:lumOff val="80000"/>
+                </a:schemeClr>
+              </a:solidFill>
+              <a:latin typeface="Inter"/>
+              <a:ea typeface="Inter"/>
+              <a:cs typeface="Inter"/>
+              <a:sym typeface="Inter"/>
+            </a:endParaRPr>
+          </a:p>
+          <a:p>
+            <a:pPr marL="0" marR="0" lvl="0" indent="0" algn="l" rtl="0">
+              <a:lnSpc>
+                <a:spcPct val="120000"/>
+              </a:lnSpc>
+              <a:spcBef>
+                <a:spcPts val="0"/>
+              </a:spcBef>
+              <a:spcAft>
+                <a:spcPts val="0"/>
+              </a:spcAft>
+              <a:buNone/>
+            </a:pPr>
+            <a:endParaRPr lang="en-US" sz="1350" b="1" dirty="0">
+              <a:solidFill>
+                <a:schemeClr val="bg2">
+                  <a:lumMod val="20000"/>
+                  <a:lumOff val="80000"/>
+                </a:schemeClr>
+              </a:solidFill>
+              <a:latin typeface="Inter"/>
+              <a:ea typeface="Inter"/>
+              <a:cs typeface="Inter"/>
+              <a:sym typeface="Inter"/>
+            </a:endParaRPr>
+          </a:p>
+          <a:p>
+            <a:pPr marL="0" marR="0" lvl="0" indent="0" algn="l" rtl="0">
+              <a:lnSpc>
+                <a:spcPct val="120000"/>
+              </a:lnSpc>
+              <a:spcBef>
+                <a:spcPts val="0"/>
+              </a:spcBef>
+              <a:spcAft>
+                <a:spcPts val="0"/>
+              </a:spcAft>
+              <a:buNone/>
+            </a:pPr>
+            <a:r>
+              <a:rPr lang="en-US" sz="1350" b="1" i="0" u="none" strike="noStrike" cap="none" dirty="0" err="1">
+                <a:solidFill>
+                  <a:schemeClr val="bg2">
+                    <a:lumMod val="20000"/>
+                    <a:lumOff val="80000"/>
+                  </a:schemeClr>
+                </a:solidFill>
+                <a:latin typeface="Inter"/>
+                <a:ea typeface="Inter"/>
+                <a:cs typeface="Inter"/>
+                <a:sym typeface="Inter"/>
+              </a:rPr>
+              <a:t>Precisione</a:t>
+            </a:r>
+            <a:r>
+              <a:rPr lang="en-US" sz="1350" b="1" i="0" u="none" strike="noStrike" cap="none" dirty="0">
+                <a:solidFill>
+                  <a:schemeClr val="bg2">
+                    <a:lumMod val="20000"/>
+                    <a:lumOff val="80000"/>
+                  </a:schemeClr>
+                </a:solidFill>
+                <a:latin typeface="Inter"/>
+                <a:ea typeface="Inter"/>
+                <a:cs typeface="Inter"/>
+                <a:sym typeface="Inter"/>
+              </a:rPr>
+              <a:t>:</a:t>
+            </a:r>
+            <a:r>
+              <a:rPr lang="en-US" sz="1350" b="0" i="0" u="none" strike="noStrike" cap="none" dirty="0">
+                <a:solidFill>
+                  <a:schemeClr val="bg2">
+                    <a:lumMod val="20000"/>
+                    <a:lumOff val="80000"/>
+                  </a:schemeClr>
+                </a:solidFill>
+                <a:latin typeface="Inter"/>
+                <a:ea typeface="Inter"/>
+                <a:cs typeface="Inter"/>
+                <a:sym typeface="Inter"/>
+              </a:rPr>
+              <a:t> </a:t>
+            </a:r>
+            <a:r>
+              <a:rPr lang="en-US" sz="1350" dirty="0">
+                <a:solidFill>
+                  <a:schemeClr val="bg1">
+                    <a:lumMod val="85000"/>
+                  </a:schemeClr>
+                </a:solidFill>
+                <a:latin typeface="Inter"/>
+                <a:ea typeface="Inter"/>
+                <a:cs typeface="Inter"/>
+                <a:sym typeface="Inter"/>
+              </a:rPr>
+              <a:t>74</a:t>
+            </a:r>
+            <a:r>
+              <a:rPr lang="en-US" sz="1350" b="0" i="0" u="none" strike="noStrike" cap="none" dirty="0">
+                <a:solidFill>
+                  <a:schemeClr val="bg1">
+                    <a:lumMod val="85000"/>
+                  </a:schemeClr>
+                </a:solidFill>
+                <a:latin typeface="Inter"/>
+                <a:ea typeface="Inter"/>
+                <a:cs typeface="Inter"/>
+                <a:sym typeface="Inter"/>
+              </a:rPr>
+              <a:t>%</a:t>
+            </a:r>
+            <a:br>
+              <a:rPr lang="en-US" sz="1800" b="0" i="0" u="none" strike="noStrike" cap="none" dirty="0">
+                <a:solidFill>
+                  <a:schemeClr val="dk1"/>
+                </a:solidFill>
+                <a:latin typeface="Calibri"/>
+                <a:ea typeface="Calibri"/>
+                <a:cs typeface="Calibri"/>
+                <a:sym typeface="Calibri"/>
+              </a:rPr>
+            </a:br>
+            <a:r>
+              <a:rPr lang="en-US" sz="1350" b="1" i="0" u="none" strike="noStrike" cap="none" dirty="0">
+                <a:solidFill>
+                  <a:schemeClr val="bg2">
+                    <a:lumMod val="20000"/>
+                    <a:lumOff val="80000"/>
+                  </a:schemeClr>
+                </a:solidFill>
+                <a:latin typeface="Inter"/>
+                <a:ea typeface="Inter"/>
+                <a:cs typeface="Inter"/>
+                <a:sym typeface="Inter"/>
+              </a:rPr>
+              <a:t>Recall:</a:t>
+            </a:r>
+            <a:r>
+              <a:rPr lang="en-US" sz="1350" b="0" i="0" u="none" strike="noStrike" cap="none" dirty="0">
+                <a:solidFill>
+                  <a:schemeClr val="bg2">
+                    <a:lumMod val="20000"/>
+                    <a:lumOff val="80000"/>
+                  </a:schemeClr>
+                </a:solidFill>
+                <a:latin typeface="Inter"/>
+                <a:ea typeface="Inter"/>
+                <a:cs typeface="Inter"/>
+                <a:sym typeface="Inter"/>
+              </a:rPr>
+              <a:t> </a:t>
+            </a:r>
+            <a:r>
+              <a:rPr lang="en-US" sz="1350" b="0" i="0" u="none" strike="noStrike" cap="none" dirty="0">
+                <a:solidFill>
+                  <a:schemeClr val="bg1">
+                    <a:lumMod val="85000"/>
+                  </a:schemeClr>
+                </a:solidFill>
+                <a:latin typeface="Inter"/>
+                <a:ea typeface="Inter"/>
+                <a:cs typeface="Inter"/>
+                <a:sym typeface="Inter"/>
+              </a:rPr>
+              <a:t>76%</a:t>
+            </a:r>
+            <a:br>
+              <a:rPr lang="en-US" sz="1800" b="0" i="0" u="none" strike="noStrike" cap="none" dirty="0">
+                <a:solidFill>
+                  <a:schemeClr val="dk1"/>
+                </a:solidFill>
+                <a:latin typeface="Calibri"/>
+                <a:ea typeface="Calibri"/>
+                <a:cs typeface="Calibri"/>
+                <a:sym typeface="Calibri"/>
+              </a:rPr>
+            </a:br>
+            <a:r>
+              <a:rPr lang="en-US" sz="1350" b="1" i="0" u="none" strike="noStrike" cap="none" dirty="0">
+                <a:solidFill>
+                  <a:schemeClr val="bg2">
+                    <a:lumMod val="20000"/>
+                    <a:lumOff val="80000"/>
+                  </a:schemeClr>
+                </a:solidFill>
+                <a:latin typeface="Inter"/>
+                <a:ea typeface="Inter"/>
+                <a:cs typeface="Inter"/>
+                <a:sym typeface="Inter"/>
+              </a:rPr>
+              <a:t>F1-Score:</a:t>
+            </a:r>
+            <a:r>
+              <a:rPr lang="en-US" sz="1350" b="0" i="0" u="none" strike="noStrike" cap="none" dirty="0">
+                <a:solidFill>
+                  <a:schemeClr val="bg2">
+                    <a:lumMod val="20000"/>
+                    <a:lumOff val="80000"/>
+                  </a:schemeClr>
+                </a:solidFill>
+                <a:latin typeface="Inter"/>
+                <a:ea typeface="Inter"/>
+                <a:cs typeface="Inter"/>
+                <a:sym typeface="Inter"/>
+              </a:rPr>
+              <a:t> </a:t>
+            </a:r>
+            <a:r>
+              <a:rPr lang="en-US" sz="1350" b="0" i="0" u="none" strike="noStrike" cap="none" dirty="0">
+                <a:solidFill>
+                  <a:schemeClr val="bg1">
+                    <a:lumMod val="85000"/>
+                  </a:schemeClr>
+                </a:solidFill>
+                <a:latin typeface="Inter"/>
+                <a:ea typeface="Inter"/>
+                <a:cs typeface="Inter"/>
+                <a:sym typeface="Inter"/>
+              </a:rPr>
+              <a:t>75%</a:t>
+            </a:r>
+          </a:p>
+        </p:txBody>
+      </p:sp>
+      <p:sp>
+        <p:nvSpPr>
+          <p:cNvPr id="11" name="Google Shape;242;p23">
+            <a:extLst>
+              <a:ext uri="{FF2B5EF4-FFF2-40B4-BE49-F238E27FC236}">
+                <a16:creationId xmlns:a16="http://schemas.microsoft.com/office/drawing/2014/main" id="{0ED19050-B209-4A04-1982-8C029B8A3D73}"/>
+              </a:ext>
+            </a:extLst>
+          </p:cNvPr>
+          <p:cNvSpPr txBox="1"/>
+          <p:nvPr/>
+        </p:nvSpPr>
+        <p:spPr>
+          <a:xfrm>
+            <a:off x="4464202" y="2953948"/>
+            <a:ext cx="2290257" cy="323165"/>
+          </a:xfrm>
+          <a:prstGeom prst="rect">
+            <a:avLst/>
+          </a:prstGeom>
+          <a:noFill/>
+          <a:ln>
+            <a:noFill/>
+          </a:ln>
+        </p:spPr>
+        <p:txBody>
+          <a:bodyPr spcFirstLastPara="1" wrap="square" lIns="0" tIns="0" rIns="0" bIns="0" anchor="t" anchorCtr="0">
+            <a:spAutoFit/>
+          </a:bodyPr>
+          <a:lstStyle/>
+          <a:p>
+            <a:pPr marL="0" marR="0" lvl="0" indent="0" algn="l" rtl="0">
+              <a:spcBef>
+                <a:spcPts val="0"/>
+              </a:spcBef>
+              <a:spcAft>
+                <a:spcPts val="0"/>
+              </a:spcAft>
+              <a:buNone/>
+            </a:pPr>
+            <a:r>
+              <a:rPr lang="en-US" sz="2100" b="1" i="0" u="none" strike="noStrike" cap="none" dirty="0">
+                <a:solidFill>
+                  <a:srgbClr val="38BDF8"/>
+                </a:solidFill>
+                <a:latin typeface="Poppins Medium"/>
+                <a:ea typeface="Poppins Medium"/>
+                <a:cs typeface="Poppins Medium"/>
+                <a:sym typeface="Poppins Medium"/>
+              </a:rPr>
+              <a:t>SVM (</a:t>
+            </a:r>
+            <a:r>
+              <a:rPr lang="en-US" sz="2100" b="1" i="0" u="none" strike="noStrike" cap="none" dirty="0" err="1">
+                <a:solidFill>
+                  <a:srgbClr val="38BDF8"/>
+                </a:solidFill>
+                <a:latin typeface="Poppins Medium"/>
+                <a:ea typeface="Poppins Medium"/>
+                <a:cs typeface="Poppins Medium"/>
+                <a:sym typeface="Poppins Medium"/>
+              </a:rPr>
+              <a:t>Cubica</a:t>
+            </a:r>
+            <a:r>
+              <a:rPr lang="en-US" sz="2100" b="1" i="0" u="none" strike="noStrike" cap="none" dirty="0">
+                <a:solidFill>
+                  <a:srgbClr val="38BDF8"/>
+                </a:solidFill>
+                <a:latin typeface="Poppins Medium"/>
+                <a:ea typeface="Poppins Medium"/>
+                <a:cs typeface="Poppins Medium"/>
+                <a:sym typeface="Poppins Medium"/>
+              </a:rPr>
+              <a:t>)</a:t>
+            </a:r>
+            <a:endParaRPr b="1" dirty="0"/>
+          </a:p>
+        </p:txBody>
+      </p:sp>
+      <p:sp>
+        <p:nvSpPr>
+          <p:cNvPr id="12" name="Google Shape;242;p23">
+            <a:extLst>
+              <a:ext uri="{FF2B5EF4-FFF2-40B4-BE49-F238E27FC236}">
+                <a16:creationId xmlns:a16="http://schemas.microsoft.com/office/drawing/2014/main" id="{0249F397-6373-BAD8-41CB-16A0772BCACE}"/>
+              </a:ext>
+            </a:extLst>
+          </p:cNvPr>
+          <p:cNvSpPr txBox="1"/>
+          <p:nvPr/>
+        </p:nvSpPr>
+        <p:spPr>
+          <a:xfrm>
+            <a:off x="8328101" y="3370305"/>
+            <a:ext cx="2290257" cy="323165"/>
+          </a:xfrm>
+          <a:prstGeom prst="rect">
+            <a:avLst/>
+          </a:prstGeom>
+          <a:noFill/>
+          <a:ln>
+            <a:noFill/>
+          </a:ln>
+        </p:spPr>
+        <p:txBody>
+          <a:bodyPr spcFirstLastPara="1" wrap="square" lIns="0" tIns="0" rIns="0" bIns="0" anchor="t" anchorCtr="0">
+            <a:spAutoFit/>
+          </a:bodyPr>
+          <a:lstStyle/>
+          <a:p>
+            <a:pPr marL="0" marR="0" lvl="0" indent="0" algn="l" rtl="0">
+              <a:spcBef>
+                <a:spcPts val="0"/>
+              </a:spcBef>
+              <a:spcAft>
+                <a:spcPts val="0"/>
+              </a:spcAft>
+              <a:buNone/>
+            </a:pPr>
+            <a:r>
+              <a:rPr lang="en-US" sz="2100" b="0" i="0" u="none" strike="noStrike" cap="none" dirty="0">
+                <a:solidFill>
+                  <a:srgbClr val="38BDF8"/>
+                </a:solidFill>
+                <a:latin typeface="Poppins Medium"/>
+                <a:ea typeface="Poppins Medium"/>
+                <a:cs typeface="Poppins Medium"/>
+                <a:sym typeface="Poppins Medium"/>
+              </a:rPr>
+              <a:t>Stress</a:t>
+            </a:r>
+            <a:endParaRPr dirty="0"/>
+          </a:p>
+        </p:txBody>
+      </p:sp>
+      <p:sp>
+        <p:nvSpPr>
+          <p:cNvPr id="13" name="Google Shape;244;p23">
+            <a:extLst>
+              <a:ext uri="{FF2B5EF4-FFF2-40B4-BE49-F238E27FC236}">
+                <a16:creationId xmlns:a16="http://schemas.microsoft.com/office/drawing/2014/main" id="{146CE94C-5287-0570-0969-A09933B67553}"/>
+              </a:ext>
+            </a:extLst>
+          </p:cNvPr>
+          <p:cNvSpPr txBox="1"/>
+          <p:nvPr/>
+        </p:nvSpPr>
+        <p:spPr>
+          <a:xfrm>
+            <a:off x="8328101" y="3879853"/>
+            <a:ext cx="2918329" cy="1246495"/>
+          </a:xfrm>
+          <a:prstGeom prst="rect">
+            <a:avLst/>
+          </a:prstGeom>
+          <a:noFill/>
+          <a:ln>
+            <a:noFill/>
+          </a:ln>
+        </p:spPr>
+        <p:txBody>
+          <a:bodyPr spcFirstLastPara="1" wrap="square" lIns="0" tIns="0" rIns="0" bIns="0" anchor="t" anchorCtr="0">
+            <a:spAutoFit/>
+          </a:bodyPr>
+          <a:lstStyle/>
+          <a:p>
+            <a:pPr>
+              <a:lnSpc>
+                <a:spcPct val="120000"/>
+              </a:lnSpc>
+            </a:pPr>
+            <a:r>
+              <a:rPr lang="en-US" sz="1350" b="1" dirty="0" err="1">
+                <a:solidFill>
+                  <a:schemeClr val="bg2">
+                    <a:lumMod val="20000"/>
+                    <a:lumOff val="80000"/>
+                  </a:schemeClr>
+                </a:solidFill>
+                <a:latin typeface="Inter"/>
+                <a:ea typeface="Inter"/>
+                <a:cs typeface="Inter"/>
+                <a:sym typeface="Inter"/>
+              </a:rPr>
+              <a:t>Accuratezza</a:t>
+            </a:r>
+            <a:r>
+              <a:rPr lang="en-US" sz="1350" b="1" dirty="0">
+                <a:solidFill>
+                  <a:schemeClr val="bg2">
+                    <a:lumMod val="20000"/>
+                    <a:lumOff val="80000"/>
+                  </a:schemeClr>
+                </a:solidFill>
+                <a:latin typeface="Inter"/>
+                <a:ea typeface="Inter"/>
+                <a:cs typeface="Inter"/>
+                <a:sym typeface="Inter"/>
+              </a:rPr>
+              <a:t>:</a:t>
+            </a:r>
+            <a:r>
+              <a:rPr lang="en-US" sz="1350" dirty="0">
+                <a:solidFill>
+                  <a:schemeClr val="bg1">
+                    <a:lumMod val="85000"/>
+                  </a:schemeClr>
+                </a:solidFill>
+                <a:latin typeface="Inter"/>
+                <a:ea typeface="Inter"/>
+                <a:cs typeface="Inter"/>
+                <a:sym typeface="Inter"/>
+              </a:rPr>
+              <a:t> 70.42%</a:t>
+            </a:r>
+            <a:endParaRPr lang="en-US" sz="1350" b="1" dirty="0">
+              <a:solidFill>
+                <a:schemeClr val="bg2">
+                  <a:lumMod val="20000"/>
+                  <a:lumOff val="80000"/>
+                </a:schemeClr>
+              </a:solidFill>
+              <a:latin typeface="Inter"/>
+              <a:ea typeface="Inter"/>
+              <a:cs typeface="Inter"/>
+              <a:sym typeface="Inter"/>
+            </a:endParaRPr>
+          </a:p>
+          <a:p>
+            <a:pPr marL="0" marR="0" lvl="0" indent="0" algn="l" rtl="0">
+              <a:lnSpc>
+                <a:spcPct val="120000"/>
+              </a:lnSpc>
+              <a:spcBef>
+                <a:spcPts val="0"/>
+              </a:spcBef>
+              <a:spcAft>
+                <a:spcPts val="0"/>
+              </a:spcAft>
+              <a:buNone/>
+            </a:pPr>
+            <a:endParaRPr lang="en-US" sz="1350" b="1" i="0" u="none" strike="noStrike" cap="none" dirty="0">
+              <a:solidFill>
+                <a:schemeClr val="bg2">
+                  <a:lumMod val="20000"/>
+                  <a:lumOff val="80000"/>
+                </a:schemeClr>
+              </a:solidFill>
+              <a:latin typeface="Inter"/>
+              <a:ea typeface="Inter"/>
+              <a:cs typeface="Inter"/>
+              <a:sym typeface="Inter"/>
+            </a:endParaRPr>
+          </a:p>
+          <a:p>
+            <a:pPr marL="0" marR="0" lvl="0" indent="0" algn="l" rtl="0">
+              <a:lnSpc>
+                <a:spcPct val="120000"/>
+              </a:lnSpc>
+              <a:spcBef>
+                <a:spcPts val="0"/>
+              </a:spcBef>
+              <a:spcAft>
+                <a:spcPts val="0"/>
+              </a:spcAft>
+              <a:buNone/>
+            </a:pPr>
+            <a:r>
+              <a:rPr lang="en-US" sz="1350" b="1" i="0" u="none" strike="noStrike" cap="none" dirty="0" err="1">
+                <a:solidFill>
+                  <a:schemeClr val="bg2">
+                    <a:lumMod val="20000"/>
+                    <a:lumOff val="80000"/>
+                  </a:schemeClr>
+                </a:solidFill>
+                <a:latin typeface="Inter"/>
+                <a:ea typeface="Inter"/>
+                <a:cs typeface="Inter"/>
+                <a:sym typeface="Inter"/>
+              </a:rPr>
+              <a:t>Precisione</a:t>
+            </a:r>
+            <a:r>
+              <a:rPr lang="en-US" sz="1350" b="1" i="0" u="none" strike="noStrike" cap="none" dirty="0">
+                <a:solidFill>
+                  <a:schemeClr val="bg2">
+                    <a:lumMod val="20000"/>
+                    <a:lumOff val="80000"/>
+                  </a:schemeClr>
+                </a:solidFill>
+                <a:latin typeface="Inter"/>
+                <a:ea typeface="Inter"/>
+                <a:cs typeface="Inter"/>
+                <a:sym typeface="Inter"/>
+              </a:rPr>
+              <a:t>:</a:t>
+            </a:r>
+            <a:r>
+              <a:rPr lang="en-US" sz="1350" b="0" i="0" u="none" strike="noStrike" cap="none" dirty="0">
+                <a:solidFill>
+                  <a:schemeClr val="bg2">
+                    <a:lumMod val="20000"/>
+                    <a:lumOff val="80000"/>
+                  </a:schemeClr>
+                </a:solidFill>
+                <a:latin typeface="Inter"/>
+                <a:ea typeface="Inter"/>
+                <a:cs typeface="Inter"/>
+                <a:sym typeface="Inter"/>
+              </a:rPr>
+              <a:t> </a:t>
+            </a:r>
+            <a:r>
+              <a:rPr lang="en-US" sz="1350" dirty="0">
+                <a:solidFill>
+                  <a:schemeClr val="bg1">
+                    <a:lumMod val="85000"/>
+                  </a:schemeClr>
+                </a:solidFill>
+                <a:latin typeface="Inter"/>
+                <a:ea typeface="Inter"/>
+                <a:cs typeface="Inter"/>
+                <a:sym typeface="Inter"/>
+              </a:rPr>
+              <a:t>73</a:t>
+            </a:r>
+            <a:r>
+              <a:rPr lang="en-US" sz="1350" b="0" i="0" u="none" strike="noStrike" cap="none" dirty="0">
+                <a:solidFill>
+                  <a:schemeClr val="bg1">
+                    <a:lumMod val="85000"/>
+                  </a:schemeClr>
+                </a:solidFill>
+                <a:latin typeface="Inter"/>
+                <a:ea typeface="Inter"/>
+                <a:cs typeface="Inter"/>
+                <a:sym typeface="Inter"/>
+              </a:rPr>
+              <a:t>%</a:t>
+            </a:r>
+            <a:br>
+              <a:rPr lang="en-US" sz="1800" b="0" i="0" u="none" strike="noStrike" cap="none" dirty="0">
+                <a:solidFill>
+                  <a:schemeClr val="dk1"/>
+                </a:solidFill>
+                <a:latin typeface="Calibri"/>
+                <a:ea typeface="Calibri"/>
+                <a:cs typeface="Calibri"/>
+                <a:sym typeface="Calibri"/>
+              </a:rPr>
+            </a:br>
+            <a:r>
+              <a:rPr lang="en-US" sz="1350" b="1" i="0" u="none" strike="noStrike" cap="none" dirty="0">
+                <a:solidFill>
+                  <a:schemeClr val="bg2">
+                    <a:lumMod val="20000"/>
+                    <a:lumOff val="80000"/>
+                  </a:schemeClr>
+                </a:solidFill>
+                <a:latin typeface="Inter"/>
+                <a:ea typeface="Inter"/>
+                <a:cs typeface="Inter"/>
+                <a:sym typeface="Inter"/>
+              </a:rPr>
+              <a:t>Recall:</a:t>
+            </a:r>
+            <a:r>
+              <a:rPr lang="en-US" sz="1350" b="0" i="0" u="none" strike="noStrike" cap="none" dirty="0">
+                <a:solidFill>
+                  <a:schemeClr val="bg2">
+                    <a:lumMod val="20000"/>
+                    <a:lumOff val="80000"/>
+                  </a:schemeClr>
+                </a:solidFill>
+                <a:latin typeface="Inter"/>
+                <a:ea typeface="Inter"/>
+                <a:cs typeface="Inter"/>
+                <a:sym typeface="Inter"/>
+              </a:rPr>
+              <a:t> </a:t>
+            </a:r>
+            <a:r>
+              <a:rPr lang="en-US" sz="1350" b="0" i="0" u="none" strike="noStrike" cap="none" dirty="0">
+                <a:solidFill>
+                  <a:schemeClr val="bg1">
+                    <a:lumMod val="85000"/>
+                  </a:schemeClr>
+                </a:solidFill>
+                <a:latin typeface="Inter"/>
+                <a:ea typeface="Inter"/>
+                <a:cs typeface="Inter"/>
+                <a:sym typeface="Inter"/>
+              </a:rPr>
+              <a:t>74%</a:t>
+            </a:r>
+            <a:br>
+              <a:rPr lang="en-US" sz="1800" b="0" i="0" u="none" strike="noStrike" cap="none" dirty="0">
+                <a:solidFill>
+                  <a:schemeClr val="dk1"/>
+                </a:solidFill>
+                <a:latin typeface="Calibri"/>
+                <a:ea typeface="Calibri"/>
+                <a:cs typeface="Calibri"/>
+                <a:sym typeface="Calibri"/>
+              </a:rPr>
+            </a:br>
+            <a:r>
+              <a:rPr lang="en-US" sz="1350" b="1" i="0" u="none" strike="noStrike" cap="none" dirty="0">
+                <a:solidFill>
+                  <a:schemeClr val="bg2">
+                    <a:lumMod val="20000"/>
+                    <a:lumOff val="80000"/>
+                  </a:schemeClr>
+                </a:solidFill>
+                <a:latin typeface="Inter"/>
+                <a:ea typeface="Inter"/>
+                <a:cs typeface="Inter"/>
+                <a:sym typeface="Inter"/>
+              </a:rPr>
+              <a:t>F1-Score:</a:t>
+            </a:r>
+            <a:r>
+              <a:rPr lang="en-US" sz="1350" b="0" i="0" u="none" strike="noStrike" cap="none" dirty="0">
+                <a:solidFill>
+                  <a:schemeClr val="bg2">
+                    <a:lumMod val="20000"/>
+                    <a:lumOff val="80000"/>
+                  </a:schemeClr>
+                </a:solidFill>
+                <a:latin typeface="Inter"/>
+                <a:ea typeface="Inter"/>
+                <a:cs typeface="Inter"/>
+                <a:sym typeface="Inter"/>
+              </a:rPr>
+              <a:t> </a:t>
+            </a:r>
+            <a:r>
+              <a:rPr lang="en-US" sz="1350" b="0" i="0" u="none" strike="noStrike" cap="none" dirty="0">
+                <a:solidFill>
+                  <a:schemeClr val="bg1">
+                    <a:lumMod val="85000"/>
+                  </a:schemeClr>
+                </a:solidFill>
+                <a:latin typeface="Inter"/>
+                <a:ea typeface="Inter"/>
+                <a:cs typeface="Inter"/>
+                <a:sym typeface="Inter"/>
+              </a:rPr>
+              <a:t>73%</a:t>
+            </a:r>
+          </a:p>
+        </p:txBody>
+      </p:sp>
+      <p:sp>
+        <p:nvSpPr>
+          <p:cNvPr id="14" name="Google Shape;242;p23">
+            <a:extLst>
+              <a:ext uri="{FF2B5EF4-FFF2-40B4-BE49-F238E27FC236}">
+                <a16:creationId xmlns:a16="http://schemas.microsoft.com/office/drawing/2014/main" id="{19386B87-908C-40F6-EFF0-AD1CB92DECAA}"/>
+              </a:ext>
+            </a:extLst>
+          </p:cNvPr>
+          <p:cNvSpPr txBox="1"/>
+          <p:nvPr/>
+        </p:nvSpPr>
+        <p:spPr>
+          <a:xfrm>
+            <a:off x="8328101" y="2953948"/>
+            <a:ext cx="2598517" cy="323165"/>
+          </a:xfrm>
+          <a:prstGeom prst="rect">
+            <a:avLst/>
+          </a:prstGeom>
+          <a:noFill/>
+          <a:ln>
+            <a:noFill/>
+          </a:ln>
+        </p:spPr>
+        <p:txBody>
+          <a:bodyPr spcFirstLastPara="1" wrap="square" lIns="0" tIns="0" rIns="0" bIns="0" anchor="t" anchorCtr="0">
+            <a:spAutoFit/>
+          </a:bodyPr>
+          <a:lstStyle/>
+          <a:p>
+            <a:pPr marL="0" marR="0" lvl="0" indent="0" algn="l" rtl="0">
+              <a:spcBef>
+                <a:spcPts val="0"/>
+              </a:spcBef>
+              <a:spcAft>
+                <a:spcPts val="0"/>
+              </a:spcAft>
+              <a:buNone/>
+            </a:pPr>
+            <a:r>
+              <a:rPr lang="en-US" sz="2100" b="1" i="0" u="none" strike="noStrike" cap="none" dirty="0">
+                <a:solidFill>
+                  <a:srgbClr val="38BDF8"/>
+                </a:solidFill>
+                <a:latin typeface="Poppins Medium"/>
+                <a:ea typeface="Poppins Medium"/>
+                <a:cs typeface="Poppins Medium"/>
+                <a:sym typeface="Poppins Medium"/>
+              </a:rPr>
+              <a:t>Logistic Regression</a:t>
+            </a:r>
+            <a:endParaRPr b="1" dirty="0"/>
+          </a:p>
+        </p:txBody>
+      </p:sp>
+    </p:spTree>
+    <p:extLst>
+      <p:ext uri="{BB962C8B-B14F-4D97-AF65-F5344CB8AC3E}">
+        <p14:creationId xmlns:p14="http://schemas.microsoft.com/office/powerpoint/2010/main" val="1174189188"/>
+      </p:ext>
+    </p:extLst>
+  </p:cSld>
+  <p:clrMapOvr>
+    <a:masterClrMapping/>
+  </p:clrMapOvr>
+</p:sld>
+</file>
+
+<file path=ppt/slides/slide11.xml><?xml version="1.0" encoding="utf-8"?>
+<p:sld xmlns:a="http://schemas.openxmlformats.org/drawingml/2006/main" xmlns:r="http://schemas.openxmlformats.org/officeDocument/2006/relationships" xmlns:p="http://schemas.openxmlformats.org/presentationml/2006/main">
+  <p:cSld>
+    <p:bg>
+      <p:bgPr>
+        <a:solidFill>
+          <a:srgbClr val="111827"/>
+        </a:solidFill>
+        <a:effectLst/>
+      </p:bgPr>
+    </p:bg>
+    <p:spTree>
+      <p:nvGrpSpPr>
+        <p:cNvPr id="1" name="Shape 238"/>
+        <p:cNvGrpSpPr/>
+        <p:nvPr/>
+      </p:nvGrpSpPr>
+      <p:grpSpPr>
+        <a:xfrm>
+          <a:off x="0" y="0"/>
+          <a:ext cx="0" cy="0"/>
+          <a:chOff x="0" y="0"/>
+          <a:chExt cx="0" cy="0"/>
+        </a:xfrm>
+      </p:grpSpPr>
+      <p:pic>
+        <p:nvPicPr>
+          <p:cNvPr id="239" name="Google Shape;239;p23" descr="image.png"/>
+          <p:cNvPicPr preferRelativeResize="0"/>
+          <p:nvPr/>
+        </p:nvPicPr>
+        <p:blipFill rotWithShape="1">
+          <a:blip r:embed="rId3">
+            <a:alphaModFix/>
+          </a:blip>
+          <a:srcRect/>
+          <a:stretch/>
+        </p:blipFill>
+        <p:spPr>
+          <a:xfrm>
+            <a:off x="0" y="0"/>
+            <a:ext cx="12192000" cy="6858000"/>
+          </a:xfrm>
+          <a:prstGeom prst="rect">
+            <a:avLst/>
+          </a:prstGeom>
+          <a:noFill/>
+          <a:ln>
+            <a:noFill/>
+          </a:ln>
+        </p:spPr>
+      </p:pic>
+      <p:sp>
+        <p:nvSpPr>
+          <p:cNvPr id="240" name="Google Shape;240;p23"/>
+          <p:cNvSpPr txBox="1"/>
+          <p:nvPr/>
+        </p:nvSpPr>
+        <p:spPr>
+          <a:xfrm>
+            <a:off x="487555" y="1829915"/>
+            <a:ext cx="5286375" cy="1615827"/>
+          </a:xfrm>
+          <a:prstGeom prst="rect">
+            <a:avLst/>
+          </a:prstGeom>
+          <a:noFill/>
+          <a:ln>
+            <a:noFill/>
+          </a:ln>
+        </p:spPr>
+        <p:txBody>
+          <a:bodyPr spcFirstLastPara="1" wrap="square" lIns="0" tIns="0" rIns="0" bIns="0" anchor="t" anchorCtr="0">
+            <a:spAutoFit/>
+          </a:bodyPr>
+          <a:lstStyle/>
+          <a:p>
+            <a:pPr marL="0" marR="0" lvl="0" indent="0" algn="ctr" rtl="0">
+              <a:lnSpc>
+                <a:spcPct val="100000"/>
+              </a:lnSpc>
+              <a:spcBef>
+                <a:spcPts val="0"/>
+              </a:spcBef>
+              <a:spcAft>
+                <a:spcPts val="0"/>
+              </a:spcAft>
+              <a:buNone/>
+            </a:pPr>
+            <a:r>
+              <a:rPr lang="en-US" sz="10500" b="1" i="0" u="none" strike="noStrike" cap="none" dirty="0">
+                <a:solidFill>
+                  <a:srgbClr val="38BDF8"/>
+                </a:solidFill>
+                <a:latin typeface="Poppins"/>
+                <a:ea typeface="Poppins"/>
+                <a:cs typeface="Poppins"/>
+                <a:sym typeface="Poppins"/>
+              </a:rPr>
+              <a:t>72.77%</a:t>
+            </a:r>
+            <a:endParaRPr dirty="0"/>
+          </a:p>
+        </p:txBody>
+      </p:sp>
+      <p:sp>
+        <p:nvSpPr>
+          <p:cNvPr id="241" name="Google Shape;241;p23"/>
+          <p:cNvSpPr txBox="1"/>
+          <p:nvPr/>
+        </p:nvSpPr>
+        <p:spPr>
+          <a:xfrm>
+            <a:off x="414241" y="3224143"/>
+            <a:ext cx="5433002" cy="443198"/>
+          </a:xfrm>
+          <a:prstGeom prst="rect">
+            <a:avLst/>
+          </a:prstGeom>
+          <a:noFill/>
+          <a:ln>
+            <a:noFill/>
+          </a:ln>
+        </p:spPr>
+        <p:txBody>
+          <a:bodyPr spcFirstLastPara="1" wrap="square" lIns="0" tIns="0" rIns="0" bIns="0" anchor="t" anchorCtr="0">
+            <a:spAutoFit/>
+          </a:bodyPr>
+          <a:lstStyle/>
+          <a:p>
+            <a:pPr marL="0" marR="0" lvl="0" indent="0" algn="ctr" rtl="0">
+              <a:lnSpc>
+                <a:spcPct val="159944"/>
+              </a:lnSpc>
+              <a:spcBef>
+                <a:spcPts val="0"/>
+              </a:spcBef>
+              <a:spcAft>
+                <a:spcPts val="0"/>
+              </a:spcAft>
+              <a:buNone/>
+            </a:pPr>
+            <a:r>
+              <a:rPr lang="en-US" sz="1800" b="0" i="0" u="none" strike="noStrike" cap="none" dirty="0">
+                <a:solidFill>
+                  <a:schemeClr val="bg1"/>
+                </a:solidFill>
+                <a:latin typeface="Inter SemiBold"/>
+                <a:ea typeface="Inter SemiBold"/>
+                <a:cs typeface="Inter SemiBold"/>
+                <a:sym typeface="Inter SemiBold"/>
+              </a:rPr>
+              <a:t>ACCURATEZZA GLOBALE (Target Paper: 76.5%)</a:t>
+            </a:r>
+            <a:endParaRPr dirty="0">
+              <a:solidFill>
+                <a:schemeClr val="bg1"/>
+              </a:solidFill>
+            </a:endParaRPr>
+          </a:p>
+        </p:txBody>
+      </p:sp>
+      <p:sp>
+        <p:nvSpPr>
+          <p:cNvPr id="242" name="Google Shape;242;p23"/>
+          <p:cNvSpPr txBox="1"/>
+          <p:nvPr/>
+        </p:nvSpPr>
+        <p:spPr>
+          <a:xfrm>
+            <a:off x="3810115" y="4457646"/>
+            <a:ext cx="2290257" cy="323165"/>
+          </a:xfrm>
+          <a:prstGeom prst="rect">
+            <a:avLst/>
+          </a:prstGeom>
+          <a:noFill/>
+          <a:ln>
+            <a:noFill/>
+          </a:ln>
+        </p:spPr>
+        <p:txBody>
+          <a:bodyPr spcFirstLastPara="1" wrap="square" lIns="0" tIns="0" rIns="0" bIns="0" anchor="t" anchorCtr="0">
+            <a:spAutoFit/>
+          </a:bodyPr>
+          <a:lstStyle/>
+          <a:p>
+            <a:pPr marL="0" marR="0" lvl="0" indent="0" algn="l" rtl="0">
+              <a:spcBef>
+                <a:spcPts val="0"/>
+              </a:spcBef>
+              <a:spcAft>
+                <a:spcPts val="0"/>
+              </a:spcAft>
+              <a:buNone/>
+            </a:pPr>
+            <a:r>
+              <a:rPr lang="en-US" sz="2100" b="0" i="0" u="none" strike="noStrike" cap="none" dirty="0">
+                <a:solidFill>
+                  <a:srgbClr val="38BDF8"/>
+                </a:solidFill>
+                <a:latin typeface="Poppins Medium"/>
+                <a:ea typeface="Poppins Medium"/>
+                <a:cs typeface="Poppins Medium"/>
+                <a:sym typeface="Poppins Medium"/>
+              </a:rPr>
+              <a:t>Stress</a:t>
+            </a:r>
+            <a:endParaRPr dirty="0"/>
+          </a:p>
+        </p:txBody>
+      </p:sp>
+      <p:sp>
+        <p:nvSpPr>
+          <p:cNvPr id="244" name="Google Shape;244;p23"/>
+          <p:cNvSpPr txBox="1"/>
+          <p:nvPr/>
+        </p:nvSpPr>
+        <p:spPr>
+          <a:xfrm>
+            <a:off x="3810115" y="4967194"/>
+            <a:ext cx="2918329" cy="1006429"/>
+          </a:xfrm>
+          <a:prstGeom prst="rect">
+            <a:avLst/>
+          </a:prstGeom>
+          <a:noFill/>
+          <a:ln>
+            <a:noFill/>
+          </a:ln>
+        </p:spPr>
+        <p:txBody>
+          <a:bodyPr spcFirstLastPara="1" wrap="square" lIns="0" tIns="0" rIns="0" bIns="0" anchor="t" anchorCtr="0">
+            <a:spAutoFit/>
+          </a:bodyPr>
+          <a:lstStyle/>
+          <a:p>
+            <a:pPr marL="0" marR="0" lvl="0" indent="0" algn="l" rtl="0">
+              <a:lnSpc>
+                <a:spcPct val="120000"/>
+              </a:lnSpc>
+              <a:spcBef>
+                <a:spcPts val="0"/>
+              </a:spcBef>
+              <a:spcAft>
+                <a:spcPts val="0"/>
+              </a:spcAft>
+              <a:buNone/>
+            </a:pPr>
+            <a:r>
+              <a:rPr lang="en-US" sz="1350" b="1" i="0" u="none" strike="noStrike" cap="none" dirty="0" err="1">
+                <a:solidFill>
+                  <a:schemeClr val="bg2">
+                    <a:lumMod val="20000"/>
+                    <a:lumOff val="80000"/>
+                  </a:schemeClr>
+                </a:solidFill>
+                <a:latin typeface="Inter"/>
+                <a:ea typeface="Inter"/>
+                <a:cs typeface="Inter"/>
+                <a:sym typeface="Inter"/>
+              </a:rPr>
+              <a:t>Precisione</a:t>
+            </a:r>
+            <a:r>
+              <a:rPr lang="en-US" sz="1350" b="1" i="0" u="none" strike="noStrike" cap="none" dirty="0">
+                <a:solidFill>
+                  <a:schemeClr val="bg2">
+                    <a:lumMod val="20000"/>
+                    <a:lumOff val="80000"/>
+                  </a:schemeClr>
+                </a:solidFill>
+                <a:latin typeface="Inter"/>
+                <a:ea typeface="Inter"/>
+                <a:cs typeface="Inter"/>
+                <a:sym typeface="Inter"/>
+              </a:rPr>
+              <a:t>:</a:t>
+            </a:r>
+            <a:r>
+              <a:rPr lang="en-US" sz="1350" b="0" i="0" u="none" strike="noStrike" cap="none" dirty="0">
+                <a:solidFill>
+                  <a:schemeClr val="bg2">
+                    <a:lumMod val="20000"/>
+                    <a:lumOff val="80000"/>
+                  </a:schemeClr>
+                </a:solidFill>
+                <a:latin typeface="Inter"/>
+                <a:ea typeface="Inter"/>
+                <a:cs typeface="Inter"/>
+                <a:sym typeface="Inter"/>
+              </a:rPr>
+              <a:t> </a:t>
+            </a:r>
+            <a:r>
+              <a:rPr lang="en-US" sz="1350" dirty="0">
+                <a:solidFill>
+                  <a:schemeClr val="bg1">
+                    <a:lumMod val="85000"/>
+                  </a:schemeClr>
+                </a:solidFill>
+                <a:latin typeface="Inter"/>
+                <a:ea typeface="Inter"/>
+                <a:cs typeface="Inter"/>
+                <a:sym typeface="Inter"/>
+              </a:rPr>
+              <a:t>75</a:t>
+            </a:r>
+            <a:r>
+              <a:rPr lang="en-US" sz="1350" b="0" i="0" u="none" strike="noStrike" cap="none" dirty="0">
+                <a:solidFill>
+                  <a:schemeClr val="bg1">
+                    <a:lumMod val="85000"/>
+                  </a:schemeClr>
+                </a:solidFill>
+                <a:latin typeface="Inter"/>
+                <a:ea typeface="Inter"/>
+                <a:cs typeface="Inter"/>
+                <a:sym typeface="Inter"/>
+              </a:rPr>
+              <a:t>%</a:t>
+            </a:r>
+            <a:br>
+              <a:rPr lang="en-US" sz="1800" b="0" i="0" u="none" strike="noStrike" cap="none" dirty="0">
+                <a:solidFill>
+                  <a:schemeClr val="dk1"/>
+                </a:solidFill>
+                <a:latin typeface="Calibri"/>
+                <a:ea typeface="Calibri"/>
+                <a:cs typeface="Calibri"/>
+                <a:sym typeface="Calibri"/>
+              </a:rPr>
+            </a:br>
+            <a:r>
+              <a:rPr lang="en-US" sz="1350" b="1" i="0" u="none" strike="noStrike" cap="none" dirty="0">
+                <a:solidFill>
+                  <a:schemeClr val="bg2">
+                    <a:lumMod val="20000"/>
+                    <a:lumOff val="80000"/>
+                  </a:schemeClr>
+                </a:solidFill>
+                <a:latin typeface="Inter"/>
+                <a:ea typeface="Inter"/>
+                <a:cs typeface="Inter"/>
+                <a:sym typeface="Inter"/>
+              </a:rPr>
+              <a:t>Recall:</a:t>
+            </a:r>
+            <a:r>
+              <a:rPr lang="en-US" sz="1350" b="0" i="0" u="none" strike="noStrike" cap="none" dirty="0">
+                <a:solidFill>
+                  <a:schemeClr val="bg2">
+                    <a:lumMod val="20000"/>
+                    <a:lumOff val="80000"/>
+                  </a:schemeClr>
+                </a:solidFill>
+                <a:latin typeface="Inter"/>
+                <a:ea typeface="Inter"/>
+                <a:cs typeface="Inter"/>
+                <a:sym typeface="Inter"/>
+              </a:rPr>
+              <a:t> </a:t>
+            </a:r>
+            <a:r>
+              <a:rPr lang="en-US" sz="1350" b="0" i="0" u="none" strike="noStrike" cap="none" dirty="0">
+                <a:solidFill>
+                  <a:schemeClr val="bg1">
+                    <a:lumMod val="85000"/>
+                  </a:schemeClr>
+                </a:solidFill>
+                <a:latin typeface="Inter"/>
+                <a:ea typeface="Inter"/>
+                <a:cs typeface="Inter"/>
+                <a:sym typeface="Inter"/>
+              </a:rPr>
+              <a:t>77%</a:t>
+            </a:r>
+            <a:br>
+              <a:rPr lang="en-US" sz="1800" b="0" i="0" u="none" strike="noStrike" cap="none" dirty="0">
+                <a:solidFill>
+                  <a:schemeClr val="dk1"/>
+                </a:solidFill>
+                <a:latin typeface="Calibri"/>
+                <a:ea typeface="Calibri"/>
+                <a:cs typeface="Calibri"/>
+                <a:sym typeface="Calibri"/>
+              </a:rPr>
+            </a:br>
+            <a:r>
+              <a:rPr lang="en-US" sz="1350" b="1" i="0" u="none" strike="noStrike" cap="none" dirty="0">
+                <a:solidFill>
+                  <a:schemeClr val="bg2">
+                    <a:lumMod val="20000"/>
+                    <a:lumOff val="80000"/>
+                  </a:schemeClr>
+                </a:solidFill>
+                <a:latin typeface="Inter"/>
+                <a:ea typeface="Inter"/>
+                <a:cs typeface="Inter"/>
+                <a:sym typeface="Inter"/>
+              </a:rPr>
+              <a:t>F1-Score:</a:t>
+            </a:r>
+            <a:r>
+              <a:rPr lang="en-US" sz="1350" b="0" i="0" u="none" strike="noStrike" cap="none" dirty="0">
+                <a:solidFill>
+                  <a:schemeClr val="bg2">
+                    <a:lumMod val="20000"/>
+                    <a:lumOff val="80000"/>
+                  </a:schemeClr>
+                </a:solidFill>
+                <a:latin typeface="Inter"/>
+                <a:ea typeface="Inter"/>
+                <a:cs typeface="Inter"/>
+                <a:sym typeface="Inter"/>
+              </a:rPr>
+              <a:t> </a:t>
+            </a:r>
+            <a:r>
+              <a:rPr lang="en-US" sz="1350" b="0" i="0" u="none" strike="noStrike" cap="none" dirty="0">
+                <a:solidFill>
+                  <a:schemeClr val="bg1">
+                    <a:lumMod val="85000"/>
+                  </a:schemeClr>
+                </a:solidFill>
+                <a:latin typeface="Inter"/>
+                <a:ea typeface="Inter"/>
+                <a:cs typeface="Inter"/>
+                <a:sym typeface="Inter"/>
+              </a:rPr>
+              <a:t>76%</a:t>
+            </a:r>
+          </a:p>
+          <a:p>
+            <a:pPr marL="0" marR="0" lvl="0" indent="0" algn="l" rtl="0">
+              <a:lnSpc>
+                <a:spcPct val="120000"/>
+              </a:lnSpc>
+              <a:spcBef>
+                <a:spcPts val="0"/>
+              </a:spcBef>
+              <a:spcAft>
+                <a:spcPts val="0"/>
+              </a:spcAft>
+              <a:buNone/>
+            </a:pPr>
+            <a:r>
+              <a:rPr lang="en-US" sz="1350" b="1" dirty="0">
+                <a:solidFill>
+                  <a:schemeClr val="bg2">
+                    <a:lumMod val="20000"/>
+                    <a:lumOff val="80000"/>
+                  </a:schemeClr>
+                </a:solidFill>
+                <a:latin typeface="Inter"/>
+                <a:ea typeface="Inter"/>
+                <a:sym typeface="Inter"/>
+              </a:rPr>
+              <a:t>Distribuzione Classi: </a:t>
+            </a:r>
+            <a:r>
+              <a:rPr lang="en-US" sz="1350" dirty="0">
+                <a:solidFill>
+                  <a:schemeClr val="bg1">
+                    <a:lumMod val="85000"/>
+                  </a:schemeClr>
+                </a:solidFill>
+                <a:latin typeface="Inter"/>
+                <a:ea typeface="Inter"/>
+                <a:sym typeface="Inter"/>
+              </a:rPr>
+              <a:t>328 Stress</a:t>
+            </a:r>
+            <a:endParaRPr dirty="0">
+              <a:solidFill>
+                <a:schemeClr val="bg1">
+                  <a:lumMod val="85000"/>
+                </a:schemeClr>
+              </a:solidFill>
+            </a:endParaRPr>
+          </a:p>
+        </p:txBody>
+      </p:sp>
+      <p:sp>
+        <p:nvSpPr>
+          <p:cNvPr id="246" name="Google Shape;246;p23"/>
+          <p:cNvSpPr txBox="1"/>
+          <p:nvPr/>
+        </p:nvSpPr>
+        <p:spPr>
+          <a:xfrm>
+            <a:off x="571500" y="571500"/>
+            <a:ext cx="10355118" cy="461665"/>
+          </a:xfrm>
+          <a:prstGeom prst="rect">
+            <a:avLst/>
+          </a:prstGeom>
+          <a:noFill/>
+          <a:ln>
+            <a:noFill/>
+          </a:ln>
+        </p:spPr>
+        <p:txBody>
+          <a:bodyPr spcFirstLastPara="1" wrap="square" lIns="0" tIns="0" rIns="0" bIns="0" anchor="t" anchorCtr="0">
+            <a:spAutoFit/>
+          </a:bodyPr>
+          <a:lstStyle/>
+          <a:p>
+            <a:pPr marL="0" marR="0" lvl="0" indent="0" algn="l" rtl="0">
+              <a:spcBef>
+                <a:spcPts val="0"/>
+              </a:spcBef>
+              <a:spcAft>
+                <a:spcPts val="0"/>
+              </a:spcAft>
+              <a:buNone/>
+            </a:pPr>
+            <a:r>
+              <a:rPr lang="en-US" sz="3000" b="0" i="0" u="none" strike="noStrike" cap="none" dirty="0" err="1">
+                <a:solidFill>
+                  <a:schemeClr val="bg1"/>
+                </a:solidFill>
+                <a:latin typeface="Poppins SemiBold"/>
+                <a:ea typeface="Poppins SemiBold"/>
+                <a:cs typeface="Poppins SemiBold"/>
+                <a:sym typeface="Poppins SemiBold"/>
+              </a:rPr>
+              <a:t>Metriche</a:t>
+            </a:r>
+            <a:r>
+              <a:rPr lang="en-US" sz="3000" b="0" i="0" u="none" strike="noStrike" cap="none" dirty="0">
+                <a:solidFill>
+                  <a:schemeClr val="bg1"/>
+                </a:solidFill>
+                <a:latin typeface="Poppins SemiBold"/>
+                <a:ea typeface="Poppins SemiBold"/>
+                <a:cs typeface="Poppins SemiBold"/>
+                <a:sym typeface="Poppins SemiBold"/>
+              </a:rPr>
+              <a:t>: </a:t>
+            </a:r>
+            <a:r>
+              <a:rPr lang="en-US" sz="3000" b="0" i="0" u="none" strike="noStrike" cap="none" dirty="0" err="1">
+                <a:solidFill>
+                  <a:schemeClr val="bg1"/>
+                </a:solidFill>
+                <a:latin typeface="Poppins SemiBold"/>
+                <a:ea typeface="Poppins SemiBold"/>
+                <a:cs typeface="Poppins SemiBold"/>
+                <a:sym typeface="Poppins SemiBold"/>
+              </a:rPr>
+              <a:t>Modello</a:t>
+            </a:r>
+            <a:r>
+              <a:rPr lang="en-US" sz="3000" b="0" i="0" u="none" strike="noStrike" cap="none" dirty="0">
+                <a:solidFill>
+                  <a:schemeClr val="bg1"/>
+                </a:solidFill>
+                <a:latin typeface="Poppins SemiBold"/>
+                <a:ea typeface="Poppins SemiBold"/>
+                <a:cs typeface="Poppins SemiBold"/>
+                <a:sym typeface="Poppins SemiBold"/>
+              </a:rPr>
+              <a:t> Migliore (Random Forest)</a:t>
+            </a:r>
+            <a:endParaRPr dirty="0">
+              <a:solidFill>
+                <a:schemeClr val="bg1"/>
+              </a:solidFill>
+            </a:endParaRPr>
+          </a:p>
+        </p:txBody>
+      </p:sp>
+      <p:sp>
+        <p:nvSpPr>
+          <p:cNvPr id="9" name="Google Shape;242;p23">
+            <a:extLst>
+              <a:ext uri="{FF2B5EF4-FFF2-40B4-BE49-F238E27FC236}">
+                <a16:creationId xmlns:a16="http://schemas.microsoft.com/office/drawing/2014/main" id="{8D221085-EB71-B68E-BE83-DE8E04837C15}"/>
+              </a:ext>
+            </a:extLst>
+          </p:cNvPr>
+          <p:cNvSpPr txBox="1"/>
+          <p:nvPr/>
+        </p:nvSpPr>
+        <p:spPr>
+          <a:xfrm>
+            <a:off x="414241" y="4496636"/>
+            <a:ext cx="2290257" cy="323165"/>
+          </a:xfrm>
+          <a:prstGeom prst="rect">
+            <a:avLst/>
+          </a:prstGeom>
+          <a:noFill/>
+          <a:ln>
+            <a:noFill/>
+          </a:ln>
+        </p:spPr>
+        <p:txBody>
+          <a:bodyPr spcFirstLastPara="1" wrap="square" lIns="0" tIns="0" rIns="0" bIns="0" anchor="t" anchorCtr="0">
+            <a:spAutoFit/>
+          </a:bodyPr>
+          <a:lstStyle/>
+          <a:p>
+            <a:pPr marL="0" marR="0" lvl="0" indent="0" algn="l" rtl="0">
+              <a:spcBef>
+                <a:spcPts val="0"/>
+              </a:spcBef>
+              <a:spcAft>
+                <a:spcPts val="0"/>
+              </a:spcAft>
+              <a:buNone/>
+            </a:pPr>
+            <a:r>
+              <a:rPr lang="en-US" sz="2100" dirty="0" err="1">
+                <a:solidFill>
+                  <a:srgbClr val="38BDF8"/>
+                </a:solidFill>
+                <a:latin typeface="Poppins Medium"/>
+                <a:cs typeface="Poppins Medium"/>
+                <a:sym typeface="Poppins Medium"/>
+              </a:rPr>
+              <a:t>Riposo</a:t>
+            </a:r>
+            <a:r>
+              <a:rPr lang="en-US" sz="2100" dirty="0">
+                <a:solidFill>
+                  <a:srgbClr val="38BDF8"/>
+                </a:solidFill>
+                <a:latin typeface="Poppins Medium"/>
+                <a:cs typeface="Poppins Medium"/>
+                <a:sym typeface="Poppins Medium"/>
+              </a:rPr>
+              <a:t> (Rest)</a:t>
+            </a:r>
+            <a:endParaRPr dirty="0"/>
+          </a:p>
+        </p:txBody>
+      </p:sp>
+      <p:sp>
+        <p:nvSpPr>
+          <p:cNvPr id="10" name="Google Shape;244;p23">
+            <a:extLst>
+              <a:ext uri="{FF2B5EF4-FFF2-40B4-BE49-F238E27FC236}">
+                <a16:creationId xmlns:a16="http://schemas.microsoft.com/office/drawing/2014/main" id="{8853605B-17C0-B565-2331-A581F3F04510}"/>
+              </a:ext>
+            </a:extLst>
+          </p:cNvPr>
+          <p:cNvSpPr txBox="1"/>
+          <p:nvPr/>
+        </p:nvSpPr>
+        <p:spPr>
+          <a:xfrm>
+            <a:off x="414241" y="5006184"/>
+            <a:ext cx="2918329" cy="1006429"/>
+          </a:xfrm>
+          <a:prstGeom prst="rect">
+            <a:avLst/>
+          </a:prstGeom>
+          <a:noFill/>
+          <a:ln>
+            <a:noFill/>
+          </a:ln>
+        </p:spPr>
+        <p:txBody>
+          <a:bodyPr spcFirstLastPara="1" wrap="square" lIns="0" tIns="0" rIns="0" bIns="0" anchor="t" anchorCtr="0">
+            <a:spAutoFit/>
+          </a:bodyPr>
+          <a:lstStyle/>
+          <a:p>
+            <a:pPr marL="0" marR="0" lvl="0" indent="0" algn="l" rtl="0">
+              <a:lnSpc>
+                <a:spcPct val="120000"/>
+              </a:lnSpc>
+              <a:spcBef>
+                <a:spcPts val="0"/>
+              </a:spcBef>
+              <a:spcAft>
+                <a:spcPts val="0"/>
+              </a:spcAft>
+              <a:buNone/>
+            </a:pPr>
+            <a:r>
+              <a:rPr lang="en-US" sz="1350" b="1" i="0" u="none" strike="noStrike" cap="none" dirty="0" err="1">
+                <a:solidFill>
+                  <a:schemeClr val="bg2">
+                    <a:lumMod val="20000"/>
+                    <a:lumOff val="80000"/>
+                  </a:schemeClr>
+                </a:solidFill>
+                <a:latin typeface="Inter"/>
+                <a:ea typeface="Inter"/>
+                <a:cs typeface="Inter"/>
+                <a:sym typeface="Inter"/>
+              </a:rPr>
+              <a:t>Precisione</a:t>
+            </a:r>
+            <a:r>
+              <a:rPr lang="en-US" sz="1350" b="1" i="0" u="none" strike="noStrike" cap="none" dirty="0">
+                <a:solidFill>
+                  <a:schemeClr val="bg2">
+                    <a:lumMod val="20000"/>
+                    <a:lumOff val="80000"/>
+                  </a:schemeClr>
+                </a:solidFill>
+                <a:latin typeface="Inter"/>
+                <a:ea typeface="Inter"/>
+                <a:cs typeface="Inter"/>
+                <a:sym typeface="Inter"/>
+              </a:rPr>
+              <a:t>:</a:t>
+            </a:r>
+            <a:r>
+              <a:rPr lang="en-US" sz="1350" b="0" i="0" u="none" strike="noStrike" cap="none" dirty="0">
+                <a:solidFill>
+                  <a:schemeClr val="bg2">
+                    <a:lumMod val="20000"/>
+                    <a:lumOff val="80000"/>
+                  </a:schemeClr>
+                </a:solidFill>
+                <a:latin typeface="Inter"/>
+                <a:ea typeface="Inter"/>
+                <a:cs typeface="Inter"/>
+                <a:sym typeface="Inter"/>
+              </a:rPr>
+              <a:t> </a:t>
+            </a:r>
+            <a:r>
+              <a:rPr lang="en-US" sz="1350" b="0" i="0" u="none" strike="noStrike" cap="none" dirty="0">
+                <a:solidFill>
+                  <a:schemeClr val="bg1">
+                    <a:lumMod val="85000"/>
+                  </a:schemeClr>
+                </a:solidFill>
+                <a:latin typeface="Inter"/>
+                <a:ea typeface="Inter"/>
+                <a:cs typeface="Inter"/>
+                <a:sym typeface="Inter"/>
+              </a:rPr>
+              <a:t>70%</a:t>
+            </a:r>
+            <a:br>
+              <a:rPr lang="en-US" sz="1800" b="0" i="0" u="none" strike="noStrike" cap="none" dirty="0">
+                <a:solidFill>
+                  <a:schemeClr val="dk1"/>
+                </a:solidFill>
+                <a:latin typeface="Calibri"/>
+                <a:ea typeface="Calibri"/>
+                <a:cs typeface="Calibri"/>
+                <a:sym typeface="Calibri"/>
+              </a:rPr>
+            </a:br>
+            <a:r>
+              <a:rPr lang="en-US" sz="1350" b="1" i="0" u="none" strike="noStrike" cap="none" dirty="0">
+                <a:solidFill>
+                  <a:schemeClr val="bg2">
+                    <a:lumMod val="20000"/>
+                    <a:lumOff val="80000"/>
+                  </a:schemeClr>
+                </a:solidFill>
+                <a:latin typeface="Inter"/>
+                <a:ea typeface="Inter"/>
+                <a:cs typeface="Inter"/>
+                <a:sym typeface="Inter"/>
+              </a:rPr>
+              <a:t>Recall:</a:t>
+            </a:r>
+            <a:r>
+              <a:rPr lang="en-US" sz="1350" b="0" i="0" u="none" strike="noStrike" cap="none" dirty="0">
+                <a:solidFill>
+                  <a:schemeClr val="bg2">
+                    <a:lumMod val="20000"/>
+                    <a:lumOff val="80000"/>
+                  </a:schemeClr>
+                </a:solidFill>
+                <a:latin typeface="Inter"/>
+                <a:ea typeface="Inter"/>
+                <a:cs typeface="Inter"/>
+                <a:sym typeface="Inter"/>
+              </a:rPr>
+              <a:t> </a:t>
+            </a:r>
+            <a:r>
+              <a:rPr lang="en-US" sz="1350" dirty="0">
+                <a:solidFill>
+                  <a:schemeClr val="bg1">
+                    <a:lumMod val="85000"/>
+                  </a:schemeClr>
+                </a:solidFill>
+                <a:latin typeface="Inter"/>
+                <a:ea typeface="Inter"/>
+                <a:cs typeface="Inter"/>
+                <a:sym typeface="Inter"/>
+              </a:rPr>
+              <a:t>68</a:t>
+            </a:r>
+            <a:r>
+              <a:rPr lang="en-US" sz="1350" b="0" i="0" u="none" strike="noStrike" cap="none" dirty="0">
+                <a:solidFill>
+                  <a:schemeClr val="bg1">
+                    <a:lumMod val="85000"/>
+                  </a:schemeClr>
+                </a:solidFill>
+                <a:latin typeface="Inter"/>
+                <a:ea typeface="Inter"/>
+                <a:cs typeface="Inter"/>
+                <a:sym typeface="Inter"/>
+              </a:rPr>
+              <a:t>%</a:t>
+            </a:r>
+            <a:br>
+              <a:rPr lang="en-US" sz="1800" b="0" i="0" u="none" strike="noStrike" cap="none" dirty="0">
+                <a:solidFill>
+                  <a:schemeClr val="dk1"/>
+                </a:solidFill>
+                <a:latin typeface="Calibri"/>
+                <a:ea typeface="Calibri"/>
+                <a:cs typeface="Calibri"/>
+                <a:sym typeface="Calibri"/>
+              </a:rPr>
+            </a:br>
+            <a:r>
+              <a:rPr lang="en-US" sz="1350" b="1" i="0" u="none" strike="noStrike" cap="none" dirty="0">
+                <a:solidFill>
+                  <a:schemeClr val="bg2">
+                    <a:lumMod val="20000"/>
+                    <a:lumOff val="80000"/>
+                  </a:schemeClr>
+                </a:solidFill>
+                <a:latin typeface="Inter"/>
+                <a:ea typeface="Inter"/>
+                <a:cs typeface="Inter"/>
+                <a:sym typeface="Inter"/>
+              </a:rPr>
+              <a:t>F1-Score:</a:t>
+            </a:r>
+            <a:r>
+              <a:rPr lang="en-US" sz="1350" b="0" i="0" u="none" strike="noStrike" cap="none" dirty="0">
+                <a:solidFill>
+                  <a:schemeClr val="bg2">
+                    <a:lumMod val="20000"/>
+                    <a:lumOff val="80000"/>
+                  </a:schemeClr>
+                </a:solidFill>
+                <a:latin typeface="Inter"/>
+                <a:ea typeface="Inter"/>
+                <a:cs typeface="Inter"/>
+                <a:sym typeface="Inter"/>
+              </a:rPr>
+              <a:t> </a:t>
+            </a:r>
+            <a:r>
+              <a:rPr lang="en-US" sz="1350" dirty="0">
+                <a:solidFill>
+                  <a:schemeClr val="bg1">
+                    <a:lumMod val="85000"/>
+                  </a:schemeClr>
+                </a:solidFill>
+                <a:latin typeface="Inter"/>
+                <a:ea typeface="Inter"/>
+                <a:cs typeface="Inter"/>
+                <a:sym typeface="Inter"/>
+              </a:rPr>
+              <a:t>69</a:t>
+            </a:r>
+            <a:r>
+              <a:rPr lang="en-US" sz="1350" b="0" i="0" u="none" strike="noStrike" cap="none" dirty="0">
+                <a:solidFill>
+                  <a:schemeClr val="bg1">
+                    <a:lumMod val="85000"/>
+                  </a:schemeClr>
+                </a:solidFill>
+                <a:latin typeface="Inter"/>
+                <a:ea typeface="Inter"/>
+                <a:cs typeface="Inter"/>
+                <a:sym typeface="Inter"/>
+              </a:rPr>
+              <a:t>%</a:t>
+            </a:r>
+          </a:p>
+          <a:p>
+            <a:pPr marL="0" marR="0" lvl="0" indent="0" algn="l" rtl="0">
+              <a:lnSpc>
+                <a:spcPct val="120000"/>
+              </a:lnSpc>
+              <a:spcBef>
+                <a:spcPts val="0"/>
+              </a:spcBef>
+              <a:spcAft>
+                <a:spcPts val="0"/>
+              </a:spcAft>
+              <a:buNone/>
+            </a:pPr>
+            <a:r>
+              <a:rPr lang="en-US" sz="1350" b="1" dirty="0">
+                <a:solidFill>
+                  <a:schemeClr val="bg2">
+                    <a:lumMod val="20000"/>
+                    <a:lumOff val="80000"/>
+                  </a:schemeClr>
+                </a:solidFill>
+                <a:latin typeface="Inter"/>
+                <a:ea typeface="Inter"/>
+                <a:sym typeface="Inter"/>
+              </a:rPr>
+              <a:t>Distribuzione Classi: </a:t>
+            </a:r>
+            <a:r>
+              <a:rPr lang="en-US" sz="1350" dirty="0">
+                <a:solidFill>
+                  <a:schemeClr val="bg1">
+                    <a:lumMod val="85000"/>
+                  </a:schemeClr>
+                </a:solidFill>
+                <a:latin typeface="Inter"/>
+                <a:ea typeface="Inter"/>
+                <a:sym typeface="Inter"/>
+              </a:rPr>
+              <a:t>267 Rest</a:t>
+            </a:r>
+            <a:endParaRPr dirty="0">
+              <a:solidFill>
+                <a:schemeClr val="bg1">
+                  <a:lumMod val="85000"/>
+                </a:schemeClr>
+              </a:solidFill>
+            </a:endParaRPr>
+          </a:p>
+        </p:txBody>
+      </p:sp>
+      <p:sp>
+        <p:nvSpPr>
+          <p:cNvPr id="13" name="Google Shape;94;p14">
+            <a:extLst>
+              <a:ext uri="{FF2B5EF4-FFF2-40B4-BE49-F238E27FC236}">
+                <a16:creationId xmlns:a16="http://schemas.microsoft.com/office/drawing/2014/main" id="{F00436ED-F9F7-92E9-71BE-2791417FA0BA}"/>
+              </a:ext>
+            </a:extLst>
+          </p:cNvPr>
+          <p:cNvSpPr txBox="1"/>
+          <p:nvPr/>
+        </p:nvSpPr>
+        <p:spPr>
+          <a:xfrm>
+            <a:off x="571499" y="1080720"/>
+            <a:ext cx="8738755" cy="332399"/>
+          </a:xfrm>
+          <a:prstGeom prst="rect">
+            <a:avLst/>
+          </a:prstGeom>
+          <a:noFill/>
+          <a:ln>
+            <a:noFill/>
+          </a:ln>
+        </p:spPr>
+        <p:txBody>
+          <a:bodyPr spcFirstLastPara="1" wrap="square" lIns="0" tIns="0" rIns="0" bIns="0" anchor="t" anchorCtr="0">
+            <a:spAutoFit/>
+          </a:bodyPr>
+          <a:lstStyle/>
+          <a:p>
+            <a:pPr marL="0" marR="0" lvl="0" indent="0" algn="l" rtl="0">
+              <a:lnSpc>
+                <a:spcPct val="160000"/>
+              </a:lnSpc>
+              <a:spcBef>
+                <a:spcPts val="0"/>
+              </a:spcBef>
+              <a:spcAft>
+                <a:spcPts val="0"/>
+              </a:spcAft>
+              <a:buNone/>
+            </a:pPr>
+            <a:r>
+              <a:rPr lang="it-IT" sz="1350" b="0" i="0" u="none" strike="noStrike" cap="none" dirty="0">
+                <a:solidFill>
+                  <a:srgbClr val="CBD5E1"/>
+                </a:solidFill>
+                <a:latin typeface="Inter"/>
+                <a:ea typeface="Inter"/>
+                <a:cs typeface="Inter"/>
+                <a:sym typeface="Inter"/>
+              </a:rPr>
+              <a:t>Random Forest con 50 </a:t>
+            </a:r>
+            <a:r>
+              <a:rPr lang="it-IT" sz="1350" dirty="0" err="1">
+                <a:solidFill>
+                  <a:srgbClr val="CBD5E1"/>
+                </a:solidFill>
+                <a:latin typeface="Inter"/>
+                <a:ea typeface="Inter"/>
+                <a:cs typeface="Inter"/>
+                <a:sym typeface="Inter"/>
+              </a:rPr>
+              <a:t>L</a:t>
+            </a:r>
+            <a:r>
+              <a:rPr lang="it-IT" sz="1350" b="0" i="0" u="none" strike="noStrike" cap="none" dirty="0" err="1">
+                <a:solidFill>
+                  <a:srgbClr val="CBD5E1"/>
+                </a:solidFill>
+                <a:latin typeface="Inter"/>
+                <a:ea typeface="Inter"/>
+                <a:cs typeface="Inter"/>
+                <a:sym typeface="Inter"/>
+              </a:rPr>
+              <a:t>earners</a:t>
+            </a:r>
+            <a:r>
+              <a:rPr lang="it-IT" sz="1350" b="0" i="0" u="none" strike="noStrike" cap="none" dirty="0">
+                <a:solidFill>
+                  <a:srgbClr val="CBD5E1"/>
+                </a:solidFill>
+                <a:latin typeface="Inter"/>
+                <a:ea typeface="Inter"/>
+                <a:cs typeface="Inter"/>
+                <a:sym typeface="Inter"/>
+              </a:rPr>
+              <a:t> e 1000 </a:t>
+            </a:r>
+            <a:r>
+              <a:rPr lang="it-IT" sz="1350" b="0" i="0" u="none" strike="noStrike" cap="none" dirty="0" err="1">
+                <a:solidFill>
+                  <a:srgbClr val="CBD5E1"/>
+                </a:solidFill>
+                <a:latin typeface="Inter"/>
+                <a:ea typeface="Inter"/>
+                <a:cs typeface="Inter"/>
+                <a:sym typeface="Inter"/>
+              </a:rPr>
+              <a:t>Splits</a:t>
+            </a:r>
+            <a:r>
+              <a:rPr lang="it-IT" sz="1350" b="0" i="0" u="none" strike="noStrike" cap="none" dirty="0">
+                <a:solidFill>
+                  <a:srgbClr val="CBD5E1"/>
+                </a:solidFill>
+                <a:latin typeface="Inter"/>
+                <a:ea typeface="Inter"/>
+                <a:cs typeface="Inter"/>
+                <a:sym typeface="Inter"/>
+              </a:rPr>
+              <a:t> </a:t>
+            </a:r>
+            <a:endParaRPr lang="it-IT" dirty="0"/>
+          </a:p>
+        </p:txBody>
+      </p:sp>
+      <p:pic>
+        <p:nvPicPr>
+          <p:cNvPr id="3" name="Immagine 2">
+            <a:extLst>
+              <a:ext uri="{FF2B5EF4-FFF2-40B4-BE49-F238E27FC236}">
+                <a16:creationId xmlns:a16="http://schemas.microsoft.com/office/drawing/2014/main" id="{D57B7CE6-F65C-AFC9-4F93-E6FF782F9887}"/>
+              </a:ext>
+            </a:extLst>
+          </p:cNvPr>
+          <p:cNvPicPr>
+            <a:picLocks noChangeAspect="1"/>
+          </p:cNvPicPr>
+          <p:nvPr/>
+        </p:nvPicPr>
+        <p:blipFill>
+          <a:blip r:embed="rId4"/>
+          <a:stretch>
+            <a:fillRect/>
+          </a:stretch>
+        </p:blipFill>
+        <p:spPr>
+          <a:xfrm>
+            <a:off x="6577917" y="1829915"/>
+            <a:ext cx="4973124" cy="3306969"/>
+          </a:xfrm>
+          <a:prstGeom prst="roundRect">
+            <a:avLst>
+              <a:gd name="adj" fmla="val 8594"/>
+            </a:avLst>
+          </a:prstGeom>
+          <a:solidFill>
+            <a:srgbClr val="FFFFFF">
+              <a:shade val="85000"/>
+            </a:srgbClr>
+          </a:solidFill>
+          <a:ln>
+            <a:noFill/>
+          </a:ln>
+          <a:effectLst>
+            <a:reflection blurRad="12700" stA="38000" endPos="28000" dist="5000" dir="5400000" sy="-100000" algn="bl" rotWithShape="0"/>
+          </a:effectLst>
+        </p:spPr>
+      </p:pic>
+    </p:spTree>
+  </p:cSld>
+  <p:clrMapOvr>
+    <a:masterClrMapping/>
+  </p:clrMapOvr>
+</p:sld>
+</file>
+
+<file path=ppt/slides/slide12.xml><?xml version="1.0" encoding="utf-8"?>
+<p:sld xmlns:a="http://schemas.openxmlformats.org/drawingml/2006/main" xmlns:r="http://schemas.openxmlformats.org/officeDocument/2006/relationships" xmlns:p="http://schemas.openxmlformats.org/presentationml/2006/main">
+  <p:cSld>
+    <p:bg>
+      <p:bgPr>
+        <a:solidFill>
+          <a:srgbClr val="111827"/>
+        </a:solidFill>
+        <a:effectLst/>
+      </p:bgPr>
+    </p:bg>
+    <p:spTree>
+      <p:nvGrpSpPr>
         <p:cNvPr id="1" name="Shape 269"/>
         <p:cNvGrpSpPr/>
         <p:nvPr/>
@@ -20518,14 +22758,14 @@
           <p:nvPr>
             <p:extLst>
               <p:ext uri="{D42A27DB-BD31-4B8C-83A1-F6EECF244321}">
-                <p14:modId xmlns:p14="http://schemas.microsoft.com/office/powerpoint/2010/main" val="3886053098"/>
+                <p14:modId xmlns:p14="http://schemas.microsoft.com/office/powerpoint/2010/main" val="3942614331"/>
               </p:ext>
             </p:extLst>
           </p:nvPr>
         </p:nvGraphicFramePr>
         <p:xfrm>
-          <a:off x="571465" y="1955046"/>
-          <a:ext cx="11140244" cy="3981073"/>
+          <a:off x="525878" y="1565970"/>
+          <a:ext cx="11140244" cy="4651785"/>
         </p:xfrm>
         <a:graphic>
           <a:graphicData uri="http://schemas.openxmlformats.org/drawingml/2006/table">
@@ -21201,6 +23441,9 @@
                     <a:lnT>
                       <a:noFill/>
                     </a:lnT>
+                    <a:lnB>
+                      <a:noFill/>
+                    </a:lnB>
                     <a:solidFill>
                       <a:schemeClr val="bg2">
                         <a:lumMod val="75000"/>
@@ -21213,7 +23456,7 @@
                     <a:bodyPr/>
                     <a:lstStyle/>
                     <a:p>
-                      <a:endParaRPr lang="it-IT">
+                      <a:endParaRPr lang="it-IT" dirty="0">
                         <a:solidFill>
                           <a:schemeClr val="accent1">
                             <a:lumMod val="20000"/>
@@ -21286,6 +23529,144 @@
                   </a:ext>
                 </a:extLst>
               </a:tr>
+              <a:tr h="670712">
+                <a:tc>
+                  <a:txBody>
+                    <a:bodyPr/>
+                    <a:lstStyle/>
+                    <a:p>
+                      <a:r>
+                        <a:rPr lang="it-IT" b="1" dirty="0" err="1">
+                          <a:solidFill>
+                            <a:schemeClr val="accent1">
+                              <a:lumMod val="20000"/>
+                              <a:lumOff val="80000"/>
+                            </a:schemeClr>
+                          </a:solidFill>
+                        </a:rPr>
+                        <a:t>Logistic</a:t>
+                      </a:r>
+                      <a:r>
+                        <a:rPr lang="it-IT" b="1" dirty="0">
+                          <a:solidFill>
+                            <a:schemeClr val="accent1">
+                              <a:lumMod val="20000"/>
+                              <a:lumOff val="80000"/>
+                            </a:schemeClr>
+                          </a:solidFill>
+                        </a:rPr>
+                        <a:t> </a:t>
+                      </a:r>
+                      <a:r>
+                        <a:rPr lang="it-IT" b="1" dirty="0" err="1">
+                          <a:solidFill>
+                            <a:schemeClr val="accent1">
+                              <a:lumMod val="20000"/>
+                              <a:lumOff val="80000"/>
+                            </a:schemeClr>
+                          </a:solidFill>
+                        </a:rPr>
+                        <a:t>Regression</a:t>
+                      </a:r>
+                      <a:endParaRPr lang="it-IT" b="1" dirty="0">
+                        <a:solidFill>
+                          <a:schemeClr val="accent1">
+                            <a:lumMod val="20000"/>
+                            <a:lumOff val="80000"/>
+                          </a:schemeClr>
+                        </a:solidFill>
+                      </a:endParaRPr>
+                    </a:p>
+                  </a:txBody>
+                  <a:tcPr anchor="ctr">
+                    <a:lnT>
+                      <a:noFill/>
+                    </a:lnT>
+                    <a:solidFill>
+                      <a:schemeClr val="bg2">
+                        <a:lumMod val="75000"/>
+                      </a:schemeClr>
+                    </a:solidFill>
+                  </a:tcPr>
+                </a:tc>
+                <a:tc>
+                  <a:txBody>
+                    <a:bodyPr/>
+                    <a:lstStyle/>
+                    <a:p>
+                      <a:endParaRPr lang="it-IT" dirty="0">
+                        <a:solidFill>
+                          <a:schemeClr val="accent1">
+                            <a:lumMod val="20000"/>
+                            <a:lumOff val="80000"/>
+                          </a:schemeClr>
+                        </a:solidFill>
+                      </a:endParaRPr>
+                    </a:p>
+                  </a:txBody>
+                  <a:tcPr anchor="ctr">
+                    <a:solidFill>
+                      <a:schemeClr val="bg2">
+                        <a:lumMod val="75000"/>
+                      </a:schemeClr>
+                    </a:solidFill>
+                  </a:tcPr>
+                </a:tc>
+                <a:tc>
+                  <a:txBody>
+                    <a:bodyPr/>
+                    <a:lstStyle/>
+                    <a:p>
+                      <a:endParaRPr lang="it-IT" dirty="0">
+                        <a:solidFill>
+                          <a:schemeClr val="accent1">
+                            <a:lumMod val="20000"/>
+                            <a:lumOff val="80000"/>
+                          </a:schemeClr>
+                        </a:solidFill>
+                      </a:endParaRPr>
+                    </a:p>
+                  </a:txBody>
+                  <a:tcPr anchor="ctr">
+                    <a:solidFill>
+                      <a:schemeClr val="bg2">
+                        <a:lumMod val="75000"/>
+                      </a:schemeClr>
+                    </a:solidFill>
+                  </a:tcPr>
+                </a:tc>
+                <a:tc>
+                  <a:txBody>
+                    <a:bodyPr/>
+                    <a:lstStyle/>
+                    <a:p>
+                      <a:r>
+                        <a:rPr lang="it-IT" dirty="0">
+                          <a:solidFill>
+                            <a:schemeClr val="accent1">
+                              <a:lumMod val="20000"/>
+                              <a:lumOff val="80000"/>
+                            </a:schemeClr>
+                          </a:solidFill>
+                        </a:rPr>
+                        <a:t>70.42%</a:t>
+                      </a:r>
+                    </a:p>
+                  </a:txBody>
+                  <a:tcPr anchor="ctr">
+                    <a:solidFill>
+                      <a:schemeClr val="bg2">
+                        <a:lumMod val="75000"/>
+                      </a:schemeClr>
+                    </a:solidFill>
+                  </a:tcPr>
+                </a:tc>
+                <a:extLst>
+                  <a:ext uri="{0D108BD9-81ED-4DB2-BD59-A6C34878D82A}">
+                    <a16:rowId xmlns:a16="http://schemas.microsoft.com/office/drawing/2014/main" val="2433105071"/>
+                  </a:ext>
+                </a:extLst>
+              </a:tr>
             </a:tbl>
           </a:graphicData>
         </a:graphic>
@@ -21311,7 +23692,13 @@
     </p:bg>
     <p:spTree>
       <p:nvGrpSpPr>
-        <p:cNvPr id="1" name="Shape 238"/>
+        <p:cNvPr id="1" name="Shape 238">
+          <a:extLst>
+            <a:ext uri="{FF2B5EF4-FFF2-40B4-BE49-F238E27FC236}">
+              <a16:creationId xmlns:a16="http://schemas.microsoft.com/office/drawing/2014/main" id="{0195A18D-63AD-EC9E-E574-F7089924A688}"/>
+            </a:ext>
+          </a:extLst>
+        </p:cNvPr>
         <p:cNvGrpSpPr/>
         <p:nvPr/>
       </p:nvGrpSpPr>
@@ -21325,7 +23712,13 @@
       </p:grpSpPr>
       <p:pic>
         <p:nvPicPr>
-          <p:cNvPr id="239" name="Google Shape;239;p23" descr="image.png"/>
+          <p:cNvPr id="239" name="Google Shape;239;p23" descr="image.png">
+            <a:extLst>
+              <a:ext uri="{FF2B5EF4-FFF2-40B4-BE49-F238E27FC236}">
+                <a16:creationId xmlns:a16="http://schemas.microsoft.com/office/drawing/2014/main" id="{20B13576-44AF-AC41-937A-85E71A40E2EB}"/>
+              </a:ext>
+            </a:extLst>
+          </p:cNvPr>
           <p:cNvPicPr preferRelativeResize="0"/>
           <p:nvPr/>
         </p:nvPicPr>
@@ -21352,438 +23745,13 @@
       </p:pic>
       <p:sp>
         <p:nvSpPr>
-          <p:cNvPr id="240" name="Google Shape;240;p23"/>
-          <p:cNvSpPr txBox="1"/>
-          <p:nvPr/>
-        </p:nvSpPr>
-        <p:spPr>
-          <a:xfrm>
-            <a:off x="3562638" y="1792026"/>
-            <a:ext cx="5286375" cy="1615827"/>
-          </a:xfrm>
-          <a:prstGeom prst="rect">
-            <a:avLst/>
-          </a:prstGeom>
-          <a:noFill/>
-          <a:ln>
-            <a:noFill/>
-          </a:ln>
-        </p:spPr>
-        <p:txBody>
-          <a:bodyPr spcFirstLastPara="1" wrap="square" lIns="0" tIns="0" rIns="0" bIns="0" anchor="t" anchorCtr="0">
-            <a:spAutoFit/>
-          </a:bodyPr>
-          <a:lstStyle/>
-          <a:p>
-            <a:pPr marL="0" marR="0" lvl="0" indent="0" algn="ctr" rtl="0">
-              <a:lnSpc>
-                <a:spcPct val="100000"/>
-              </a:lnSpc>
-              <a:spcBef>
-                <a:spcPts val="0"/>
-              </a:spcBef>
-              <a:spcAft>
-                <a:spcPts val="0"/>
-              </a:spcAft>
-              <a:buNone/>
-            </a:pPr>
-            <a:r>
-              <a:rPr lang="en-US" sz="10500" b="1" i="0" u="none" strike="noStrike" cap="none" dirty="0">
-                <a:solidFill>
-                  <a:srgbClr val="38BDF8"/>
-                </a:solidFill>
-                <a:latin typeface="Poppins"/>
-                <a:ea typeface="Poppins"/>
-                <a:cs typeface="Poppins"/>
-                <a:sym typeface="Poppins"/>
-              </a:rPr>
-              <a:t>72.77%</a:t>
-            </a:r>
-            <a:endParaRPr dirty="0"/>
-          </a:p>
-        </p:txBody>
-      </p:sp>
-      <p:sp>
-        <p:nvSpPr>
-          <p:cNvPr id="241" name="Google Shape;241;p23"/>
-          <p:cNvSpPr txBox="1"/>
-          <p:nvPr/>
-        </p:nvSpPr>
-        <p:spPr>
-          <a:xfrm>
-            <a:off x="3489324" y="3186254"/>
-            <a:ext cx="5433002" cy="443198"/>
-          </a:xfrm>
-          <a:prstGeom prst="rect">
-            <a:avLst/>
-          </a:prstGeom>
-          <a:noFill/>
-          <a:ln>
-            <a:noFill/>
-          </a:ln>
-        </p:spPr>
-        <p:txBody>
-          <a:bodyPr spcFirstLastPara="1" wrap="square" lIns="0" tIns="0" rIns="0" bIns="0" anchor="t" anchorCtr="0">
-            <a:spAutoFit/>
-          </a:bodyPr>
-          <a:lstStyle/>
-          <a:p>
-            <a:pPr marL="0" marR="0" lvl="0" indent="0" algn="ctr" rtl="0">
-              <a:lnSpc>
-                <a:spcPct val="159944"/>
-              </a:lnSpc>
-              <a:spcBef>
-                <a:spcPts val="0"/>
-              </a:spcBef>
-              <a:spcAft>
-                <a:spcPts val="0"/>
-              </a:spcAft>
-              <a:buNone/>
-            </a:pPr>
-            <a:r>
-              <a:rPr lang="en-US" sz="1800" b="0" i="0" u="none" strike="noStrike" cap="none" dirty="0">
-                <a:solidFill>
-                  <a:schemeClr val="bg1"/>
-                </a:solidFill>
-                <a:latin typeface="Inter SemiBold"/>
-                <a:ea typeface="Inter SemiBold"/>
-                <a:cs typeface="Inter SemiBold"/>
-                <a:sym typeface="Inter SemiBold"/>
-              </a:rPr>
-              <a:t>ACCURATEZZA GLOBALE (Target Paper: 76.5%)</a:t>
-            </a:r>
-            <a:endParaRPr dirty="0">
-              <a:solidFill>
-                <a:schemeClr val="bg1"/>
-              </a:solidFill>
-            </a:endParaRPr>
-          </a:p>
-        </p:txBody>
-      </p:sp>
-      <p:sp>
-        <p:nvSpPr>
-          <p:cNvPr id="242" name="Google Shape;242;p23"/>
-          <p:cNvSpPr txBox="1"/>
-          <p:nvPr/>
-        </p:nvSpPr>
-        <p:spPr>
-          <a:xfrm>
-            <a:off x="7474999" y="4517906"/>
-            <a:ext cx="2290257" cy="323165"/>
-          </a:xfrm>
-          <a:prstGeom prst="rect">
-            <a:avLst/>
-          </a:prstGeom>
-          <a:noFill/>
-          <a:ln>
-            <a:noFill/>
-          </a:ln>
-        </p:spPr>
-        <p:txBody>
-          <a:bodyPr spcFirstLastPara="1" wrap="square" lIns="0" tIns="0" rIns="0" bIns="0" anchor="t" anchorCtr="0">
-            <a:spAutoFit/>
-          </a:bodyPr>
-          <a:lstStyle/>
-          <a:p>
-            <a:pPr marL="0" marR="0" lvl="0" indent="0" algn="l" rtl="0">
-              <a:spcBef>
-                <a:spcPts val="0"/>
-              </a:spcBef>
-              <a:spcAft>
-                <a:spcPts val="0"/>
-              </a:spcAft>
-              <a:buNone/>
-            </a:pPr>
-            <a:r>
-              <a:rPr lang="en-US" sz="2100" b="0" i="0" u="none" strike="noStrike" cap="none" dirty="0">
-                <a:solidFill>
-                  <a:srgbClr val="38BDF8"/>
-                </a:solidFill>
-                <a:latin typeface="Poppins Medium"/>
-                <a:ea typeface="Poppins Medium"/>
-                <a:cs typeface="Poppins Medium"/>
-                <a:sym typeface="Poppins Medium"/>
-              </a:rPr>
-              <a:t>Stress</a:t>
-            </a:r>
-            <a:endParaRPr dirty="0"/>
-          </a:p>
-        </p:txBody>
-      </p:sp>
-      <p:sp>
-        <p:nvSpPr>
-          <p:cNvPr id="244" name="Google Shape;244;p23"/>
-          <p:cNvSpPr txBox="1"/>
-          <p:nvPr/>
-        </p:nvSpPr>
-        <p:spPr>
-          <a:xfrm>
-            <a:off x="7474999" y="5027454"/>
-            <a:ext cx="2918329" cy="1006429"/>
-          </a:xfrm>
-          <a:prstGeom prst="rect">
-            <a:avLst/>
-          </a:prstGeom>
-          <a:noFill/>
-          <a:ln>
-            <a:noFill/>
-          </a:ln>
-        </p:spPr>
-        <p:txBody>
-          <a:bodyPr spcFirstLastPara="1" wrap="square" lIns="0" tIns="0" rIns="0" bIns="0" anchor="t" anchorCtr="0">
-            <a:spAutoFit/>
-          </a:bodyPr>
-          <a:lstStyle/>
-          <a:p>
-            <a:pPr marL="0" marR="0" lvl="0" indent="0" algn="l" rtl="0">
-              <a:lnSpc>
-                <a:spcPct val="120000"/>
-              </a:lnSpc>
-              <a:spcBef>
-                <a:spcPts val="0"/>
-              </a:spcBef>
-              <a:spcAft>
-                <a:spcPts val="0"/>
-              </a:spcAft>
-              <a:buNone/>
-            </a:pPr>
-            <a:r>
-              <a:rPr lang="en-US" sz="1350" b="1" i="0" u="none" strike="noStrike" cap="none" dirty="0" err="1">
-                <a:solidFill>
-                  <a:schemeClr val="bg2">
-                    <a:lumMod val="20000"/>
-                    <a:lumOff val="80000"/>
-                  </a:schemeClr>
-                </a:solidFill>
-                <a:latin typeface="Inter"/>
-                <a:ea typeface="Inter"/>
-                <a:cs typeface="Inter"/>
-                <a:sym typeface="Inter"/>
-              </a:rPr>
-              <a:t>Precisione</a:t>
-            </a:r>
-            <a:r>
-              <a:rPr lang="en-US" sz="1350" b="1" i="0" u="none" strike="noStrike" cap="none" dirty="0">
-                <a:solidFill>
-                  <a:schemeClr val="bg2">
-                    <a:lumMod val="20000"/>
-                    <a:lumOff val="80000"/>
-                  </a:schemeClr>
-                </a:solidFill>
-                <a:latin typeface="Inter"/>
-                <a:ea typeface="Inter"/>
-                <a:cs typeface="Inter"/>
-                <a:sym typeface="Inter"/>
-              </a:rPr>
-              <a:t>:</a:t>
-            </a:r>
-            <a:r>
-              <a:rPr lang="en-US" sz="1350" b="0" i="0" u="none" strike="noStrike" cap="none" dirty="0">
-                <a:solidFill>
-                  <a:schemeClr val="bg2">
-                    <a:lumMod val="20000"/>
-                    <a:lumOff val="80000"/>
-                  </a:schemeClr>
-                </a:solidFill>
-                <a:latin typeface="Inter"/>
-                <a:ea typeface="Inter"/>
-                <a:cs typeface="Inter"/>
-                <a:sym typeface="Inter"/>
-              </a:rPr>
-              <a:t> </a:t>
-            </a:r>
-            <a:r>
-              <a:rPr lang="en-US" sz="1350" dirty="0">
-                <a:solidFill>
-                  <a:schemeClr val="bg1">
-                    <a:lumMod val="85000"/>
-                  </a:schemeClr>
-                </a:solidFill>
-                <a:latin typeface="Inter"/>
-                <a:ea typeface="Inter"/>
-                <a:cs typeface="Inter"/>
-                <a:sym typeface="Inter"/>
-              </a:rPr>
-              <a:t>75</a:t>
-            </a:r>
-            <a:r>
-              <a:rPr lang="en-US" sz="1350" b="0" i="0" u="none" strike="noStrike" cap="none" dirty="0">
-                <a:solidFill>
-                  <a:schemeClr val="bg1">
-                    <a:lumMod val="85000"/>
-                  </a:schemeClr>
-                </a:solidFill>
-                <a:latin typeface="Inter"/>
-                <a:ea typeface="Inter"/>
-                <a:cs typeface="Inter"/>
-                <a:sym typeface="Inter"/>
-              </a:rPr>
-              <a:t>%</a:t>
-            </a:r>
-            <a:br>
-              <a:rPr lang="en-US" sz="1800" b="0" i="0" u="none" strike="noStrike" cap="none" dirty="0">
-                <a:solidFill>
-                  <a:schemeClr val="dk1"/>
-                </a:solidFill>
-                <a:latin typeface="Calibri"/>
-                <a:ea typeface="Calibri"/>
-                <a:cs typeface="Calibri"/>
-                <a:sym typeface="Calibri"/>
-              </a:rPr>
-            </a:br>
-            <a:r>
-              <a:rPr lang="en-US" sz="1350" b="1" i="0" u="none" strike="noStrike" cap="none" dirty="0">
-                <a:solidFill>
-                  <a:schemeClr val="bg2">
-                    <a:lumMod val="20000"/>
-                    <a:lumOff val="80000"/>
-                  </a:schemeClr>
-                </a:solidFill>
-                <a:latin typeface="Inter"/>
-                <a:ea typeface="Inter"/>
-                <a:cs typeface="Inter"/>
-                <a:sym typeface="Inter"/>
-              </a:rPr>
-              <a:t>Recall:</a:t>
-            </a:r>
-            <a:r>
-              <a:rPr lang="en-US" sz="1350" b="0" i="0" u="none" strike="noStrike" cap="none" dirty="0">
-                <a:solidFill>
-                  <a:schemeClr val="bg2">
-                    <a:lumMod val="20000"/>
-                    <a:lumOff val="80000"/>
-                  </a:schemeClr>
-                </a:solidFill>
-                <a:latin typeface="Inter"/>
-                <a:ea typeface="Inter"/>
-                <a:cs typeface="Inter"/>
-                <a:sym typeface="Inter"/>
-              </a:rPr>
-              <a:t> </a:t>
-            </a:r>
-            <a:r>
-              <a:rPr lang="en-US" sz="1350" b="0" i="0" u="none" strike="noStrike" cap="none" dirty="0">
-                <a:solidFill>
-                  <a:schemeClr val="bg1">
-                    <a:lumMod val="85000"/>
-                  </a:schemeClr>
-                </a:solidFill>
-                <a:latin typeface="Inter"/>
-                <a:ea typeface="Inter"/>
-                <a:cs typeface="Inter"/>
-                <a:sym typeface="Inter"/>
-              </a:rPr>
-              <a:t>77%</a:t>
-            </a:r>
-            <a:br>
-              <a:rPr lang="en-US" sz="1800" b="0" i="0" u="none" strike="noStrike" cap="none" dirty="0">
-                <a:solidFill>
-                  <a:schemeClr val="dk1"/>
-                </a:solidFill>
-                <a:latin typeface="Calibri"/>
-                <a:ea typeface="Calibri"/>
-                <a:cs typeface="Calibri"/>
-                <a:sym typeface="Calibri"/>
-              </a:rPr>
-            </a:br>
-            <a:r>
-              <a:rPr lang="en-US" sz="1350" b="1" i="0" u="none" strike="noStrike" cap="none" dirty="0">
-                <a:solidFill>
-                  <a:schemeClr val="bg2">
-                    <a:lumMod val="20000"/>
-                    <a:lumOff val="80000"/>
-                  </a:schemeClr>
-                </a:solidFill>
-                <a:latin typeface="Inter"/>
-                <a:ea typeface="Inter"/>
-                <a:cs typeface="Inter"/>
-                <a:sym typeface="Inter"/>
-              </a:rPr>
-              <a:t>F1-Score:</a:t>
-            </a:r>
-            <a:r>
-              <a:rPr lang="en-US" sz="1350" b="0" i="0" u="none" strike="noStrike" cap="none" dirty="0">
-                <a:solidFill>
-                  <a:schemeClr val="bg2">
-                    <a:lumMod val="20000"/>
-                    <a:lumOff val="80000"/>
-                  </a:schemeClr>
-                </a:solidFill>
-                <a:latin typeface="Inter"/>
-                <a:ea typeface="Inter"/>
-                <a:cs typeface="Inter"/>
-                <a:sym typeface="Inter"/>
-              </a:rPr>
-              <a:t> </a:t>
-            </a:r>
-            <a:r>
-              <a:rPr lang="en-US" sz="1350" b="0" i="0" u="none" strike="noStrike" cap="none" dirty="0">
-                <a:solidFill>
-                  <a:schemeClr val="bg1">
-                    <a:lumMod val="85000"/>
-                  </a:schemeClr>
-                </a:solidFill>
-                <a:latin typeface="Inter"/>
-                <a:ea typeface="Inter"/>
-                <a:cs typeface="Inter"/>
-                <a:sym typeface="Inter"/>
-              </a:rPr>
-              <a:t>76%</a:t>
-            </a:r>
-          </a:p>
-          <a:p>
-            <a:pPr marL="0" marR="0" lvl="0" indent="0" algn="l" rtl="0">
-              <a:lnSpc>
-                <a:spcPct val="120000"/>
-              </a:lnSpc>
-              <a:spcBef>
-                <a:spcPts val="0"/>
-              </a:spcBef>
-              <a:spcAft>
-                <a:spcPts val="0"/>
-              </a:spcAft>
-              <a:buNone/>
-            </a:pPr>
-            <a:r>
-              <a:rPr lang="en-US" sz="1350" b="1" dirty="0">
-                <a:solidFill>
-                  <a:schemeClr val="bg2">
-                    <a:lumMod val="20000"/>
-                    <a:lumOff val="80000"/>
-                  </a:schemeClr>
-                </a:solidFill>
-                <a:latin typeface="Inter"/>
-                <a:ea typeface="Inter"/>
-                <a:sym typeface="Inter"/>
-              </a:rPr>
-              <a:t>Distribuzione Classi: </a:t>
-            </a:r>
-            <a:r>
-              <a:rPr lang="en-US" sz="1350" dirty="0">
-                <a:solidFill>
-                  <a:schemeClr val="bg1">
-                    <a:lumMod val="85000"/>
-                  </a:schemeClr>
-                </a:solidFill>
-                <a:latin typeface="Inter"/>
-                <a:ea typeface="Inter"/>
-                <a:sym typeface="Inter"/>
-              </a:rPr>
-              <a:t>328 Stress</a:t>
-            </a:r>
-            <a:endParaRPr dirty="0">
-              <a:solidFill>
-                <a:schemeClr val="bg1">
-                  <a:lumMod val="85000"/>
-                </a:schemeClr>
-              </a:solidFill>
-            </a:endParaRPr>
-          </a:p>
-        </p:txBody>
-      </p:sp>
-      <p:sp>
-        <p:nvSpPr>
-          <p:cNvPr id="246" name="Google Shape;246;p23"/>
+          <p:cNvPr id="246" name="Google Shape;246;p23">
+            <a:extLst>
+              <a:ext uri="{FF2B5EF4-FFF2-40B4-BE49-F238E27FC236}">
+                <a16:creationId xmlns:a16="http://schemas.microsoft.com/office/drawing/2014/main" id="{E8E246B9-C8FF-D351-384C-63CAFD24D8F1}"/>
+              </a:ext>
+            </a:extLst>
+          </p:cNvPr>
           <p:cNvSpPr txBox="1"/>
           <p:nvPr/>
         </p:nvSpPr>
@@ -21816,7 +23784,7 @@
               <a:buNone/>
             </a:pPr>
             <a:r>
-              <a:rPr lang="en-US" sz="3000" b="0" i="0" u="none" strike="noStrike" cap="none" dirty="0" err="1">
+              <a:rPr lang="it-IT" sz="3000" b="0" i="0" u="none" strike="noStrike" cap="none" dirty="0">
                 <a:solidFill>
                   <a:schemeClr val="bg1"/>
                 </a:solidFill>
@@ -21825,45 +23793,9 @@
                 <a:cs typeface="Poppins SemiBold"/>
                 <a:sym typeface="Poppins SemiBold"/>
               </a:rPr>
-              <a:t>Metriche</a:t>
-            </a:r>
-            <a:r>
-              <a:rPr lang="en-US" sz="3000" b="0" i="0" u="none" strike="noStrike" cap="none" dirty="0">
-                <a:solidFill>
-                  <a:schemeClr val="bg1"/>
-                </a:solidFill>
-                <a:latin typeface="Poppins SemiBold"/>
-                <a:ea typeface="Poppins SemiBold"/>
-                <a:cs typeface="Poppins SemiBold"/>
-                <a:sym typeface="Poppins SemiBold"/>
-              </a:rPr>
-              <a:t>: </a:t>
-            </a:r>
-            <a:r>
-              <a:rPr lang="en-US" sz="3000" b="0" i="0" u="none" strike="noStrike" cap="none" dirty="0" err="1">
-                <a:solidFill>
-                  <a:schemeClr val="bg1"/>
-                </a:solidFill>
-                <a:latin typeface="Poppins SemiBold"/>
-                <a:ea typeface="Poppins SemiBold"/>
-                <a:cs typeface="Poppins SemiBold"/>
-                <a:sym typeface="Poppins SemiBold"/>
-              </a:rPr>
-              <a:t>Modello</a:t>
-            </a:r>
-            <a:r>
-              <a:rPr lang="en-US" sz="3000" b="0" i="0" u="none" strike="noStrike" cap="none" dirty="0">
-                <a:solidFill>
-                  <a:schemeClr val="bg1"/>
-                </a:solidFill>
-                <a:latin typeface="Poppins SemiBold"/>
-                <a:ea typeface="Poppins SemiBold"/>
-                <a:cs typeface="Poppins SemiBold"/>
-                <a:sym typeface="Poppins SemiBold"/>
-              </a:rPr>
-              <a:t> Migliore (Random Forest)</a:t>
-            </a:r>
-            <a:endParaRPr dirty="0">
+              <a:t>Matrici di confusione a confronto</a:t>
+            </a:r>
+            <a:endParaRPr lang="it-IT" dirty="0">
               <a:solidFill>
                 <a:schemeClr val="bg1"/>
               </a:solidFill>
@@ -21873,367 +23805,10 @@
       </p:sp>
       <p:sp>
         <p:nvSpPr>
-          <p:cNvPr id="9" name="Google Shape;242;p23">
+          <p:cNvPr id="5" name="Google Shape;94;p14">
             <a:extLst>
               <a:ext uri="{FF2B5EF4-FFF2-40B4-BE49-F238E27FC236}">
-                <a16:creationId xmlns:a16="http://schemas.microsoft.com/office/drawing/2014/main" id="{8D221085-EB71-B68E-BE83-DE8E04837C15}"/>
-              </a:ext>
-            </a:extLst>
-          </p:cNvPr>
-          <p:cNvSpPr txBox="1"/>
-          <p:nvPr/>
-        </p:nvSpPr>
-        <p:spPr>
-          <a:xfrm>
-            <a:off x="2426746" y="4517906"/>
-            <a:ext cx="2290257" cy="323165"/>
-          </a:xfrm>
-          <a:prstGeom prst="rect">
-            <a:avLst/>
-          </a:prstGeom>
-          <a:noFill/>
-          <a:ln>
-            <a:noFill/>
-          </a:ln>
-        </p:spPr>
-        <p:txBody>
-          <a:bodyPr spcFirstLastPara="1" wrap="square" lIns="0" tIns="0" rIns="0" bIns="0" anchor="t" anchorCtr="0">
-            <a:spAutoFit/>
-          </a:bodyPr>
-          <a:lstStyle/>
-          <a:p>
-            <a:pPr marL="0" marR="0" lvl="0" indent="0" algn="l" rtl="0">
-              <a:spcBef>
-                <a:spcPts val="0"/>
-              </a:spcBef>
-              <a:spcAft>
-                <a:spcPts val="0"/>
-              </a:spcAft>
-              <a:buNone/>
-            </a:pPr>
-            <a:r>
-              <a:rPr lang="en-US" sz="2100" dirty="0" err="1">
-                <a:solidFill>
-                  <a:srgbClr val="38BDF8"/>
-                </a:solidFill>
-                <a:latin typeface="Poppins Medium"/>
-                <a:cs typeface="Poppins Medium"/>
-                <a:sym typeface="Poppins Medium"/>
-              </a:rPr>
-              <a:t>Riposo</a:t>
-            </a:r>
-            <a:r>
-              <a:rPr lang="en-US" sz="2100" dirty="0">
-                <a:solidFill>
-                  <a:srgbClr val="38BDF8"/>
-                </a:solidFill>
-                <a:latin typeface="Poppins Medium"/>
-                <a:cs typeface="Poppins Medium"/>
-                <a:sym typeface="Poppins Medium"/>
-              </a:rPr>
-              <a:t> (Rest)</a:t>
-            </a:r>
-            <a:endParaRPr dirty="0"/>
-          </a:p>
-        </p:txBody>
-      </p:sp>
-      <p:sp>
-        <p:nvSpPr>
-          <p:cNvPr id="10" name="Google Shape;244;p23">
-            <a:extLst>
-              <a:ext uri="{FF2B5EF4-FFF2-40B4-BE49-F238E27FC236}">
-                <a16:creationId xmlns:a16="http://schemas.microsoft.com/office/drawing/2014/main" id="{8853605B-17C0-B565-2331-A581F3F04510}"/>
-              </a:ext>
-            </a:extLst>
-          </p:cNvPr>
-          <p:cNvSpPr txBox="1"/>
-          <p:nvPr/>
-        </p:nvSpPr>
-        <p:spPr>
-          <a:xfrm>
-            <a:off x="2426746" y="5027454"/>
-            <a:ext cx="2918329" cy="1006429"/>
-          </a:xfrm>
-          <a:prstGeom prst="rect">
-            <a:avLst/>
-          </a:prstGeom>
-          <a:noFill/>
-          <a:ln>
-            <a:noFill/>
-          </a:ln>
-        </p:spPr>
-        <p:txBody>
-          <a:bodyPr spcFirstLastPara="1" wrap="square" lIns="0" tIns="0" rIns="0" bIns="0" anchor="t" anchorCtr="0">
-            <a:spAutoFit/>
-          </a:bodyPr>
-          <a:lstStyle/>
-          <a:p>
-            <a:pPr marL="0" marR="0" lvl="0" indent="0" algn="l" rtl="0">
-              <a:lnSpc>
-                <a:spcPct val="120000"/>
-              </a:lnSpc>
-              <a:spcBef>
-                <a:spcPts val="0"/>
-              </a:spcBef>
-              <a:spcAft>
-                <a:spcPts val="0"/>
-              </a:spcAft>
-              <a:buNone/>
-            </a:pPr>
-            <a:r>
-              <a:rPr lang="en-US" sz="1350" b="1" i="0" u="none" strike="noStrike" cap="none" dirty="0" err="1">
-                <a:solidFill>
-                  <a:schemeClr val="bg2">
-                    <a:lumMod val="20000"/>
-                    <a:lumOff val="80000"/>
-                  </a:schemeClr>
-                </a:solidFill>
-                <a:latin typeface="Inter"/>
-                <a:ea typeface="Inter"/>
-                <a:cs typeface="Inter"/>
-                <a:sym typeface="Inter"/>
-              </a:rPr>
-              <a:t>Precisione</a:t>
-            </a:r>
-            <a:r>
-              <a:rPr lang="en-US" sz="1350" b="1" i="0" u="none" strike="noStrike" cap="none" dirty="0">
-                <a:solidFill>
-                  <a:schemeClr val="bg2">
-                    <a:lumMod val="20000"/>
-                    <a:lumOff val="80000"/>
-                  </a:schemeClr>
-                </a:solidFill>
-                <a:latin typeface="Inter"/>
-                <a:ea typeface="Inter"/>
-                <a:cs typeface="Inter"/>
-                <a:sym typeface="Inter"/>
-              </a:rPr>
-              <a:t>:</a:t>
-            </a:r>
-            <a:r>
-              <a:rPr lang="en-US" sz="1350" b="0" i="0" u="none" strike="noStrike" cap="none" dirty="0">
-                <a:solidFill>
-                  <a:schemeClr val="bg2">
-                    <a:lumMod val="20000"/>
-                    <a:lumOff val="80000"/>
-                  </a:schemeClr>
-                </a:solidFill>
-                <a:latin typeface="Inter"/>
-                <a:ea typeface="Inter"/>
-                <a:cs typeface="Inter"/>
-                <a:sym typeface="Inter"/>
-              </a:rPr>
-              <a:t> </a:t>
-            </a:r>
-            <a:r>
-              <a:rPr lang="en-US" sz="1350" b="0" i="0" u="none" strike="noStrike" cap="none" dirty="0">
-                <a:solidFill>
-                  <a:schemeClr val="bg1">
-                    <a:lumMod val="85000"/>
-                  </a:schemeClr>
-                </a:solidFill>
-                <a:latin typeface="Inter"/>
-                <a:ea typeface="Inter"/>
-                <a:cs typeface="Inter"/>
-                <a:sym typeface="Inter"/>
-              </a:rPr>
-              <a:t>70%</a:t>
-            </a:r>
-            <a:br>
-              <a:rPr lang="en-US" sz="1800" b="0" i="0" u="none" strike="noStrike" cap="none" dirty="0">
-                <a:solidFill>
-                  <a:schemeClr val="dk1"/>
-                </a:solidFill>
-                <a:latin typeface="Calibri"/>
-                <a:ea typeface="Calibri"/>
-                <a:cs typeface="Calibri"/>
-                <a:sym typeface="Calibri"/>
-              </a:rPr>
-            </a:br>
-            <a:r>
-              <a:rPr lang="en-US" sz="1350" b="1" i="0" u="none" strike="noStrike" cap="none" dirty="0">
-                <a:solidFill>
-                  <a:schemeClr val="bg2">
-                    <a:lumMod val="20000"/>
-                    <a:lumOff val="80000"/>
-                  </a:schemeClr>
-                </a:solidFill>
-                <a:latin typeface="Inter"/>
-                <a:ea typeface="Inter"/>
-                <a:cs typeface="Inter"/>
-                <a:sym typeface="Inter"/>
-              </a:rPr>
-              <a:t>Recall:</a:t>
-            </a:r>
-            <a:r>
-              <a:rPr lang="en-US" sz="1350" b="0" i="0" u="none" strike="noStrike" cap="none" dirty="0">
-                <a:solidFill>
-                  <a:schemeClr val="bg2">
-                    <a:lumMod val="20000"/>
-                    <a:lumOff val="80000"/>
-                  </a:schemeClr>
-                </a:solidFill>
-                <a:latin typeface="Inter"/>
-                <a:ea typeface="Inter"/>
-                <a:cs typeface="Inter"/>
-                <a:sym typeface="Inter"/>
-              </a:rPr>
-              <a:t> </a:t>
-            </a:r>
-            <a:r>
-              <a:rPr lang="en-US" sz="1350" dirty="0">
-                <a:solidFill>
-                  <a:schemeClr val="bg1">
-                    <a:lumMod val="85000"/>
-                  </a:schemeClr>
-                </a:solidFill>
-                <a:latin typeface="Inter"/>
-                <a:ea typeface="Inter"/>
-                <a:cs typeface="Inter"/>
-                <a:sym typeface="Inter"/>
-              </a:rPr>
-              <a:t>68</a:t>
-            </a:r>
-            <a:r>
-              <a:rPr lang="en-US" sz="1350" b="0" i="0" u="none" strike="noStrike" cap="none" dirty="0">
-                <a:solidFill>
-                  <a:schemeClr val="bg1">
-                    <a:lumMod val="85000"/>
-                  </a:schemeClr>
-                </a:solidFill>
-                <a:latin typeface="Inter"/>
-                <a:ea typeface="Inter"/>
-                <a:cs typeface="Inter"/>
-                <a:sym typeface="Inter"/>
-              </a:rPr>
-              <a:t>%</a:t>
-            </a:r>
-            <a:br>
-              <a:rPr lang="en-US" sz="1800" b="0" i="0" u="none" strike="noStrike" cap="none" dirty="0">
-                <a:solidFill>
-                  <a:schemeClr val="dk1"/>
-                </a:solidFill>
-                <a:latin typeface="Calibri"/>
-                <a:ea typeface="Calibri"/>
-                <a:cs typeface="Calibri"/>
-                <a:sym typeface="Calibri"/>
-              </a:rPr>
-            </a:br>
-            <a:r>
-              <a:rPr lang="en-US" sz="1350" b="1" i="0" u="none" strike="noStrike" cap="none" dirty="0">
-                <a:solidFill>
-                  <a:schemeClr val="bg2">
-                    <a:lumMod val="20000"/>
-                    <a:lumOff val="80000"/>
-                  </a:schemeClr>
-                </a:solidFill>
-                <a:latin typeface="Inter"/>
-                <a:ea typeface="Inter"/>
-                <a:cs typeface="Inter"/>
-                <a:sym typeface="Inter"/>
-              </a:rPr>
-              <a:t>F1-Score:</a:t>
-            </a:r>
-            <a:r>
-              <a:rPr lang="en-US" sz="1350" b="0" i="0" u="none" strike="noStrike" cap="none" dirty="0">
-                <a:solidFill>
-                  <a:schemeClr val="bg2">
-                    <a:lumMod val="20000"/>
-                    <a:lumOff val="80000"/>
-                  </a:schemeClr>
-                </a:solidFill>
-                <a:latin typeface="Inter"/>
-                <a:ea typeface="Inter"/>
-                <a:cs typeface="Inter"/>
-                <a:sym typeface="Inter"/>
-              </a:rPr>
-              <a:t> </a:t>
-            </a:r>
-            <a:r>
-              <a:rPr lang="en-US" sz="1350" dirty="0">
-                <a:solidFill>
-                  <a:schemeClr val="bg1">
-                    <a:lumMod val="85000"/>
-                  </a:schemeClr>
-                </a:solidFill>
-                <a:latin typeface="Inter"/>
-                <a:ea typeface="Inter"/>
-                <a:cs typeface="Inter"/>
-                <a:sym typeface="Inter"/>
-              </a:rPr>
-              <a:t>69</a:t>
-            </a:r>
-            <a:r>
-              <a:rPr lang="en-US" sz="1350" b="0" i="0" u="none" strike="noStrike" cap="none" dirty="0">
-                <a:solidFill>
-                  <a:schemeClr val="bg1">
-                    <a:lumMod val="85000"/>
-                  </a:schemeClr>
-                </a:solidFill>
-                <a:latin typeface="Inter"/>
-                <a:ea typeface="Inter"/>
-                <a:cs typeface="Inter"/>
-                <a:sym typeface="Inter"/>
-              </a:rPr>
-              <a:t>%</a:t>
-            </a:r>
-          </a:p>
-          <a:p>
-            <a:pPr marL="0" marR="0" lvl="0" indent="0" algn="l" rtl="0">
-              <a:lnSpc>
-                <a:spcPct val="120000"/>
-              </a:lnSpc>
-              <a:spcBef>
-                <a:spcPts val="0"/>
-              </a:spcBef>
-              <a:spcAft>
-                <a:spcPts val="0"/>
-              </a:spcAft>
-              <a:buNone/>
-            </a:pPr>
-            <a:r>
-              <a:rPr lang="en-US" sz="1350" b="1" dirty="0">
-                <a:solidFill>
-                  <a:schemeClr val="bg2">
-                    <a:lumMod val="20000"/>
-                    <a:lumOff val="80000"/>
-                  </a:schemeClr>
-                </a:solidFill>
-                <a:latin typeface="Inter"/>
-                <a:ea typeface="Inter"/>
-                <a:sym typeface="Inter"/>
-              </a:rPr>
-              <a:t>Distribuzione Classi: </a:t>
-            </a:r>
-            <a:r>
-              <a:rPr lang="en-US" sz="1350" dirty="0">
-                <a:solidFill>
-                  <a:schemeClr val="bg1">
-                    <a:lumMod val="85000"/>
-                  </a:schemeClr>
-                </a:solidFill>
-                <a:latin typeface="Inter"/>
-                <a:ea typeface="Inter"/>
-                <a:sym typeface="Inter"/>
-              </a:rPr>
-              <a:t>267 Rest</a:t>
-            </a:r>
-            <a:endParaRPr dirty="0">
-              <a:solidFill>
-                <a:schemeClr val="bg1">
-                  <a:lumMod val="85000"/>
-                </a:schemeClr>
-              </a:solidFill>
-            </a:endParaRPr>
-          </a:p>
-        </p:txBody>
-      </p:sp>
-      <p:sp>
-        <p:nvSpPr>
-          <p:cNvPr id="13" name="Google Shape;94;p14">
-            <a:extLst>
-              <a:ext uri="{FF2B5EF4-FFF2-40B4-BE49-F238E27FC236}">
-                <a16:creationId xmlns:a16="http://schemas.microsoft.com/office/drawing/2014/main" id="{F00436ED-F9F7-92E9-71BE-2791417FA0BA}"/>
+                <a16:creationId xmlns:a16="http://schemas.microsoft.com/office/drawing/2014/main" id="{9D4E0847-DC0B-7159-17A0-94AA772F33B8}"/>
               </a:ext>
             </a:extLst>
           </p:cNvPr>
@@ -22281,19 +23856,7 @@
                 <a:cs typeface="Inter"/>
                 <a:sym typeface="Inter"/>
               </a:rPr>
-              <a:t>Il Random Forest con 50 </a:t>
-            </a:r>
-            <a:r>
-              <a:rPr lang="it-IT" sz="1350" dirty="0" err="1">
-                <a:solidFill>
-                  <a:srgbClr val="CBD5E1"/>
-                </a:solidFill>
-                <a:latin typeface="Inter"/>
-                <a:ea typeface="Inter"/>
-                <a:cs typeface="Inter"/>
-                <a:sym typeface="Inter"/>
-              </a:rPr>
-              <a:t>L</a:t>
+              <a:t>Rispettivamente: RF (50 </a:t>
             </a:r>
             <a:r>
               <a:rPr lang="it-IT" sz="1350" b="0" i="0" u="none" strike="noStrike" cap="none" dirty="0" err="1">
@@ -22305,7 +23868,7 @@
                 <a:cs typeface="Inter"/>
                 <a:sym typeface="Inter"/>
               </a:rPr>
-              <a:t>earners</a:t>
+              <a:t>Learners</a:t>
             </a:r>
             <a:r>
               <a:rPr lang="it-IT" sz="1350" b="0" i="0" u="none" strike="noStrike" cap="none" dirty="0">
@@ -22317,7 +23880,7 @@
                 <a:cs typeface="Inter"/>
                 <a:sym typeface="Inter"/>
               </a:rPr>
-              <a:t> e 1000 </a:t>
+              <a:t>, 1000 </a:t>
             </a:r>
             <a:r>
               <a:rPr lang="it-IT" sz="1350" b="0" i="0" u="none" strike="noStrike" cap="none" dirty="0" err="1">
@@ -22341,13 +23904,108 @@
                 <a:cs typeface="Inter"/>
                 <a:sym typeface="Inter"/>
               </a:rPr>
-              <a:t> ha un’efficacia maggiore in recall a identificare lo stress. </a:t>
+              <a:t>), SVM (Kernel Cubico), </a:t>
+            </a:r>
+            <a:r>
+              <a:rPr lang="it-IT" sz="1350" b="0" i="0" u="none" strike="noStrike" cap="none" dirty="0" err="1">
+                <a:solidFill>
+                  <a:srgbClr val="CBD5E1"/>
+                </a:solidFill>
+                <a:latin typeface="Inter"/>
+                <a:ea typeface="Inter"/>
+                <a:cs typeface="Inter"/>
+                <a:sym typeface="Inter"/>
+              </a:rPr>
+              <a:t>Logistic</a:t>
+            </a:r>
+            <a:r>
+              <a:rPr lang="it-IT" sz="1350" b="0" i="0" u="none" strike="noStrike" cap="none" dirty="0">
+                <a:solidFill>
+                  <a:srgbClr val="CBD5E1"/>
+                </a:solidFill>
+                <a:latin typeface="Inter"/>
+                <a:ea typeface="Inter"/>
+                <a:cs typeface="Inter"/>
+                <a:sym typeface="Inter"/>
+              </a:rPr>
+              <a:t> </a:t>
+            </a:r>
+            <a:r>
+              <a:rPr lang="it-IT" sz="1350" b="0" i="0" u="none" strike="noStrike" cap="none" dirty="0" err="1">
+                <a:solidFill>
+                  <a:srgbClr val="CBD5E1"/>
+                </a:solidFill>
+                <a:latin typeface="Inter"/>
+                <a:ea typeface="Inter"/>
+                <a:cs typeface="Inter"/>
+                <a:sym typeface="Inter"/>
+              </a:rPr>
+              <a:t>Regression</a:t>
             </a:r>
             <a:endParaRPr lang="it-IT" dirty="0"/>
           </a:p>
         </p:txBody>
       </p:sp>
+      <p:pic>
+        <p:nvPicPr>
+          <p:cNvPr id="7" name="Immagine 6">
+            <a:extLst>
+              <a:ext uri="{FF2B5EF4-FFF2-40B4-BE49-F238E27FC236}">
+                <a16:creationId xmlns:a16="http://schemas.microsoft.com/office/drawing/2014/main" id="{A16EB073-200F-F3BB-B490-4C044385FCD1}"/>
+              </a:ext>
+            </a:extLst>
+          </p:cNvPr>
+          <p:cNvPicPr>
+            <a:picLocks noChangeAspect="1"/>
+          </p:cNvPicPr>
+          <p:nvPr/>
+        </p:nvPicPr>
+        <p:blipFill>
+          <a:blip r:embed="rId4"/>
+          <a:stretch>
+            <a:fillRect/>
+          </a:stretch>
+        </p:blipFill>
+        <p:spPr>
+          <a:xfrm>
+            <a:off x="538535" y="1745398"/>
+            <a:ext cx="11114930" cy="4780323"/>
+          </a:xfrm>
+          <a:prstGeom prst="roundRect">
+            <a:avLst>
+              <a:gd name="adj" fmla="val 16667"/>
+            </a:avLst>
+          </a:prstGeom>
+          <a:ln>
+            <a:noFill/>
+          </a:ln>
+          <a:effectLst>
+            <a:outerShdw blurRad="76200" dist="38100" dir="7800000" algn="tl" rotWithShape="0">
+              <a:srgbClr val="000000">
+                <a:alpha val="40000"/>
+              </a:srgbClr>
+            </a:outerShdw>
+          </a:effectLst>
+          <a:scene3d>
+            <a:camera prst="orthographicFront"/>
+            <a:lightRig rig="contrasting" dir="t">
+              <a:rot lat="0" lon="0" rev="4200000"/>
+            </a:lightRig>
+          </a:scene3d>
+          <a:sp3d prstMaterial="plastic">
+            <a:bevelT w="381000" h="114300" prst="relaxedInset"/>
+            <a:contourClr>
+              <a:srgbClr val="969696"/>
+            </a:contourClr>
+          </a:sp3d>
+        </p:spPr>
+      </p:pic>
     </p:spTree>
+    <p:extLst>
+      <p:ext uri="{BB962C8B-B14F-4D97-AF65-F5344CB8AC3E}">
+        <p14:creationId xmlns:p14="http://schemas.microsoft.com/office/powerpoint/2010/main" val="3952022092"/>
+      </p:ext>
+    </p:extLst>
   </p:cSld>
   <p:clrMapOvr>
     <a:masterClrMapping/>

--- a/Progetto Interfacce Uomo-Macchina.pptx
+++ b/Progetto Interfacce Uomo-Macchina.pptx
@@ -5,7 +5,7 @@
     <p:sldMasterId id="2147483659" r:id="rId1"/>
   </p:sldMasterIdLst>
   <p:notesMasterIdLst>
-    <p:notesMasterId r:id="rId14"/>
+    <p:notesMasterId r:id="rId15"/>
   </p:notesMasterIdLst>
   <p:sldIdLst>
     <p:sldId id="256" r:id="rId2"/>
@@ -18,46 +18,47 @@
     <p:sldId id="264" r:id="rId9"/>
     <p:sldId id="270" r:id="rId10"/>
     <p:sldId id="271" r:id="rId11"/>
-    <p:sldId id="266" r:id="rId12"/>
-    <p:sldId id="269" r:id="rId13"/>
+    <p:sldId id="272" r:id="rId12"/>
+    <p:sldId id="266" r:id="rId13"/>
+    <p:sldId id="269" r:id="rId14"/>
   </p:sldIdLst>
   <p:sldSz cx="12192000" cy="6858000"/>
   <p:notesSz cx="6858000" cy="9144000"/>
   <p:embeddedFontLst>
     <p:embeddedFont>
       <p:font typeface="Inter" panose="020B0604020202020204" charset="0"/>
-      <p:regular r:id="rId15"/>
-      <p:bold r:id="rId16"/>
-      <p:italic r:id="rId17"/>
-      <p:boldItalic r:id="rId18"/>
+      <p:regular r:id="rId16"/>
+      <p:bold r:id="rId17"/>
+      <p:italic r:id="rId18"/>
+      <p:boldItalic r:id="rId19"/>
     </p:embeddedFont>
     <p:embeddedFont>
       <p:font typeface="Inter SemiBold" panose="020B0604020202020204" charset="0"/>
-      <p:regular r:id="rId19"/>
-      <p:bold r:id="rId20"/>
-      <p:italic r:id="rId21"/>
-      <p:boldItalic r:id="rId22"/>
+      <p:regular r:id="rId20"/>
+      <p:bold r:id="rId21"/>
+      <p:italic r:id="rId22"/>
+      <p:boldItalic r:id="rId23"/>
     </p:embeddedFont>
     <p:embeddedFont>
       <p:font typeface="Poppins" panose="00000500000000000000" pitchFamily="2" charset="0"/>
-      <p:regular r:id="rId23"/>
-      <p:bold r:id="rId24"/>
-      <p:italic r:id="rId25"/>
-      <p:boldItalic r:id="rId26"/>
+      <p:regular r:id="rId24"/>
+      <p:bold r:id="rId25"/>
+      <p:italic r:id="rId26"/>
+      <p:boldItalic r:id="rId27"/>
     </p:embeddedFont>
     <p:embeddedFont>
       <p:font typeface="Poppins Medium" panose="00000600000000000000" pitchFamily="2" charset="0"/>
-      <p:regular r:id="rId27"/>
-      <p:bold r:id="rId28"/>
-      <p:italic r:id="rId29"/>
-      <p:boldItalic r:id="rId30"/>
+      <p:regular r:id="rId28"/>
+      <p:bold r:id="rId29"/>
+      <p:italic r:id="rId30"/>
+      <p:boldItalic r:id="rId31"/>
     </p:embeddedFont>
     <p:embeddedFont>
       <p:font typeface="Poppins SemiBold" panose="00000700000000000000" pitchFamily="2" charset="0"/>
-      <p:regular r:id="rId31"/>
-      <p:bold r:id="rId32"/>
-      <p:italic r:id="rId33"/>
-      <p:boldItalic r:id="rId34"/>
+      <p:regular r:id="rId32"/>
+      <p:bold r:id="rId33"/>
+      <p:italic r:id="rId34"/>
+      <p:boldItalic r:id="rId35"/>
     </p:embeddedFont>
   </p:embeddedFontLst>
   <p:defaultTextStyle>
@@ -985,6 +986,133 @@
   <p:cSld>
     <p:spTree>
       <p:nvGrpSpPr>
+        <p:cNvPr id="1" name="Shape 235">
+          <a:extLst>
+            <a:ext uri="{FF2B5EF4-FFF2-40B4-BE49-F238E27FC236}">
+              <a16:creationId xmlns:a16="http://schemas.microsoft.com/office/drawing/2014/main" id="{FC2C6982-D461-6595-D0D3-FBB3DD0350EC}"/>
+            </a:ext>
+          </a:extLst>
+        </p:cNvPr>
+        <p:cNvGrpSpPr/>
+        <p:nvPr/>
+      </p:nvGrpSpPr>
+      <p:grpSpPr>
+        <a:xfrm>
+          <a:off x="0" y="0"/>
+          <a:ext cx="0" cy="0"/>
+          <a:chOff x="0" y="0"/>
+          <a:chExt cx="0" cy="0"/>
+        </a:xfrm>
+      </p:grpSpPr>
+      <p:sp>
+        <p:nvSpPr>
+          <p:cNvPr id="236" name="Google Shape;236;p11:notes">
+            <a:extLst>
+              <a:ext uri="{FF2B5EF4-FFF2-40B4-BE49-F238E27FC236}">
+                <a16:creationId xmlns:a16="http://schemas.microsoft.com/office/drawing/2014/main" id="{F79BB721-46C0-BA2B-F3CA-1DEC1C3D7AE5}"/>
+              </a:ext>
+            </a:extLst>
+          </p:cNvPr>
+          <p:cNvSpPr txBox="1">
+            <a:spLocks noGrp="1"/>
+          </p:cNvSpPr>
+          <p:nvPr>
+            <p:ph type="body" idx="1"/>
+          </p:nvPr>
+        </p:nvSpPr>
+        <p:spPr>
+          <a:xfrm>
+            <a:off x="685800" y="4343400"/>
+            <a:ext cx="5486400" cy="4114800"/>
+          </a:xfrm>
+          <a:prstGeom prst="rect">
+            <a:avLst/>
+          </a:prstGeom>
+        </p:spPr>
+        <p:txBody>
+          <a:bodyPr spcFirstLastPara="1" wrap="square" lIns="91425" tIns="91425" rIns="91425" bIns="91425" anchor="t" anchorCtr="0">
+            <a:noAutofit/>
+          </a:bodyPr>
+          <a:lstStyle/>
+          <a:p>
+            <a:pPr marL="0" lvl="0" indent="0" algn="l" rtl="0">
+              <a:spcBef>
+                <a:spcPts val="0"/>
+              </a:spcBef>
+              <a:spcAft>
+                <a:spcPts val="0"/>
+              </a:spcAft>
+              <a:buNone/>
+            </a:pPr>
+            <a:endParaRPr/>
+          </a:p>
+        </p:txBody>
+      </p:sp>
+      <p:sp>
+        <p:nvSpPr>
+          <p:cNvPr id="237" name="Google Shape;237;p11:notes">
+            <a:extLst>
+              <a:ext uri="{FF2B5EF4-FFF2-40B4-BE49-F238E27FC236}">
+                <a16:creationId xmlns:a16="http://schemas.microsoft.com/office/drawing/2014/main" id="{6947C15C-7BF0-644E-69E0-6D194FF6F542}"/>
+              </a:ext>
+            </a:extLst>
+          </p:cNvPr>
+          <p:cNvSpPr>
+            <a:spLocks noGrp="1" noRot="1" noChangeAspect="1"/>
+          </p:cNvSpPr>
+          <p:nvPr>
+            <p:ph type="sldImg" idx="2"/>
+          </p:nvPr>
+        </p:nvSpPr>
+        <p:spPr>
+          <a:xfrm>
+            <a:off x="381000" y="685800"/>
+            <a:ext cx="6096000" cy="3429000"/>
+          </a:xfrm>
+          <a:custGeom>
+            <a:avLst/>
+            <a:gdLst/>
+            <a:ahLst/>
+            <a:cxnLst/>
+            <a:rect l="l" t="t" r="r" b="b"/>
+            <a:pathLst>
+              <a:path w="120000" h="120000" extrusionOk="0">
+                <a:moveTo>
+                  <a:pt x="0" y="0"/>
+                </a:moveTo>
+                <a:lnTo>
+                  <a:pt x="120000" y="0"/>
+                </a:lnTo>
+                <a:lnTo>
+                  <a:pt x="120000" y="120000"/>
+                </a:lnTo>
+                <a:lnTo>
+                  <a:pt x="0" y="120000"/>
+                </a:lnTo>
+                <a:close/>
+              </a:path>
+            </a:pathLst>
+          </a:custGeom>
+        </p:spPr>
+      </p:sp>
+    </p:spTree>
+    <p:extLst>
+      <p:ext uri="{BB962C8B-B14F-4D97-AF65-F5344CB8AC3E}">
+        <p14:creationId xmlns:p14="http://schemas.microsoft.com/office/powerpoint/2010/main" val="8982370"/>
+      </p:ext>
+    </p:extLst>
+  </p:cSld>
+  <p:clrMapOvr>
+    <a:masterClrMapping/>
+  </p:clrMapOvr>
+</p:notes>
+</file>
+
+<file path=ppt/notesSlides/notesSlide12.xml><?xml version="1.0" encoding="utf-8"?>
+<p:notes xmlns:a="http://schemas.openxmlformats.org/drawingml/2006/main" xmlns:r="http://schemas.openxmlformats.org/officeDocument/2006/relationships" xmlns:p="http://schemas.openxmlformats.org/presentationml/2006/main" showMasterSp="0" showMasterPhAnim="0">
+  <p:cSld>
+    <p:spTree>
+      <p:nvGrpSpPr>
         <p:cNvPr id="1" name="Shape 235"/>
         <p:cNvGrpSpPr/>
         <p:nvPr/>
@@ -1084,7 +1212,7 @@
 </p:notes>
 </file>
 
-<file path=ppt/notesSlides/notesSlide12.xml><?xml version="1.0" encoding="utf-8"?>
+<file path=ppt/notesSlides/notesSlide13.xml><?xml version="1.0" encoding="utf-8"?>
 <p:notes xmlns:a="http://schemas.openxmlformats.org/drawingml/2006/main" xmlns:r="http://schemas.openxmlformats.org/officeDocument/2006/relationships" xmlns:p="http://schemas.openxmlformats.org/presentationml/2006/main" showMasterSp="0" showMasterPhAnim="0">
   <p:cSld>
     <p:spTree>
@@ -11649,7 +11777,7 @@
                 <a:cs typeface="Inter"/>
                 <a:sym typeface="Inter"/>
               </a:rPr>
-              <a:t>Rispettivamente: RF (50 </a:t>
+              <a:t>Baseline: RF (50 </a:t>
             </a:r>
             <a:r>
               <a:rPr lang="it-IT" sz="1350" b="0" i="0" u="none" strike="noStrike" cap="none" dirty="0" err="1">
@@ -11753,7 +11881,7 @@
         </p:nvSpPr>
         <p:spPr>
           <a:xfrm>
-            <a:off x="688846" y="3377571"/>
+            <a:off x="571499" y="1921053"/>
             <a:ext cx="2290257" cy="323165"/>
           </a:xfrm>
           <a:prstGeom prst="rect">
@@ -11809,8 +11937,8 @@
         </p:nvSpPr>
         <p:spPr>
           <a:xfrm>
-            <a:off x="688846" y="3887119"/>
-            <a:ext cx="2918329" cy="1246495"/>
+            <a:off x="571499" y="2318478"/>
+            <a:ext cx="2918329" cy="997196"/>
           </a:xfrm>
           <a:prstGeom prst="rect">
             <a:avLst/>
@@ -11834,9 +11962,9 @@
             <a:r>
               <a:rPr lang="en-US" sz="1350" b="1" dirty="0" err="1">
                 <a:solidFill>
-                  <a:schemeClr val="bg2">
-                    <a:lumMod val="20000"/>
-                    <a:lumOff val="80000"/>
+                  <a:schemeClr val="accent3">
+                    <a:lumMod val="40000"/>
+                    <a:lumOff val="60000"/>
                   </a:schemeClr>
                 </a:solidFill>
                 <a:latin typeface="Inter"/>
@@ -11849,9 +11977,9 @@
             <a:r>
               <a:rPr lang="en-US" sz="1350" b="1" dirty="0">
                 <a:solidFill>
-                  <a:schemeClr val="bg2">
-                    <a:lumMod val="20000"/>
-                    <a:lumOff val="80000"/>
+                  <a:schemeClr val="accent3">
+                    <a:lumMod val="40000"/>
+                    <a:lumOff val="60000"/>
                   </a:schemeClr>
                 </a:solidFill>
                 <a:latin typeface="Inter"/>
@@ -11860,6 +11988,21 @@
                 <a:sym typeface="Inter"/>
               </a:rPr>
               <a:t>:</a:t>
+            </a:r>
+            <a:r>
+              <a:rPr lang="en-US" sz="1350" dirty="0">
+                <a:solidFill>
+                  <a:schemeClr val="accent3">
+                    <a:lumMod val="40000"/>
+                    <a:lumOff val="60000"/>
+                  </a:schemeClr>
+                </a:solidFill>
+                <a:latin typeface="Inter"/>
+                <a:ea typeface="Inter"/>
+                <a:cs typeface="Inter"/>
+                <a:sym typeface="Inter"/>
+              </a:rPr>
+              <a:t> </a:t>
             </a:r>
             <a:r>
               <a:rPr lang="en-US" sz="1350" dirty="0">
@@ -11873,34 +12016,8 @@
                 <a:cs typeface="Inter"/>
                 <a:sym typeface="Inter"/>
               </a:rPr>
-              <a:t> 72.77%</a:t>
-            </a:r>
-            <a:endParaRPr lang="en-US" sz="1350" b="1" i="0" u="none" strike="noStrike" cap="none" dirty="0">
-              <a:solidFill>
-                <a:schemeClr val="bg2">
-                  <a:lumMod val="20000"/>
-                  <a:lumOff val="80000"/>
-                </a:schemeClr>
-              </a:solidFill>
-              <a:latin typeface="Inter"/>
-              <a:ea typeface="Inter"/>
-              <a:cs typeface="Inter"/>
-              <a:sym typeface="Inter"/>
-            </a:endParaRPr>
-          </a:p>
-          <a:p>
-            <a:pPr marL="0" marR="0" lvl="0" indent="0" algn="l" rtl="0">
-              <a:lnSpc>
-                <a:spcPct val="120000"/>
-              </a:lnSpc>
-              <a:spcBef>
-                <a:spcPts val="0"/>
-              </a:spcBef>
-              <a:spcAft>
-                <a:spcPts val="0"/>
-              </a:spcAft>
-              <a:buNone/>
-            </a:pPr>
+              <a:t>72.77%</a:t>
+            </a:r>
             <a:endParaRPr lang="en-US" sz="1350" b="1" dirty="0">
               <a:solidFill>
                 <a:schemeClr val="bg2">
@@ -12127,7 +12244,7 @@
         </p:nvSpPr>
         <p:spPr>
           <a:xfrm>
-            <a:off x="688846" y="2961214"/>
+            <a:off x="571499" y="1611931"/>
             <a:ext cx="2290257" cy="323165"/>
           </a:xfrm>
           <a:prstGeom prst="rect">
@@ -12183,7 +12300,7 @@
         </p:nvSpPr>
         <p:spPr>
           <a:xfrm>
-            <a:off x="4464202" y="3370305"/>
+            <a:off x="4346854" y="1926712"/>
             <a:ext cx="2290257" cy="323165"/>
           </a:xfrm>
           <a:prstGeom prst="rect">
@@ -12239,8 +12356,8 @@
         </p:nvSpPr>
         <p:spPr>
           <a:xfrm>
-            <a:off x="4464202" y="3879853"/>
-            <a:ext cx="2918329" cy="1246495"/>
+            <a:off x="4346854" y="2318478"/>
+            <a:ext cx="2918329" cy="997196"/>
           </a:xfrm>
           <a:prstGeom prst="rect">
             <a:avLst/>
@@ -12264,9 +12381,9 @@
             <a:r>
               <a:rPr lang="en-US" sz="1350" b="1" dirty="0" err="1">
                 <a:solidFill>
-                  <a:schemeClr val="bg2">
-                    <a:lumMod val="20000"/>
-                    <a:lumOff val="80000"/>
+                  <a:schemeClr val="accent3">
+                    <a:lumMod val="40000"/>
+                    <a:lumOff val="60000"/>
                   </a:schemeClr>
                 </a:solidFill>
                 <a:latin typeface="Inter"/>
@@ -12279,9 +12396,9 @@
             <a:r>
               <a:rPr lang="en-US" sz="1350" b="1" dirty="0">
                 <a:solidFill>
-                  <a:schemeClr val="bg2">
-                    <a:lumMod val="20000"/>
-                    <a:lumOff val="80000"/>
+                  <a:schemeClr val="accent3">
+                    <a:lumMod val="40000"/>
+                    <a:lumOff val="60000"/>
                   </a:schemeClr>
                 </a:solidFill>
                 <a:latin typeface="Inter"/>
@@ -12290,6 +12407,21 @@
                 <a:sym typeface="Inter"/>
               </a:rPr>
               <a:t>:</a:t>
+            </a:r>
+            <a:r>
+              <a:rPr lang="en-US" sz="1350" dirty="0">
+                <a:solidFill>
+                  <a:schemeClr val="accent3">
+                    <a:lumMod val="40000"/>
+                    <a:lumOff val="60000"/>
+                  </a:schemeClr>
+                </a:solidFill>
+                <a:latin typeface="Inter"/>
+                <a:ea typeface="Inter"/>
+                <a:cs typeface="Inter"/>
+                <a:sym typeface="Inter"/>
+              </a:rPr>
+              <a:t> </a:t>
             </a:r>
             <a:r>
               <a:rPr lang="en-US" sz="1350" dirty="0">
@@ -12303,34 +12435,8 @@
                 <a:cs typeface="Inter"/>
                 <a:sym typeface="Inter"/>
               </a:rPr>
-              <a:t> 72.10%</a:t>
-            </a:r>
-            <a:endParaRPr lang="en-US" sz="1350" b="1" i="0" u="none" strike="noStrike" cap="none" dirty="0">
-              <a:solidFill>
-                <a:schemeClr val="bg2">
-                  <a:lumMod val="20000"/>
-                  <a:lumOff val="80000"/>
-                </a:schemeClr>
-              </a:solidFill>
-              <a:latin typeface="Inter"/>
-              <a:ea typeface="Inter"/>
-              <a:cs typeface="Inter"/>
-              <a:sym typeface="Inter"/>
-            </a:endParaRPr>
-          </a:p>
-          <a:p>
-            <a:pPr marL="0" marR="0" lvl="0" indent="0" algn="l" rtl="0">
-              <a:lnSpc>
-                <a:spcPct val="120000"/>
-              </a:lnSpc>
-              <a:spcBef>
-                <a:spcPts val="0"/>
-              </a:spcBef>
-              <a:spcAft>
-                <a:spcPts val="0"/>
-              </a:spcAft>
-              <a:buNone/>
-            </a:pPr>
+              <a:t>72.10%</a:t>
+            </a:r>
             <a:endParaRPr lang="en-US" sz="1350" b="1" dirty="0">
               <a:solidFill>
                 <a:schemeClr val="bg2">
@@ -12557,7 +12663,7 @@
         </p:nvSpPr>
         <p:spPr>
           <a:xfrm>
-            <a:off x="4464202" y="2953948"/>
+            <a:off x="4346855" y="1604665"/>
             <a:ext cx="2290257" cy="323165"/>
           </a:xfrm>
           <a:prstGeom prst="rect">
@@ -12637,7 +12743,7 @@
         </p:nvSpPr>
         <p:spPr>
           <a:xfrm>
-            <a:off x="8328101" y="3370305"/>
+            <a:off x="8210754" y="1952302"/>
             <a:ext cx="2290257" cy="323165"/>
           </a:xfrm>
           <a:prstGeom prst="rect">
@@ -12693,8 +12799,8 @@
         </p:nvSpPr>
         <p:spPr>
           <a:xfrm>
-            <a:off x="8328101" y="3879853"/>
-            <a:ext cx="2918329" cy="1246495"/>
+            <a:off x="8243020" y="2318478"/>
+            <a:ext cx="2918329" cy="997196"/>
           </a:xfrm>
           <a:prstGeom prst="rect">
             <a:avLst/>
@@ -12718,6 +12824,91 @@
             <a:r>
               <a:rPr lang="en-US" sz="1350" b="1" dirty="0" err="1">
                 <a:solidFill>
+                  <a:schemeClr val="accent3">
+                    <a:lumMod val="40000"/>
+                    <a:lumOff val="60000"/>
+                  </a:schemeClr>
+                </a:solidFill>
+                <a:latin typeface="Inter"/>
+                <a:ea typeface="Inter"/>
+                <a:cs typeface="Inter"/>
+                <a:sym typeface="Inter"/>
+              </a:rPr>
+              <a:t>Accuratezza</a:t>
+            </a:r>
+            <a:r>
+              <a:rPr lang="en-US" sz="1350" b="1" dirty="0">
+                <a:solidFill>
+                  <a:schemeClr val="accent3">
+                    <a:lumMod val="40000"/>
+                    <a:lumOff val="60000"/>
+                  </a:schemeClr>
+                </a:solidFill>
+                <a:latin typeface="Inter"/>
+                <a:ea typeface="Inter"/>
+                <a:cs typeface="Inter"/>
+                <a:sym typeface="Inter"/>
+              </a:rPr>
+              <a:t>:</a:t>
+            </a:r>
+            <a:r>
+              <a:rPr lang="en-US" sz="1350" dirty="0">
+                <a:solidFill>
+                  <a:schemeClr val="accent3">
+                    <a:lumMod val="40000"/>
+                    <a:lumOff val="60000"/>
+                  </a:schemeClr>
+                </a:solidFill>
+                <a:latin typeface="Inter"/>
+                <a:ea typeface="Inter"/>
+                <a:cs typeface="Inter"/>
+                <a:sym typeface="Inter"/>
+              </a:rPr>
+              <a:t> </a:t>
+            </a:r>
+            <a:r>
+              <a:rPr lang="en-US" sz="1350" dirty="0">
+                <a:solidFill>
+                  <a:schemeClr val="bg1">
+                    <a:lumMod val="85000"/>
+                  </a:schemeClr>
+                </a:solidFill>
+                <a:latin typeface="Inter"/>
+                <a:ea typeface="Inter"/>
+                <a:cs typeface="Inter"/>
+                <a:sym typeface="Inter"/>
+              </a:rPr>
+              <a:t>70.42%</a:t>
+            </a:r>
+            <a:endParaRPr lang="en-US" sz="1350" b="1" i="0" u="none" strike="noStrike" cap="none" dirty="0">
+              <a:solidFill>
+                <a:schemeClr val="bg2">
+                  <a:lumMod val="20000"/>
+                  <a:lumOff val="80000"/>
+                </a:schemeClr>
+              </a:solidFill>
+              <a:latin typeface="Inter"/>
+              <a:ea typeface="Inter"/>
+              <a:cs typeface="Inter"/>
+              <a:sym typeface="Inter"/>
+            </a:endParaRPr>
+          </a:p>
+          <a:p>
+            <a:pPr marL="0" marR="0" lvl="0" indent="0" algn="l" rtl="0">
+              <a:lnSpc>
+                <a:spcPct val="120000"/>
+              </a:lnSpc>
+              <a:spcBef>
+                <a:spcPts val="0"/>
+              </a:spcBef>
+              <a:spcAft>
+                <a:spcPts val="0"/>
+              </a:spcAft>
+              <a:buNone/>
+            </a:pPr>
+            <a:r>
+              <a:rPr lang="en-US" sz="1350" b="1" i="0" u="none" strike="noStrike" cap="none" dirty="0" err="1">
+                <a:solidFill>
                   <a:schemeClr val="bg2">
                     <a:lumMod val="20000"/>
                     <a:lumOff val="80000"/>
@@ -12728,10 +12919,10 @@
                 <a:cs typeface="Inter"/>
                 <a:sym typeface="Inter"/>
               </a:rPr>
-              <a:t>Accuratezza</a:t>
-            </a:r>
-            <a:r>
-              <a:rPr lang="en-US" sz="1350" b="1" dirty="0">
+              <a:t>Precisione</a:t>
+            </a:r>
+            <a:r>
+              <a:rPr lang="en-US" sz="1350" b="1" i="0" u="none" strike="noStrike" cap="none" dirty="0">
                 <a:solidFill>
                   <a:schemeClr val="bg2">
                     <a:lumMod val="20000"/>
@@ -12746,6 +12937,21 @@
               <a:t>:</a:t>
             </a:r>
             <a:r>
+              <a:rPr lang="en-US" sz="1350" b="0" i="0" u="none" strike="noStrike" cap="none" dirty="0">
+                <a:solidFill>
+                  <a:schemeClr val="bg2">
+                    <a:lumMod val="20000"/>
+                    <a:lumOff val="80000"/>
+                  </a:schemeClr>
+                </a:solidFill>
+                <a:latin typeface="Inter"/>
+                <a:ea typeface="Inter"/>
+                <a:cs typeface="Inter"/>
+                <a:sym typeface="Inter"/>
+              </a:rPr>
+              <a:t> </a:t>
+            </a:r>
+            <a:r>
               <a:rPr lang="en-US" sz="1350" dirty="0">
                 <a:solidFill>
                   <a:schemeClr val="bg1">
@@ -12757,7 +12963,556 @@
                 <a:cs typeface="Inter"/>
                 <a:sym typeface="Inter"/>
               </a:rPr>
-              <a:t> 70.42%</a:t>
+              <a:t>73</a:t>
+            </a:r>
+            <a:r>
+              <a:rPr lang="en-US" sz="1350" b="0" i="0" u="none" strike="noStrike" cap="none" dirty="0">
+                <a:solidFill>
+                  <a:schemeClr val="bg1">
+                    <a:lumMod val="85000"/>
+                  </a:schemeClr>
+                </a:solidFill>
+                <a:latin typeface="Inter"/>
+                <a:ea typeface="Inter"/>
+                <a:cs typeface="Inter"/>
+                <a:sym typeface="Inter"/>
+              </a:rPr>
+              <a:t>%</a:t>
+            </a:r>
+            <a:br>
+              <a:rPr lang="en-US" sz="1800" b="0" i="0" u="none" strike="noStrike" cap="none" dirty="0">
+                <a:solidFill>
+                  <a:schemeClr val="dk1"/>
+                </a:solidFill>
+                <a:latin typeface="Calibri"/>
+                <a:ea typeface="Calibri"/>
+                <a:cs typeface="Calibri"/>
+                <a:sym typeface="Calibri"/>
+              </a:rPr>
+            </a:br>
+            <a:r>
+              <a:rPr lang="en-US" sz="1350" b="1" i="0" u="none" strike="noStrike" cap="none" dirty="0">
+                <a:solidFill>
+                  <a:schemeClr val="bg2">
+                    <a:lumMod val="20000"/>
+                    <a:lumOff val="80000"/>
+                  </a:schemeClr>
+                </a:solidFill>
+                <a:latin typeface="Inter"/>
+                <a:ea typeface="Inter"/>
+                <a:cs typeface="Inter"/>
+                <a:sym typeface="Inter"/>
+              </a:rPr>
+              <a:t>Recall:</a:t>
+            </a:r>
+            <a:r>
+              <a:rPr lang="en-US" sz="1350" b="0" i="0" u="none" strike="noStrike" cap="none" dirty="0">
+                <a:solidFill>
+                  <a:schemeClr val="bg2">
+                    <a:lumMod val="20000"/>
+                    <a:lumOff val="80000"/>
+                  </a:schemeClr>
+                </a:solidFill>
+                <a:latin typeface="Inter"/>
+                <a:ea typeface="Inter"/>
+                <a:cs typeface="Inter"/>
+                <a:sym typeface="Inter"/>
+              </a:rPr>
+              <a:t> </a:t>
+            </a:r>
+            <a:r>
+              <a:rPr lang="en-US" sz="1350" b="0" i="0" u="none" strike="noStrike" cap="none" dirty="0">
+                <a:solidFill>
+                  <a:schemeClr val="bg1">
+                    <a:lumMod val="85000"/>
+                  </a:schemeClr>
+                </a:solidFill>
+                <a:latin typeface="Inter"/>
+                <a:ea typeface="Inter"/>
+                <a:cs typeface="Inter"/>
+                <a:sym typeface="Inter"/>
+              </a:rPr>
+              <a:t>74%</a:t>
+            </a:r>
+            <a:br>
+              <a:rPr lang="en-US" sz="1800" b="0" i="0" u="none" strike="noStrike" cap="none" dirty="0">
+                <a:solidFill>
+                  <a:schemeClr val="dk1"/>
+                </a:solidFill>
+                <a:latin typeface="Calibri"/>
+                <a:ea typeface="Calibri"/>
+                <a:cs typeface="Calibri"/>
+                <a:sym typeface="Calibri"/>
+              </a:rPr>
+            </a:br>
+            <a:r>
+              <a:rPr lang="en-US" sz="1350" b="1" i="0" u="none" strike="noStrike" cap="none" dirty="0">
+                <a:solidFill>
+                  <a:schemeClr val="bg2">
+                    <a:lumMod val="20000"/>
+                    <a:lumOff val="80000"/>
+                  </a:schemeClr>
+                </a:solidFill>
+                <a:latin typeface="Inter"/>
+                <a:ea typeface="Inter"/>
+                <a:cs typeface="Inter"/>
+                <a:sym typeface="Inter"/>
+              </a:rPr>
+              <a:t>F1-Score:</a:t>
+            </a:r>
+            <a:r>
+              <a:rPr lang="en-US" sz="1350" b="0" i="0" u="none" strike="noStrike" cap="none" dirty="0">
+                <a:solidFill>
+                  <a:schemeClr val="bg2">
+                    <a:lumMod val="20000"/>
+                    <a:lumOff val="80000"/>
+                  </a:schemeClr>
+                </a:solidFill>
+                <a:latin typeface="Inter"/>
+                <a:ea typeface="Inter"/>
+                <a:cs typeface="Inter"/>
+                <a:sym typeface="Inter"/>
+              </a:rPr>
+              <a:t> </a:t>
+            </a:r>
+            <a:r>
+              <a:rPr lang="en-US" sz="1350" b="0" i="0" u="none" strike="noStrike" cap="none" dirty="0">
+                <a:solidFill>
+                  <a:schemeClr val="bg1">
+                    <a:lumMod val="85000"/>
+                  </a:schemeClr>
+                </a:solidFill>
+                <a:latin typeface="Inter"/>
+                <a:ea typeface="Inter"/>
+                <a:cs typeface="Inter"/>
+                <a:sym typeface="Inter"/>
+              </a:rPr>
+              <a:t>73%</a:t>
+            </a:r>
+          </a:p>
+        </p:txBody>
+      </p:sp>
+      <p:sp>
+        <p:nvSpPr>
+          <p:cNvPr id="14" name="Google Shape;242;p23">
+            <a:extLst>
+              <a:ext uri="{FF2B5EF4-FFF2-40B4-BE49-F238E27FC236}">
+                <a16:creationId xmlns:a16="http://schemas.microsoft.com/office/drawing/2014/main" id="{19386B87-908C-40F6-EFF0-AD1CB92DECAA}"/>
+              </a:ext>
+            </a:extLst>
+          </p:cNvPr>
+          <p:cNvSpPr txBox="1"/>
+          <p:nvPr/>
+        </p:nvSpPr>
+        <p:spPr>
+          <a:xfrm>
+            <a:off x="8210754" y="1604665"/>
+            <a:ext cx="2598517" cy="323165"/>
+          </a:xfrm>
+          <a:prstGeom prst="rect">
+            <a:avLst/>
+          </a:prstGeom>
+          <a:noFill/>
+          <a:ln>
+            <a:noFill/>
+          </a:ln>
+        </p:spPr>
+        <p:txBody>
+          <a:bodyPr spcFirstLastPara="1" wrap="square" lIns="0" tIns="0" rIns="0" bIns="0" anchor="t" anchorCtr="0">
+            <a:spAutoFit/>
+          </a:bodyPr>
+          <a:lstStyle/>
+          <a:p>
+            <a:pPr marL="0" marR="0" lvl="0" indent="0" algn="l" rtl="0">
+              <a:spcBef>
+                <a:spcPts val="0"/>
+              </a:spcBef>
+              <a:spcAft>
+                <a:spcPts val="0"/>
+              </a:spcAft>
+              <a:buNone/>
+            </a:pPr>
+            <a:r>
+              <a:rPr lang="en-US" sz="2100" b="1" i="0" u="none" strike="noStrike" cap="none" dirty="0">
+                <a:solidFill>
+                  <a:srgbClr val="38BDF8"/>
+                </a:solidFill>
+                <a:latin typeface="Poppins Medium"/>
+                <a:ea typeface="Poppins Medium"/>
+                <a:cs typeface="Poppins Medium"/>
+                <a:sym typeface="Poppins Medium"/>
+              </a:rPr>
+              <a:t>Logistic Regression</a:t>
+            </a:r>
+            <a:endParaRPr b="1" dirty="0"/>
+          </a:p>
+        </p:txBody>
+      </p:sp>
+      <p:sp>
+        <p:nvSpPr>
+          <p:cNvPr id="4" name="Google Shape;94;p14">
+            <a:extLst>
+              <a:ext uri="{FF2B5EF4-FFF2-40B4-BE49-F238E27FC236}">
+                <a16:creationId xmlns:a16="http://schemas.microsoft.com/office/drawing/2014/main" id="{C4ADCDF9-C5F5-321F-20CD-452BFBD96E72}"/>
+              </a:ext>
+            </a:extLst>
+          </p:cNvPr>
+          <p:cNvSpPr txBox="1"/>
+          <p:nvPr/>
+        </p:nvSpPr>
+        <p:spPr>
+          <a:xfrm>
+            <a:off x="486507" y="3540059"/>
+            <a:ext cx="11180885" cy="332399"/>
+          </a:xfrm>
+          <a:prstGeom prst="rect">
+            <a:avLst/>
+          </a:prstGeom>
+          <a:noFill/>
+          <a:ln>
+            <a:noFill/>
+          </a:ln>
+        </p:spPr>
+        <p:txBody>
+          <a:bodyPr spcFirstLastPara="1" wrap="square" lIns="0" tIns="0" rIns="0" bIns="0" anchor="t" anchorCtr="0">
+            <a:spAutoFit/>
+          </a:bodyPr>
+          <a:lstStyle/>
+          <a:p>
+            <a:pPr marL="0" marR="0" lvl="0" indent="0" algn="l" rtl="0">
+              <a:lnSpc>
+                <a:spcPct val="160000"/>
+              </a:lnSpc>
+              <a:spcBef>
+                <a:spcPts val="0"/>
+              </a:spcBef>
+              <a:spcAft>
+                <a:spcPts val="0"/>
+              </a:spcAft>
+              <a:buNone/>
+            </a:pPr>
+            <a:r>
+              <a:rPr lang="it-IT" sz="1350" dirty="0">
+                <a:solidFill>
+                  <a:srgbClr val="CBD5E1"/>
+                </a:solidFill>
+                <a:latin typeface="Inter"/>
+                <a:ea typeface="Inter"/>
+                <a:cs typeface="Inter"/>
+                <a:sym typeface="Inter"/>
+              </a:rPr>
+              <a:t>Soglia PPI 0.60 vs 0.85: </a:t>
+            </a:r>
+            <a:r>
+              <a:rPr lang="it-IT" sz="1350" b="0" i="0" u="none" strike="noStrike" cap="none" dirty="0">
+                <a:solidFill>
+                  <a:srgbClr val="CBD5E1"/>
+                </a:solidFill>
+                <a:latin typeface="Inter"/>
+                <a:ea typeface="Inter"/>
+                <a:cs typeface="Inter"/>
+                <a:sym typeface="Inter"/>
+              </a:rPr>
+              <a:t>RF (75 </a:t>
+            </a:r>
+            <a:r>
+              <a:rPr lang="it-IT" sz="1350" b="0" i="0" u="none" strike="noStrike" cap="none" dirty="0" err="1">
+                <a:solidFill>
+                  <a:srgbClr val="CBD5E1"/>
+                </a:solidFill>
+                <a:latin typeface="Inter"/>
+                <a:ea typeface="Inter"/>
+                <a:cs typeface="Inter"/>
+                <a:sym typeface="Inter"/>
+              </a:rPr>
+              <a:t>Learners</a:t>
+            </a:r>
+            <a:r>
+              <a:rPr lang="it-IT" sz="1350" b="0" i="0" u="none" strike="noStrike" cap="none" dirty="0">
+                <a:solidFill>
+                  <a:srgbClr val="CBD5E1"/>
+                </a:solidFill>
+                <a:latin typeface="Inter"/>
+                <a:ea typeface="Inter"/>
+                <a:cs typeface="Inter"/>
+                <a:sym typeface="Inter"/>
+              </a:rPr>
+              <a:t>, 750 </a:t>
+            </a:r>
+            <a:r>
+              <a:rPr lang="it-IT" sz="1350" b="0" i="0" u="none" strike="noStrike" cap="none" dirty="0" err="1">
+                <a:solidFill>
+                  <a:srgbClr val="CBD5E1"/>
+                </a:solidFill>
+                <a:latin typeface="Inter"/>
+                <a:ea typeface="Inter"/>
+                <a:cs typeface="Inter"/>
+                <a:sym typeface="Inter"/>
+              </a:rPr>
+              <a:t>Splits</a:t>
+            </a:r>
+            <a:r>
+              <a:rPr lang="it-IT" sz="1350" b="0" i="0" u="none" strike="noStrike" cap="none" dirty="0">
+                <a:solidFill>
+                  <a:srgbClr val="CBD5E1"/>
+                </a:solidFill>
+                <a:latin typeface="Inter"/>
+                <a:ea typeface="Inter"/>
+                <a:cs typeface="Inter"/>
+                <a:sym typeface="Inter"/>
+              </a:rPr>
+              <a:t>), SVM (Kernel Cubico), </a:t>
+            </a:r>
+            <a:r>
+              <a:rPr lang="it-IT" sz="1350" b="0" i="0" u="none" strike="noStrike" cap="none" dirty="0" err="1">
+                <a:solidFill>
+                  <a:srgbClr val="CBD5E1"/>
+                </a:solidFill>
+                <a:latin typeface="Inter"/>
+                <a:ea typeface="Inter"/>
+                <a:cs typeface="Inter"/>
+                <a:sym typeface="Inter"/>
+              </a:rPr>
+              <a:t>Logistic</a:t>
+            </a:r>
+            <a:r>
+              <a:rPr lang="it-IT" sz="1350" b="0" i="0" u="none" strike="noStrike" cap="none" dirty="0">
+                <a:solidFill>
+                  <a:srgbClr val="CBD5E1"/>
+                </a:solidFill>
+                <a:latin typeface="Inter"/>
+                <a:ea typeface="Inter"/>
+                <a:cs typeface="Inter"/>
+                <a:sym typeface="Inter"/>
+              </a:rPr>
+              <a:t> </a:t>
+            </a:r>
+            <a:r>
+              <a:rPr lang="it-IT" sz="1350" b="0" i="0" u="none" strike="noStrike" cap="none" dirty="0" err="1">
+                <a:solidFill>
+                  <a:srgbClr val="CBD5E1"/>
+                </a:solidFill>
+                <a:latin typeface="Inter"/>
+                <a:ea typeface="Inter"/>
+                <a:cs typeface="Inter"/>
+                <a:sym typeface="Inter"/>
+              </a:rPr>
+              <a:t>Regression</a:t>
+            </a:r>
+            <a:r>
+              <a:rPr lang="it-IT" sz="1350" b="0" i="0" u="none" strike="noStrike" cap="none" dirty="0">
+                <a:solidFill>
+                  <a:srgbClr val="CBD5E1"/>
+                </a:solidFill>
+                <a:latin typeface="Inter"/>
+                <a:ea typeface="Inter"/>
+                <a:cs typeface="Inter"/>
+                <a:sym typeface="Inter"/>
+              </a:rPr>
+              <a:t>, </a:t>
+            </a:r>
+            <a:r>
+              <a:rPr lang="it-IT" sz="1350" b="0" i="0" u="none" strike="noStrike" cap="none" dirty="0" err="1">
+                <a:solidFill>
+                  <a:srgbClr val="CBD5E1"/>
+                </a:solidFill>
+                <a:latin typeface="Inter"/>
+                <a:ea typeface="Inter"/>
+                <a:cs typeface="Inter"/>
+                <a:sym typeface="Inter"/>
+              </a:rPr>
+              <a:t>RUSBoost</a:t>
+            </a:r>
+            <a:r>
+              <a:rPr lang="it-IT" sz="1350" b="0" i="0" u="none" strike="noStrike" cap="none" dirty="0">
+                <a:solidFill>
+                  <a:srgbClr val="CBD5E1"/>
+                </a:solidFill>
+                <a:latin typeface="Inter"/>
+                <a:ea typeface="Inter"/>
+                <a:cs typeface="Inter"/>
+                <a:sym typeface="Inter"/>
+              </a:rPr>
+              <a:t> (150 cicli, 15 </a:t>
+            </a:r>
+            <a:r>
+              <a:rPr lang="it-IT" sz="1350" b="0" i="0" u="none" strike="noStrike" cap="none" dirty="0" err="1">
+                <a:solidFill>
+                  <a:srgbClr val="CBD5E1"/>
+                </a:solidFill>
+                <a:latin typeface="Inter"/>
+                <a:ea typeface="Inter"/>
+                <a:cs typeface="Inter"/>
+                <a:sym typeface="Inter"/>
+              </a:rPr>
+              <a:t>Splits</a:t>
+            </a:r>
+            <a:r>
+              <a:rPr lang="it-IT" sz="1350" b="0" i="0" u="none" strike="noStrike" cap="none" dirty="0">
+                <a:solidFill>
+                  <a:srgbClr val="CBD5E1"/>
+                </a:solidFill>
+                <a:latin typeface="Inter"/>
+                <a:ea typeface="Inter"/>
+                <a:cs typeface="Inter"/>
+                <a:sym typeface="Inter"/>
+              </a:rPr>
+              <a:t>)</a:t>
+            </a:r>
+            <a:endParaRPr lang="it-IT" dirty="0"/>
+          </a:p>
+        </p:txBody>
+      </p:sp>
+      <p:sp>
+        <p:nvSpPr>
+          <p:cNvPr id="6" name="Google Shape;242;p23">
+            <a:extLst>
+              <a:ext uri="{FF2B5EF4-FFF2-40B4-BE49-F238E27FC236}">
+                <a16:creationId xmlns:a16="http://schemas.microsoft.com/office/drawing/2014/main" id="{68542087-848E-15F3-1DDB-6384011945E2}"/>
+              </a:ext>
+            </a:extLst>
+          </p:cNvPr>
+          <p:cNvSpPr txBox="1"/>
+          <p:nvPr/>
+        </p:nvSpPr>
+        <p:spPr>
+          <a:xfrm>
+            <a:off x="486507" y="4502947"/>
+            <a:ext cx="2290257" cy="323165"/>
+          </a:xfrm>
+          <a:prstGeom prst="rect">
+            <a:avLst/>
+          </a:prstGeom>
+          <a:noFill/>
+          <a:ln>
+            <a:noFill/>
+          </a:ln>
+        </p:spPr>
+        <p:txBody>
+          <a:bodyPr spcFirstLastPara="1" wrap="square" lIns="0" tIns="0" rIns="0" bIns="0" anchor="t" anchorCtr="0">
+            <a:spAutoFit/>
+          </a:bodyPr>
+          <a:lstStyle/>
+          <a:p>
+            <a:pPr marL="0" marR="0" lvl="0" indent="0" algn="l" rtl="0">
+              <a:spcBef>
+                <a:spcPts val="0"/>
+              </a:spcBef>
+              <a:spcAft>
+                <a:spcPts val="0"/>
+              </a:spcAft>
+              <a:buNone/>
+            </a:pPr>
+            <a:r>
+              <a:rPr lang="en-US" sz="2100" b="0" i="0" u="none" strike="noStrike" cap="none" dirty="0">
+                <a:solidFill>
+                  <a:srgbClr val="38BDF8"/>
+                </a:solidFill>
+                <a:latin typeface="Poppins Medium"/>
+                <a:ea typeface="Poppins Medium"/>
+                <a:cs typeface="Poppins Medium"/>
+                <a:sym typeface="Poppins Medium"/>
+              </a:rPr>
+              <a:t>Stress</a:t>
+            </a:r>
+            <a:endParaRPr dirty="0"/>
+          </a:p>
+        </p:txBody>
+      </p:sp>
+      <p:sp>
+        <p:nvSpPr>
+          <p:cNvPr id="7" name="Google Shape;244;p23">
+            <a:extLst>
+              <a:ext uri="{FF2B5EF4-FFF2-40B4-BE49-F238E27FC236}">
+                <a16:creationId xmlns:a16="http://schemas.microsoft.com/office/drawing/2014/main" id="{C993AE8B-39B2-2D3F-9457-8A6819195AC5}"/>
+              </a:ext>
+            </a:extLst>
+          </p:cNvPr>
+          <p:cNvSpPr txBox="1"/>
+          <p:nvPr/>
+        </p:nvSpPr>
+        <p:spPr>
+          <a:xfrm>
+            <a:off x="486507" y="4900372"/>
+            <a:ext cx="2918329" cy="997196"/>
+          </a:xfrm>
+          <a:prstGeom prst="rect">
+            <a:avLst/>
+          </a:prstGeom>
+          <a:noFill/>
+          <a:ln>
+            <a:noFill/>
+          </a:ln>
+        </p:spPr>
+        <p:txBody>
+          <a:bodyPr spcFirstLastPara="1" wrap="square" lIns="0" tIns="0" rIns="0" bIns="0" anchor="t" anchorCtr="0">
+            <a:spAutoFit/>
+          </a:bodyPr>
+          <a:lstStyle/>
+          <a:p>
+            <a:pPr lvl="0">
+              <a:lnSpc>
+                <a:spcPct val="120000"/>
+              </a:lnSpc>
+            </a:pPr>
+            <a:r>
+              <a:rPr lang="en-US" sz="1350" b="1" dirty="0" err="1">
+                <a:solidFill>
+                  <a:schemeClr val="accent3">
+                    <a:lumMod val="40000"/>
+                    <a:lumOff val="60000"/>
+                  </a:schemeClr>
+                </a:solidFill>
+                <a:latin typeface="Inter"/>
+                <a:ea typeface="Inter"/>
+                <a:cs typeface="Inter"/>
+                <a:sym typeface="Inter"/>
+              </a:rPr>
+              <a:t>Accuratezza</a:t>
+            </a:r>
+            <a:r>
+              <a:rPr lang="en-US" sz="1350" b="1" dirty="0">
+                <a:solidFill>
+                  <a:schemeClr val="accent3">
+                    <a:lumMod val="40000"/>
+                    <a:lumOff val="60000"/>
+                  </a:schemeClr>
+                </a:solidFill>
+                <a:latin typeface="Inter"/>
+                <a:ea typeface="Inter"/>
+                <a:cs typeface="Inter"/>
+                <a:sym typeface="Inter"/>
+              </a:rPr>
+              <a:t>:</a:t>
+            </a:r>
+            <a:r>
+              <a:rPr lang="en-US" sz="1350" dirty="0">
+                <a:solidFill>
+                  <a:schemeClr val="accent3">
+                    <a:lumMod val="40000"/>
+                    <a:lumOff val="60000"/>
+                  </a:schemeClr>
+                </a:solidFill>
+                <a:latin typeface="Inter"/>
+                <a:ea typeface="Inter"/>
+                <a:cs typeface="Inter"/>
+                <a:sym typeface="Inter"/>
+              </a:rPr>
+              <a:t> </a:t>
+            </a:r>
+            <a:r>
+              <a:rPr lang="en-US" sz="1350" dirty="0">
+                <a:solidFill>
+                  <a:schemeClr val="bg1">
+                    <a:lumMod val="85000"/>
+                  </a:schemeClr>
+                </a:solidFill>
+                <a:latin typeface="Inter"/>
+                <a:ea typeface="Inter"/>
+                <a:cs typeface="Inter"/>
+                <a:sym typeface="Inter"/>
+              </a:rPr>
+              <a:t>74.91%</a:t>
             </a:r>
             <a:endParaRPr lang="en-US" sz="1350" b="1" dirty="0">
               <a:solidFill>
@@ -12785,6 +13540,884 @@
               </a:spcAft>
               <a:buNone/>
             </a:pPr>
+            <a:r>
+              <a:rPr lang="en-US" sz="1350" b="1" i="0" u="none" strike="noStrike" cap="none" dirty="0" err="1">
+                <a:solidFill>
+                  <a:schemeClr val="bg2">
+                    <a:lumMod val="20000"/>
+                    <a:lumOff val="80000"/>
+                  </a:schemeClr>
+                </a:solidFill>
+                <a:latin typeface="Inter"/>
+                <a:ea typeface="Inter"/>
+                <a:cs typeface="Inter"/>
+                <a:sym typeface="Inter"/>
+              </a:rPr>
+              <a:t>Precisione</a:t>
+            </a:r>
+            <a:r>
+              <a:rPr lang="en-US" sz="1350" b="1" i="0" u="none" strike="noStrike" cap="none" dirty="0">
+                <a:solidFill>
+                  <a:schemeClr val="bg2">
+                    <a:lumMod val="20000"/>
+                    <a:lumOff val="80000"/>
+                  </a:schemeClr>
+                </a:solidFill>
+                <a:latin typeface="Inter"/>
+                <a:ea typeface="Inter"/>
+                <a:cs typeface="Inter"/>
+                <a:sym typeface="Inter"/>
+              </a:rPr>
+              <a:t>:</a:t>
+            </a:r>
+            <a:r>
+              <a:rPr lang="en-US" sz="1350" b="0" i="0" u="none" strike="noStrike" cap="none" dirty="0">
+                <a:solidFill>
+                  <a:schemeClr val="bg2">
+                    <a:lumMod val="20000"/>
+                    <a:lumOff val="80000"/>
+                  </a:schemeClr>
+                </a:solidFill>
+                <a:latin typeface="Inter"/>
+                <a:ea typeface="Inter"/>
+                <a:cs typeface="Inter"/>
+                <a:sym typeface="Inter"/>
+              </a:rPr>
+              <a:t> </a:t>
+            </a:r>
+            <a:r>
+              <a:rPr lang="en-US" sz="1350" dirty="0">
+                <a:solidFill>
+                  <a:schemeClr val="bg1">
+                    <a:lumMod val="85000"/>
+                  </a:schemeClr>
+                </a:solidFill>
+                <a:latin typeface="Inter"/>
+                <a:ea typeface="Inter"/>
+                <a:cs typeface="Inter"/>
+                <a:sym typeface="Inter"/>
+              </a:rPr>
+              <a:t>77</a:t>
+            </a:r>
+            <a:r>
+              <a:rPr lang="en-US" sz="1350" b="0" i="0" u="none" strike="noStrike" cap="none" dirty="0">
+                <a:solidFill>
+                  <a:schemeClr val="bg1">
+                    <a:lumMod val="85000"/>
+                  </a:schemeClr>
+                </a:solidFill>
+                <a:latin typeface="Inter"/>
+                <a:ea typeface="Inter"/>
+                <a:cs typeface="Inter"/>
+                <a:sym typeface="Inter"/>
+              </a:rPr>
+              <a:t>%</a:t>
+            </a:r>
+            <a:br>
+              <a:rPr lang="en-US" sz="1800" b="0" i="0" u="none" strike="noStrike" cap="none" dirty="0">
+                <a:solidFill>
+                  <a:schemeClr val="dk1"/>
+                </a:solidFill>
+                <a:latin typeface="Calibri"/>
+                <a:ea typeface="Calibri"/>
+                <a:cs typeface="Calibri"/>
+                <a:sym typeface="Calibri"/>
+              </a:rPr>
+            </a:br>
+            <a:r>
+              <a:rPr lang="en-US" sz="1350" b="1" i="0" u="none" strike="noStrike" cap="none" dirty="0">
+                <a:solidFill>
+                  <a:schemeClr val="bg2">
+                    <a:lumMod val="20000"/>
+                    <a:lumOff val="80000"/>
+                  </a:schemeClr>
+                </a:solidFill>
+                <a:latin typeface="Inter"/>
+                <a:ea typeface="Inter"/>
+                <a:cs typeface="Inter"/>
+                <a:sym typeface="Inter"/>
+              </a:rPr>
+              <a:t>Recall:</a:t>
+            </a:r>
+            <a:r>
+              <a:rPr lang="en-US" sz="1350" b="0" i="0" u="none" strike="noStrike" cap="none" dirty="0">
+                <a:solidFill>
+                  <a:schemeClr val="bg2">
+                    <a:lumMod val="20000"/>
+                    <a:lumOff val="80000"/>
+                  </a:schemeClr>
+                </a:solidFill>
+                <a:latin typeface="Inter"/>
+                <a:ea typeface="Inter"/>
+                <a:cs typeface="Inter"/>
+                <a:sym typeface="Inter"/>
+              </a:rPr>
+              <a:t> </a:t>
+            </a:r>
+            <a:r>
+              <a:rPr lang="en-US" sz="1350" b="0" i="0" u="none" strike="noStrike" cap="none" dirty="0">
+                <a:solidFill>
+                  <a:schemeClr val="bg1">
+                    <a:lumMod val="85000"/>
+                  </a:schemeClr>
+                </a:solidFill>
+                <a:latin typeface="Inter"/>
+                <a:ea typeface="Inter"/>
+                <a:cs typeface="Inter"/>
+                <a:sym typeface="Inter"/>
+              </a:rPr>
+              <a:t>88%</a:t>
+            </a:r>
+            <a:br>
+              <a:rPr lang="en-US" sz="1800" b="0" i="0" u="none" strike="noStrike" cap="none" dirty="0">
+                <a:solidFill>
+                  <a:schemeClr val="dk1"/>
+                </a:solidFill>
+                <a:latin typeface="Calibri"/>
+                <a:ea typeface="Calibri"/>
+                <a:cs typeface="Calibri"/>
+                <a:sym typeface="Calibri"/>
+              </a:rPr>
+            </a:br>
+            <a:r>
+              <a:rPr lang="en-US" sz="1350" b="1" i="0" u="none" strike="noStrike" cap="none" dirty="0">
+                <a:solidFill>
+                  <a:schemeClr val="bg2">
+                    <a:lumMod val="20000"/>
+                    <a:lumOff val="80000"/>
+                  </a:schemeClr>
+                </a:solidFill>
+                <a:latin typeface="Inter"/>
+                <a:ea typeface="Inter"/>
+                <a:cs typeface="Inter"/>
+                <a:sym typeface="Inter"/>
+              </a:rPr>
+              <a:t>F1-Score:</a:t>
+            </a:r>
+            <a:r>
+              <a:rPr lang="en-US" sz="1350" b="0" i="0" u="none" strike="noStrike" cap="none" dirty="0">
+                <a:solidFill>
+                  <a:schemeClr val="bg2">
+                    <a:lumMod val="20000"/>
+                    <a:lumOff val="80000"/>
+                  </a:schemeClr>
+                </a:solidFill>
+                <a:latin typeface="Inter"/>
+                <a:ea typeface="Inter"/>
+                <a:cs typeface="Inter"/>
+                <a:sym typeface="Inter"/>
+              </a:rPr>
+              <a:t> </a:t>
+            </a:r>
+            <a:r>
+              <a:rPr lang="en-US" sz="1350" dirty="0">
+                <a:solidFill>
+                  <a:schemeClr val="bg1">
+                    <a:lumMod val="85000"/>
+                  </a:schemeClr>
+                </a:solidFill>
+                <a:latin typeface="Inter"/>
+                <a:ea typeface="Inter"/>
+                <a:cs typeface="Inter"/>
+                <a:sym typeface="Inter"/>
+              </a:rPr>
+              <a:t>82</a:t>
+            </a:r>
+            <a:r>
+              <a:rPr lang="en-US" sz="1350" b="0" i="0" u="none" strike="noStrike" cap="none" dirty="0">
+                <a:solidFill>
+                  <a:schemeClr val="bg1">
+                    <a:lumMod val="85000"/>
+                  </a:schemeClr>
+                </a:solidFill>
+                <a:latin typeface="Inter"/>
+                <a:ea typeface="Inter"/>
+                <a:cs typeface="Inter"/>
+                <a:sym typeface="Inter"/>
+              </a:rPr>
+              <a:t>%</a:t>
+            </a:r>
+          </a:p>
+        </p:txBody>
+      </p:sp>
+      <p:sp>
+        <p:nvSpPr>
+          <p:cNvPr id="15" name="Google Shape;242;p23">
+            <a:extLst>
+              <a:ext uri="{FF2B5EF4-FFF2-40B4-BE49-F238E27FC236}">
+                <a16:creationId xmlns:a16="http://schemas.microsoft.com/office/drawing/2014/main" id="{19CF970C-83E2-28D5-60F6-A997C0F054E4}"/>
+              </a:ext>
+            </a:extLst>
+          </p:cNvPr>
+          <p:cNvSpPr txBox="1"/>
+          <p:nvPr/>
+        </p:nvSpPr>
+        <p:spPr>
+          <a:xfrm>
+            <a:off x="486507" y="4193825"/>
+            <a:ext cx="2290257" cy="323165"/>
+          </a:xfrm>
+          <a:prstGeom prst="rect">
+            <a:avLst/>
+          </a:prstGeom>
+          <a:noFill/>
+          <a:ln>
+            <a:noFill/>
+          </a:ln>
+        </p:spPr>
+        <p:txBody>
+          <a:bodyPr spcFirstLastPara="1" wrap="square" lIns="0" tIns="0" rIns="0" bIns="0" anchor="t" anchorCtr="0">
+            <a:spAutoFit/>
+          </a:bodyPr>
+          <a:lstStyle/>
+          <a:p>
+            <a:pPr marL="0" marR="0" lvl="0" indent="0" algn="l" rtl="0">
+              <a:spcBef>
+                <a:spcPts val="0"/>
+              </a:spcBef>
+              <a:spcAft>
+                <a:spcPts val="0"/>
+              </a:spcAft>
+              <a:buNone/>
+            </a:pPr>
+            <a:r>
+              <a:rPr lang="en-US" sz="2100" b="1" i="0" u="none" strike="noStrike" cap="none" dirty="0">
+                <a:solidFill>
+                  <a:srgbClr val="38BDF8"/>
+                </a:solidFill>
+                <a:latin typeface="Poppins Medium"/>
+                <a:ea typeface="Poppins Medium"/>
+                <a:cs typeface="Poppins Medium"/>
+                <a:sym typeface="Poppins Medium"/>
+              </a:rPr>
+              <a:t>Random Forest</a:t>
+            </a:r>
+            <a:endParaRPr b="1" dirty="0"/>
+          </a:p>
+        </p:txBody>
+      </p:sp>
+      <p:sp>
+        <p:nvSpPr>
+          <p:cNvPr id="16" name="Google Shape;242;p23">
+            <a:extLst>
+              <a:ext uri="{FF2B5EF4-FFF2-40B4-BE49-F238E27FC236}">
+                <a16:creationId xmlns:a16="http://schemas.microsoft.com/office/drawing/2014/main" id="{64845E2F-7DCC-0985-E059-DAD73C3159EF}"/>
+              </a:ext>
+            </a:extLst>
+          </p:cNvPr>
+          <p:cNvSpPr txBox="1"/>
+          <p:nvPr/>
+        </p:nvSpPr>
+        <p:spPr>
+          <a:xfrm>
+            <a:off x="3315589" y="4515872"/>
+            <a:ext cx="2290257" cy="323165"/>
+          </a:xfrm>
+          <a:prstGeom prst="rect">
+            <a:avLst/>
+          </a:prstGeom>
+          <a:noFill/>
+          <a:ln>
+            <a:noFill/>
+          </a:ln>
+        </p:spPr>
+        <p:txBody>
+          <a:bodyPr spcFirstLastPara="1" wrap="square" lIns="0" tIns="0" rIns="0" bIns="0" anchor="t" anchorCtr="0">
+            <a:spAutoFit/>
+          </a:bodyPr>
+          <a:lstStyle/>
+          <a:p>
+            <a:pPr marL="0" marR="0" lvl="0" indent="0" algn="l" rtl="0">
+              <a:spcBef>
+                <a:spcPts val="0"/>
+              </a:spcBef>
+              <a:spcAft>
+                <a:spcPts val="0"/>
+              </a:spcAft>
+              <a:buNone/>
+            </a:pPr>
+            <a:r>
+              <a:rPr lang="en-US" sz="2100" b="0" i="0" u="none" strike="noStrike" cap="none" dirty="0">
+                <a:solidFill>
+                  <a:srgbClr val="38BDF8"/>
+                </a:solidFill>
+                <a:latin typeface="Poppins Medium"/>
+                <a:ea typeface="Poppins Medium"/>
+                <a:cs typeface="Poppins Medium"/>
+                <a:sym typeface="Poppins Medium"/>
+              </a:rPr>
+              <a:t>Stress</a:t>
+            </a:r>
+            <a:endParaRPr dirty="0"/>
+          </a:p>
+        </p:txBody>
+      </p:sp>
+      <p:sp>
+        <p:nvSpPr>
+          <p:cNvPr id="17" name="Google Shape;244;p23">
+            <a:extLst>
+              <a:ext uri="{FF2B5EF4-FFF2-40B4-BE49-F238E27FC236}">
+                <a16:creationId xmlns:a16="http://schemas.microsoft.com/office/drawing/2014/main" id="{9C5FA7D9-9000-3A53-4C50-0075A48D0216}"/>
+              </a:ext>
+            </a:extLst>
+          </p:cNvPr>
+          <p:cNvSpPr txBox="1"/>
+          <p:nvPr/>
+        </p:nvSpPr>
+        <p:spPr>
+          <a:xfrm>
+            <a:off x="3315589" y="4907638"/>
+            <a:ext cx="2918329" cy="997196"/>
+          </a:xfrm>
+          <a:prstGeom prst="rect">
+            <a:avLst/>
+          </a:prstGeom>
+          <a:noFill/>
+          <a:ln>
+            <a:noFill/>
+          </a:ln>
+        </p:spPr>
+        <p:txBody>
+          <a:bodyPr spcFirstLastPara="1" wrap="square" lIns="0" tIns="0" rIns="0" bIns="0" anchor="t" anchorCtr="0">
+            <a:spAutoFit/>
+          </a:bodyPr>
+          <a:lstStyle/>
+          <a:p>
+            <a:pPr>
+              <a:lnSpc>
+                <a:spcPct val="120000"/>
+              </a:lnSpc>
+            </a:pPr>
+            <a:r>
+              <a:rPr lang="en-US" sz="1350" b="1" dirty="0" err="1">
+                <a:solidFill>
+                  <a:schemeClr val="accent3">
+                    <a:lumMod val="40000"/>
+                    <a:lumOff val="60000"/>
+                  </a:schemeClr>
+                </a:solidFill>
+                <a:latin typeface="Inter"/>
+                <a:ea typeface="Inter"/>
+                <a:cs typeface="Inter"/>
+                <a:sym typeface="Inter"/>
+              </a:rPr>
+              <a:t>Accuratezza</a:t>
+            </a:r>
+            <a:r>
+              <a:rPr lang="en-US" sz="1350" b="1" dirty="0">
+                <a:solidFill>
+                  <a:schemeClr val="accent3">
+                    <a:lumMod val="40000"/>
+                    <a:lumOff val="60000"/>
+                  </a:schemeClr>
+                </a:solidFill>
+                <a:latin typeface="Inter"/>
+                <a:ea typeface="Inter"/>
+                <a:cs typeface="Inter"/>
+                <a:sym typeface="Inter"/>
+              </a:rPr>
+              <a:t>:</a:t>
+            </a:r>
+            <a:r>
+              <a:rPr lang="en-US" sz="1350" dirty="0">
+                <a:solidFill>
+                  <a:schemeClr val="accent3">
+                    <a:lumMod val="40000"/>
+                    <a:lumOff val="60000"/>
+                  </a:schemeClr>
+                </a:solidFill>
+                <a:latin typeface="Inter"/>
+                <a:ea typeface="Inter"/>
+                <a:cs typeface="Inter"/>
+                <a:sym typeface="Inter"/>
+              </a:rPr>
+              <a:t> </a:t>
+            </a:r>
+            <a:r>
+              <a:rPr lang="en-US" sz="1350" dirty="0">
+                <a:solidFill>
+                  <a:schemeClr val="bg1">
+                    <a:lumMod val="85000"/>
+                  </a:schemeClr>
+                </a:solidFill>
+                <a:latin typeface="Inter"/>
+                <a:ea typeface="Inter"/>
+                <a:cs typeface="Inter"/>
+                <a:sym typeface="Inter"/>
+              </a:rPr>
+              <a:t>74.16%</a:t>
+            </a:r>
+            <a:endParaRPr lang="en-US" sz="1350" b="1" dirty="0">
+              <a:solidFill>
+                <a:schemeClr val="bg2">
+                  <a:lumMod val="20000"/>
+                  <a:lumOff val="80000"/>
+                </a:schemeClr>
+              </a:solidFill>
+              <a:latin typeface="Inter"/>
+              <a:ea typeface="Inter"/>
+              <a:cs typeface="Inter"/>
+              <a:sym typeface="Inter"/>
+            </a:endParaRPr>
+          </a:p>
+          <a:p>
+            <a:pPr marL="0" marR="0" lvl="0" indent="0" algn="l" rtl="0">
+              <a:lnSpc>
+                <a:spcPct val="120000"/>
+              </a:lnSpc>
+              <a:spcBef>
+                <a:spcPts val="0"/>
+              </a:spcBef>
+              <a:spcAft>
+                <a:spcPts val="0"/>
+              </a:spcAft>
+              <a:buNone/>
+            </a:pPr>
+            <a:r>
+              <a:rPr lang="en-US" sz="1350" b="1" i="0" u="none" strike="noStrike" cap="none" dirty="0" err="1">
+                <a:solidFill>
+                  <a:schemeClr val="bg2">
+                    <a:lumMod val="20000"/>
+                    <a:lumOff val="80000"/>
+                  </a:schemeClr>
+                </a:solidFill>
+                <a:latin typeface="Inter"/>
+                <a:ea typeface="Inter"/>
+                <a:cs typeface="Inter"/>
+                <a:sym typeface="Inter"/>
+              </a:rPr>
+              <a:t>Precisione</a:t>
+            </a:r>
+            <a:r>
+              <a:rPr lang="en-US" sz="1350" b="1" i="0" u="none" strike="noStrike" cap="none" dirty="0">
+                <a:solidFill>
+                  <a:schemeClr val="bg2">
+                    <a:lumMod val="20000"/>
+                    <a:lumOff val="80000"/>
+                  </a:schemeClr>
+                </a:solidFill>
+                <a:latin typeface="Inter"/>
+                <a:ea typeface="Inter"/>
+                <a:cs typeface="Inter"/>
+                <a:sym typeface="Inter"/>
+              </a:rPr>
+              <a:t>:</a:t>
+            </a:r>
+            <a:r>
+              <a:rPr lang="en-US" sz="1350" b="0" i="0" u="none" strike="noStrike" cap="none" dirty="0">
+                <a:solidFill>
+                  <a:schemeClr val="bg2">
+                    <a:lumMod val="20000"/>
+                    <a:lumOff val="80000"/>
+                  </a:schemeClr>
+                </a:solidFill>
+                <a:latin typeface="Inter"/>
+                <a:ea typeface="Inter"/>
+                <a:cs typeface="Inter"/>
+                <a:sym typeface="Inter"/>
+              </a:rPr>
+              <a:t> </a:t>
+            </a:r>
+            <a:r>
+              <a:rPr lang="en-US" sz="1350" dirty="0">
+                <a:solidFill>
+                  <a:schemeClr val="bg1">
+                    <a:lumMod val="85000"/>
+                  </a:schemeClr>
+                </a:solidFill>
+                <a:latin typeface="Inter"/>
+                <a:ea typeface="Inter"/>
+                <a:cs typeface="Inter"/>
+                <a:sym typeface="Inter"/>
+              </a:rPr>
+              <a:t>75</a:t>
+            </a:r>
+            <a:r>
+              <a:rPr lang="en-US" sz="1350" b="0" i="0" u="none" strike="noStrike" cap="none" dirty="0">
+                <a:solidFill>
+                  <a:schemeClr val="bg1">
+                    <a:lumMod val="85000"/>
+                  </a:schemeClr>
+                </a:solidFill>
+                <a:latin typeface="Inter"/>
+                <a:ea typeface="Inter"/>
+                <a:cs typeface="Inter"/>
+                <a:sym typeface="Inter"/>
+              </a:rPr>
+              <a:t>%</a:t>
+            </a:r>
+            <a:br>
+              <a:rPr lang="en-US" sz="1800" b="0" i="0" u="none" strike="noStrike" cap="none" dirty="0">
+                <a:solidFill>
+                  <a:schemeClr val="dk1"/>
+                </a:solidFill>
+                <a:latin typeface="Calibri"/>
+                <a:ea typeface="Calibri"/>
+                <a:cs typeface="Calibri"/>
+                <a:sym typeface="Calibri"/>
+              </a:rPr>
+            </a:br>
+            <a:r>
+              <a:rPr lang="en-US" sz="1350" b="1" i="0" u="none" strike="noStrike" cap="none" dirty="0">
+                <a:solidFill>
+                  <a:schemeClr val="bg2">
+                    <a:lumMod val="20000"/>
+                    <a:lumOff val="80000"/>
+                  </a:schemeClr>
+                </a:solidFill>
+                <a:latin typeface="Inter"/>
+                <a:ea typeface="Inter"/>
+                <a:cs typeface="Inter"/>
+                <a:sym typeface="Inter"/>
+              </a:rPr>
+              <a:t>Recall:</a:t>
+            </a:r>
+            <a:r>
+              <a:rPr lang="en-US" sz="1350" b="0" i="0" u="none" strike="noStrike" cap="none" dirty="0">
+                <a:solidFill>
+                  <a:schemeClr val="bg2">
+                    <a:lumMod val="20000"/>
+                    <a:lumOff val="80000"/>
+                  </a:schemeClr>
+                </a:solidFill>
+                <a:latin typeface="Inter"/>
+                <a:ea typeface="Inter"/>
+                <a:cs typeface="Inter"/>
+                <a:sym typeface="Inter"/>
+              </a:rPr>
+              <a:t> </a:t>
+            </a:r>
+            <a:r>
+              <a:rPr lang="en-US" sz="1350" dirty="0">
+                <a:solidFill>
+                  <a:schemeClr val="bg1">
+                    <a:lumMod val="85000"/>
+                  </a:schemeClr>
+                </a:solidFill>
+                <a:latin typeface="Inter"/>
+                <a:ea typeface="Inter"/>
+                <a:cs typeface="Inter"/>
+                <a:sym typeface="Inter"/>
+              </a:rPr>
+              <a:t>90</a:t>
+            </a:r>
+            <a:r>
+              <a:rPr lang="en-US" sz="1350" b="0" i="0" u="none" strike="noStrike" cap="none" dirty="0">
+                <a:solidFill>
+                  <a:schemeClr val="bg1">
+                    <a:lumMod val="85000"/>
+                  </a:schemeClr>
+                </a:solidFill>
+                <a:latin typeface="Inter"/>
+                <a:ea typeface="Inter"/>
+                <a:cs typeface="Inter"/>
+                <a:sym typeface="Inter"/>
+              </a:rPr>
+              <a:t>%</a:t>
+            </a:r>
+            <a:br>
+              <a:rPr lang="en-US" sz="1800" b="0" i="0" u="none" strike="noStrike" cap="none" dirty="0">
+                <a:solidFill>
+                  <a:schemeClr val="dk1"/>
+                </a:solidFill>
+                <a:latin typeface="Calibri"/>
+                <a:ea typeface="Calibri"/>
+                <a:cs typeface="Calibri"/>
+                <a:sym typeface="Calibri"/>
+              </a:rPr>
+            </a:br>
+            <a:r>
+              <a:rPr lang="en-US" sz="1350" b="1" i="0" u="none" strike="noStrike" cap="none" dirty="0">
+                <a:solidFill>
+                  <a:schemeClr val="bg2">
+                    <a:lumMod val="20000"/>
+                    <a:lumOff val="80000"/>
+                  </a:schemeClr>
+                </a:solidFill>
+                <a:latin typeface="Inter"/>
+                <a:ea typeface="Inter"/>
+                <a:cs typeface="Inter"/>
+                <a:sym typeface="Inter"/>
+              </a:rPr>
+              <a:t>F1-Score:</a:t>
+            </a:r>
+            <a:r>
+              <a:rPr lang="en-US" sz="1350" b="0" i="0" u="none" strike="noStrike" cap="none" dirty="0">
+                <a:solidFill>
+                  <a:schemeClr val="bg2">
+                    <a:lumMod val="20000"/>
+                    <a:lumOff val="80000"/>
+                  </a:schemeClr>
+                </a:solidFill>
+                <a:latin typeface="Inter"/>
+                <a:ea typeface="Inter"/>
+                <a:cs typeface="Inter"/>
+                <a:sym typeface="Inter"/>
+              </a:rPr>
+              <a:t> </a:t>
+            </a:r>
+            <a:r>
+              <a:rPr lang="en-US" sz="1350" dirty="0">
+                <a:solidFill>
+                  <a:schemeClr val="bg1">
+                    <a:lumMod val="85000"/>
+                  </a:schemeClr>
+                </a:solidFill>
+                <a:latin typeface="Inter"/>
+                <a:ea typeface="Inter"/>
+                <a:cs typeface="Inter"/>
+                <a:sym typeface="Inter"/>
+              </a:rPr>
+              <a:t>82</a:t>
+            </a:r>
+            <a:r>
+              <a:rPr lang="en-US" sz="1350" b="0" i="0" u="none" strike="noStrike" cap="none" dirty="0">
+                <a:solidFill>
+                  <a:schemeClr val="bg1">
+                    <a:lumMod val="85000"/>
+                  </a:schemeClr>
+                </a:solidFill>
+                <a:latin typeface="Inter"/>
+                <a:ea typeface="Inter"/>
+                <a:cs typeface="Inter"/>
+                <a:sym typeface="Inter"/>
+              </a:rPr>
+              <a:t>%</a:t>
+            </a:r>
+          </a:p>
+        </p:txBody>
+      </p:sp>
+      <p:sp>
+        <p:nvSpPr>
+          <p:cNvPr id="18" name="Google Shape;242;p23">
+            <a:extLst>
+              <a:ext uri="{FF2B5EF4-FFF2-40B4-BE49-F238E27FC236}">
+                <a16:creationId xmlns:a16="http://schemas.microsoft.com/office/drawing/2014/main" id="{9978A342-2A96-7717-809E-C1FE390BF954}"/>
+              </a:ext>
+            </a:extLst>
+          </p:cNvPr>
+          <p:cNvSpPr txBox="1"/>
+          <p:nvPr/>
+        </p:nvSpPr>
+        <p:spPr>
+          <a:xfrm>
+            <a:off x="3315590" y="4193825"/>
+            <a:ext cx="2290257" cy="323165"/>
+          </a:xfrm>
+          <a:prstGeom prst="rect">
+            <a:avLst/>
+          </a:prstGeom>
+          <a:noFill/>
+          <a:ln>
+            <a:noFill/>
+          </a:ln>
+        </p:spPr>
+        <p:txBody>
+          <a:bodyPr spcFirstLastPara="1" wrap="square" lIns="0" tIns="0" rIns="0" bIns="0" anchor="t" anchorCtr="0">
+            <a:spAutoFit/>
+          </a:bodyPr>
+          <a:lstStyle/>
+          <a:p>
+            <a:pPr marL="0" marR="0" lvl="0" indent="0" algn="l" rtl="0">
+              <a:spcBef>
+                <a:spcPts val="0"/>
+              </a:spcBef>
+              <a:spcAft>
+                <a:spcPts val="0"/>
+              </a:spcAft>
+              <a:buNone/>
+            </a:pPr>
+            <a:r>
+              <a:rPr lang="en-US" sz="2100" b="1" i="0" u="none" strike="noStrike" cap="none" dirty="0">
+                <a:solidFill>
+                  <a:srgbClr val="38BDF8"/>
+                </a:solidFill>
+                <a:latin typeface="Poppins Medium"/>
+                <a:ea typeface="Poppins Medium"/>
+                <a:cs typeface="Poppins Medium"/>
+                <a:sym typeface="Poppins Medium"/>
+              </a:rPr>
+              <a:t>SVM (</a:t>
+            </a:r>
+            <a:r>
+              <a:rPr lang="en-US" sz="2100" b="1" i="0" u="none" strike="noStrike" cap="none" dirty="0" err="1">
+                <a:solidFill>
+                  <a:srgbClr val="38BDF8"/>
+                </a:solidFill>
+                <a:latin typeface="Poppins Medium"/>
+                <a:ea typeface="Poppins Medium"/>
+                <a:cs typeface="Poppins Medium"/>
+                <a:sym typeface="Poppins Medium"/>
+              </a:rPr>
+              <a:t>Cubica</a:t>
+            </a:r>
+            <a:r>
+              <a:rPr lang="en-US" sz="2100" b="1" i="0" u="none" strike="noStrike" cap="none" dirty="0">
+                <a:solidFill>
+                  <a:srgbClr val="38BDF8"/>
+                </a:solidFill>
+                <a:latin typeface="Poppins Medium"/>
+                <a:ea typeface="Poppins Medium"/>
+                <a:cs typeface="Poppins Medium"/>
+                <a:sym typeface="Poppins Medium"/>
+              </a:rPr>
+              <a:t>)</a:t>
+            </a:r>
+            <a:endParaRPr b="1" dirty="0"/>
+          </a:p>
+        </p:txBody>
+      </p:sp>
+      <p:sp>
+        <p:nvSpPr>
+          <p:cNvPr id="19" name="Google Shape;242;p23">
+            <a:extLst>
+              <a:ext uri="{FF2B5EF4-FFF2-40B4-BE49-F238E27FC236}">
+                <a16:creationId xmlns:a16="http://schemas.microsoft.com/office/drawing/2014/main" id="{EB065E2A-212A-B233-748D-4B3A28366D58}"/>
+              </a:ext>
+            </a:extLst>
+          </p:cNvPr>
+          <p:cNvSpPr txBox="1"/>
+          <p:nvPr/>
+        </p:nvSpPr>
+        <p:spPr>
+          <a:xfrm>
+            <a:off x="5886498" y="4525298"/>
+            <a:ext cx="2290257" cy="323165"/>
+          </a:xfrm>
+          <a:prstGeom prst="rect">
+            <a:avLst/>
+          </a:prstGeom>
+          <a:noFill/>
+          <a:ln>
+            <a:noFill/>
+          </a:ln>
+        </p:spPr>
+        <p:txBody>
+          <a:bodyPr spcFirstLastPara="1" wrap="square" lIns="0" tIns="0" rIns="0" bIns="0" anchor="t" anchorCtr="0">
+            <a:spAutoFit/>
+          </a:bodyPr>
+          <a:lstStyle/>
+          <a:p>
+            <a:pPr marL="0" marR="0" lvl="0" indent="0" algn="l" rtl="0">
+              <a:spcBef>
+                <a:spcPts val="0"/>
+              </a:spcBef>
+              <a:spcAft>
+                <a:spcPts val="0"/>
+              </a:spcAft>
+              <a:buNone/>
+            </a:pPr>
+            <a:r>
+              <a:rPr lang="en-US" sz="2100" b="0" i="0" u="none" strike="noStrike" cap="none" dirty="0">
+                <a:solidFill>
+                  <a:srgbClr val="38BDF8"/>
+                </a:solidFill>
+                <a:latin typeface="Poppins Medium"/>
+                <a:ea typeface="Poppins Medium"/>
+                <a:cs typeface="Poppins Medium"/>
+                <a:sym typeface="Poppins Medium"/>
+              </a:rPr>
+              <a:t>Stress</a:t>
+            </a:r>
+            <a:endParaRPr dirty="0"/>
+          </a:p>
+        </p:txBody>
+      </p:sp>
+      <p:sp>
+        <p:nvSpPr>
+          <p:cNvPr id="20" name="Google Shape;244;p23">
+            <a:extLst>
+              <a:ext uri="{FF2B5EF4-FFF2-40B4-BE49-F238E27FC236}">
+                <a16:creationId xmlns:a16="http://schemas.microsoft.com/office/drawing/2014/main" id="{AEA4055E-A3DC-15E1-679A-981D1D4B12E4}"/>
+              </a:ext>
+            </a:extLst>
+          </p:cNvPr>
+          <p:cNvSpPr txBox="1"/>
+          <p:nvPr/>
+        </p:nvSpPr>
+        <p:spPr>
+          <a:xfrm>
+            <a:off x="5886498" y="4891474"/>
+            <a:ext cx="2918329" cy="997196"/>
+          </a:xfrm>
+          <a:prstGeom prst="rect">
+            <a:avLst/>
+          </a:prstGeom>
+          <a:noFill/>
+          <a:ln>
+            <a:noFill/>
+          </a:ln>
+        </p:spPr>
+        <p:txBody>
+          <a:bodyPr spcFirstLastPara="1" wrap="square" lIns="0" tIns="0" rIns="0" bIns="0" anchor="t" anchorCtr="0">
+            <a:spAutoFit/>
+          </a:bodyPr>
+          <a:lstStyle/>
+          <a:p>
+            <a:pPr>
+              <a:lnSpc>
+                <a:spcPct val="120000"/>
+              </a:lnSpc>
+            </a:pPr>
+            <a:r>
+              <a:rPr lang="en-US" sz="1350" b="1" dirty="0" err="1">
+                <a:solidFill>
+                  <a:schemeClr val="accent3">
+                    <a:lumMod val="40000"/>
+                    <a:lumOff val="60000"/>
+                  </a:schemeClr>
+                </a:solidFill>
+                <a:latin typeface="Inter"/>
+                <a:ea typeface="Inter"/>
+                <a:cs typeface="Inter"/>
+                <a:sym typeface="Inter"/>
+              </a:rPr>
+              <a:t>Accuratezza</a:t>
+            </a:r>
+            <a:r>
+              <a:rPr lang="en-US" sz="1350" b="1" dirty="0">
+                <a:solidFill>
+                  <a:schemeClr val="accent3">
+                    <a:lumMod val="40000"/>
+                    <a:lumOff val="60000"/>
+                  </a:schemeClr>
+                </a:solidFill>
+                <a:latin typeface="Inter"/>
+                <a:ea typeface="Inter"/>
+                <a:cs typeface="Inter"/>
+                <a:sym typeface="Inter"/>
+              </a:rPr>
+              <a:t>:</a:t>
+            </a:r>
+            <a:r>
+              <a:rPr lang="en-US" sz="1350" dirty="0">
+                <a:solidFill>
+                  <a:schemeClr val="accent3">
+                    <a:lumMod val="40000"/>
+                    <a:lumOff val="60000"/>
+                  </a:schemeClr>
+                </a:solidFill>
+                <a:latin typeface="Inter"/>
+                <a:ea typeface="Inter"/>
+                <a:cs typeface="Inter"/>
+                <a:sym typeface="Inter"/>
+              </a:rPr>
+              <a:t> </a:t>
+            </a:r>
+            <a:r>
+              <a:rPr lang="en-US" sz="1350" dirty="0">
+                <a:solidFill>
+                  <a:schemeClr val="bg1">
+                    <a:lumMod val="85000"/>
+                  </a:schemeClr>
+                </a:solidFill>
+                <a:latin typeface="Inter"/>
+                <a:ea typeface="Inter"/>
+                <a:cs typeface="Inter"/>
+                <a:sym typeface="Inter"/>
+              </a:rPr>
+              <a:t>71.07%</a:t>
+            </a:r>
             <a:endParaRPr lang="en-US" sz="1350" b="1" i="0" u="none" strike="noStrike" cap="none" dirty="0">
               <a:solidFill>
                 <a:schemeClr val="bg2">
@@ -12926,7 +14559,7 @@
               <a:t> </a:t>
             </a:r>
             <a:r>
-              <a:rPr lang="en-US" sz="1350" b="0" i="0" u="none" strike="noStrike" cap="none" dirty="0">
+              <a:rPr lang="en-US" sz="1350" dirty="0">
                 <a:solidFill>
                   <a:schemeClr val="bg1">
                     <a:lumMod val="85000"/>
@@ -12937,7 +14570,21 @@
                 <a:cs typeface="Inter"/>
                 <a:sym typeface="Inter"/>
               </a:rPr>
-              <a:t>74%</a:t>
+              <a:t>87</a:t>
+            </a:r>
+            <a:r>
+              <a:rPr lang="en-US" sz="1350" b="0" i="0" u="none" strike="noStrike" cap="none" dirty="0">
+                <a:solidFill>
+                  <a:schemeClr val="bg1">
+                    <a:lumMod val="85000"/>
+                  </a:schemeClr>
+                </a:solidFill>
+                <a:latin typeface="Inter"/>
+                <a:ea typeface="Inter"/>
+                <a:cs typeface="Inter"/>
+                <a:sym typeface="Inter"/>
+              </a:rPr>
+              <a:t>%</a:t>
             </a:r>
             <a:br>
               <a:rPr lang="en-US" sz="1800" b="0" i="0" u="none" strike="noStrike" cap="none" dirty="0">
@@ -12981,7 +14628,7 @@
               <a:t> </a:t>
             </a:r>
             <a:r>
-              <a:rPr lang="en-US" sz="1350" b="0" i="0" u="none" strike="noStrike" cap="none" dirty="0">
+              <a:rPr lang="en-US" sz="1350" dirty="0">
                 <a:solidFill>
                   <a:schemeClr val="bg1">
                     <a:lumMod val="85000"/>
@@ -12992,17 +14639,31 @@
                 <a:cs typeface="Inter"/>
                 <a:sym typeface="Inter"/>
               </a:rPr>
-              <a:t>73%</a:t>
+              <a:t>79</a:t>
+            </a:r>
+            <a:r>
+              <a:rPr lang="en-US" sz="1350" b="0" i="0" u="none" strike="noStrike" cap="none" dirty="0">
+                <a:solidFill>
+                  <a:schemeClr val="bg1">
+                    <a:lumMod val="85000"/>
+                  </a:schemeClr>
+                </a:solidFill>
+                <a:latin typeface="Inter"/>
+                <a:ea typeface="Inter"/>
+                <a:cs typeface="Inter"/>
+                <a:sym typeface="Inter"/>
+              </a:rPr>
+              <a:t>%</a:t>
             </a:r>
           </a:p>
         </p:txBody>
       </p:sp>
       <p:sp>
         <p:nvSpPr>
-          <p:cNvPr id="14" name="Google Shape;242;p23">
+          <p:cNvPr id="21" name="Google Shape;242;p23">
             <a:extLst>
               <a:ext uri="{FF2B5EF4-FFF2-40B4-BE49-F238E27FC236}">
-                <a16:creationId xmlns:a16="http://schemas.microsoft.com/office/drawing/2014/main" id="{19386B87-908C-40F6-EFF0-AD1CB92DECAA}"/>
+                <a16:creationId xmlns:a16="http://schemas.microsoft.com/office/drawing/2014/main" id="{53869A8C-7686-D029-DFD2-DEB163F49FC2}"/>
               </a:ext>
             </a:extLst>
           </p:cNvPr>
@@ -13011,7 +14672,7 @@
         </p:nvSpPr>
         <p:spPr>
           <a:xfrm>
-            <a:off x="8328101" y="2953948"/>
+            <a:off x="5886498" y="4177661"/>
             <a:ext cx="2598517" cy="323165"/>
           </a:xfrm>
           <a:prstGeom prst="rect">
@@ -13048,6 +14709,439 @@
                 <a:sym typeface="Poppins Medium"/>
               </a:rPr>
               <a:t>Logistic Regression</a:t>
+            </a:r>
+            <a:endParaRPr b="1" dirty="0"/>
+          </a:p>
+        </p:txBody>
+      </p:sp>
+      <p:sp>
+        <p:nvSpPr>
+          <p:cNvPr id="22" name="Google Shape;242;p23">
+            <a:extLst>
+              <a:ext uri="{FF2B5EF4-FFF2-40B4-BE49-F238E27FC236}">
+                <a16:creationId xmlns:a16="http://schemas.microsoft.com/office/drawing/2014/main" id="{97ACBC11-6E93-2047-9FB2-37AA1F318B43}"/>
+              </a:ext>
+            </a:extLst>
+          </p:cNvPr>
+          <p:cNvSpPr txBox="1"/>
+          <p:nvPr/>
+        </p:nvSpPr>
+        <p:spPr>
+          <a:xfrm>
+            <a:off x="9023841" y="4534196"/>
+            <a:ext cx="2290257" cy="323165"/>
+          </a:xfrm>
+          <a:prstGeom prst="rect">
+            <a:avLst/>
+          </a:prstGeom>
+          <a:noFill/>
+          <a:ln>
+            <a:noFill/>
+          </a:ln>
+        </p:spPr>
+        <p:txBody>
+          <a:bodyPr spcFirstLastPara="1" wrap="square" lIns="0" tIns="0" rIns="0" bIns="0" anchor="t" anchorCtr="0">
+            <a:spAutoFit/>
+          </a:bodyPr>
+          <a:lstStyle/>
+          <a:p>
+            <a:pPr marL="0" marR="0" lvl="0" indent="0" algn="l" rtl="0">
+              <a:spcBef>
+                <a:spcPts val="0"/>
+              </a:spcBef>
+              <a:spcAft>
+                <a:spcPts val="0"/>
+              </a:spcAft>
+              <a:buNone/>
+            </a:pPr>
+            <a:r>
+              <a:rPr lang="en-US" sz="2100" b="0" i="0" u="none" strike="noStrike" cap="none" dirty="0">
+                <a:solidFill>
+                  <a:srgbClr val="38BDF8"/>
+                </a:solidFill>
+                <a:latin typeface="Poppins Medium"/>
+                <a:ea typeface="Poppins Medium"/>
+                <a:cs typeface="Poppins Medium"/>
+                <a:sym typeface="Poppins Medium"/>
+              </a:rPr>
+              <a:t>Stress</a:t>
+            </a:r>
+            <a:endParaRPr dirty="0"/>
+          </a:p>
+        </p:txBody>
+      </p:sp>
+      <p:sp>
+        <p:nvSpPr>
+          <p:cNvPr id="23" name="Google Shape;244;p23">
+            <a:extLst>
+              <a:ext uri="{FF2B5EF4-FFF2-40B4-BE49-F238E27FC236}">
+                <a16:creationId xmlns:a16="http://schemas.microsoft.com/office/drawing/2014/main" id="{DDE83B2C-7292-EE31-5BCC-5B8DC47BEAB3}"/>
+              </a:ext>
+            </a:extLst>
+          </p:cNvPr>
+          <p:cNvSpPr txBox="1"/>
+          <p:nvPr/>
+        </p:nvSpPr>
+        <p:spPr>
+          <a:xfrm>
+            <a:off x="9023841" y="4900372"/>
+            <a:ext cx="2442173" cy="997196"/>
+          </a:xfrm>
+          <a:prstGeom prst="rect">
+            <a:avLst/>
+          </a:prstGeom>
+          <a:noFill/>
+          <a:ln>
+            <a:noFill/>
+          </a:ln>
+        </p:spPr>
+        <p:txBody>
+          <a:bodyPr spcFirstLastPara="1" wrap="square" lIns="0" tIns="0" rIns="0" bIns="0" anchor="t" anchorCtr="0">
+            <a:spAutoFit/>
+          </a:bodyPr>
+          <a:lstStyle/>
+          <a:p>
+            <a:pPr>
+              <a:lnSpc>
+                <a:spcPct val="120000"/>
+              </a:lnSpc>
+            </a:pPr>
+            <a:r>
+              <a:rPr lang="en-US" sz="1350" b="1" dirty="0" err="1">
+                <a:solidFill>
+                  <a:schemeClr val="accent3">
+                    <a:lumMod val="40000"/>
+                    <a:lumOff val="60000"/>
+                  </a:schemeClr>
+                </a:solidFill>
+                <a:latin typeface="Inter"/>
+                <a:ea typeface="Inter"/>
+                <a:cs typeface="Inter"/>
+                <a:sym typeface="Inter"/>
+              </a:rPr>
+              <a:t>Accuratezza</a:t>
+            </a:r>
+            <a:r>
+              <a:rPr lang="en-US" sz="1350" b="1" dirty="0">
+                <a:solidFill>
+                  <a:schemeClr val="accent3">
+                    <a:lumMod val="40000"/>
+                    <a:lumOff val="60000"/>
+                  </a:schemeClr>
+                </a:solidFill>
+                <a:latin typeface="Inter"/>
+                <a:ea typeface="Inter"/>
+                <a:cs typeface="Inter"/>
+                <a:sym typeface="Inter"/>
+              </a:rPr>
+              <a:t>:</a:t>
+            </a:r>
+            <a:r>
+              <a:rPr lang="en-US" sz="1350" dirty="0">
+                <a:solidFill>
+                  <a:schemeClr val="accent3">
+                    <a:lumMod val="40000"/>
+                    <a:lumOff val="60000"/>
+                  </a:schemeClr>
+                </a:solidFill>
+                <a:latin typeface="Inter"/>
+                <a:ea typeface="Inter"/>
+                <a:cs typeface="Inter"/>
+                <a:sym typeface="Inter"/>
+              </a:rPr>
+              <a:t> </a:t>
+            </a:r>
+            <a:r>
+              <a:rPr lang="en-US" sz="1350" dirty="0">
+                <a:solidFill>
+                  <a:schemeClr val="bg1">
+                    <a:lumMod val="85000"/>
+                  </a:schemeClr>
+                </a:solidFill>
+                <a:latin typeface="Inter"/>
+                <a:ea typeface="Inter"/>
+                <a:cs typeface="Inter"/>
+                <a:sym typeface="Inter"/>
+              </a:rPr>
+              <a:t>73.78%</a:t>
+            </a:r>
+            <a:endParaRPr lang="en-US" sz="1350" b="1" i="0" u="none" strike="noStrike" cap="none" dirty="0">
+              <a:solidFill>
+                <a:schemeClr val="bg2">
+                  <a:lumMod val="20000"/>
+                  <a:lumOff val="80000"/>
+                </a:schemeClr>
+              </a:solidFill>
+              <a:latin typeface="Inter"/>
+              <a:ea typeface="Inter"/>
+              <a:cs typeface="Inter"/>
+              <a:sym typeface="Inter"/>
+            </a:endParaRPr>
+          </a:p>
+          <a:p>
+            <a:pPr marL="0" marR="0" lvl="0" indent="0" algn="l" rtl="0">
+              <a:lnSpc>
+                <a:spcPct val="120000"/>
+              </a:lnSpc>
+              <a:spcBef>
+                <a:spcPts val="0"/>
+              </a:spcBef>
+              <a:spcAft>
+                <a:spcPts val="0"/>
+              </a:spcAft>
+              <a:buNone/>
+            </a:pPr>
+            <a:r>
+              <a:rPr lang="en-US" sz="1350" b="1" i="0" u="none" strike="noStrike" cap="none" dirty="0" err="1">
+                <a:solidFill>
+                  <a:schemeClr val="bg2">
+                    <a:lumMod val="20000"/>
+                    <a:lumOff val="80000"/>
+                  </a:schemeClr>
+                </a:solidFill>
+                <a:latin typeface="Inter"/>
+                <a:ea typeface="Inter"/>
+                <a:cs typeface="Inter"/>
+                <a:sym typeface="Inter"/>
+              </a:rPr>
+              <a:t>Precisione</a:t>
+            </a:r>
+            <a:r>
+              <a:rPr lang="en-US" sz="1350" b="1" i="0" u="none" strike="noStrike" cap="none" dirty="0">
+                <a:solidFill>
+                  <a:schemeClr val="bg2">
+                    <a:lumMod val="20000"/>
+                    <a:lumOff val="80000"/>
+                  </a:schemeClr>
+                </a:solidFill>
+                <a:latin typeface="Inter"/>
+                <a:ea typeface="Inter"/>
+                <a:cs typeface="Inter"/>
+                <a:sym typeface="Inter"/>
+              </a:rPr>
+              <a:t>:</a:t>
+            </a:r>
+            <a:r>
+              <a:rPr lang="en-US" sz="1350" b="0" i="0" u="none" strike="noStrike" cap="none" dirty="0">
+                <a:solidFill>
+                  <a:schemeClr val="bg2">
+                    <a:lumMod val="20000"/>
+                    <a:lumOff val="80000"/>
+                  </a:schemeClr>
+                </a:solidFill>
+                <a:latin typeface="Inter"/>
+                <a:ea typeface="Inter"/>
+                <a:cs typeface="Inter"/>
+                <a:sym typeface="Inter"/>
+              </a:rPr>
+              <a:t> </a:t>
+            </a:r>
+            <a:r>
+              <a:rPr lang="en-US" sz="1350" dirty="0">
+                <a:solidFill>
+                  <a:schemeClr val="bg1">
+                    <a:lumMod val="85000"/>
+                  </a:schemeClr>
+                </a:solidFill>
+                <a:latin typeface="Inter"/>
+                <a:ea typeface="Inter"/>
+                <a:cs typeface="Inter"/>
+                <a:sym typeface="Inter"/>
+              </a:rPr>
+              <a:t>78</a:t>
+            </a:r>
+            <a:r>
+              <a:rPr lang="en-US" sz="1350" b="0" i="0" u="none" strike="noStrike" cap="none" dirty="0">
+                <a:solidFill>
+                  <a:schemeClr val="bg1">
+                    <a:lumMod val="85000"/>
+                  </a:schemeClr>
+                </a:solidFill>
+                <a:latin typeface="Inter"/>
+                <a:ea typeface="Inter"/>
+                <a:cs typeface="Inter"/>
+                <a:sym typeface="Inter"/>
+              </a:rPr>
+              <a:t>%</a:t>
+            </a:r>
+            <a:br>
+              <a:rPr lang="en-US" sz="1800" b="0" i="0" u="none" strike="noStrike" cap="none" dirty="0">
+                <a:solidFill>
+                  <a:schemeClr val="dk1"/>
+                </a:solidFill>
+                <a:latin typeface="Calibri"/>
+                <a:ea typeface="Calibri"/>
+                <a:cs typeface="Calibri"/>
+                <a:sym typeface="Calibri"/>
+              </a:rPr>
+            </a:br>
+            <a:r>
+              <a:rPr lang="en-US" sz="1350" b="1" i="0" u="none" strike="noStrike" cap="none" dirty="0">
+                <a:solidFill>
+                  <a:schemeClr val="bg2">
+                    <a:lumMod val="20000"/>
+                    <a:lumOff val="80000"/>
+                  </a:schemeClr>
+                </a:solidFill>
+                <a:latin typeface="Inter"/>
+                <a:ea typeface="Inter"/>
+                <a:cs typeface="Inter"/>
+                <a:sym typeface="Inter"/>
+              </a:rPr>
+              <a:t>Recall:</a:t>
+            </a:r>
+            <a:r>
+              <a:rPr lang="en-US" sz="1350" b="0" i="0" u="none" strike="noStrike" cap="none" dirty="0">
+                <a:solidFill>
+                  <a:schemeClr val="bg2">
+                    <a:lumMod val="20000"/>
+                    <a:lumOff val="80000"/>
+                  </a:schemeClr>
+                </a:solidFill>
+                <a:latin typeface="Inter"/>
+                <a:ea typeface="Inter"/>
+                <a:cs typeface="Inter"/>
+                <a:sym typeface="Inter"/>
+              </a:rPr>
+              <a:t> </a:t>
+            </a:r>
+            <a:r>
+              <a:rPr lang="en-US" sz="1350" dirty="0">
+                <a:solidFill>
+                  <a:schemeClr val="bg1">
+                    <a:lumMod val="85000"/>
+                  </a:schemeClr>
+                </a:solidFill>
+                <a:latin typeface="Inter"/>
+                <a:ea typeface="Inter"/>
+                <a:cs typeface="Inter"/>
+                <a:sym typeface="Inter"/>
+              </a:rPr>
+              <a:t>83</a:t>
+            </a:r>
+            <a:r>
+              <a:rPr lang="en-US" sz="1350" b="0" i="0" u="none" strike="noStrike" cap="none" dirty="0">
+                <a:solidFill>
+                  <a:schemeClr val="bg1">
+                    <a:lumMod val="85000"/>
+                  </a:schemeClr>
+                </a:solidFill>
+                <a:latin typeface="Inter"/>
+                <a:ea typeface="Inter"/>
+                <a:cs typeface="Inter"/>
+                <a:sym typeface="Inter"/>
+              </a:rPr>
+              <a:t>%</a:t>
+            </a:r>
+            <a:br>
+              <a:rPr lang="en-US" sz="1800" b="0" i="0" u="none" strike="noStrike" cap="none" dirty="0">
+                <a:solidFill>
+                  <a:schemeClr val="dk1"/>
+                </a:solidFill>
+                <a:latin typeface="Calibri"/>
+                <a:ea typeface="Calibri"/>
+                <a:cs typeface="Calibri"/>
+                <a:sym typeface="Calibri"/>
+              </a:rPr>
+            </a:br>
+            <a:r>
+              <a:rPr lang="en-US" sz="1350" b="1" i="0" u="none" strike="noStrike" cap="none" dirty="0">
+                <a:solidFill>
+                  <a:schemeClr val="bg2">
+                    <a:lumMod val="20000"/>
+                    <a:lumOff val="80000"/>
+                  </a:schemeClr>
+                </a:solidFill>
+                <a:latin typeface="Inter"/>
+                <a:ea typeface="Inter"/>
+                <a:cs typeface="Inter"/>
+                <a:sym typeface="Inter"/>
+              </a:rPr>
+              <a:t>F1-Score:</a:t>
+            </a:r>
+            <a:r>
+              <a:rPr lang="en-US" sz="1350" b="0" i="0" u="none" strike="noStrike" cap="none" dirty="0">
+                <a:solidFill>
+                  <a:schemeClr val="bg2">
+                    <a:lumMod val="20000"/>
+                    <a:lumOff val="80000"/>
+                  </a:schemeClr>
+                </a:solidFill>
+                <a:latin typeface="Inter"/>
+                <a:ea typeface="Inter"/>
+                <a:cs typeface="Inter"/>
+                <a:sym typeface="Inter"/>
+              </a:rPr>
+              <a:t> </a:t>
+            </a:r>
+            <a:r>
+              <a:rPr lang="en-US" sz="1350" b="0" i="0" u="none" strike="noStrike" cap="none" dirty="0">
+                <a:solidFill>
+                  <a:schemeClr val="bg1">
+                    <a:lumMod val="85000"/>
+                  </a:schemeClr>
+                </a:solidFill>
+                <a:latin typeface="Inter"/>
+                <a:ea typeface="Inter"/>
+                <a:cs typeface="Inter"/>
+                <a:sym typeface="Inter"/>
+              </a:rPr>
+              <a:t>80%</a:t>
+            </a:r>
+          </a:p>
+        </p:txBody>
+      </p:sp>
+      <p:sp>
+        <p:nvSpPr>
+          <p:cNvPr id="24" name="Google Shape;242;p23">
+            <a:extLst>
+              <a:ext uri="{FF2B5EF4-FFF2-40B4-BE49-F238E27FC236}">
+                <a16:creationId xmlns:a16="http://schemas.microsoft.com/office/drawing/2014/main" id="{3BB401BA-7DF0-1634-47FF-96BAF1073E89}"/>
+              </a:ext>
+            </a:extLst>
+          </p:cNvPr>
+          <p:cNvSpPr txBox="1"/>
+          <p:nvPr/>
+        </p:nvSpPr>
+        <p:spPr>
+          <a:xfrm>
+            <a:off x="9023841" y="4186559"/>
+            <a:ext cx="2598517" cy="323165"/>
+          </a:xfrm>
+          <a:prstGeom prst="rect">
+            <a:avLst/>
+          </a:prstGeom>
+          <a:noFill/>
+          <a:ln>
+            <a:noFill/>
+          </a:ln>
+        </p:spPr>
+        <p:txBody>
+          <a:bodyPr spcFirstLastPara="1" wrap="square" lIns="0" tIns="0" rIns="0" bIns="0" anchor="t" anchorCtr="0">
+            <a:spAutoFit/>
+          </a:bodyPr>
+          <a:lstStyle/>
+          <a:p>
+            <a:pPr marL="0" marR="0" lvl="0" indent="0" algn="l" rtl="0">
+              <a:spcBef>
+                <a:spcPts val="0"/>
+              </a:spcBef>
+              <a:spcAft>
+                <a:spcPts val="0"/>
+              </a:spcAft>
+              <a:buNone/>
+            </a:pPr>
+            <a:r>
+              <a:rPr lang="en-US" sz="2100" b="1" i="0" u="none" strike="noStrike" cap="none" dirty="0" err="1">
+                <a:solidFill>
+                  <a:srgbClr val="38BDF8"/>
+                </a:solidFill>
+                <a:latin typeface="Poppins Medium"/>
+                <a:ea typeface="Poppins Medium"/>
+                <a:cs typeface="Poppins Medium"/>
+                <a:sym typeface="Poppins Medium"/>
+              </a:rPr>
+              <a:t>RUSBoost</a:t>
             </a:r>
             <a:endParaRPr b="1" dirty="0"/>
           </a:p>
@@ -13067,6 +15161,412 @@
 </file>
 
 <file path=ppt/slides/slide11.xml><?xml version="1.0" encoding="utf-8"?>
+<p:sld xmlns:a="http://schemas.openxmlformats.org/drawingml/2006/main" xmlns:r="http://schemas.openxmlformats.org/officeDocument/2006/relationships" xmlns:p="http://schemas.openxmlformats.org/presentationml/2006/main">
+  <p:cSld>
+    <p:bg>
+      <p:bgPr>
+        <a:solidFill>
+          <a:srgbClr val="111827"/>
+        </a:solidFill>
+        <a:effectLst/>
+      </p:bgPr>
+    </p:bg>
+    <p:spTree>
+      <p:nvGrpSpPr>
+        <p:cNvPr id="1" name="Shape 238">
+          <a:extLst>
+            <a:ext uri="{FF2B5EF4-FFF2-40B4-BE49-F238E27FC236}">
+              <a16:creationId xmlns:a16="http://schemas.microsoft.com/office/drawing/2014/main" id="{B962F93B-3165-2B10-50E5-ECB0A527F90A}"/>
+            </a:ext>
+          </a:extLst>
+        </p:cNvPr>
+        <p:cNvGrpSpPr/>
+        <p:nvPr/>
+      </p:nvGrpSpPr>
+      <p:grpSpPr>
+        <a:xfrm>
+          <a:off x="0" y="0"/>
+          <a:ext cx="0" cy="0"/>
+          <a:chOff x="0" y="0"/>
+          <a:chExt cx="0" cy="0"/>
+        </a:xfrm>
+      </p:grpSpPr>
+      <p:pic>
+        <p:nvPicPr>
+          <p:cNvPr id="239" name="Google Shape;239;p23" descr="image.png">
+            <a:extLst>
+              <a:ext uri="{FF2B5EF4-FFF2-40B4-BE49-F238E27FC236}">
+                <a16:creationId xmlns:a16="http://schemas.microsoft.com/office/drawing/2014/main" id="{C0EAC803-6B45-4FEC-8942-FCEAC0A5E41E}"/>
+              </a:ext>
+            </a:extLst>
+          </p:cNvPr>
+          <p:cNvPicPr preferRelativeResize="0"/>
+          <p:nvPr/>
+        </p:nvPicPr>
+        <p:blipFill rotWithShape="1">
+          <a:blip r:embed="rId3">
+            <a:alphaModFix/>
+          </a:blip>
+          <a:srcRect/>
+          <a:stretch/>
+        </p:blipFill>
+        <p:spPr>
+          <a:xfrm>
+            <a:off x="0" y="0"/>
+            <a:ext cx="12192000" cy="6858000"/>
+          </a:xfrm>
+          <a:prstGeom prst="rect">
+            <a:avLst/>
+          </a:prstGeom>
+          <a:noFill/>
+          <a:ln>
+            <a:noFill/>
+          </a:ln>
+        </p:spPr>
+      </p:pic>
+      <p:sp>
+        <p:nvSpPr>
+          <p:cNvPr id="246" name="Google Shape;246;p23">
+            <a:extLst>
+              <a:ext uri="{FF2B5EF4-FFF2-40B4-BE49-F238E27FC236}">
+                <a16:creationId xmlns:a16="http://schemas.microsoft.com/office/drawing/2014/main" id="{7E08B28F-80D9-593E-F8C8-F568FC642319}"/>
+              </a:ext>
+            </a:extLst>
+          </p:cNvPr>
+          <p:cNvSpPr txBox="1"/>
+          <p:nvPr/>
+        </p:nvSpPr>
+        <p:spPr>
+          <a:xfrm>
+            <a:off x="571500" y="571500"/>
+            <a:ext cx="10355118" cy="461665"/>
+          </a:xfrm>
+          <a:prstGeom prst="rect">
+            <a:avLst/>
+          </a:prstGeom>
+          <a:noFill/>
+          <a:ln>
+            <a:noFill/>
+          </a:ln>
+        </p:spPr>
+        <p:txBody>
+          <a:bodyPr spcFirstLastPara="1" wrap="square" lIns="0" tIns="0" rIns="0" bIns="0" anchor="t" anchorCtr="0">
+            <a:spAutoFit/>
+          </a:bodyPr>
+          <a:lstStyle/>
+          <a:p>
+            <a:pPr marL="0" marR="0" lvl="0" indent="0" algn="l" rtl="0">
+              <a:spcBef>
+                <a:spcPts val="0"/>
+              </a:spcBef>
+              <a:spcAft>
+                <a:spcPts val="0"/>
+              </a:spcAft>
+              <a:buNone/>
+            </a:pPr>
+            <a:r>
+              <a:rPr lang="it-IT" sz="3000" b="0" i="0" u="none" strike="noStrike" cap="none" dirty="0">
+                <a:solidFill>
+                  <a:schemeClr val="bg1"/>
+                </a:solidFill>
+                <a:latin typeface="Poppins SemiBold"/>
+                <a:ea typeface="Poppins SemiBold"/>
+                <a:cs typeface="Poppins SemiBold"/>
+                <a:sym typeface="Poppins SemiBold"/>
+              </a:rPr>
+              <a:t>Matrici di confusione a confronto (Sperimentale)</a:t>
+            </a:r>
+            <a:endParaRPr lang="it-IT" dirty="0">
+              <a:solidFill>
+                <a:schemeClr val="bg1"/>
+              </a:solidFill>
+            </a:endParaRPr>
+          </a:p>
+        </p:txBody>
+      </p:sp>
+      <p:sp>
+        <p:nvSpPr>
+          <p:cNvPr id="5" name="Google Shape;94;p14">
+            <a:extLst>
+              <a:ext uri="{FF2B5EF4-FFF2-40B4-BE49-F238E27FC236}">
+                <a16:creationId xmlns:a16="http://schemas.microsoft.com/office/drawing/2014/main" id="{25730225-4782-4493-AC1B-59A1F0F48F5F}"/>
+              </a:ext>
+            </a:extLst>
+          </p:cNvPr>
+          <p:cNvSpPr txBox="1"/>
+          <p:nvPr/>
+        </p:nvSpPr>
+        <p:spPr>
+          <a:xfrm>
+            <a:off x="571499" y="1080720"/>
+            <a:ext cx="10355118" cy="332399"/>
+          </a:xfrm>
+          <a:prstGeom prst="rect">
+            <a:avLst/>
+          </a:prstGeom>
+          <a:noFill/>
+          <a:ln>
+            <a:noFill/>
+          </a:ln>
+        </p:spPr>
+        <p:txBody>
+          <a:bodyPr spcFirstLastPara="1" wrap="square" lIns="0" tIns="0" rIns="0" bIns="0" anchor="t" anchorCtr="0">
+            <a:spAutoFit/>
+          </a:bodyPr>
+          <a:lstStyle/>
+          <a:p>
+            <a:pPr marL="0" marR="0" lvl="0" indent="0" algn="l" rtl="0">
+              <a:lnSpc>
+                <a:spcPct val="160000"/>
+              </a:lnSpc>
+              <a:spcBef>
+                <a:spcPts val="0"/>
+              </a:spcBef>
+              <a:spcAft>
+                <a:spcPts val="0"/>
+              </a:spcAft>
+              <a:buNone/>
+            </a:pPr>
+            <a:r>
+              <a:rPr lang="it-IT" sz="1350" b="0" i="0" u="none" strike="noStrike" cap="none" dirty="0">
+                <a:solidFill>
+                  <a:srgbClr val="CBD5E1"/>
+                </a:solidFill>
+                <a:latin typeface="Inter"/>
+                <a:ea typeface="Inter"/>
+                <a:cs typeface="Inter"/>
+                <a:sym typeface="Inter"/>
+              </a:rPr>
+              <a:t>Rispettivamente: RF (</a:t>
+            </a:r>
+            <a:r>
+              <a:rPr lang="it-IT" sz="1350" dirty="0">
+                <a:solidFill>
+                  <a:srgbClr val="CBD5E1"/>
+                </a:solidFill>
+                <a:latin typeface="Inter"/>
+                <a:ea typeface="Inter"/>
+                <a:cs typeface="Inter"/>
+                <a:sym typeface="Inter"/>
+              </a:rPr>
+              <a:t>75</a:t>
+            </a:r>
+            <a:r>
+              <a:rPr lang="it-IT" sz="1350" b="0" i="0" u="none" strike="noStrike" cap="none" dirty="0">
+                <a:solidFill>
+                  <a:srgbClr val="CBD5E1"/>
+                </a:solidFill>
+                <a:latin typeface="Inter"/>
+                <a:ea typeface="Inter"/>
+                <a:cs typeface="Inter"/>
+                <a:sym typeface="Inter"/>
+              </a:rPr>
+              <a:t> </a:t>
+            </a:r>
+            <a:r>
+              <a:rPr lang="it-IT" sz="1350" b="0" i="0" u="none" strike="noStrike" cap="none" dirty="0" err="1">
+                <a:solidFill>
+                  <a:srgbClr val="CBD5E1"/>
+                </a:solidFill>
+                <a:latin typeface="Inter"/>
+                <a:ea typeface="Inter"/>
+                <a:cs typeface="Inter"/>
+                <a:sym typeface="Inter"/>
+              </a:rPr>
+              <a:t>Learners</a:t>
+            </a:r>
+            <a:r>
+              <a:rPr lang="it-IT" sz="1350" b="0" i="0" u="none" strike="noStrike" cap="none" dirty="0">
+                <a:solidFill>
+                  <a:srgbClr val="CBD5E1"/>
+                </a:solidFill>
+                <a:latin typeface="Inter"/>
+                <a:ea typeface="Inter"/>
+                <a:cs typeface="Inter"/>
+                <a:sym typeface="Inter"/>
+              </a:rPr>
+              <a:t>, 750 </a:t>
+            </a:r>
+            <a:r>
+              <a:rPr lang="it-IT" sz="1350" b="0" i="0" u="none" strike="noStrike" cap="none" dirty="0" err="1">
+                <a:solidFill>
+                  <a:srgbClr val="CBD5E1"/>
+                </a:solidFill>
+                <a:latin typeface="Inter"/>
+                <a:ea typeface="Inter"/>
+                <a:cs typeface="Inter"/>
+                <a:sym typeface="Inter"/>
+              </a:rPr>
+              <a:t>Splits</a:t>
+            </a:r>
+            <a:r>
+              <a:rPr lang="it-IT" sz="1350" b="0" i="0" u="none" strike="noStrike" cap="none" dirty="0">
+                <a:solidFill>
+                  <a:srgbClr val="CBD5E1"/>
+                </a:solidFill>
+                <a:latin typeface="Inter"/>
+                <a:ea typeface="Inter"/>
+                <a:cs typeface="Inter"/>
+                <a:sym typeface="Inter"/>
+              </a:rPr>
+              <a:t>), SVM (Kernel Cubico), </a:t>
+            </a:r>
+            <a:r>
+              <a:rPr lang="it-IT" sz="1350" b="0" i="0" u="none" strike="noStrike" cap="none" dirty="0" err="1">
+                <a:solidFill>
+                  <a:srgbClr val="CBD5E1"/>
+                </a:solidFill>
+                <a:latin typeface="Inter"/>
+                <a:ea typeface="Inter"/>
+                <a:cs typeface="Inter"/>
+                <a:sym typeface="Inter"/>
+              </a:rPr>
+              <a:t>Logistic</a:t>
+            </a:r>
+            <a:r>
+              <a:rPr lang="it-IT" sz="1350" b="0" i="0" u="none" strike="noStrike" cap="none" dirty="0">
+                <a:solidFill>
+                  <a:srgbClr val="CBD5E1"/>
+                </a:solidFill>
+                <a:latin typeface="Inter"/>
+                <a:ea typeface="Inter"/>
+                <a:cs typeface="Inter"/>
+                <a:sym typeface="Inter"/>
+              </a:rPr>
+              <a:t> </a:t>
+            </a:r>
+            <a:r>
+              <a:rPr lang="it-IT" sz="1350" b="0" i="0" u="none" strike="noStrike" cap="none" dirty="0" err="1">
+                <a:solidFill>
+                  <a:srgbClr val="CBD5E1"/>
+                </a:solidFill>
+                <a:latin typeface="Inter"/>
+                <a:ea typeface="Inter"/>
+                <a:cs typeface="Inter"/>
+                <a:sym typeface="Inter"/>
+              </a:rPr>
+              <a:t>Regression</a:t>
+            </a:r>
+            <a:r>
+              <a:rPr lang="it-IT" sz="1350" b="0" i="0" u="none" strike="noStrike" cap="none" dirty="0">
+                <a:solidFill>
+                  <a:srgbClr val="CBD5E1"/>
+                </a:solidFill>
+                <a:latin typeface="Inter"/>
+                <a:ea typeface="Inter"/>
+                <a:cs typeface="Inter"/>
+                <a:sym typeface="Inter"/>
+              </a:rPr>
+              <a:t> e </a:t>
+            </a:r>
+            <a:r>
+              <a:rPr lang="it-IT" sz="1350" b="0" i="0" u="none" strike="noStrike" cap="none" dirty="0" err="1">
+                <a:solidFill>
+                  <a:srgbClr val="CBD5E1"/>
+                </a:solidFill>
+                <a:latin typeface="Inter"/>
+                <a:ea typeface="Inter"/>
+                <a:cs typeface="Inter"/>
+                <a:sym typeface="Inter"/>
+              </a:rPr>
+              <a:t>RUSBoost</a:t>
+            </a:r>
+            <a:r>
+              <a:rPr lang="it-IT" sz="1350" b="0" i="0" u="none" strike="noStrike" cap="none" dirty="0">
+                <a:solidFill>
+                  <a:srgbClr val="CBD5E1"/>
+                </a:solidFill>
+                <a:latin typeface="Inter"/>
+                <a:ea typeface="Inter"/>
+                <a:cs typeface="Inter"/>
+                <a:sym typeface="Inter"/>
+              </a:rPr>
+              <a:t> (150 cicli, 15 </a:t>
+            </a:r>
+            <a:r>
+              <a:rPr lang="it-IT" sz="1350" dirty="0" err="1">
+                <a:solidFill>
+                  <a:srgbClr val="CBD5E1"/>
+                </a:solidFill>
+                <a:latin typeface="Inter"/>
+                <a:ea typeface="Inter"/>
+                <a:cs typeface="Inter"/>
+                <a:sym typeface="Inter"/>
+              </a:rPr>
+              <a:t>S</a:t>
+            </a:r>
+            <a:r>
+              <a:rPr lang="it-IT" sz="1350" b="0" i="0" u="none" strike="noStrike" cap="none" dirty="0" err="1">
+                <a:solidFill>
+                  <a:srgbClr val="CBD5E1"/>
+                </a:solidFill>
+                <a:latin typeface="Inter"/>
+                <a:ea typeface="Inter"/>
+                <a:cs typeface="Inter"/>
+                <a:sym typeface="Inter"/>
+              </a:rPr>
+              <a:t>plits</a:t>
+            </a:r>
+            <a:r>
+              <a:rPr lang="it-IT" sz="1350" b="0" i="0" u="none" strike="noStrike" cap="none" dirty="0">
+                <a:solidFill>
+                  <a:srgbClr val="CBD5E1"/>
+                </a:solidFill>
+                <a:latin typeface="Inter"/>
+                <a:ea typeface="Inter"/>
+                <a:cs typeface="Inter"/>
+                <a:sym typeface="Inter"/>
+              </a:rPr>
+              <a:t>) </a:t>
+            </a:r>
+            <a:endParaRPr lang="it-IT" dirty="0"/>
+          </a:p>
+        </p:txBody>
+      </p:sp>
+      <p:pic>
+        <p:nvPicPr>
+          <p:cNvPr id="4" name="Immagine 3">
+            <a:extLst>
+              <a:ext uri="{FF2B5EF4-FFF2-40B4-BE49-F238E27FC236}">
+                <a16:creationId xmlns:a16="http://schemas.microsoft.com/office/drawing/2014/main" id="{8C5375A9-28EF-EB41-5D77-C24A1B355B26}"/>
+              </a:ext>
+            </a:extLst>
+          </p:cNvPr>
+          <p:cNvPicPr>
+            <a:picLocks noChangeAspect="1"/>
+          </p:cNvPicPr>
+          <p:nvPr/>
+        </p:nvPicPr>
+        <p:blipFill>
+          <a:blip r:embed="rId4"/>
+          <a:stretch>
+            <a:fillRect/>
+          </a:stretch>
+        </p:blipFill>
+        <p:spPr>
+          <a:xfrm>
+            <a:off x="168200" y="1937538"/>
+            <a:ext cx="11855600" cy="3839742"/>
+          </a:xfrm>
+          <a:prstGeom prst="rect">
+            <a:avLst/>
+          </a:prstGeom>
+        </p:spPr>
+      </p:pic>
+    </p:spTree>
+    <p:extLst>
+      <p:ext uri="{BB962C8B-B14F-4D97-AF65-F5344CB8AC3E}">
+        <p14:creationId xmlns:p14="http://schemas.microsoft.com/office/powerpoint/2010/main" val="3784043608"/>
+      </p:ext>
+    </p:extLst>
+  </p:cSld>
+  <p:clrMapOvr>
+    <a:masterClrMapping/>
+  </p:clrMapOvr>
+</p:sld>
+</file>
+
+<file path=ppt/slides/slide12.xml><?xml version="1.0" encoding="utf-8"?>
 <p:sld xmlns:a="http://schemas.openxmlformats.org/drawingml/2006/main" xmlns:r="http://schemas.openxmlformats.org/officeDocument/2006/relationships" xmlns:p="http://schemas.openxmlformats.org/presentationml/2006/main">
   <p:cSld>
     <p:bg>
@@ -14158,6 +16658,89 @@
           </a:effectLst>
         </p:spPr>
       </p:pic>
+      <p:sp>
+        <p:nvSpPr>
+          <p:cNvPr id="2" name="Google Shape;94;p14">
+            <a:extLst>
+              <a:ext uri="{FF2B5EF4-FFF2-40B4-BE49-F238E27FC236}">
+                <a16:creationId xmlns:a16="http://schemas.microsoft.com/office/drawing/2014/main" id="{F7E61213-9736-9159-47D0-DCF87F822313}"/>
+              </a:ext>
+            </a:extLst>
+          </p:cNvPr>
+          <p:cNvSpPr txBox="1"/>
+          <p:nvPr/>
+        </p:nvSpPr>
+        <p:spPr>
+          <a:xfrm>
+            <a:off x="1559369" y="3591436"/>
+            <a:ext cx="3732753" cy="332399"/>
+          </a:xfrm>
+          <a:prstGeom prst="rect">
+            <a:avLst/>
+          </a:prstGeom>
+          <a:noFill/>
+          <a:ln>
+            <a:noFill/>
+          </a:ln>
+        </p:spPr>
+        <p:txBody>
+          <a:bodyPr spcFirstLastPara="1" wrap="square" lIns="0" tIns="0" rIns="0" bIns="0" anchor="t" anchorCtr="0">
+            <a:spAutoFit/>
+          </a:bodyPr>
+          <a:lstStyle/>
+          <a:p>
+            <a:pPr marL="0" marR="0" lvl="0" indent="0" algn="l" rtl="0">
+              <a:lnSpc>
+                <a:spcPct val="160000"/>
+              </a:lnSpc>
+              <a:spcBef>
+                <a:spcPts val="0"/>
+              </a:spcBef>
+              <a:spcAft>
+                <a:spcPts val="0"/>
+              </a:spcAft>
+              <a:buNone/>
+            </a:pPr>
+            <a:r>
+              <a:rPr lang="it-IT" sz="1350" b="0" i="0" u="none" strike="noStrike" cap="none" dirty="0">
+                <a:solidFill>
+                  <a:srgbClr val="CBD5E1"/>
+                </a:solidFill>
+                <a:latin typeface="Inter"/>
+                <a:ea typeface="Inter"/>
+                <a:cs typeface="Inter"/>
+                <a:sym typeface="Inter"/>
+              </a:rPr>
+              <a:t>Con soglia PPI 0.60 migliora a </a:t>
+            </a:r>
+            <a:r>
+              <a:rPr lang="it-IT" sz="1350" b="1" i="0" u="none" strike="noStrike" cap="none" dirty="0">
+                <a:solidFill>
+                  <a:srgbClr val="CBD5E1"/>
+                </a:solidFill>
+                <a:latin typeface="Inter"/>
+                <a:ea typeface="Inter"/>
+                <a:cs typeface="Inter"/>
+                <a:sym typeface="Inter"/>
+              </a:rPr>
+              <a:t>74,91%</a:t>
+            </a:r>
+            <a:r>
+              <a:rPr lang="it-IT" sz="1350" b="0" i="0" u="none" strike="noStrike" cap="none" dirty="0">
+                <a:solidFill>
+                  <a:srgbClr val="CBD5E1"/>
+                </a:solidFill>
+                <a:latin typeface="Inter"/>
+                <a:ea typeface="Inter"/>
+                <a:cs typeface="Inter"/>
+                <a:sym typeface="Inter"/>
+              </a:rPr>
+              <a:t> </a:t>
+            </a:r>
+            <a:endParaRPr lang="it-IT" dirty="0"/>
+          </a:p>
+        </p:txBody>
+      </p:sp>
     </p:spTree>
   </p:cSld>
   <p:clrMapOvr>
@@ -14166,7 +16749,7 @@
 </p:sld>
 </file>
 
-<file path=ppt/slides/slide12.xml><?xml version="1.0" encoding="utf-8"?>
+<file path=ppt/slides/slide13.xml><?xml version="1.0" encoding="utf-8"?>
 <p:sld xmlns:a="http://schemas.openxmlformats.org/drawingml/2006/main" xmlns:r="http://schemas.openxmlformats.org/officeDocument/2006/relationships" xmlns:p="http://schemas.openxmlformats.org/presentationml/2006/main">
   <p:cSld>
     <p:bg>
@@ -14226,7 +16809,7 @@
         </p:nvSpPr>
         <p:spPr>
           <a:xfrm>
-            <a:off x="1971600" y="1714500"/>
+            <a:off x="1971600" y="1543591"/>
             <a:ext cx="8248800" cy="3393237"/>
           </a:xfrm>
           <a:prstGeom prst="rect">
@@ -14301,7 +16884,7 @@
                 <a:cs typeface="Poppins Medium"/>
                 <a:sym typeface="Poppins Medium"/>
               </a:rPr>
-              <a:t> </a:t>
+              <a:t> del paper è </a:t>
             </a:r>
             <a:r>
               <a:rPr lang="en-US" sz="3150" dirty="0" err="1">
@@ -14313,7 +16896,7 @@
                 <a:cs typeface="Poppins Medium"/>
                 <a:sym typeface="Poppins Medium"/>
               </a:rPr>
-              <a:t>dei</a:t>
+              <a:t>stato</a:t>
             </a:r>
             <a:r>
               <a:rPr lang="en-US" sz="3150" dirty="0">
@@ -14325,7 +16908,7 @@
                 <a:cs typeface="Poppins Medium"/>
                 <a:sym typeface="Poppins Medium"/>
               </a:rPr>
-              <a:t> paper è </a:t>
+              <a:t> </a:t>
             </a:r>
             <a:r>
               <a:rPr lang="en-US" sz="3150" dirty="0" err="1">
@@ -14337,7 +16920,7 @@
                 <a:cs typeface="Poppins Medium"/>
                 <a:sym typeface="Poppins Medium"/>
               </a:rPr>
-              <a:t>stato</a:t>
+              <a:t>possibile</a:t>
             </a:r>
             <a:r>
               <a:rPr lang="en-US" sz="3150" dirty="0">
@@ -14361,7 +16944,7 @@
                 <a:cs typeface="Poppins Medium"/>
                 <a:sym typeface="Poppins Medium"/>
               </a:rPr>
-              <a:t>possibile</a:t>
+              <a:t>avvicinarsi</a:t>
             </a:r>
             <a:r>
               <a:rPr lang="en-US" sz="3150" dirty="0">
@@ -14373,7 +16956,7 @@
                 <a:cs typeface="Poppins Medium"/>
                 <a:sym typeface="Poppins Medium"/>
               </a:rPr>
-              <a:t> </a:t>
+              <a:t> alla </a:t>
             </a:r>
             <a:r>
               <a:rPr lang="en-US" sz="3150" dirty="0" err="1">
@@ -14385,7 +16968,7 @@
                 <a:cs typeface="Poppins Medium"/>
                 <a:sym typeface="Poppins Medium"/>
               </a:rPr>
-              <a:t>avvicinarsi</a:t>
+              <a:t>precisione</a:t>
             </a:r>
             <a:r>
               <a:rPr lang="en-US" sz="3150" dirty="0">
@@ -14397,7 +16980,7 @@
                 <a:cs typeface="Poppins Medium"/>
                 <a:sym typeface="Poppins Medium"/>
               </a:rPr>
-              <a:t> alla </a:t>
+              <a:t> </a:t>
             </a:r>
             <a:r>
               <a:rPr lang="en-US" sz="3150" dirty="0" err="1">
@@ -14409,7 +16992,7 @@
                 <a:cs typeface="Poppins Medium"/>
                 <a:sym typeface="Poppins Medium"/>
               </a:rPr>
-              <a:t>precisione</a:t>
+              <a:t>dichiarata</a:t>
             </a:r>
             <a:r>
               <a:rPr lang="en-US" sz="3150" dirty="0">
@@ -14421,7 +17004,7 @@
                 <a:cs typeface="Poppins Medium"/>
                 <a:sym typeface="Poppins Medium"/>
               </a:rPr>
-              <a:t> </a:t>
+              <a:t> (72.77% </a:t>
             </a:r>
             <a:r>
               <a:rPr lang="en-US" sz="3150" dirty="0" err="1">
@@ -14433,7 +17016,7 @@
                 <a:cs typeface="Poppins Medium"/>
                 <a:sym typeface="Poppins Medium"/>
               </a:rPr>
-              <a:t>dichiarata</a:t>
+              <a:t>contro</a:t>
             </a:r>
             <a:r>
               <a:rPr lang="en-US" sz="3150" dirty="0">
@@ -14445,7 +17028,7 @@
                 <a:cs typeface="Poppins Medium"/>
                 <a:sym typeface="Poppins Medium"/>
               </a:rPr>
-              <a:t> (72.77% </a:t>
+              <a:t> il 76.5%), con </a:t>
             </a:r>
             <a:r>
               <a:rPr lang="en-US" sz="3150" dirty="0" err="1">
@@ -14457,7 +17040,7 @@
                 <a:cs typeface="Poppins Medium"/>
                 <a:sym typeface="Poppins Medium"/>
               </a:rPr>
-              <a:t>contro</a:t>
+              <a:t>possibilità</a:t>
             </a:r>
             <a:r>
               <a:rPr lang="en-US" sz="3150" dirty="0">
@@ -14469,7 +17052,7 @@
                 <a:cs typeface="Poppins Medium"/>
                 <a:sym typeface="Poppins Medium"/>
               </a:rPr>
-              <a:t> il 76.5%), con </a:t>
+              <a:t> di </a:t>
             </a:r>
             <a:r>
               <a:rPr lang="en-US" sz="3150" dirty="0" err="1">
@@ -14481,7 +17064,7 @@
                 <a:cs typeface="Poppins Medium"/>
                 <a:sym typeface="Poppins Medium"/>
               </a:rPr>
-              <a:t>possibilità</a:t>
+              <a:t>miglioramento</a:t>
             </a:r>
             <a:r>
               <a:rPr lang="en-US" sz="3150" dirty="0">
@@ -14493,7 +17076,7 @@
                 <a:cs typeface="Poppins Medium"/>
                 <a:sym typeface="Poppins Medium"/>
               </a:rPr>
-              <a:t> di </a:t>
+              <a:t> </a:t>
             </a:r>
             <a:r>
               <a:rPr lang="en-US" sz="3150" dirty="0" err="1">
@@ -14505,7 +17088,7 @@
                 <a:cs typeface="Poppins Medium"/>
                 <a:sym typeface="Poppins Medium"/>
               </a:rPr>
-              <a:t>miglioramento</a:t>
+              <a:t>tramite</a:t>
             </a:r>
             <a:r>
               <a:rPr lang="en-US" sz="3150" dirty="0">
@@ -14517,7 +17100,55 @@
                 <a:cs typeface="Poppins Medium"/>
                 <a:sym typeface="Poppins Medium"/>
               </a:rPr>
-              <a:t> future.</a:t>
+              <a:t> PPI </a:t>
+            </a:r>
+            <a:r>
+              <a:rPr lang="en-US" sz="3150" dirty="0" err="1">
+                <a:solidFill>
+                  <a:schemeClr val="bg1"/>
+                </a:solidFill>
+                <a:latin typeface="Poppins Medium"/>
+                <a:ea typeface="Poppins Medium"/>
+                <a:cs typeface="Poppins Medium"/>
+                <a:sym typeface="Poppins Medium"/>
+              </a:rPr>
+              <a:t>diversi</a:t>
+            </a:r>
+            <a:r>
+              <a:rPr lang="en-US" sz="3150" dirty="0">
+                <a:solidFill>
+                  <a:schemeClr val="bg1"/>
+                </a:solidFill>
+                <a:latin typeface="Poppins Medium"/>
+                <a:ea typeface="Poppins Medium"/>
+                <a:cs typeface="Poppins Medium"/>
+                <a:sym typeface="Poppins Medium"/>
+              </a:rPr>
+              <a:t> e </a:t>
+            </a:r>
+            <a:r>
+              <a:rPr lang="en-US" sz="3150" dirty="0" err="1">
+                <a:solidFill>
+                  <a:schemeClr val="bg1"/>
+                </a:solidFill>
+                <a:latin typeface="Poppins Medium"/>
+                <a:ea typeface="Poppins Medium"/>
+                <a:cs typeface="Poppins Medium"/>
+                <a:sym typeface="Poppins Medium"/>
+              </a:rPr>
+              <a:t>ulteriore</a:t>
+            </a:r>
+            <a:r>
+              <a:rPr lang="en-US" sz="3150" dirty="0">
+                <a:solidFill>
+                  <a:schemeClr val="bg1"/>
+                </a:solidFill>
+                <a:latin typeface="Poppins Medium"/>
+                <a:ea typeface="Poppins Medium"/>
+                <a:cs typeface="Poppins Medium"/>
+                <a:sym typeface="Poppins Medium"/>
+              </a:rPr>
+              <a:t> tuning.</a:t>
             </a:r>
             <a:endParaRPr dirty="0">
               <a:solidFill>
@@ -14959,7 +17590,7 @@
         <p:spPr>
           <a:xfrm>
             <a:off x="571500" y="2051637"/>
-            <a:ext cx="5286300" cy="540300"/>
+            <a:ext cx="5286300" cy="664797"/>
           </a:xfrm>
           <a:prstGeom prst="rect">
             <a:avLst/>
@@ -15225,7 +17856,7 @@
                 <a:cs typeface="Inter"/>
                 <a:sym typeface="Inter"/>
               </a:rPr>
-              <a:t>).</a:t>
+              <a:t>/Rest).</a:t>
             </a:r>
             <a:endParaRPr dirty="0"/>
           </a:p>
@@ -15239,8 +17870,8 @@
         </p:nvSpPr>
         <p:spPr>
           <a:xfrm>
-            <a:off x="571500" y="2909292"/>
-            <a:ext cx="5286375" cy="664797"/>
+            <a:off x="571425" y="2805341"/>
+            <a:ext cx="5286375" cy="997196"/>
           </a:xfrm>
           <a:prstGeom prst="rect">
             <a:avLst/>
@@ -15557,6 +18188,54 @@
               <a:t>multisensoriali</a:t>
             </a:r>
             <a:r>
+              <a:rPr lang="en-US" sz="1350" dirty="0">
+                <a:solidFill>
+                  <a:srgbClr val="CBD5E1"/>
+                </a:solidFill>
+                <a:latin typeface="Inter"/>
+                <a:ea typeface="Inter"/>
+                <a:cs typeface="Inter"/>
+                <a:sym typeface="Inter"/>
+              </a:rPr>
+              <a:t>, </a:t>
+            </a:r>
+            <a:r>
+              <a:rPr lang="en-US" sz="1350" dirty="0" err="1">
+                <a:solidFill>
+                  <a:srgbClr val="CBD5E1"/>
+                </a:solidFill>
+                <a:latin typeface="Inter"/>
+                <a:ea typeface="Inter"/>
+                <a:cs typeface="Inter"/>
+                <a:sym typeface="Inter"/>
+              </a:rPr>
+              <a:t>nello</a:t>
+            </a:r>
+            <a:r>
+              <a:rPr lang="en-US" sz="1350" dirty="0">
+                <a:solidFill>
+                  <a:srgbClr val="CBD5E1"/>
+                </a:solidFill>
+                <a:latin typeface="Inter"/>
+                <a:ea typeface="Inter"/>
+                <a:cs typeface="Inter"/>
+                <a:sym typeface="Inter"/>
+              </a:rPr>
+              <a:t> specific con </a:t>
+            </a:r>
+            <a:r>
+              <a:rPr lang="en-US" sz="1350" b="0" i="0" u="none" strike="noStrike" cap="none" dirty="0" err="1">
+                <a:solidFill>
+                  <a:srgbClr val="CBD5E1"/>
+                </a:solidFill>
+                <a:latin typeface="Inter"/>
+                <a:ea typeface="Inter"/>
+                <a:cs typeface="Inter"/>
+                <a:sym typeface="Inter"/>
+              </a:rPr>
+              <a:t>Empatica</a:t>
+            </a:r>
+            <a:r>
               <a:rPr lang="en-US" sz="1350" b="0" i="0" u="none" strike="noStrike" cap="none" dirty="0">
                 <a:solidFill>
                   <a:srgbClr val="CBD5E1"/>
@@ -15566,31 +18245,7 @@
                 <a:cs typeface="Inter"/>
                 <a:sym typeface="Inter"/>
               </a:rPr>
-              <a:t> (</a:t>
-            </a:r>
-            <a:r>
-              <a:rPr lang="en-US" sz="1350" b="0" i="0" u="none" strike="noStrike" cap="none" dirty="0" err="1">
-                <a:solidFill>
-                  <a:srgbClr val="CBD5E1"/>
-                </a:solidFill>
-                <a:latin typeface="Inter"/>
-                <a:ea typeface="Inter"/>
-                <a:cs typeface="Inter"/>
-                <a:sym typeface="Inter"/>
-              </a:rPr>
-              <a:t>Empatica</a:t>
-            </a:r>
-            <a:r>
-              <a:rPr lang="en-US" sz="1350" b="0" i="0" u="none" strike="noStrike" cap="none" dirty="0">
-                <a:solidFill>
-                  <a:srgbClr val="CBD5E1"/>
-                </a:solidFill>
-                <a:latin typeface="Inter"/>
-                <a:ea typeface="Inter"/>
-                <a:cs typeface="Inter"/>
-                <a:sym typeface="Inter"/>
-              </a:rPr>
-              <a:t> E4).</a:t>
+              <a:t> E4.</a:t>
             </a:r>
             <a:endParaRPr dirty="0"/>
           </a:p>
@@ -15605,7 +18260,7 @@
         <p:spPr>
           <a:xfrm>
             <a:off x="571500" y="3891445"/>
-            <a:ext cx="5286300" cy="540300"/>
+            <a:ext cx="5286300" cy="997196"/>
           </a:xfrm>
           <a:prstGeom prst="rect">
             <a:avLst/>
@@ -15811,7 +18466,7 @@
                 <a:cs typeface="Inter"/>
                 <a:sym typeface="Inter"/>
               </a:rPr>
-              <a:t> </a:t>
+              <a:t> possible (</a:t>
             </a:r>
             <a:r>
               <a:rPr lang="en-US" sz="1350" dirty="0" err="1">
@@ -15823,7 +18478,19 @@
                 <a:cs typeface="Inter"/>
                 <a:sym typeface="Inter"/>
               </a:rPr>
-              <a:t>possibile</a:t>
+              <a:t>Principalmente</a:t>
+            </a:r>
+            <a:r>
+              <a:rPr lang="en-US" sz="1350" dirty="0">
+                <a:solidFill>
+                  <a:srgbClr val="CBD5E1"/>
+                </a:solidFill>
+                <a:latin typeface="Inter"/>
+                <a:ea typeface="Inter"/>
+                <a:cs typeface="Inter"/>
+                <a:sym typeface="Inter"/>
+              </a:rPr>
+              <a:t> RF, SVM e Logistic Regression)</a:t>
             </a:r>
             <a:r>
               <a:rPr lang="en-US" sz="1350" b="0" i="0" u="none" strike="noStrike" cap="none" dirty="0">
@@ -16400,7 +19067,7 @@
                 <a:cs typeface="Inter"/>
                 <a:sym typeface="Inter"/>
               </a:rPr>
-              <a:t> (EDA e PPG). La loro </a:t>
+              <a:t> (EDA e BVP). La loro </a:t>
             </a:r>
             <a:r>
               <a:rPr lang="en-US" sz="1350" b="0" i="0" u="none" strike="noStrike" cap="none" dirty="0" err="1">
@@ -16975,7 +19642,7 @@
                 <a:ea typeface="Inter"/>
                 <a:sym typeface="Inter"/>
               </a:rPr>
-              <a:t>) </a:t>
+              <a:t>) con </a:t>
             </a:r>
             <a:r>
               <a:rPr lang="en-US" sz="1350" dirty="0" err="1">
@@ -17129,7 +19796,29 @@
                 <a:ea typeface="Inter"/>
                 <a:sym typeface="Inter"/>
               </a:rPr>
-              <a:t>.</a:t>
+              <a:t>, e </a:t>
+            </a:r>
+            <a:r>
+              <a:rPr lang="en-US" sz="1350" dirty="0" err="1">
+                <a:solidFill>
+                  <a:srgbClr val="CBD5E1"/>
+                </a:solidFill>
+                <a:latin typeface="Inter"/>
+                <a:ea typeface="Inter"/>
+                <a:sym typeface="Inter"/>
+              </a:rPr>
+              <a:t>soglie</a:t>
+            </a:r>
+            <a:r>
+              <a:rPr lang="en-US" sz="1350" dirty="0">
+                <a:solidFill>
+                  <a:srgbClr val="CBD5E1"/>
+                </a:solidFill>
+                <a:latin typeface="Inter"/>
+                <a:ea typeface="Inter"/>
+                <a:sym typeface="Inter"/>
+              </a:rPr>
+              <a:t> PPI diverse.</a:t>
             </a:r>
             <a:endParaRPr dirty="0"/>
           </a:p>
@@ -18793,8 +21482,8 @@
         </p:nvSpPr>
         <p:spPr>
           <a:xfrm>
-            <a:off x="3370510" y="2769989"/>
-            <a:ext cx="2784300" cy="254100"/>
+            <a:off x="3370509" y="2769989"/>
+            <a:ext cx="3012705" cy="253916"/>
           </a:xfrm>
           <a:prstGeom prst="rect">
             <a:avLst/>
@@ -18841,10 +21530,10 @@
                 <a:cs typeface="Poppins Medium"/>
                 <a:sym typeface="Poppins Medium"/>
               </a:rPr>
-              <a:t> Lego </a:t>
-            </a:r>
-            <a:r>
-              <a:rPr lang="en-US" sz="1650" b="0" i="0" u="none" strike="noStrike" cap="none" dirty="0" err="1">
+              <a:t> Lego con </a:t>
+            </a:r>
+            <a:r>
+              <a:rPr lang="en-US" sz="1650" dirty="0" err="1">
                 <a:solidFill>
                   <a:srgbClr val="F8FAFC"/>
                 </a:solidFill>
@@ -18853,7 +21542,19 @@
                 <a:cs typeface="Poppins Medium"/>
                 <a:sym typeface="Poppins Medium"/>
               </a:rPr>
-              <a:t>Guidato</a:t>
+              <a:t>i</a:t>
+            </a:r>
+            <a:r>
+              <a:rPr lang="en-US" sz="1650" b="0" i="0" u="none" strike="noStrike" cap="none" dirty="0" err="1">
+                <a:solidFill>
+                  <a:srgbClr val="F8FAFC"/>
+                </a:solidFill>
+                <a:latin typeface="Poppins Medium"/>
+                <a:ea typeface="Poppins Medium"/>
+                <a:cs typeface="Poppins Medium"/>
+                <a:sym typeface="Poppins Medium"/>
+              </a:rPr>
+              <a:t>struzioni</a:t>
             </a:r>
             <a:endParaRPr dirty="0"/>
           </a:p>
@@ -19103,7 +21804,7 @@
               <a:buNone/>
             </a:pPr>
             <a:r>
-              <a:rPr lang="en-US" sz="1650">
+              <a:rPr lang="en-US" sz="1650" dirty="0">
                 <a:solidFill>
                   <a:srgbClr val="F8FAFC"/>
                 </a:solidFill>
@@ -19115,7 +21816,7 @@
               <a:t>3° e 4° Task</a:t>
             </a:r>
             <a:r>
-              <a:rPr lang="en-US" sz="1650" b="0" i="0" u="none" strike="noStrike" cap="none">
+              <a:rPr lang="en-US" sz="1650" b="0" i="0" u="none" strike="noStrike" cap="none" dirty="0">
                 <a:solidFill>
                   <a:srgbClr val="F8FAFC"/>
                 </a:solidFill>
@@ -19124,9 +21825,21 @@
                 <a:cs typeface="Poppins Medium"/>
                 <a:sym typeface="Poppins Medium"/>
               </a:rPr>
-              <a:t>: Matematica</a:t>
-            </a:r>
-            <a:endParaRPr/>
+              <a:t>: </a:t>
+            </a:r>
+            <a:r>
+              <a:rPr lang="en-US" sz="1650" b="0" i="0" u="none" strike="noStrike" cap="none" dirty="0" err="1">
+                <a:solidFill>
+                  <a:srgbClr val="F8FAFC"/>
+                </a:solidFill>
+                <a:latin typeface="Poppins Medium"/>
+                <a:ea typeface="Poppins Medium"/>
+                <a:cs typeface="Poppins Medium"/>
+                <a:sym typeface="Poppins Medium"/>
+              </a:rPr>
+              <a:t>Matematica</a:t>
+            </a:r>
+            <a:endParaRPr dirty="0"/>
           </a:p>
         </p:txBody>
       </p:sp>
@@ -19230,7 +21943,7 @@
               <a:buNone/>
             </a:pPr>
             <a:r>
-              <a:rPr lang="en-US" sz="1650">
+              <a:rPr lang="en-US" sz="1650" dirty="0">
                 <a:solidFill>
                   <a:srgbClr val="F8FAFC"/>
                 </a:solidFill>
@@ -19242,7 +21955,7 @@
               <a:t>5° Task</a:t>
             </a:r>
             <a:r>
-              <a:rPr lang="en-US" sz="1650" b="0" i="0" u="none" strike="noStrike" cap="none">
+              <a:rPr lang="en-US" sz="1650" b="0" i="0" u="none" strike="noStrike" cap="none" dirty="0">
                 <a:solidFill>
                   <a:srgbClr val="F8FAFC"/>
                 </a:solidFill>
@@ -19253,7 +21966,7 @@
               </a:rPr>
               <a:t>: Esposizione CV</a:t>
             </a:r>
-            <a:endParaRPr/>
+            <a:endParaRPr dirty="0"/>
           </a:p>
         </p:txBody>
       </p:sp>
@@ -20781,7 +23494,7 @@
         </p:nvSpPr>
         <p:spPr>
           <a:xfrm>
-            <a:off x="501438" y="1196784"/>
+            <a:off x="571500" y="3108720"/>
             <a:ext cx="5286375" cy="332399"/>
           </a:xfrm>
           <a:prstGeom prst="rect">
@@ -20889,7 +23602,7 @@
         </p:nvSpPr>
         <p:spPr>
           <a:xfrm>
-            <a:off x="571424" y="4160344"/>
+            <a:off x="571500" y="1325346"/>
             <a:ext cx="5286375" cy="249299"/>
           </a:xfrm>
           <a:prstGeom prst="rect">
@@ -21027,7 +23740,7 @@
         </p:nvSpPr>
         <p:spPr>
           <a:xfrm>
-            <a:off x="882438" y="1584069"/>
+            <a:off x="952500" y="3496005"/>
             <a:ext cx="4914900" cy="2326791"/>
           </a:xfrm>
           <a:prstGeom prst="rect">
@@ -21756,7 +24469,7 @@
         </p:nvSpPr>
         <p:spPr>
           <a:xfrm>
-            <a:off x="952499" y="4447925"/>
+            <a:off x="952575" y="1612927"/>
             <a:ext cx="4905300" cy="1661993"/>
           </a:xfrm>
           <a:prstGeom prst="rect">
@@ -22737,7 +25450,43 @@
                 <a:cs typeface="Poppins SemiBold"/>
                 <a:sym typeface="Poppins SemiBold"/>
               </a:rPr>
-              <a:t> 10-Fold CV</a:t>
+              <a:t> 10-Fold CV (con </a:t>
+            </a:r>
+            <a:r>
+              <a:rPr lang="en-US" sz="3000" dirty="0" err="1">
+                <a:solidFill>
+                  <a:srgbClr val="F8FAFC"/>
+                </a:solidFill>
+                <a:latin typeface="Poppins SemiBold"/>
+                <a:ea typeface="Poppins SemiBold"/>
+                <a:cs typeface="Poppins SemiBold"/>
+                <a:sym typeface="Poppins SemiBold"/>
+              </a:rPr>
+              <a:t>p</a:t>
+            </a:r>
+            <a:r>
+              <a:rPr lang="en-US" sz="3000" b="0" i="0" u="none" strike="noStrike" cap="none" dirty="0" err="1">
+                <a:solidFill>
+                  <a:srgbClr val="F8FAFC"/>
+                </a:solidFill>
+                <a:latin typeface="Poppins SemiBold"/>
+                <a:ea typeface="Poppins SemiBold"/>
+                <a:cs typeface="Poppins SemiBold"/>
+                <a:sym typeface="Poppins SemiBold"/>
+              </a:rPr>
+              <a:t>arametri</a:t>
+            </a:r>
+            <a:r>
+              <a:rPr lang="en-US" sz="3000" b="0" i="0" u="none" strike="noStrike" cap="none" dirty="0">
+                <a:solidFill>
+                  <a:srgbClr val="F8FAFC"/>
+                </a:solidFill>
+                <a:latin typeface="Poppins SemiBold"/>
+                <a:ea typeface="Poppins SemiBold"/>
+                <a:cs typeface="Poppins SemiBold"/>
+                <a:sym typeface="Poppins SemiBold"/>
+              </a:rPr>
+              <a:t> del Paper)</a:t>
             </a:r>
             <a:endParaRPr dirty="0"/>
           </a:p>
@@ -23948,10 +26697,10 @@
       </p:sp>
       <p:pic>
         <p:nvPicPr>
-          <p:cNvPr id="7" name="Immagine 6">
+          <p:cNvPr id="3" name="Immagine 2">
             <a:extLst>
               <a:ext uri="{FF2B5EF4-FFF2-40B4-BE49-F238E27FC236}">
-                <a16:creationId xmlns:a16="http://schemas.microsoft.com/office/drawing/2014/main" id="{A16EB073-200F-F3BB-B490-4C044385FCD1}"/>
+                <a16:creationId xmlns:a16="http://schemas.microsoft.com/office/drawing/2014/main" id="{3EE4CC44-C9ED-6D91-2D76-EFDF2DD61C5E}"/>
               </a:ext>
             </a:extLst>
           </p:cNvPr>
@@ -23968,36 +26717,12 @@
         </p:blipFill>
         <p:spPr>
           <a:xfrm>
-            <a:off x="538535" y="1745398"/>
-            <a:ext cx="11114930" cy="4780323"/>
+            <a:off x="529132" y="1807836"/>
+            <a:ext cx="11133736" cy="4478664"/>
           </a:xfrm>
-          <a:prstGeom prst="roundRect">
-            <a:avLst>
-              <a:gd name="adj" fmla="val 16667"/>
-            </a:avLst>
+          <a:prstGeom prst="rect">
+            <a:avLst/>
           </a:prstGeom>
-          <a:ln>
-            <a:noFill/>
-          </a:ln>
-          <a:effectLst>
-            <a:outerShdw blurRad="76200" dist="38100" dir="7800000" algn="tl" rotWithShape="0">
-              <a:srgbClr val="000000">
-                <a:alpha val="40000"/>
-              </a:srgbClr>
-            </a:outerShdw>
-          </a:effectLst>
-          <a:scene3d>
-            <a:camera prst="orthographicFront"/>
-            <a:lightRig rig="contrasting" dir="t">
-              <a:rot lat="0" lon="0" rev="4200000"/>
-            </a:lightRig>
-          </a:scene3d>
-          <a:sp3d prstMaterial="plastic">
-            <a:bevelT w="381000" h="114300" prst="relaxedInset"/>
-            <a:contourClr>
-              <a:srgbClr val="969696"/>
-            </a:contourClr>
-          </a:sp3d>
         </p:spPr>
       </p:pic>
     </p:spTree>

--- a/Progetto Interfacce Uomo-Macchina.pptx
+++ b/Progetto Interfacce Uomo-Macchina.pptx
@@ -13501,11 +13501,9 @@
               <a:t> </a:t>
             </a:r>
             <a:r>
-              <a:rPr lang="en-US" sz="1350" dirty="0">
-                <a:solidFill>
-                  <a:schemeClr val="bg1">
-                    <a:lumMod val="85000"/>
-                  </a:schemeClr>
+              <a:rPr lang="en-US" sz="1350" b="1" dirty="0">
+                <a:solidFill>
+                  <a:srgbClr val="21EB9E"/>
                 </a:solidFill>
                 <a:latin typeface="Inter"/>
                 <a:ea typeface="Inter"/>
@@ -13514,18 +13512,6 @@
               </a:rPr>
               <a:t>74.91%</a:t>
             </a:r>
-            <a:endParaRPr lang="en-US" sz="1350" b="1" dirty="0">
-              <a:solidFill>
-                <a:schemeClr val="bg2">
-                  <a:lumMod val="20000"/>
-                  <a:lumOff val="80000"/>
-                </a:schemeClr>
-              </a:solidFill>
-              <a:latin typeface="Inter"/>
-              <a:ea typeface="Inter"/>
-              <a:cs typeface="Inter"/>
-              <a:sym typeface="Inter"/>
-            </a:endParaRPr>
           </a:p>
           <a:p>
             <a:pPr marL="0" marR="0" lvl="0" indent="0" algn="l" rtl="0">
@@ -19741,7 +19727,7 @@
                 <a:ea typeface="Inter"/>
                 <a:sym typeface="Inter"/>
               </a:rPr>
-              <a:t>comportano</a:t>
+              <a:t>comporta</a:t>
             </a:r>
             <a:r>
               <a:rPr lang="en-US" sz="1350" dirty="0">
@@ -21482,8 +21468,8 @@
         </p:nvSpPr>
         <p:spPr>
           <a:xfrm>
-            <a:off x="3370509" y="2769989"/>
-            <a:ext cx="3012705" cy="253916"/>
+            <a:off x="3370510" y="2632950"/>
+            <a:ext cx="3356862" cy="507831"/>
           </a:xfrm>
           <a:prstGeom prst="rect">
             <a:avLst/>
@@ -21518,7 +21504,7 @@
                 <a:cs typeface="Poppins Medium"/>
                 <a:sym typeface="Poppins Medium"/>
               </a:rPr>
-              <a:t>2° Task:</a:t>
+              <a:t>2° e 3° Task:</a:t>
             </a:r>
             <a:r>
               <a:rPr lang="en-US" sz="1650" b="0" i="0" u="none" strike="noStrike" cap="none" dirty="0">
@@ -21530,10 +21516,10 @@
                 <a:cs typeface="Poppins Medium"/>
                 <a:sym typeface="Poppins Medium"/>
               </a:rPr>
-              <a:t> Lego con </a:t>
-            </a:r>
-            <a:r>
-              <a:rPr lang="en-US" sz="1650" dirty="0" err="1">
+              <a:t> Lego </a:t>
+            </a:r>
+            <a:r>
+              <a:rPr lang="en-US" sz="1650" dirty="0">
                 <a:solidFill>
                   <a:srgbClr val="F8FAFC"/>
                 </a:solidFill>
@@ -21542,10 +21528,10 @@
                 <a:cs typeface="Poppins Medium"/>
                 <a:sym typeface="Poppins Medium"/>
               </a:rPr>
-              <a:t>i</a:t>
-            </a:r>
-            <a:r>
-              <a:rPr lang="en-US" sz="1650" b="0" i="0" u="none" strike="noStrike" cap="none" dirty="0" err="1">
+              <a:t>con/senza </a:t>
+            </a:r>
+            <a:r>
+              <a:rPr lang="en-US" sz="1650" dirty="0" err="1">
                 <a:solidFill>
                   <a:srgbClr val="F8FAFC"/>
                 </a:solidFill>
@@ -21554,7 +21540,7 @@
                 <a:cs typeface="Poppins Medium"/>
                 <a:sym typeface="Poppins Medium"/>
               </a:rPr>
-              <a:t>struzioni</a:t>
+              <a:t>istruzioni</a:t>
             </a:r>
             <a:endParaRPr dirty="0"/>
           </a:p>
@@ -21679,7 +21665,7 @@
                 <a:cs typeface="Inter"/>
                 <a:sym typeface="Inter"/>
               </a:rPr>
-              <a:t>dei</a:t>
+              <a:t>piccoli</a:t>
             </a:r>
             <a:r>
               <a:rPr lang="en-US" sz="1200" b="0" i="0" u="none" strike="noStrike" cap="none" dirty="0">
@@ -21715,7 +21701,31 @@
                 <a:cs typeface="Inter"/>
                 <a:sym typeface="Inter"/>
               </a:rPr>
-              <a:t> (</a:t>
+              <a:t>, e poi </a:t>
+            </a:r>
+            <a:r>
+              <a:rPr lang="en-US" sz="1200" b="0" i="0" u="none" strike="noStrike" cap="none" dirty="0" err="1">
+                <a:solidFill>
+                  <a:srgbClr val="94A3B8"/>
+                </a:solidFill>
+                <a:latin typeface="Inter"/>
+                <a:ea typeface="Inter"/>
+                <a:cs typeface="Inter"/>
+                <a:sym typeface="Inter"/>
+              </a:rPr>
+              <a:t>grandi</a:t>
+            </a:r>
+            <a:r>
+              <a:rPr lang="en-US" sz="1200" b="0" i="0" u="none" strike="noStrike" cap="none" dirty="0">
+                <a:solidFill>
+                  <a:srgbClr val="94A3B8"/>
+                </a:solidFill>
+                <a:latin typeface="Inter"/>
+                <a:ea typeface="Inter"/>
+                <a:cs typeface="Inter"/>
+                <a:sym typeface="Inter"/>
+              </a:rPr>
+              <a:t> senza (</a:t>
             </a:r>
             <a:r>
               <a:rPr lang="en-US" sz="1200" b="0" i="0" u="none" strike="noStrike" cap="none" dirty="0" err="1">
@@ -21813,7 +21823,7 @@
                 <a:cs typeface="Poppins Medium"/>
                 <a:sym typeface="Poppins Medium"/>
               </a:rPr>
-              <a:t>3° e 4° Task</a:t>
+              <a:t>4° Task</a:t>
             </a:r>
             <a:r>
               <a:rPr lang="en-US" sz="1650" b="0" i="0" u="none" strike="noStrike" cap="none" dirty="0">
@@ -22321,6 +22331,66 @@
           </a:p>
         </p:txBody>
       </p:sp>
+      <p:pic>
+        <p:nvPicPr>
+          <p:cNvPr id="3" name="Immagine 2">
+            <a:extLst>
+              <a:ext uri="{FF2B5EF4-FFF2-40B4-BE49-F238E27FC236}">
+                <a16:creationId xmlns:a16="http://schemas.microsoft.com/office/drawing/2014/main" id="{2CAD9EF4-5565-D5DA-7D1F-059E60C56332}"/>
+              </a:ext>
+            </a:extLst>
+          </p:cNvPr>
+          <p:cNvPicPr>
+            <a:picLocks noChangeAspect="1"/>
+          </p:cNvPicPr>
+          <p:nvPr/>
+        </p:nvPicPr>
+        <p:blipFill>
+          <a:blip r:embed="rId4"/>
+          <a:stretch>
+            <a:fillRect/>
+          </a:stretch>
+        </p:blipFill>
+        <p:spPr>
+          <a:xfrm>
+            <a:off x="6253463" y="421744"/>
+            <a:ext cx="4778782" cy="1851519"/>
+          </a:xfrm>
+          <a:prstGeom prst="snip2DiagRect">
+            <a:avLst/>
+          </a:prstGeom>
+          <a:solidFill>
+            <a:srgbClr val="FFFFFF">
+              <a:shade val="85000"/>
+            </a:srgbClr>
+          </a:solidFill>
+          <a:ln w="88900" cap="sq">
+            <a:solidFill>
+              <a:srgbClr val="FFFFFF"/>
+            </a:solidFill>
+            <a:miter lim="800000"/>
+          </a:ln>
+          <a:effectLst>
+            <a:outerShdw blurRad="88900" algn="tl" rotWithShape="0">
+              <a:srgbClr val="000000">
+                <a:alpha val="45000"/>
+              </a:srgbClr>
+            </a:outerShdw>
+          </a:effectLst>
+          <a:scene3d>
+            <a:camera prst="orthographicFront"/>
+            <a:lightRig rig="twoPt" dir="t">
+              <a:rot lat="0" lon="0" rev="7200000"/>
+            </a:lightRig>
+          </a:scene3d>
+          <a:sp3d>
+            <a:bevelT w="25400" h="19050"/>
+            <a:contourClr>
+              <a:srgbClr val="FFFFFF"/>
+            </a:contourClr>
+          </a:sp3d>
+        </p:spPr>
+      </p:pic>
     </p:spTree>
   </p:cSld>
   <p:clrMapOvr>
@@ -22729,7 +22799,31 @@
                 <a:cs typeface="Inter"/>
                 <a:sym typeface="Inter"/>
               </a:rPr>
-              <a:t> da 1 minute per </a:t>
+              <a:t> da 1 </a:t>
+            </a:r>
+            <a:r>
+              <a:rPr lang="en-US" sz="1350" dirty="0" err="1">
+                <a:solidFill>
+                  <a:srgbClr val="CBD5E1"/>
+                </a:solidFill>
+                <a:latin typeface="Inter"/>
+                <a:ea typeface="Inter"/>
+                <a:cs typeface="Inter"/>
+                <a:sym typeface="Inter"/>
+              </a:rPr>
+              <a:t>minuto</a:t>
+            </a:r>
+            <a:r>
+              <a:rPr lang="en-US" sz="1350" dirty="0">
+                <a:solidFill>
+                  <a:srgbClr val="CBD5E1"/>
+                </a:solidFill>
+                <a:latin typeface="Inter"/>
+                <a:ea typeface="Inter"/>
+                <a:cs typeface="Inter"/>
+                <a:sym typeface="Inter"/>
+              </a:rPr>
+              <a:t> per </a:t>
             </a:r>
             <a:r>
               <a:rPr lang="en-US" sz="1350" dirty="0" err="1">
@@ -22937,7 +23031,7 @@
                 <a:cs typeface="Inter"/>
                 <a:sym typeface="Inter"/>
               </a:rPr>
-              <a:t>Estrazione delle features per fornire al modello una rappresentazione chiara del segnale e dei dati su cui lavorare.</a:t>
+              <a:t>Estrazione delle features per fornire al modello una rappresentazione chiara del segnale e dei dati.</a:t>
             </a:r>
             <a:endParaRPr lang="it-IT" dirty="0"/>
           </a:p>
@@ -23139,7 +23233,7 @@
                 <a:ea typeface="Inter"/>
                 <a:sym typeface="Inter"/>
               </a:rPr>
-              <a:t> (Con Random Forest – RF e SVM) </a:t>
+              <a:t> (Con Random Forest – RF, SVM e Logistic Regression) </a:t>
             </a:r>
             <a:r>
               <a:rPr lang="en-US" sz="1350" dirty="0" err="1">
@@ -23741,7 +23835,7 @@
         <p:spPr>
           <a:xfrm>
             <a:off x="952500" y="3496005"/>
-            <a:ext cx="4914900" cy="2326791"/>
+            <a:ext cx="4914900" cy="1994392"/>
           </a:xfrm>
           <a:prstGeom prst="rect">
             <a:avLst/>
@@ -24241,7 +24335,7 @@
                 <a:cs typeface="Inter"/>
                 <a:sym typeface="Inter"/>
               </a:rPr>
-              <a:t> mini 0.4s)</a:t>
+              <a:t> minima 0.4s)</a:t>
             </a:r>
           </a:p>
           <a:p>
@@ -24417,7 +24511,7 @@
                 <a:cs typeface="Inter"/>
                 <a:sym typeface="Inter"/>
               </a:rPr>
-              <a:t> con intervalli anomaly (al di </a:t>
+              <a:t> con intervalli anomaly (</a:t>
             </a:r>
             <a:r>
               <a:rPr lang="en-US" sz="1350" dirty="0" err="1">
@@ -24431,7 +24525,7 @@
                 <a:cs typeface="Inter"/>
                 <a:sym typeface="Inter"/>
               </a:rPr>
-              <a:t>fuori</a:t>
+              <a:t>oltre</a:t>
             </a:r>
             <a:r>
               <a:rPr lang="en-US" sz="1350" dirty="0">
@@ -24445,7 +24539,7 @@
                 <a:cs typeface="Inter"/>
                 <a:sym typeface="Inter"/>
               </a:rPr>
-              <a:t> del 15%)</a:t>
+              <a:t> al 15%)</a:t>
             </a:r>
             <a:endParaRPr lang="en-US" sz="1350" b="0" i="0" u="none" strike="noStrike" cap="none" dirty="0">
               <a:solidFill>
